--- a/11.Presenttaions/big-cities-transport.pptx
+++ b/11.Presenttaions/big-cities-transport.pptx
@@ -5,7 +5,7 @@
     <p:sldMasterId id="2147483648" r:id="rId1"/>
   </p:sldMasterIdLst>
   <p:notesMasterIdLst>
-    <p:notesMasterId r:id="rId25"/>
+    <p:notesMasterId r:id="rId29"/>
   </p:notesMasterIdLst>
   <p:sldIdLst>
     <p:sldId id="257" r:id="rId2"/>
@@ -29,8 +29,12 @@
     <p:sldId id="270" r:id="rId20"/>
     <p:sldId id="262" r:id="rId21"/>
     <p:sldId id="263" r:id="rId22"/>
-    <p:sldId id="264" r:id="rId23"/>
-    <p:sldId id="265" r:id="rId24"/>
+    <p:sldId id="288" r:id="rId23"/>
+    <p:sldId id="290" r:id="rId24"/>
+    <p:sldId id="289" r:id="rId25"/>
+    <p:sldId id="291" r:id="rId26"/>
+    <p:sldId id="264" r:id="rId27"/>
+    <p:sldId id="265" r:id="rId28"/>
   </p:sldIdLst>
   <p:sldSz cx="12192000" cy="6858000"/>
   <p:notesSz cx="6858000" cy="9144000"/>
@@ -219,7 +223,7 @@
           <a:p>
             <a:fld id="{E0227317-6136-4B22-B169-340711FF5F77}" type="datetimeFigureOut">
               <a:rPr lang="fr-BE" smtClean="0"/>
-              <a:t>10-10-23</a:t>
+              <a:t>29-10-23</a:t>
             </a:fld>
             <a:endParaRPr lang="fr-BE"/>
           </a:p>
@@ -4132,10 +4136,49 @@
           <a:bodyPr/>
           <a:lstStyle/>
           <a:p>
+            <a:pPr marL="171450" indent="-171450">
+              <a:buFont typeface="Wingdings" panose="05000000000000000000" pitchFamily="2" charset="2"/>
+              <a:buChar char="à"/>
+            </a:pPr>
+            <a:r>
+              <a:rPr lang="en-US" dirty="0">
+                <a:sym typeface="Wingdings" panose="05000000000000000000" pitchFamily="2" charset="2"/>
+              </a:rPr>
+              <a:t>Operational: Speed &amp; Frequency</a:t>
+            </a:r>
+          </a:p>
+          <a:p>
+            <a:pPr marL="171450" indent="-171450">
+              <a:buFontTx/>
+              <a:buChar char="-"/>
+            </a:pPr>
+            <a:r>
+              <a:rPr lang="en-US" dirty="0">
+                <a:sym typeface="Wingdings" panose="05000000000000000000" pitchFamily="2" charset="2"/>
+              </a:rPr>
+              <a:t>Histogram (charts) weight</a:t>
+            </a:r>
+          </a:p>
+          <a:p>
+            <a:pPr marL="171450" indent="-171450">
+              <a:buFontTx/>
+              <a:buChar char="-"/>
+            </a:pPr>
+            <a:r>
+              <a:rPr lang="en-US" dirty="0">
+                <a:sym typeface="Wingdings" panose="05000000000000000000" pitchFamily="2" charset="2"/>
+              </a:rPr>
+              <a:t>Maps (Networkx)</a:t>
+            </a:r>
+          </a:p>
+          <a:p>
             <a:pPr marL="0" indent="0">
-              <a:buNone/>
-            </a:pPr>
-            <a:endParaRPr lang="en-US" dirty="0"/>
+              <a:buFontTx/>
+              <a:buNone/>
+            </a:pPr>
+            <a:endParaRPr lang="en-US" dirty="0">
+              <a:sym typeface="Wingdings" panose="05000000000000000000" pitchFamily="2" charset="2"/>
+            </a:endParaRPr>
           </a:p>
           <a:p>
             <a:pPr marL="0" marR="0" lvl="0" indent="0" algn="l" defTabSz="914400" rtl="0" eaLnBrk="1" fontAlgn="auto" latinLnBrk="0" hangingPunct="1">
@@ -4156,108 +4199,47 @@
               <a:defRPr/>
             </a:pPr>
             <a:r>
-              <a:rPr lang="en-US" dirty="0"/>
-              <a:t>1) </a:t>
-            </a:r>
-            <a:r>
               <a:rPr lang="en-US" dirty="0">
                 <a:sym typeface="Wingdings" panose="05000000000000000000" pitchFamily="2" charset="2"/>
               </a:rPr>
-              <a:t>Interconnect all possible modes of transport including bikes and walks.</a:t>
-            </a:r>
-            <a:endParaRPr lang="en-US" dirty="0"/>
-          </a:p>
-          <a:p>
-            <a:pPr marL="0" indent="0">
-              <a:buNone/>
-            </a:pPr>
-            <a:endParaRPr lang="en-US" dirty="0"/>
-          </a:p>
-          <a:p>
-            <a:pPr marL="0" indent="0">
-              <a:buNone/>
-            </a:pPr>
-            <a:endParaRPr lang="en-US" dirty="0"/>
-          </a:p>
-          <a:p>
-            <a:pPr marL="0" indent="0">
-              <a:buNone/>
-            </a:pPr>
-            <a:r>
-              <a:rPr lang="en-US" dirty="0"/>
-              <a:t>2) Use ML models for predictions of:</a:t>
-            </a:r>
-          </a:p>
-          <a:p>
-            <a:pPr marL="228600" indent="-228600">
-              <a:buAutoNum type="arabicParenR"/>
-            </a:pPr>
-            <a:endParaRPr lang="en-US" dirty="0"/>
+              <a:t> Traffic</a:t>
+            </a:r>
           </a:p>
           <a:p>
             <a:pPr marL="171450" indent="-171450">
-              <a:buFont typeface="Wingdings" panose="05000000000000000000" pitchFamily="2" charset="2"/>
-              <a:buChar char="à"/>
-            </a:pPr>
-            <a:r>
-              <a:rPr lang="en-US" dirty="0"/>
-              <a:t>TRAFFIC: Passenger flow: </a:t>
-            </a:r>
-            <a:r>
-              <a:rPr lang="en-US" b="0" i="0" dirty="0">
-                <a:solidFill>
-                  <a:srgbClr val="24292F"/>
-                </a:solidFill>
-                <a:effectLst/>
-                <a:latin typeface="-apple-system"/>
+              <a:buFontTx/>
+              <a:buChar char="-"/>
+            </a:pPr>
+            <a:r>
+              <a:rPr lang="en-US" dirty="0">
+                <a:sym typeface="Wingdings" panose="05000000000000000000" pitchFamily="2" charset="2"/>
               </a:rPr>
-              <a:t>From network lens (keeping passenger anonymity) , use more data (daily events) to more accurately understand why traffic is generated in each segments;</a:t>
+              <a:t>Enter/Exists in stations (Networkx)</a:t>
             </a:r>
           </a:p>
           <a:p>
             <a:pPr marL="171450" indent="-171450">
-              <a:buFont typeface="Wingdings" panose="05000000000000000000" pitchFamily="2" charset="2"/>
-              <a:buChar char="à"/>
-            </a:pPr>
-            <a:endParaRPr lang="en-US" b="0" i="0" dirty="0">
-              <a:solidFill>
-                <a:srgbClr val="24292F"/>
-              </a:solidFill>
-              <a:effectLst/>
-              <a:latin typeface="-apple-system"/>
+              <a:buFontTx/>
+              <a:buChar char="-"/>
+            </a:pPr>
+            <a:r>
+              <a:rPr lang="en-US" dirty="0">
+                <a:sym typeface="Wingdings" panose="05000000000000000000" pitchFamily="2" charset="2"/>
+              </a:rPr>
+              <a:t>Load in segments (Networkx)</a:t>
+            </a:r>
+          </a:p>
+          <a:p>
+            <a:pPr marL="171450" indent="-171450">
+              <a:buFontTx/>
+              <a:buChar char="-"/>
+            </a:pPr>
+            <a:endParaRPr lang="en-US" dirty="0">
+              <a:sym typeface="Wingdings" panose="05000000000000000000" pitchFamily="2" charset="2"/>
             </a:endParaRPr>
           </a:p>
           <a:p>
-            <a:pPr marL="171450" indent="-171450">
-              <a:buFont typeface="Wingdings" panose="05000000000000000000" pitchFamily="2" charset="2"/>
-              <a:buChar char="à"/>
-            </a:pPr>
-            <a:r>
-              <a:rPr lang="en-US" b="0" i="0" dirty="0">
-                <a:solidFill>
-                  <a:srgbClr val="24292F"/>
-                </a:solidFill>
-                <a:effectLst/>
-                <a:latin typeface="-apple-system"/>
-              </a:rPr>
-              <a:t>OPEX: Predict disruptions and its impact considering forecasted passenger traffic to optimize maintenance planning.</a:t>
-            </a:r>
-          </a:p>
-          <a:p>
-            <a:pPr marL="171450" indent="-171450">
-              <a:buFont typeface="Wingdings" panose="05000000000000000000" pitchFamily="2" charset="2"/>
-              <a:buChar char="à"/>
-            </a:pPr>
-            <a:endParaRPr lang="en-US" b="0" i="0" dirty="0">
-              <a:solidFill>
-                <a:srgbClr val="24292F"/>
-              </a:solidFill>
-              <a:effectLst/>
-              <a:latin typeface="-apple-system"/>
-            </a:endParaRPr>
-          </a:p>
-          <a:p>
-            <a:pPr marL="171450" marR="0" lvl="0" indent="-171450" algn="l" defTabSz="914400" rtl="0" eaLnBrk="1" fontAlgn="auto" latinLnBrk="0" hangingPunct="1">
+            <a:pPr marL="0" marR="0" lvl="0" indent="0" algn="l" defTabSz="914400" rtl="0" eaLnBrk="1" fontAlgn="auto" latinLnBrk="0" hangingPunct="1">
               <a:lnSpc>
                 <a:spcPct val="100000"/>
               </a:lnSpc>
@@ -4269,102 +4251,75 @@
               </a:spcAft>
               <a:buClrTx/>
               <a:buSzTx/>
-              <a:buFont typeface="Wingdings" panose="05000000000000000000" pitchFamily="2" charset="2"/>
-              <a:buChar char="à"/>
+              <a:buFontTx/>
+              <a:buNone/>
               <a:tabLst/>
               <a:defRPr/>
             </a:pPr>
             <a:r>
-              <a:rPr lang="en-US" b="0" i="0" dirty="0">
-                <a:solidFill>
-                  <a:srgbClr val="24292F"/>
-                </a:solidFill>
-                <a:effectLst/>
-                <a:latin typeface="-apple-system"/>
+              <a:rPr lang="en-US" dirty="0">
+                <a:sym typeface="Wingdings" panose="05000000000000000000" pitchFamily="2" charset="2"/>
               </a:rPr>
-              <a:t>Create a timetable dynamically tailored that optimize infra-structure towards the commuters needs.</a:t>
+              <a:t> User importance:</a:t>
             </a:r>
           </a:p>
           <a:p>
             <a:pPr marL="171450" indent="-171450">
-              <a:buFont typeface="Wingdings" panose="05000000000000000000" pitchFamily="2" charset="2"/>
-              <a:buChar char="à"/>
-            </a:pPr>
-            <a:endParaRPr lang="en-US" b="0" i="0" dirty="0">
-              <a:solidFill>
-                <a:srgbClr val="24292F"/>
-              </a:solidFill>
-              <a:effectLst/>
-              <a:latin typeface="-apple-system"/>
+              <a:buFontTx/>
+              <a:buChar char="-"/>
+            </a:pPr>
+            <a:r>
+              <a:rPr lang="en-US" dirty="0">
+                <a:sym typeface="Wingdings" panose="05000000000000000000" pitchFamily="2" charset="2"/>
+              </a:rPr>
+              <a:t>Disparity ranking comparison</a:t>
+            </a:r>
+          </a:p>
+          <a:p>
+            <a:pPr marL="171450" indent="-171450">
+              <a:buFontTx/>
+              <a:buChar char="-"/>
+            </a:pPr>
+            <a:endParaRPr lang="en-US" dirty="0">
+              <a:sym typeface="Wingdings" panose="05000000000000000000" pitchFamily="2" charset="2"/>
             </a:endParaRPr>
           </a:p>
           <a:p>
+            <a:pPr marL="0" marR="0" lvl="0" indent="0" algn="l" defTabSz="914400" rtl="0" eaLnBrk="1" fontAlgn="auto" latinLnBrk="0" hangingPunct="1">
+              <a:lnSpc>
+                <a:spcPct val="100000"/>
+              </a:lnSpc>
+              <a:spcBef>
+                <a:spcPts val="0"/>
+              </a:spcBef>
+              <a:spcAft>
+                <a:spcPts val="0"/>
+              </a:spcAft>
+              <a:buClrTx/>
+              <a:buSzTx/>
+              <a:buFontTx/>
+              <a:buNone/>
+              <a:tabLst/>
+              <a:defRPr/>
+            </a:pPr>
+            <a:r>
+              <a:rPr lang="en-US" dirty="0">
+                <a:sym typeface="Wingdings" panose="05000000000000000000" pitchFamily="2" charset="2"/>
+              </a:rPr>
+              <a:t> Collective importance:</a:t>
+            </a:r>
+          </a:p>
+          <a:p>
             <a:pPr marL="171450" indent="-171450">
-              <a:buFont typeface="Wingdings" panose="05000000000000000000" pitchFamily="2" charset="2"/>
-              <a:buChar char="à"/>
-            </a:pPr>
-            <a:r>
-              <a:rPr lang="en-US" b="0" i="0" dirty="0">
-                <a:solidFill>
-                  <a:srgbClr val="24292F"/>
-                </a:solidFill>
-                <a:effectLst/>
-                <a:latin typeface="-apple-system"/>
+              <a:buFontTx/>
+              <a:buChar char="-"/>
+            </a:pPr>
+            <a:r>
+              <a:rPr lang="en-US" dirty="0">
+                <a:sym typeface="Wingdings" panose="05000000000000000000" pitchFamily="2" charset="2"/>
               </a:rPr>
-              <a:t>CAPEX: More maintenance, less disruptions, less need for redundancy and more investment express lanes (study of origin and destination). </a:t>
-            </a:r>
-          </a:p>
-          <a:p>
-            <a:pPr marL="171450" indent="-171450">
-              <a:buFont typeface="Wingdings" panose="05000000000000000000" pitchFamily="2" charset="2"/>
-              <a:buChar char="à"/>
-            </a:pPr>
-            <a:endParaRPr lang="en-US" b="0" i="0" dirty="0">
-              <a:solidFill>
-                <a:srgbClr val="24292F"/>
-              </a:solidFill>
-              <a:effectLst/>
-              <a:latin typeface="-apple-system"/>
-            </a:endParaRPr>
-          </a:p>
-          <a:p>
-            <a:pPr marL="171450" indent="-171450">
-              <a:buFont typeface="Wingdings" panose="05000000000000000000" pitchFamily="2" charset="2"/>
-              <a:buChar char="à"/>
-            </a:pPr>
-            <a:endParaRPr lang="en-US" b="0" i="0" dirty="0">
-              <a:solidFill>
-                <a:srgbClr val="24292F"/>
-              </a:solidFill>
-              <a:effectLst/>
-              <a:latin typeface="-apple-system"/>
-            </a:endParaRPr>
-          </a:p>
-          <a:p>
-            <a:pPr marL="0" indent="0">
-              <a:buFont typeface="Wingdings" panose="05000000000000000000" pitchFamily="2" charset="2"/>
-              <a:buNone/>
-            </a:pPr>
-            <a:endParaRPr lang="en-US" b="0" i="0" dirty="0">
-              <a:solidFill>
-                <a:srgbClr val="24292F"/>
-              </a:solidFill>
-              <a:effectLst/>
-              <a:latin typeface="-apple-system"/>
-            </a:endParaRPr>
-          </a:p>
-          <a:p>
-            <a:pPr marL="171450" indent="-171450">
-              <a:buFont typeface="Wingdings" panose="05000000000000000000" pitchFamily="2" charset="2"/>
-              <a:buChar char="à"/>
-            </a:pPr>
-            <a:endParaRPr lang="en-US" b="0" i="0" dirty="0">
-              <a:solidFill>
-                <a:srgbClr val="24292F"/>
-              </a:solidFill>
-              <a:effectLst/>
-              <a:latin typeface="-apple-system"/>
-            </a:endParaRPr>
+              <a:t>Distress ranking comparison</a:t>
+            </a:r>
           </a:p>
         </p:txBody>
       </p:sp>
@@ -4394,7 +4349,7 @@
     </p:spTree>
     <p:extLst>
       <p:ext uri="{BB962C8B-B14F-4D97-AF65-F5344CB8AC3E}">
-        <p14:creationId xmlns:p14="http://schemas.microsoft.com/office/powerpoint/2010/main" val="2618829657"/>
+        <p14:creationId xmlns:p14="http://schemas.microsoft.com/office/powerpoint/2010/main" val="2407261714"/>
       </p:ext>
     </p:extLst>
   </p:cSld>
@@ -4448,10 +4403,49 @@
           <a:bodyPr/>
           <a:lstStyle/>
           <a:p>
-            <a:r>
-              <a:rPr lang="en-US" dirty="0"/>
-              <a:t>What is a efficient network = minimizes travel time and costs (vehicles, energy, emissions, price) assuring passenger “comfort” and “prompt mobility”.</a:t>
-            </a:r>
+            <a:pPr marL="171450" indent="-171450">
+              <a:buFont typeface="Wingdings" panose="05000000000000000000" pitchFamily="2" charset="2"/>
+              <a:buChar char="à"/>
+            </a:pPr>
+            <a:r>
+              <a:rPr lang="en-US" dirty="0">
+                <a:sym typeface="Wingdings" panose="05000000000000000000" pitchFamily="2" charset="2"/>
+              </a:rPr>
+              <a:t>Operational: Speed &amp; Frequency</a:t>
+            </a:r>
+          </a:p>
+          <a:p>
+            <a:pPr marL="171450" indent="-171450">
+              <a:buFontTx/>
+              <a:buChar char="-"/>
+            </a:pPr>
+            <a:r>
+              <a:rPr lang="en-US" dirty="0">
+                <a:sym typeface="Wingdings" panose="05000000000000000000" pitchFamily="2" charset="2"/>
+              </a:rPr>
+              <a:t>Histogram (charts) weight</a:t>
+            </a:r>
+          </a:p>
+          <a:p>
+            <a:pPr marL="171450" indent="-171450">
+              <a:buFontTx/>
+              <a:buChar char="-"/>
+            </a:pPr>
+            <a:r>
+              <a:rPr lang="en-US" dirty="0">
+                <a:sym typeface="Wingdings" panose="05000000000000000000" pitchFamily="2" charset="2"/>
+              </a:rPr>
+              <a:t>Maps (Networkx)</a:t>
+            </a:r>
+          </a:p>
+          <a:p>
+            <a:pPr marL="0" indent="0">
+              <a:buFontTx/>
+              <a:buNone/>
+            </a:pPr>
+            <a:endParaRPr lang="en-US" dirty="0">
+              <a:sym typeface="Wingdings" panose="05000000000000000000" pitchFamily="2" charset="2"/>
+            </a:endParaRPr>
           </a:p>
           <a:p>
             <a:pPr marL="0" marR="0" lvl="0" indent="0" algn="l" defTabSz="914400" rtl="0" eaLnBrk="1" fontAlgn="auto" latinLnBrk="0" hangingPunct="1">
@@ -4471,67 +4465,128 @@
               <a:tabLst/>
               <a:defRPr/>
             </a:pPr>
-            <a:endParaRPr lang="en-US" dirty="0"/>
-          </a:p>
-          <a:p>
-            <a:r>
-              <a:rPr lang="en-US" dirty="0"/>
-              <a:t>It is important to mention that a more efficient network inherently requires more maintenance.</a:t>
-            </a:r>
-          </a:p>
-          <a:p>
-            <a:endParaRPr lang="en-US" dirty="0"/>
-          </a:p>
-          <a:p>
-            <a:r>
-              <a:rPr lang="en-US" dirty="0"/>
-              <a:t>It is not necessary related to its size. But is related to how it was projected to assist the commuters.</a:t>
-            </a:r>
-          </a:p>
-          <a:p>
-            <a:endParaRPr lang="en-US" dirty="0"/>
-          </a:p>
-          <a:p>
-            <a:r>
-              <a:rPr lang="en-US" dirty="0"/>
-              <a:t>In a network without disruption, for instance, it would be a waste invest in redundancies. More money could be destinated to reduce travels time. </a:t>
-            </a:r>
-          </a:p>
-          <a:p>
-            <a:endParaRPr lang="en-US" dirty="0"/>
-          </a:p>
-          <a:p>
-            <a:r>
-              <a:rPr lang="en-US" dirty="0"/>
-              <a:t>In a real world, however, no disruptions comes with a high maintenance price. </a:t>
-            </a:r>
-          </a:p>
-          <a:p>
-            <a:endParaRPr lang="en-US" dirty="0"/>
-          </a:p>
-          <a:p>
-            <a:r>
-              <a:rPr lang="en-US" dirty="0"/>
-              <a:t>The balance between effectiveness and robustness is a major question when comes down to a such important factor of the society evolvement.</a:t>
-            </a:r>
-          </a:p>
-          <a:p>
-            <a:endParaRPr lang="en-US" dirty="0"/>
-          </a:p>
-          <a:p>
-            <a:endParaRPr lang="en-US" dirty="0"/>
-          </a:p>
-          <a:p>
-            <a:endParaRPr lang="en-US" dirty="0"/>
-          </a:p>
-          <a:p>
-            <a:endParaRPr lang="en-US" dirty="0"/>
-          </a:p>
-          <a:p>
-            <a:endParaRPr lang="en-US" dirty="0"/>
-          </a:p>
-          <a:p>
-            <a:endParaRPr lang="en-US" dirty="0"/>
+            <a:r>
+              <a:rPr lang="en-US" dirty="0">
+                <a:sym typeface="Wingdings" panose="05000000000000000000" pitchFamily="2" charset="2"/>
+              </a:rPr>
+              <a:t> Traffic</a:t>
+            </a:r>
+          </a:p>
+          <a:p>
+            <a:pPr marL="171450" indent="-171450">
+              <a:buFontTx/>
+              <a:buChar char="-"/>
+            </a:pPr>
+            <a:r>
+              <a:rPr lang="en-US" dirty="0">
+                <a:sym typeface="Wingdings" panose="05000000000000000000" pitchFamily="2" charset="2"/>
+              </a:rPr>
+              <a:t>Enter/Exists in stations (Networkx)</a:t>
+            </a:r>
+          </a:p>
+          <a:p>
+            <a:pPr marL="171450" indent="-171450">
+              <a:buFontTx/>
+              <a:buChar char="-"/>
+            </a:pPr>
+            <a:r>
+              <a:rPr lang="en-US" dirty="0">
+                <a:sym typeface="Wingdings" panose="05000000000000000000" pitchFamily="2" charset="2"/>
+              </a:rPr>
+              <a:t>Load in segments (Networkx)</a:t>
+            </a:r>
+          </a:p>
+          <a:p>
+            <a:pPr marL="171450" indent="-171450">
+              <a:buFontTx/>
+              <a:buChar char="-"/>
+            </a:pPr>
+            <a:endParaRPr lang="en-US" dirty="0">
+              <a:sym typeface="Wingdings" panose="05000000000000000000" pitchFamily="2" charset="2"/>
+            </a:endParaRPr>
+          </a:p>
+          <a:p>
+            <a:pPr marL="0" marR="0" lvl="0" indent="0" algn="l" defTabSz="914400" rtl="0" eaLnBrk="1" fontAlgn="auto" latinLnBrk="0" hangingPunct="1">
+              <a:lnSpc>
+                <a:spcPct val="100000"/>
+              </a:lnSpc>
+              <a:spcBef>
+                <a:spcPts val="0"/>
+              </a:spcBef>
+              <a:spcAft>
+                <a:spcPts val="0"/>
+              </a:spcAft>
+              <a:buClrTx/>
+              <a:buSzTx/>
+              <a:buFontTx/>
+              <a:buNone/>
+              <a:tabLst/>
+              <a:defRPr/>
+            </a:pPr>
+            <a:r>
+              <a:rPr lang="en-US" dirty="0">
+                <a:sym typeface="Wingdings" panose="05000000000000000000" pitchFamily="2" charset="2"/>
+              </a:rPr>
+              <a:t> User importance:</a:t>
+            </a:r>
+          </a:p>
+          <a:p>
+            <a:pPr marL="171450" indent="-171450">
+              <a:buFontTx/>
+              <a:buChar char="-"/>
+            </a:pPr>
+            <a:r>
+              <a:rPr lang="en-US" dirty="0">
+                <a:sym typeface="Wingdings" panose="05000000000000000000" pitchFamily="2" charset="2"/>
+              </a:rPr>
+              <a:t>Disparity ranking comparison</a:t>
+            </a:r>
+          </a:p>
+          <a:p>
+            <a:pPr marL="171450" indent="-171450">
+              <a:buFontTx/>
+              <a:buChar char="-"/>
+            </a:pPr>
+            <a:endParaRPr lang="en-US" dirty="0">
+              <a:sym typeface="Wingdings" panose="05000000000000000000" pitchFamily="2" charset="2"/>
+            </a:endParaRPr>
+          </a:p>
+          <a:p>
+            <a:pPr marL="0" marR="0" lvl="0" indent="0" algn="l" defTabSz="914400" rtl="0" eaLnBrk="1" fontAlgn="auto" latinLnBrk="0" hangingPunct="1">
+              <a:lnSpc>
+                <a:spcPct val="100000"/>
+              </a:lnSpc>
+              <a:spcBef>
+                <a:spcPts val="0"/>
+              </a:spcBef>
+              <a:spcAft>
+                <a:spcPts val="0"/>
+              </a:spcAft>
+              <a:buClrTx/>
+              <a:buSzTx/>
+              <a:buFontTx/>
+              <a:buNone/>
+              <a:tabLst/>
+              <a:defRPr/>
+            </a:pPr>
+            <a:r>
+              <a:rPr lang="en-US" dirty="0">
+                <a:sym typeface="Wingdings" panose="05000000000000000000" pitchFamily="2" charset="2"/>
+              </a:rPr>
+              <a:t> Collective importance:</a:t>
+            </a:r>
+          </a:p>
+          <a:p>
+            <a:pPr marL="171450" indent="-171450">
+              <a:buFontTx/>
+              <a:buChar char="-"/>
+            </a:pPr>
+            <a:r>
+              <a:rPr lang="en-US" dirty="0">
+                <a:sym typeface="Wingdings" panose="05000000000000000000" pitchFamily="2" charset="2"/>
+              </a:rPr>
+              <a:t>Distress ranking comparison</a:t>
+            </a:r>
           </a:p>
         </p:txBody>
       </p:sp>
@@ -4553,6 +4608,1023 @@
             <a:fld id="{3D19D2C4-D801-4083-8F60-14491AD78394}" type="slidenum">
               <a:rPr lang="fr-BE" smtClean="0"/>
               <a:t>23</a:t>
+            </a:fld>
+            <a:endParaRPr lang="fr-BE"/>
+          </a:p>
+        </p:txBody>
+      </p:sp>
+    </p:spTree>
+    <p:extLst>
+      <p:ext uri="{BB962C8B-B14F-4D97-AF65-F5344CB8AC3E}">
+        <p14:creationId xmlns:p14="http://schemas.microsoft.com/office/powerpoint/2010/main" val="2305896"/>
+      </p:ext>
+    </p:extLst>
+  </p:cSld>
+  <p:clrMapOvr>
+    <a:masterClrMapping/>
+  </p:clrMapOvr>
+</p:notes>
+</file>
+
+<file path=ppt/notesSlides/notesSlide23.xml><?xml version="1.0" encoding="utf-8"?>
+<p:notes xmlns:a="http://schemas.openxmlformats.org/drawingml/2006/main" xmlns:r="http://schemas.openxmlformats.org/officeDocument/2006/relationships" xmlns:p="http://schemas.openxmlformats.org/presentationml/2006/main">
+  <p:cSld>
+    <p:spTree>
+      <p:nvGrpSpPr>
+        <p:cNvPr id="1" name=""/>
+        <p:cNvGrpSpPr/>
+        <p:nvPr/>
+      </p:nvGrpSpPr>
+      <p:grpSpPr>
+        <a:xfrm>
+          <a:off x="0" y="0"/>
+          <a:ext cx="0" cy="0"/>
+          <a:chOff x="0" y="0"/>
+          <a:chExt cx="0" cy="0"/>
+        </a:xfrm>
+      </p:grpSpPr>
+      <p:sp>
+        <p:nvSpPr>
+          <p:cNvPr id="2" name="Slide Image Placeholder 1"/>
+          <p:cNvSpPr>
+            <a:spLocks noGrp="1" noRot="1" noChangeAspect="1"/>
+          </p:cNvSpPr>
+          <p:nvPr>
+            <p:ph type="sldImg"/>
+          </p:nvPr>
+        </p:nvSpPr>
+        <p:spPr/>
+      </p:sp>
+      <p:sp>
+        <p:nvSpPr>
+          <p:cNvPr id="3" name="Notes Placeholder 2"/>
+          <p:cNvSpPr>
+            <a:spLocks noGrp="1"/>
+          </p:cNvSpPr>
+          <p:nvPr>
+            <p:ph type="body" idx="1"/>
+          </p:nvPr>
+        </p:nvSpPr>
+        <p:spPr/>
+        <p:txBody>
+          <a:bodyPr/>
+          <a:lstStyle/>
+          <a:p>
+            <a:pPr marL="171450" indent="-171450">
+              <a:buFont typeface="Wingdings" panose="05000000000000000000" pitchFamily="2" charset="2"/>
+              <a:buChar char="à"/>
+            </a:pPr>
+            <a:r>
+              <a:rPr lang="en-US" dirty="0">
+                <a:sym typeface="Wingdings" panose="05000000000000000000" pitchFamily="2" charset="2"/>
+              </a:rPr>
+              <a:t>Operational: Speed &amp; Frequency</a:t>
+            </a:r>
+          </a:p>
+          <a:p>
+            <a:pPr marL="171450" indent="-171450">
+              <a:buFontTx/>
+              <a:buChar char="-"/>
+            </a:pPr>
+            <a:r>
+              <a:rPr lang="en-US" dirty="0">
+                <a:sym typeface="Wingdings" panose="05000000000000000000" pitchFamily="2" charset="2"/>
+              </a:rPr>
+              <a:t>Histogram (charts) weight</a:t>
+            </a:r>
+          </a:p>
+          <a:p>
+            <a:pPr marL="171450" indent="-171450">
+              <a:buFontTx/>
+              <a:buChar char="-"/>
+            </a:pPr>
+            <a:r>
+              <a:rPr lang="en-US" dirty="0">
+                <a:sym typeface="Wingdings" panose="05000000000000000000" pitchFamily="2" charset="2"/>
+              </a:rPr>
+              <a:t>Maps (Networkx)</a:t>
+            </a:r>
+          </a:p>
+          <a:p>
+            <a:pPr marL="0" indent="0">
+              <a:buFontTx/>
+              <a:buNone/>
+            </a:pPr>
+            <a:endParaRPr lang="en-US" dirty="0">
+              <a:sym typeface="Wingdings" panose="05000000000000000000" pitchFamily="2" charset="2"/>
+            </a:endParaRPr>
+          </a:p>
+          <a:p>
+            <a:pPr marL="0" marR="0" lvl="0" indent="0" algn="l" defTabSz="914400" rtl="0" eaLnBrk="1" fontAlgn="auto" latinLnBrk="0" hangingPunct="1">
+              <a:lnSpc>
+                <a:spcPct val="100000"/>
+              </a:lnSpc>
+              <a:spcBef>
+                <a:spcPts val="0"/>
+              </a:spcBef>
+              <a:spcAft>
+                <a:spcPts val="0"/>
+              </a:spcAft>
+              <a:buClrTx/>
+              <a:buSzTx/>
+              <a:buFontTx/>
+              <a:buNone/>
+              <a:tabLst/>
+              <a:defRPr/>
+            </a:pPr>
+            <a:r>
+              <a:rPr lang="en-US" dirty="0">
+                <a:sym typeface="Wingdings" panose="05000000000000000000" pitchFamily="2" charset="2"/>
+              </a:rPr>
+              <a:t> Traffic</a:t>
+            </a:r>
+          </a:p>
+          <a:p>
+            <a:pPr marL="171450" indent="-171450">
+              <a:buFontTx/>
+              <a:buChar char="-"/>
+            </a:pPr>
+            <a:r>
+              <a:rPr lang="en-US" dirty="0">
+                <a:sym typeface="Wingdings" panose="05000000000000000000" pitchFamily="2" charset="2"/>
+              </a:rPr>
+              <a:t>Enter/Exists in stations (Networkx)</a:t>
+            </a:r>
+          </a:p>
+          <a:p>
+            <a:pPr marL="171450" indent="-171450">
+              <a:buFontTx/>
+              <a:buChar char="-"/>
+            </a:pPr>
+            <a:r>
+              <a:rPr lang="en-US" dirty="0">
+                <a:sym typeface="Wingdings" panose="05000000000000000000" pitchFamily="2" charset="2"/>
+              </a:rPr>
+              <a:t>Load in segments (Networkx)</a:t>
+            </a:r>
+          </a:p>
+          <a:p>
+            <a:pPr marL="171450" indent="-171450">
+              <a:buFontTx/>
+              <a:buChar char="-"/>
+            </a:pPr>
+            <a:endParaRPr lang="en-US" dirty="0">
+              <a:sym typeface="Wingdings" panose="05000000000000000000" pitchFamily="2" charset="2"/>
+            </a:endParaRPr>
+          </a:p>
+          <a:p>
+            <a:pPr marL="0" marR="0" lvl="0" indent="0" algn="l" defTabSz="914400" rtl="0" eaLnBrk="1" fontAlgn="auto" latinLnBrk="0" hangingPunct="1">
+              <a:lnSpc>
+                <a:spcPct val="100000"/>
+              </a:lnSpc>
+              <a:spcBef>
+                <a:spcPts val="0"/>
+              </a:spcBef>
+              <a:spcAft>
+                <a:spcPts val="0"/>
+              </a:spcAft>
+              <a:buClrTx/>
+              <a:buSzTx/>
+              <a:buFontTx/>
+              <a:buNone/>
+              <a:tabLst/>
+              <a:defRPr/>
+            </a:pPr>
+            <a:r>
+              <a:rPr lang="en-US" dirty="0">
+                <a:sym typeface="Wingdings" panose="05000000000000000000" pitchFamily="2" charset="2"/>
+              </a:rPr>
+              <a:t> User importance:</a:t>
+            </a:r>
+          </a:p>
+          <a:p>
+            <a:pPr marL="171450" indent="-171450">
+              <a:buFontTx/>
+              <a:buChar char="-"/>
+            </a:pPr>
+            <a:r>
+              <a:rPr lang="en-US" dirty="0">
+                <a:sym typeface="Wingdings" panose="05000000000000000000" pitchFamily="2" charset="2"/>
+              </a:rPr>
+              <a:t>Disparity ranking comparison</a:t>
+            </a:r>
+          </a:p>
+          <a:p>
+            <a:pPr marL="171450" indent="-171450">
+              <a:buFontTx/>
+              <a:buChar char="-"/>
+            </a:pPr>
+            <a:endParaRPr lang="en-US" dirty="0">
+              <a:sym typeface="Wingdings" panose="05000000000000000000" pitchFamily="2" charset="2"/>
+            </a:endParaRPr>
+          </a:p>
+          <a:p>
+            <a:pPr marL="0" marR="0" lvl="0" indent="0" algn="l" defTabSz="914400" rtl="0" eaLnBrk="1" fontAlgn="auto" latinLnBrk="0" hangingPunct="1">
+              <a:lnSpc>
+                <a:spcPct val="100000"/>
+              </a:lnSpc>
+              <a:spcBef>
+                <a:spcPts val="0"/>
+              </a:spcBef>
+              <a:spcAft>
+                <a:spcPts val="0"/>
+              </a:spcAft>
+              <a:buClrTx/>
+              <a:buSzTx/>
+              <a:buFontTx/>
+              <a:buNone/>
+              <a:tabLst/>
+              <a:defRPr/>
+            </a:pPr>
+            <a:r>
+              <a:rPr lang="en-US" dirty="0">
+                <a:sym typeface="Wingdings" panose="05000000000000000000" pitchFamily="2" charset="2"/>
+              </a:rPr>
+              <a:t> Collective importance:</a:t>
+            </a:r>
+          </a:p>
+          <a:p>
+            <a:pPr marL="171450" indent="-171450">
+              <a:buFontTx/>
+              <a:buChar char="-"/>
+            </a:pPr>
+            <a:r>
+              <a:rPr lang="en-US" dirty="0">
+                <a:sym typeface="Wingdings" panose="05000000000000000000" pitchFamily="2" charset="2"/>
+              </a:rPr>
+              <a:t>Distress ranking comparison</a:t>
+            </a:r>
+          </a:p>
+        </p:txBody>
+      </p:sp>
+      <p:sp>
+        <p:nvSpPr>
+          <p:cNvPr id="4" name="Slide Number Placeholder 3"/>
+          <p:cNvSpPr>
+            <a:spLocks noGrp="1"/>
+          </p:cNvSpPr>
+          <p:nvPr>
+            <p:ph type="sldNum" sz="quarter" idx="5"/>
+          </p:nvPr>
+        </p:nvSpPr>
+        <p:spPr/>
+        <p:txBody>
+          <a:bodyPr/>
+          <a:lstStyle/>
+          <a:p>
+            <a:fld id="{3D19D2C4-D801-4083-8F60-14491AD78394}" type="slidenum">
+              <a:rPr lang="fr-BE" smtClean="0"/>
+              <a:t>24</a:t>
+            </a:fld>
+            <a:endParaRPr lang="fr-BE"/>
+          </a:p>
+        </p:txBody>
+      </p:sp>
+    </p:spTree>
+    <p:extLst>
+      <p:ext uri="{BB962C8B-B14F-4D97-AF65-F5344CB8AC3E}">
+        <p14:creationId xmlns:p14="http://schemas.microsoft.com/office/powerpoint/2010/main" val="3774980255"/>
+      </p:ext>
+    </p:extLst>
+  </p:cSld>
+  <p:clrMapOvr>
+    <a:masterClrMapping/>
+  </p:clrMapOvr>
+</p:notes>
+</file>
+
+<file path=ppt/notesSlides/notesSlide24.xml><?xml version="1.0" encoding="utf-8"?>
+<p:notes xmlns:a="http://schemas.openxmlformats.org/drawingml/2006/main" xmlns:r="http://schemas.openxmlformats.org/officeDocument/2006/relationships" xmlns:p="http://schemas.openxmlformats.org/presentationml/2006/main">
+  <p:cSld>
+    <p:spTree>
+      <p:nvGrpSpPr>
+        <p:cNvPr id="1" name=""/>
+        <p:cNvGrpSpPr/>
+        <p:nvPr/>
+      </p:nvGrpSpPr>
+      <p:grpSpPr>
+        <a:xfrm>
+          <a:off x="0" y="0"/>
+          <a:ext cx="0" cy="0"/>
+          <a:chOff x="0" y="0"/>
+          <a:chExt cx="0" cy="0"/>
+        </a:xfrm>
+      </p:grpSpPr>
+      <p:sp>
+        <p:nvSpPr>
+          <p:cNvPr id="2" name="Slide Image Placeholder 1"/>
+          <p:cNvSpPr>
+            <a:spLocks noGrp="1" noRot="1" noChangeAspect="1"/>
+          </p:cNvSpPr>
+          <p:nvPr>
+            <p:ph type="sldImg"/>
+          </p:nvPr>
+        </p:nvSpPr>
+        <p:spPr/>
+      </p:sp>
+      <p:sp>
+        <p:nvSpPr>
+          <p:cNvPr id="3" name="Notes Placeholder 2"/>
+          <p:cNvSpPr>
+            <a:spLocks noGrp="1"/>
+          </p:cNvSpPr>
+          <p:nvPr>
+            <p:ph type="body" idx="1"/>
+          </p:nvPr>
+        </p:nvSpPr>
+        <p:spPr/>
+        <p:txBody>
+          <a:bodyPr/>
+          <a:lstStyle/>
+          <a:p>
+            <a:pPr marL="171450" indent="-171450">
+              <a:buFont typeface="Wingdings" panose="05000000000000000000" pitchFamily="2" charset="2"/>
+              <a:buChar char="à"/>
+            </a:pPr>
+            <a:r>
+              <a:rPr lang="en-US" dirty="0">
+                <a:sym typeface="Wingdings" panose="05000000000000000000" pitchFamily="2" charset="2"/>
+              </a:rPr>
+              <a:t>Operational: Speed &amp; Frequency</a:t>
+            </a:r>
+          </a:p>
+          <a:p>
+            <a:pPr marL="171450" indent="-171450">
+              <a:buFontTx/>
+              <a:buChar char="-"/>
+            </a:pPr>
+            <a:r>
+              <a:rPr lang="en-US" dirty="0">
+                <a:sym typeface="Wingdings" panose="05000000000000000000" pitchFamily="2" charset="2"/>
+              </a:rPr>
+              <a:t>Histogram (charts) weight</a:t>
+            </a:r>
+          </a:p>
+          <a:p>
+            <a:pPr marL="171450" indent="-171450">
+              <a:buFontTx/>
+              <a:buChar char="-"/>
+            </a:pPr>
+            <a:r>
+              <a:rPr lang="en-US" dirty="0">
+                <a:sym typeface="Wingdings" panose="05000000000000000000" pitchFamily="2" charset="2"/>
+              </a:rPr>
+              <a:t>Maps (Networkx)</a:t>
+            </a:r>
+          </a:p>
+          <a:p>
+            <a:pPr marL="0" indent="0">
+              <a:buFontTx/>
+              <a:buNone/>
+            </a:pPr>
+            <a:endParaRPr lang="en-US" dirty="0">
+              <a:sym typeface="Wingdings" panose="05000000000000000000" pitchFamily="2" charset="2"/>
+            </a:endParaRPr>
+          </a:p>
+          <a:p>
+            <a:pPr marL="0" marR="0" lvl="0" indent="0" algn="l" defTabSz="914400" rtl="0" eaLnBrk="1" fontAlgn="auto" latinLnBrk="0" hangingPunct="1">
+              <a:lnSpc>
+                <a:spcPct val="100000"/>
+              </a:lnSpc>
+              <a:spcBef>
+                <a:spcPts val="0"/>
+              </a:spcBef>
+              <a:spcAft>
+                <a:spcPts val="0"/>
+              </a:spcAft>
+              <a:buClrTx/>
+              <a:buSzTx/>
+              <a:buFontTx/>
+              <a:buNone/>
+              <a:tabLst/>
+              <a:defRPr/>
+            </a:pPr>
+            <a:r>
+              <a:rPr lang="en-US" dirty="0">
+                <a:sym typeface="Wingdings" panose="05000000000000000000" pitchFamily="2" charset="2"/>
+              </a:rPr>
+              <a:t> Traffic</a:t>
+            </a:r>
+          </a:p>
+          <a:p>
+            <a:pPr marL="171450" indent="-171450">
+              <a:buFontTx/>
+              <a:buChar char="-"/>
+            </a:pPr>
+            <a:r>
+              <a:rPr lang="en-US" dirty="0">
+                <a:sym typeface="Wingdings" panose="05000000000000000000" pitchFamily="2" charset="2"/>
+              </a:rPr>
+              <a:t>Enter/Exists in stations (Networkx)</a:t>
+            </a:r>
+          </a:p>
+          <a:p>
+            <a:pPr marL="171450" indent="-171450">
+              <a:buFontTx/>
+              <a:buChar char="-"/>
+            </a:pPr>
+            <a:r>
+              <a:rPr lang="en-US" dirty="0">
+                <a:sym typeface="Wingdings" panose="05000000000000000000" pitchFamily="2" charset="2"/>
+              </a:rPr>
+              <a:t>Load in segments (Networkx)</a:t>
+            </a:r>
+          </a:p>
+          <a:p>
+            <a:pPr marL="171450" indent="-171450">
+              <a:buFontTx/>
+              <a:buChar char="-"/>
+            </a:pPr>
+            <a:endParaRPr lang="en-US" dirty="0">
+              <a:sym typeface="Wingdings" panose="05000000000000000000" pitchFamily="2" charset="2"/>
+            </a:endParaRPr>
+          </a:p>
+          <a:p>
+            <a:pPr marL="0" marR="0" lvl="0" indent="0" algn="l" defTabSz="914400" rtl="0" eaLnBrk="1" fontAlgn="auto" latinLnBrk="0" hangingPunct="1">
+              <a:lnSpc>
+                <a:spcPct val="100000"/>
+              </a:lnSpc>
+              <a:spcBef>
+                <a:spcPts val="0"/>
+              </a:spcBef>
+              <a:spcAft>
+                <a:spcPts val="0"/>
+              </a:spcAft>
+              <a:buClrTx/>
+              <a:buSzTx/>
+              <a:buFontTx/>
+              <a:buNone/>
+              <a:tabLst/>
+              <a:defRPr/>
+            </a:pPr>
+            <a:r>
+              <a:rPr lang="en-US" dirty="0">
+                <a:sym typeface="Wingdings" panose="05000000000000000000" pitchFamily="2" charset="2"/>
+              </a:rPr>
+              <a:t> User importance:</a:t>
+            </a:r>
+          </a:p>
+          <a:p>
+            <a:pPr marL="171450" indent="-171450">
+              <a:buFontTx/>
+              <a:buChar char="-"/>
+            </a:pPr>
+            <a:r>
+              <a:rPr lang="en-US" dirty="0">
+                <a:sym typeface="Wingdings" panose="05000000000000000000" pitchFamily="2" charset="2"/>
+              </a:rPr>
+              <a:t>Disparity ranking comparison</a:t>
+            </a:r>
+          </a:p>
+          <a:p>
+            <a:pPr marL="171450" indent="-171450">
+              <a:buFontTx/>
+              <a:buChar char="-"/>
+            </a:pPr>
+            <a:endParaRPr lang="en-US" dirty="0">
+              <a:sym typeface="Wingdings" panose="05000000000000000000" pitchFamily="2" charset="2"/>
+            </a:endParaRPr>
+          </a:p>
+          <a:p>
+            <a:pPr marL="0" marR="0" lvl="0" indent="0" algn="l" defTabSz="914400" rtl="0" eaLnBrk="1" fontAlgn="auto" latinLnBrk="0" hangingPunct="1">
+              <a:lnSpc>
+                <a:spcPct val="100000"/>
+              </a:lnSpc>
+              <a:spcBef>
+                <a:spcPts val="0"/>
+              </a:spcBef>
+              <a:spcAft>
+                <a:spcPts val="0"/>
+              </a:spcAft>
+              <a:buClrTx/>
+              <a:buSzTx/>
+              <a:buFontTx/>
+              <a:buNone/>
+              <a:tabLst/>
+              <a:defRPr/>
+            </a:pPr>
+            <a:r>
+              <a:rPr lang="en-US" dirty="0">
+                <a:sym typeface="Wingdings" panose="05000000000000000000" pitchFamily="2" charset="2"/>
+              </a:rPr>
+              <a:t> Collective importance:</a:t>
+            </a:r>
+          </a:p>
+          <a:p>
+            <a:pPr marL="171450" indent="-171450">
+              <a:buFontTx/>
+              <a:buChar char="-"/>
+            </a:pPr>
+            <a:r>
+              <a:rPr lang="en-US" dirty="0">
+                <a:sym typeface="Wingdings" panose="05000000000000000000" pitchFamily="2" charset="2"/>
+              </a:rPr>
+              <a:t>Distress ranking comparison</a:t>
+            </a:r>
+          </a:p>
+        </p:txBody>
+      </p:sp>
+      <p:sp>
+        <p:nvSpPr>
+          <p:cNvPr id="4" name="Slide Number Placeholder 3"/>
+          <p:cNvSpPr>
+            <a:spLocks noGrp="1"/>
+          </p:cNvSpPr>
+          <p:nvPr>
+            <p:ph type="sldNum" sz="quarter" idx="5"/>
+          </p:nvPr>
+        </p:nvSpPr>
+        <p:spPr/>
+        <p:txBody>
+          <a:bodyPr/>
+          <a:lstStyle/>
+          <a:p>
+            <a:fld id="{3D19D2C4-D801-4083-8F60-14491AD78394}" type="slidenum">
+              <a:rPr lang="fr-BE" smtClean="0"/>
+              <a:t>25</a:t>
+            </a:fld>
+            <a:endParaRPr lang="fr-BE"/>
+          </a:p>
+        </p:txBody>
+      </p:sp>
+    </p:spTree>
+    <p:extLst>
+      <p:ext uri="{BB962C8B-B14F-4D97-AF65-F5344CB8AC3E}">
+        <p14:creationId xmlns:p14="http://schemas.microsoft.com/office/powerpoint/2010/main" val="203907506"/>
+      </p:ext>
+    </p:extLst>
+  </p:cSld>
+  <p:clrMapOvr>
+    <a:masterClrMapping/>
+  </p:clrMapOvr>
+</p:notes>
+</file>
+
+<file path=ppt/notesSlides/notesSlide25.xml><?xml version="1.0" encoding="utf-8"?>
+<p:notes xmlns:a="http://schemas.openxmlformats.org/drawingml/2006/main" xmlns:r="http://schemas.openxmlformats.org/officeDocument/2006/relationships" xmlns:p="http://schemas.openxmlformats.org/presentationml/2006/main">
+  <p:cSld>
+    <p:spTree>
+      <p:nvGrpSpPr>
+        <p:cNvPr id="1" name=""/>
+        <p:cNvGrpSpPr/>
+        <p:nvPr/>
+      </p:nvGrpSpPr>
+      <p:grpSpPr>
+        <a:xfrm>
+          <a:off x="0" y="0"/>
+          <a:ext cx="0" cy="0"/>
+          <a:chOff x="0" y="0"/>
+          <a:chExt cx="0" cy="0"/>
+        </a:xfrm>
+      </p:grpSpPr>
+      <p:sp>
+        <p:nvSpPr>
+          <p:cNvPr id="2" name="Slide Image Placeholder 1"/>
+          <p:cNvSpPr>
+            <a:spLocks noGrp="1" noRot="1" noChangeAspect="1"/>
+          </p:cNvSpPr>
+          <p:nvPr>
+            <p:ph type="sldImg"/>
+          </p:nvPr>
+        </p:nvSpPr>
+        <p:spPr/>
+      </p:sp>
+      <p:sp>
+        <p:nvSpPr>
+          <p:cNvPr id="3" name="Notes Placeholder 2"/>
+          <p:cNvSpPr>
+            <a:spLocks noGrp="1"/>
+          </p:cNvSpPr>
+          <p:nvPr>
+            <p:ph type="body" idx="1"/>
+          </p:nvPr>
+        </p:nvSpPr>
+        <p:spPr/>
+        <p:txBody>
+          <a:bodyPr/>
+          <a:lstStyle/>
+          <a:p>
+            <a:pPr marL="0" indent="0">
+              <a:buNone/>
+            </a:pPr>
+            <a:endParaRPr lang="en-US" dirty="0"/>
+          </a:p>
+          <a:p>
+            <a:pPr marL="0" marR="0" lvl="0" indent="0" algn="l" defTabSz="914400" rtl="0" eaLnBrk="1" fontAlgn="auto" latinLnBrk="0" hangingPunct="1">
+              <a:lnSpc>
+                <a:spcPct val="100000"/>
+              </a:lnSpc>
+              <a:spcBef>
+                <a:spcPts val="0"/>
+              </a:spcBef>
+              <a:spcAft>
+                <a:spcPts val="0"/>
+              </a:spcAft>
+              <a:buClrTx/>
+              <a:buSzTx/>
+              <a:buFontTx/>
+              <a:buNone/>
+              <a:tabLst/>
+              <a:defRPr/>
+            </a:pPr>
+            <a:r>
+              <a:rPr lang="en-US" dirty="0"/>
+              <a:t>1) </a:t>
+            </a:r>
+            <a:r>
+              <a:rPr lang="en-US" dirty="0">
+                <a:sym typeface="Wingdings" panose="05000000000000000000" pitchFamily="2" charset="2"/>
+              </a:rPr>
+              <a:t>Interconnect all possible modes of transport including bikes and walks.</a:t>
+            </a:r>
+            <a:endParaRPr lang="en-US" dirty="0"/>
+          </a:p>
+          <a:p>
+            <a:pPr marL="0" indent="0">
+              <a:buNone/>
+            </a:pPr>
+            <a:endParaRPr lang="en-US" dirty="0"/>
+          </a:p>
+          <a:p>
+            <a:pPr marL="0" indent="0">
+              <a:buNone/>
+            </a:pPr>
+            <a:endParaRPr lang="en-US" dirty="0"/>
+          </a:p>
+          <a:p>
+            <a:pPr marL="0" indent="0">
+              <a:buNone/>
+            </a:pPr>
+            <a:r>
+              <a:rPr lang="en-US" dirty="0"/>
+              <a:t>2) Use ML models for predictions of:</a:t>
+            </a:r>
+          </a:p>
+          <a:p>
+            <a:pPr marL="228600" indent="-228600">
+              <a:buAutoNum type="arabicParenR"/>
+            </a:pPr>
+            <a:endParaRPr lang="en-US" dirty="0"/>
+          </a:p>
+          <a:p>
+            <a:pPr marL="171450" indent="-171450">
+              <a:buFont typeface="Wingdings" panose="05000000000000000000" pitchFamily="2" charset="2"/>
+              <a:buChar char="à"/>
+            </a:pPr>
+            <a:r>
+              <a:rPr lang="en-US" dirty="0"/>
+              <a:t>TRAFFIC: Passenger flow: </a:t>
+            </a:r>
+            <a:r>
+              <a:rPr lang="en-US" b="0" i="0" dirty="0">
+                <a:solidFill>
+                  <a:srgbClr val="24292F"/>
+                </a:solidFill>
+                <a:effectLst/>
+                <a:latin typeface="-apple-system"/>
+              </a:rPr>
+              <a:t>From network lens (keeping passenger anonymity) , use more data (daily events) to more accurately understand why traffic is generated in each segments;</a:t>
+            </a:r>
+          </a:p>
+          <a:p>
+            <a:pPr marL="171450" indent="-171450">
+              <a:buFont typeface="Wingdings" panose="05000000000000000000" pitchFamily="2" charset="2"/>
+              <a:buChar char="à"/>
+            </a:pPr>
+            <a:endParaRPr lang="en-US" b="0" i="0" dirty="0">
+              <a:solidFill>
+                <a:srgbClr val="24292F"/>
+              </a:solidFill>
+              <a:effectLst/>
+              <a:latin typeface="-apple-system"/>
+            </a:endParaRPr>
+          </a:p>
+          <a:p>
+            <a:pPr marL="171450" indent="-171450">
+              <a:buFont typeface="Wingdings" panose="05000000000000000000" pitchFamily="2" charset="2"/>
+              <a:buChar char="à"/>
+            </a:pPr>
+            <a:r>
+              <a:rPr lang="en-US" b="0" i="0" dirty="0">
+                <a:solidFill>
+                  <a:srgbClr val="24292F"/>
+                </a:solidFill>
+                <a:effectLst/>
+                <a:latin typeface="-apple-system"/>
+              </a:rPr>
+              <a:t>OPEX: Predict disruptions and its impact considering forecasted passenger traffic to optimize maintenance planning.</a:t>
+            </a:r>
+          </a:p>
+          <a:p>
+            <a:pPr marL="171450" indent="-171450">
+              <a:buFont typeface="Wingdings" panose="05000000000000000000" pitchFamily="2" charset="2"/>
+              <a:buChar char="à"/>
+            </a:pPr>
+            <a:endParaRPr lang="en-US" b="0" i="0" dirty="0">
+              <a:solidFill>
+                <a:srgbClr val="24292F"/>
+              </a:solidFill>
+              <a:effectLst/>
+              <a:latin typeface="-apple-system"/>
+            </a:endParaRPr>
+          </a:p>
+          <a:p>
+            <a:pPr marL="171450" marR="0" lvl="0" indent="-171450" algn="l" defTabSz="914400" rtl="0" eaLnBrk="1" fontAlgn="auto" latinLnBrk="0" hangingPunct="1">
+              <a:lnSpc>
+                <a:spcPct val="100000"/>
+              </a:lnSpc>
+              <a:spcBef>
+                <a:spcPts val="0"/>
+              </a:spcBef>
+              <a:spcAft>
+                <a:spcPts val="0"/>
+              </a:spcAft>
+              <a:buClrTx/>
+              <a:buSzTx/>
+              <a:buFont typeface="Wingdings" panose="05000000000000000000" pitchFamily="2" charset="2"/>
+              <a:buChar char="à"/>
+              <a:tabLst/>
+              <a:defRPr/>
+            </a:pPr>
+            <a:r>
+              <a:rPr lang="en-US" b="0" i="0" dirty="0">
+                <a:solidFill>
+                  <a:srgbClr val="24292F"/>
+                </a:solidFill>
+                <a:effectLst/>
+                <a:latin typeface="-apple-system"/>
+              </a:rPr>
+              <a:t>Create a timetable dynamically tailored that optimize infra-structure towards the commuters needs.</a:t>
+            </a:r>
+          </a:p>
+          <a:p>
+            <a:pPr marL="171450" indent="-171450">
+              <a:buFont typeface="Wingdings" panose="05000000000000000000" pitchFamily="2" charset="2"/>
+              <a:buChar char="à"/>
+            </a:pPr>
+            <a:endParaRPr lang="en-US" b="0" i="0" dirty="0">
+              <a:solidFill>
+                <a:srgbClr val="24292F"/>
+              </a:solidFill>
+              <a:effectLst/>
+              <a:latin typeface="-apple-system"/>
+            </a:endParaRPr>
+          </a:p>
+          <a:p>
+            <a:pPr marL="171450" indent="-171450">
+              <a:buFont typeface="Wingdings" panose="05000000000000000000" pitchFamily="2" charset="2"/>
+              <a:buChar char="à"/>
+            </a:pPr>
+            <a:r>
+              <a:rPr lang="en-US" b="0" i="0" dirty="0">
+                <a:solidFill>
+                  <a:srgbClr val="24292F"/>
+                </a:solidFill>
+                <a:effectLst/>
+                <a:latin typeface="-apple-system"/>
+              </a:rPr>
+              <a:t>CAPEX: More maintenance, less disruptions, less need for redundancy and more investment express lanes (study of origin and destination). </a:t>
+            </a:r>
+          </a:p>
+          <a:p>
+            <a:pPr marL="171450" indent="-171450">
+              <a:buFont typeface="Wingdings" panose="05000000000000000000" pitchFamily="2" charset="2"/>
+              <a:buChar char="à"/>
+            </a:pPr>
+            <a:endParaRPr lang="en-US" b="0" i="0" dirty="0">
+              <a:solidFill>
+                <a:srgbClr val="24292F"/>
+              </a:solidFill>
+              <a:effectLst/>
+              <a:latin typeface="-apple-system"/>
+            </a:endParaRPr>
+          </a:p>
+          <a:p>
+            <a:pPr marL="171450" indent="-171450">
+              <a:buFont typeface="Wingdings" panose="05000000000000000000" pitchFamily="2" charset="2"/>
+              <a:buChar char="à"/>
+            </a:pPr>
+            <a:endParaRPr lang="en-US" b="0" i="0" dirty="0">
+              <a:solidFill>
+                <a:srgbClr val="24292F"/>
+              </a:solidFill>
+              <a:effectLst/>
+              <a:latin typeface="-apple-system"/>
+            </a:endParaRPr>
+          </a:p>
+          <a:p>
+            <a:pPr marL="0" indent="0">
+              <a:buFont typeface="Wingdings" panose="05000000000000000000" pitchFamily="2" charset="2"/>
+              <a:buNone/>
+            </a:pPr>
+            <a:endParaRPr lang="en-US" b="0" i="0" dirty="0">
+              <a:solidFill>
+                <a:srgbClr val="24292F"/>
+              </a:solidFill>
+              <a:effectLst/>
+              <a:latin typeface="-apple-system"/>
+            </a:endParaRPr>
+          </a:p>
+          <a:p>
+            <a:pPr marL="171450" indent="-171450">
+              <a:buFont typeface="Wingdings" panose="05000000000000000000" pitchFamily="2" charset="2"/>
+              <a:buChar char="à"/>
+            </a:pPr>
+            <a:endParaRPr lang="en-US" b="0" i="0" dirty="0">
+              <a:solidFill>
+                <a:srgbClr val="24292F"/>
+              </a:solidFill>
+              <a:effectLst/>
+              <a:latin typeface="-apple-system"/>
+            </a:endParaRPr>
+          </a:p>
+        </p:txBody>
+      </p:sp>
+      <p:sp>
+        <p:nvSpPr>
+          <p:cNvPr id="4" name="Slide Number Placeholder 3"/>
+          <p:cNvSpPr>
+            <a:spLocks noGrp="1"/>
+          </p:cNvSpPr>
+          <p:nvPr>
+            <p:ph type="sldNum" sz="quarter" idx="5"/>
+          </p:nvPr>
+        </p:nvSpPr>
+        <p:spPr/>
+        <p:txBody>
+          <a:bodyPr/>
+          <a:lstStyle/>
+          <a:p>
+            <a:fld id="{3D19D2C4-D801-4083-8F60-14491AD78394}" type="slidenum">
+              <a:rPr lang="fr-BE" smtClean="0"/>
+              <a:t>26</a:t>
+            </a:fld>
+            <a:endParaRPr lang="fr-BE"/>
+          </a:p>
+        </p:txBody>
+      </p:sp>
+    </p:spTree>
+    <p:extLst>
+      <p:ext uri="{BB962C8B-B14F-4D97-AF65-F5344CB8AC3E}">
+        <p14:creationId xmlns:p14="http://schemas.microsoft.com/office/powerpoint/2010/main" val="2618829657"/>
+      </p:ext>
+    </p:extLst>
+  </p:cSld>
+  <p:clrMapOvr>
+    <a:masterClrMapping/>
+  </p:clrMapOvr>
+</p:notes>
+</file>
+
+<file path=ppt/notesSlides/notesSlide26.xml><?xml version="1.0" encoding="utf-8"?>
+<p:notes xmlns:a="http://schemas.openxmlformats.org/drawingml/2006/main" xmlns:r="http://schemas.openxmlformats.org/officeDocument/2006/relationships" xmlns:p="http://schemas.openxmlformats.org/presentationml/2006/main">
+  <p:cSld>
+    <p:spTree>
+      <p:nvGrpSpPr>
+        <p:cNvPr id="1" name=""/>
+        <p:cNvGrpSpPr/>
+        <p:nvPr/>
+      </p:nvGrpSpPr>
+      <p:grpSpPr>
+        <a:xfrm>
+          <a:off x="0" y="0"/>
+          <a:ext cx="0" cy="0"/>
+          <a:chOff x="0" y="0"/>
+          <a:chExt cx="0" cy="0"/>
+        </a:xfrm>
+      </p:grpSpPr>
+      <p:sp>
+        <p:nvSpPr>
+          <p:cNvPr id="2" name="Slide Image Placeholder 1"/>
+          <p:cNvSpPr>
+            <a:spLocks noGrp="1" noRot="1" noChangeAspect="1"/>
+          </p:cNvSpPr>
+          <p:nvPr>
+            <p:ph type="sldImg"/>
+          </p:nvPr>
+        </p:nvSpPr>
+        <p:spPr/>
+      </p:sp>
+      <p:sp>
+        <p:nvSpPr>
+          <p:cNvPr id="3" name="Notes Placeholder 2"/>
+          <p:cNvSpPr>
+            <a:spLocks noGrp="1"/>
+          </p:cNvSpPr>
+          <p:nvPr>
+            <p:ph type="body" idx="1"/>
+          </p:nvPr>
+        </p:nvSpPr>
+        <p:spPr/>
+        <p:txBody>
+          <a:bodyPr/>
+          <a:lstStyle/>
+          <a:p>
+            <a:r>
+              <a:rPr lang="en-US" dirty="0"/>
+              <a:t>What is a efficient network = minimizes travel time and costs (vehicles, energy, emissions, price) assuring passenger “comfort” and “prompt mobility”.</a:t>
+            </a:r>
+          </a:p>
+          <a:p>
+            <a:pPr marL="0" marR="0" lvl="0" indent="0" algn="l" defTabSz="914400" rtl="0" eaLnBrk="1" fontAlgn="auto" latinLnBrk="0" hangingPunct="1">
+              <a:lnSpc>
+                <a:spcPct val="100000"/>
+              </a:lnSpc>
+              <a:spcBef>
+                <a:spcPts val="0"/>
+              </a:spcBef>
+              <a:spcAft>
+                <a:spcPts val="0"/>
+              </a:spcAft>
+              <a:buClrTx/>
+              <a:buSzTx/>
+              <a:buFontTx/>
+              <a:buNone/>
+              <a:tabLst/>
+              <a:defRPr/>
+            </a:pPr>
+            <a:endParaRPr lang="en-US" dirty="0"/>
+          </a:p>
+          <a:p>
+            <a:r>
+              <a:rPr lang="en-US" dirty="0"/>
+              <a:t>It is important to mention that a more efficient network inherently requires more maintenance.</a:t>
+            </a:r>
+          </a:p>
+          <a:p>
+            <a:endParaRPr lang="en-US" dirty="0"/>
+          </a:p>
+          <a:p>
+            <a:r>
+              <a:rPr lang="en-US" dirty="0"/>
+              <a:t>It is not necessary related to its size. But is related to how it was projected to assist the commuters.</a:t>
+            </a:r>
+          </a:p>
+          <a:p>
+            <a:endParaRPr lang="en-US" dirty="0"/>
+          </a:p>
+          <a:p>
+            <a:r>
+              <a:rPr lang="en-US" dirty="0"/>
+              <a:t>In a network without disruption, for instance, it would be a waste invest in redundancies. More money could be destinated to reduce travels time. </a:t>
+            </a:r>
+          </a:p>
+          <a:p>
+            <a:endParaRPr lang="en-US" dirty="0"/>
+          </a:p>
+          <a:p>
+            <a:r>
+              <a:rPr lang="en-US" dirty="0"/>
+              <a:t>In a real world, however, no disruptions comes with a high maintenance price. </a:t>
+            </a:r>
+          </a:p>
+          <a:p>
+            <a:endParaRPr lang="en-US" dirty="0"/>
+          </a:p>
+          <a:p>
+            <a:r>
+              <a:rPr lang="en-US" dirty="0"/>
+              <a:t>The balance between effectiveness and robustness is a major question when comes down to a such important factor of the society evolvement.</a:t>
+            </a:r>
+          </a:p>
+          <a:p>
+            <a:endParaRPr lang="en-US" dirty="0"/>
+          </a:p>
+          <a:p>
+            <a:endParaRPr lang="en-US" dirty="0"/>
+          </a:p>
+          <a:p>
+            <a:endParaRPr lang="en-US" dirty="0"/>
+          </a:p>
+          <a:p>
+            <a:endParaRPr lang="en-US" dirty="0"/>
+          </a:p>
+          <a:p>
+            <a:endParaRPr lang="en-US" dirty="0"/>
+          </a:p>
+          <a:p>
+            <a:endParaRPr lang="en-US" dirty="0"/>
+          </a:p>
+        </p:txBody>
+      </p:sp>
+      <p:sp>
+        <p:nvSpPr>
+          <p:cNvPr id="4" name="Slide Number Placeholder 3"/>
+          <p:cNvSpPr>
+            <a:spLocks noGrp="1"/>
+          </p:cNvSpPr>
+          <p:nvPr>
+            <p:ph type="sldNum" sz="quarter" idx="5"/>
+          </p:nvPr>
+        </p:nvSpPr>
+        <p:spPr/>
+        <p:txBody>
+          <a:bodyPr/>
+          <a:lstStyle/>
+          <a:p>
+            <a:fld id="{3D19D2C4-D801-4083-8F60-14491AD78394}" type="slidenum">
+              <a:rPr lang="fr-BE" smtClean="0"/>
+              <a:t>27</a:t>
             </a:fld>
             <a:endParaRPr lang="fr-BE"/>
           </a:p>
@@ -5622,7 +6694,7 @@
           <a:p>
             <a:fld id="{CCC07DD4-E8D6-4581-B1F4-04F48CF9E11E}" type="datetimeFigureOut">
               <a:rPr lang="fr-BE" smtClean="0"/>
-              <a:t>10-10-23</a:t>
+              <a:t>29-10-23</a:t>
             </a:fld>
             <a:endParaRPr lang="fr-BE"/>
           </a:p>
@@ -5822,7 +6894,7 @@
           <a:p>
             <a:fld id="{CCC07DD4-E8D6-4581-B1F4-04F48CF9E11E}" type="datetimeFigureOut">
               <a:rPr lang="fr-BE" smtClean="0"/>
-              <a:t>10-10-23</a:t>
+              <a:t>29-10-23</a:t>
             </a:fld>
             <a:endParaRPr lang="fr-BE"/>
           </a:p>
@@ -6032,7 +7104,7 @@
           <a:p>
             <a:fld id="{CCC07DD4-E8D6-4581-B1F4-04F48CF9E11E}" type="datetimeFigureOut">
               <a:rPr lang="fr-BE" smtClean="0"/>
-              <a:t>10-10-23</a:t>
+              <a:t>29-10-23</a:t>
             </a:fld>
             <a:endParaRPr lang="fr-BE"/>
           </a:p>
@@ -6232,7 +7304,7 @@
           <a:p>
             <a:fld id="{CCC07DD4-E8D6-4581-B1F4-04F48CF9E11E}" type="datetimeFigureOut">
               <a:rPr lang="fr-BE" smtClean="0"/>
-              <a:t>10-10-23</a:t>
+              <a:t>29-10-23</a:t>
             </a:fld>
             <a:endParaRPr lang="fr-BE"/>
           </a:p>
@@ -6508,7 +7580,7 @@
           <a:p>
             <a:fld id="{CCC07DD4-E8D6-4581-B1F4-04F48CF9E11E}" type="datetimeFigureOut">
               <a:rPr lang="fr-BE" smtClean="0"/>
-              <a:t>10-10-23</a:t>
+              <a:t>29-10-23</a:t>
             </a:fld>
             <a:endParaRPr lang="fr-BE"/>
           </a:p>
@@ -6776,7 +7848,7 @@
           <a:p>
             <a:fld id="{CCC07DD4-E8D6-4581-B1F4-04F48CF9E11E}" type="datetimeFigureOut">
               <a:rPr lang="fr-BE" smtClean="0"/>
-              <a:t>10-10-23</a:t>
+              <a:t>29-10-23</a:t>
             </a:fld>
             <a:endParaRPr lang="fr-BE"/>
           </a:p>
@@ -7191,7 +8263,7 @@
           <a:p>
             <a:fld id="{CCC07DD4-E8D6-4581-B1F4-04F48CF9E11E}" type="datetimeFigureOut">
               <a:rPr lang="fr-BE" smtClean="0"/>
-              <a:t>10-10-23</a:t>
+              <a:t>29-10-23</a:t>
             </a:fld>
             <a:endParaRPr lang="fr-BE"/>
           </a:p>
@@ -7333,7 +8405,7 @@
           <a:p>
             <a:fld id="{CCC07DD4-E8D6-4581-B1F4-04F48CF9E11E}" type="datetimeFigureOut">
               <a:rPr lang="fr-BE" smtClean="0"/>
-              <a:t>10-10-23</a:t>
+              <a:t>29-10-23</a:t>
             </a:fld>
             <a:endParaRPr lang="fr-BE"/>
           </a:p>
@@ -7446,7 +8518,7 @@
           <a:p>
             <a:fld id="{CCC07DD4-E8D6-4581-B1F4-04F48CF9E11E}" type="datetimeFigureOut">
               <a:rPr lang="fr-BE" smtClean="0"/>
-              <a:t>10-10-23</a:t>
+              <a:t>29-10-23</a:t>
             </a:fld>
             <a:endParaRPr lang="fr-BE"/>
           </a:p>
@@ -7759,7 +8831,7 @@
           <a:p>
             <a:fld id="{CCC07DD4-E8D6-4581-B1F4-04F48CF9E11E}" type="datetimeFigureOut">
               <a:rPr lang="fr-BE" smtClean="0"/>
-              <a:t>10-10-23</a:t>
+              <a:t>29-10-23</a:t>
             </a:fld>
             <a:endParaRPr lang="fr-BE"/>
           </a:p>
@@ -8048,7 +9120,7 @@
           <a:p>
             <a:fld id="{CCC07DD4-E8D6-4581-B1F4-04F48CF9E11E}" type="datetimeFigureOut">
               <a:rPr lang="fr-BE" smtClean="0"/>
-              <a:t>10-10-23</a:t>
+              <a:t>29-10-23</a:t>
             </a:fld>
             <a:endParaRPr lang="fr-BE"/>
           </a:p>
@@ -8291,7 +9363,7 @@
           <a:p>
             <a:fld id="{CCC07DD4-E8D6-4581-B1F4-04F48CF9E11E}" type="datetimeFigureOut">
               <a:rPr lang="fr-BE" smtClean="0"/>
-              <a:t>10-10-23</a:t>
+              <a:t>29-10-23</a:t>
             </a:fld>
             <a:endParaRPr lang="fr-BE"/>
           </a:p>
@@ -11698,8 +12770,8 @@
           </a:p>
         </p:txBody>
       </p:sp>
-      <mc:AlternateContent xmlns:mc="http://schemas.openxmlformats.org/markup-compatibility/2006">
-        <mc:Choice xmlns:a14="http://schemas.microsoft.com/office/drawing/2010/main" Requires="a14">
+      <mc:AlternateContent xmlns:mc="http://schemas.openxmlformats.org/markup-compatibility/2006" xmlns:a14="http://schemas.microsoft.com/office/drawing/2010/main">
+        <mc:Choice Requires="a14">
           <p:sp>
             <p:nvSpPr>
               <p:cNvPr id="5" name="TextBox 4">
@@ -12353,7 +13425,7 @@
             </p:txBody>
           </p:sp>
         </mc:Choice>
-        <mc:Fallback>
+        <mc:Fallback xmlns="">
           <p:sp>
             <p:nvSpPr>
               <p:cNvPr id="5" name="TextBox 4">
@@ -13602,7 +14674,7 @@
         <p:spPr>
           <a:xfrm>
             <a:off x="958970" y="1759610"/>
-            <a:ext cx="6883400" cy="3693319"/>
+            <a:ext cx="6883400" cy="923330"/>
           </a:xfrm>
           <a:prstGeom prst="rect">
             <a:avLst/>
@@ -13623,7 +14695,7 @@
               <a:rPr lang="en-US" dirty="0">
                 <a:sym typeface="Wingdings" panose="05000000000000000000" pitchFamily="2" charset="2"/>
               </a:rPr>
-              <a:t>Operational: Speed &amp; Frequency</a:t>
+              <a:t>Inbound &amp; Outbound Traffic: Morning (5-7) x Evening (19-22) </a:t>
             </a:r>
           </a:p>
           <a:p>
@@ -13635,7 +14707,19 @@
               <a:rPr lang="en-US" dirty="0">
                 <a:sym typeface="Wingdings" panose="05000000000000000000" pitchFamily="2" charset="2"/>
               </a:rPr>
-              <a:t>Histogram (charts)</a:t>
+              <a:t>(DLR, </a:t>
+            </a:r>
+            <a:r>
+              <a:rPr lang="en-US" dirty="0" err="1">
+                <a:sym typeface="Wingdings" panose="05000000000000000000" pitchFamily="2" charset="2"/>
+              </a:rPr>
+              <a:t>OverGround</a:t>
+            </a:r>
+            <a:r>
+              <a:rPr lang="en-US" dirty="0">
+                <a:sym typeface="Wingdings" panose="05000000000000000000" pitchFamily="2" charset="2"/>
+              </a:rPr>
+              <a:t>, Tube) </a:t>
             </a:r>
           </a:p>
           <a:p>
@@ -13647,163 +14731,7 @@
               <a:rPr lang="en-US" dirty="0">
                 <a:sym typeface="Wingdings" panose="05000000000000000000" pitchFamily="2" charset="2"/>
               </a:rPr>
-              <a:t>Maps (Networkx)</a:t>
-            </a:r>
-          </a:p>
-          <a:p>
-            <a:pPr marL="0" indent="0">
-              <a:buFontTx/>
-              <a:buNone/>
-            </a:pPr>
-            <a:endParaRPr lang="en-US" dirty="0">
-              <a:sym typeface="Wingdings" panose="05000000000000000000" pitchFamily="2" charset="2"/>
-            </a:endParaRPr>
-          </a:p>
-          <a:p>
-            <a:pPr marL="0" marR="0" lvl="0" indent="0" algn="l" defTabSz="914400" rtl="0" eaLnBrk="1" fontAlgn="auto" latinLnBrk="0" hangingPunct="1">
-              <a:lnSpc>
-                <a:spcPct val="100000"/>
-              </a:lnSpc>
-              <a:spcBef>
-                <a:spcPts val="0"/>
-              </a:spcBef>
-              <a:spcAft>
-                <a:spcPts val="0"/>
-              </a:spcAft>
-              <a:buClrTx/>
-              <a:buSzTx/>
-              <a:buFontTx/>
-              <a:buNone/>
-              <a:tabLst/>
-              <a:defRPr/>
-            </a:pPr>
-            <a:r>
-              <a:rPr lang="en-US" dirty="0">
-                <a:sym typeface="Wingdings" panose="05000000000000000000" pitchFamily="2" charset="2"/>
-              </a:rPr>
-              <a:t> Traffic</a:t>
-            </a:r>
-          </a:p>
-          <a:p>
-            <a:pPr marL="171450" indent="-171450">
-              <a:buFontTx/>
-              <a:buChar char="-"/>
-            </a:pPr>
-            <a:r>
-              <a:rPr lang="en-US" dirty="0">
-                <a:sym typeface="Wingdings" panose="05000000000000000000" pitchFamily="2" charset="2"/>
-              </a:rPr>
-              <a:t>Enter/Exists in stations (Networkx)</a:t>
-            </a:r>
-          </a:p>
-          <a:p>
-            <a:pPr marL="171450" indent="-171450">
-              <a:buFontTx/>
-              <a:buChar char="-"/>
-            </a:pPr>
-            <a:r>
-              <a:rPr lang="en-US" dirty="0">
-                <a:sym typeface="Wingdings" panose="05000000000000000000" pitchFamily="2" charset="2"/>
-              </a:rPr>
-              <a:t>Load in segments (Networkx)</a:t>
-            </a:r>
-          </a:p>
-          <a:p>
-            <a:pPr marL="171450" indent="-171450">
-              <a:buFontTx/>
-              <a:buChar char="-"/>
-            </a:pPr>
-            <a:endParaRPr lang="en-US" dirty="0">
-              <a:sym typeface="Wingdings" panose="05000000000000000000" pitchFamily="2" charset="2"/>
-            </a:endParaRPr>
-          </a:p>
-          <a:p>
-            <a:pPr marL="0" marR="0" lvl="0" indent="0" algn="l" defTabSz="914400" rtl="0" eaLnBrk="1" fontAlgn="auto" latinLnBrk="0" hangingPunct="1">
-              <a:lnSpc>
-                <a:spcPct val="100000"/>
-              </a:lnSpc>
-              <a:spcBef>
-                <a:spcPts val="0"/>
-              </a:spcBef>
-              <a:spcAft>
-                <a:spcPts val="0"/>
-              </a:spcAft>
-              <a:buClrTx/>
-              <a:buSzTx/>
-              <a:buFontTx/>
-              <a:buNone/>
-              <a:tabLst/>
-              <a:defRPr/>
-            </a:pPr>
-            <a:r>
-              <a:rPr lang="en-US" dirty="0">
-                <a:sym typeface="Wingdings" panose="05000000000000000000" pitchFamily="2" charset="2"/>
-              </a:rPr>
-              <a:t> User importance:</a:t>
-            </a:r>
-          </a:p>
-          <a:p>
-            <a:pPr marL="171450" indent="-171450">
-              <a:buFontTx/>
-              <a:buChar char="-"/>
-            </a:pPr>
-            <a:r>
-              <a:rPr lang="en-US" dirty="0" err="1">
-                <a:sym typeface="Wingdings" panose="05000000000000000000" pitchFamily="2" charset="2"/>
-              </a:rPr>
-              <a:t>Efficience</a:t>
-            </a:r>
-            <a:r>
-              <a:rPr lang="en-US" dirty="0">
-                <a:sym typeface="Wingdings" panose="05000000000000000000" pitchFamily="2" charset="2"/>
-              </a:rPr>
-              <a:t> ranking comparison</a:t>
-            </a:r>
-          </a:p>
-          <a:p>
-            <a:pPr marL="171450" indent="-171450">
-              <a:buFontTx/>
-              <a:buChar char="-"/>
-            </a:pPr>
-            <a:endParaRPr lang="en-US" dirty="0">
-              <a:sym typeface="Wingdings" panose="05000000000000000000" pitchFamily="2" charset="2"/>
-            </a:endParaRPr>
-          </a:p>
-          <a:p>
-            <a:pPr marL="0" marR="0" lvl="0" indent="0" algn="l" defTabSz="914400" rtl="0" eaLnBrk="1" fontAlgn="auto" latinLnBrk="0" hangingPunct="1">
-              <a:lnSpc>
-                <a:spcPct val="100000"/>
-              </a:lnSpc>
-              <a:spcBef>
-                <a:spcPts val="0"/>
-              </a:spcBef>
-              <a:spcAft>
-                <a:spcPts val="0"/>
-              </a:spcAft>
-              <a:buClrTx/>
-              <a:buSzTx/>
-              <a:buFontTx/>
-              <a:buNone/>
-              <a:tabLst/>
-              <a:defRPr/>
-            </a:pPr>
-            <a:r>
-              <a:rPr lang="en-US" dirty="0">
-                <a:sym typeface="Wingdings" panose="05000000000000000000" pitchFamily="2" charset="2"/>
-              </a:rPr>
-              <a:t> Collective importance:</a:t>
-            </a:r>
-          </a:p>
-          <a:p>
-            <a:pPr marL="171450" indent="-171450">
-              <a:buFontTx/>
-              <a:buChar char="-"/>
-            </a:pPr>
-            <a:r>
-              <a:rPr lang="en-US" dirty="0">
-                <a:sym typeface="Wingdings" panose="05000000000000000000" pitchFamily="2" charset="2"/>
-              </a:rPr>
-              <a:t>Distress ranking comparison</a:t>
+              <a:t>MTT, FRI, SAT and SUN</a:t>
             </a:r>
           </a:p>
         </p:txBody>
@@ -13861,6 +14789,565 @@
           <a:p>
             <a:r>
               <a:rPr lang="en-US" dirty="0"/>
+              <a:t>Chp.5 - Results</a:t>
+            </a:r>
+            <a:endParaRPr lang="fr-BE" dirty="0"/>
+          </a:p>
+        </p:txBody>
+      </p:sp>
+      <p:sp>
+        <p:nvSpPr>
+          <p:cNvPr id="5" name="TextBox 4">
+            <a:extLst>
+              <a:ext uri="{FF2B5EF4-FFF2-40B4-BE49-F238E27FC236}">
+                <a16:creationId xmlns:a16="http://schemas.microsoft.com/office/drawing/2014/main" id="{1C70F5EB-D628-4D33-90C3-908BAEAACF37}"/>
+              </a:ext>
+            </a:extLst>
+          </p:cNvPr>
+          <p:cNvSpPr txBox="1"/>
+          <p:nvPr/>
+        </p:nvSpPr>
+        <p:spPr>
+          <a:xfrm>
+            <a:off x="958970" y="1759610"/>
+            <a:ext cx="6883400" cy="923330"/>
+          </a:xfrm>
+          <a:prstGeom prst="rect">
+            <a:avLst/>
+          </a:prstGeom>
+          <a:noFill/>
+        </p:spPr>
+        <p:txBody>
+          <a:bodyPr wrap="square">
+            <a:spAutoFit/>
+          </a:bodyPr>
+          <a:lstStyle/>
+          <a:p>
+            <a:pPr marL="0" marR="0" lvl="0" indent="0" algn="l" defTabSz="914400" rtl="0" eaLnBrk="1" fontAlgn="auto" latinLnBrk="0" hangingPunct="1">
+              <a:lnSpc>
+                <a:spcPct val="100000"/>
+              </a:lnSpc>
+              <a:spcBef>
+                <a:spcPts val="0"/>
+              </a:spcBef>
+              <a:spcAft>
+                <a:spcPts val="0"/>
+              </a:spcAft>
+              <a:buClrTx/>
+              <a:buSzTx/>
+              <a:buFontTx/>
+              <a:buNone/>
+              <a:tabLst/>
+              <a:defRPr/>
+            </a:pPr>
+            <a:r>
+              <a:rPr lang="en-US" dirty="0">
+                <a:sym typeface="Wingdings" panose="05000000000000000000" pitchFamily="2" charset="2"/>
+              </a:rPr>
+              <a:t> Traffic</a:t>
+            </a:r>
+          </a:p>
+          <a:p>
+            <a:pPr marL="171450" indent="-171450">
+              <a:buFontTx/>
+              <a:buChar char="-"/>
+            </a:pPr>
+            <a:r>
+              <a:rPr lang="en-US" dirty="0">
+                <a:sym typeface="Wingdings" panose="05000000000000000000" pitchFamily="2" charset="2"/>
+              </a:rPr>
+              <a:t>Enter/Exists in stations (Networkx)</a:t>
+            </a:r>
+          </a:p>
+          <a:p>
+            <a:pPr marL="171450" indent="-171450">
+              <a:buFontTx/>
+              <a:buChar char="-"/>
+            </a:pPr>
+            <a:r>
+              <a:rPr lang="en-US" dirty="0">
+                <a:sym typeface="Wingdings" panose="05000000000000000000" pitchFamily="2" charset="2"/>
+              </a:rPr>
+              <a:t>Load in segments (</a:t>
+            </a:r>
+            <a:r>
+              <a:rPr lang="en-US" dirty="0" err="1">
+                <a:sym typeface="Wingdings" panose="05000000000000000000" pitchFamily="2" charset="2"/>
+              </a:rPr>
+              <a:t>Networkx</a:t>
+            </a:r>
+            <a:r>
+              <a:rPr lang="en-US" dirty="0">
+                <a:sym typeface="Wingdings" panose="05000000000000000000" pitchFamily="2" charset="2"/>
+              </a:rPr>
+              <a:t>)</a:t>
+            </a:r>
+          </a:p>
+        </p:txBody>
+      </p:sp>
+    </p:spTree>
+    <p:extLst>
+      <p:ext uri="{BB962C8B-B14F-4D97-AF65-F5344CB8AC3E}">
+        <p14:creationId xmlns:p14="http://schemas.microsoft.com/office/powerpoint/2010/main" val="2043830219"/>
+      </p:ext>
+    </p:extLst>
+  </p:cSld>
+  <p:clrMapOvr>
+    <a:masterClrMapping/>
+  </p:clrMapOvr>
+</p:sld>
+</file>
+
+<file path=ppt/slides/slide23.xml><?xml version="1.0" encoding="utf-8"?>
+<p:sld xmlns:a="http://schemas.openxmlformats.org/drawingml/2006/main" xmlns:r="http://schemas.openxmlformats.org/officeDocument/2006/relationships" xmlns:p="http://schemas.openxmlformats.org/presentationml/2006/main">
+  <p:cSld>
+    <p:spTree>
+      <p:nvGrpSpPr>
+        <p:cNvPr id="1" name=""/>
+        <p:cNvGrpSpPr/>
+        <p:nvPr/>
+      </p:nvGrpSpPr>
+      <p:grpSpPr>
+        <a:xfrm>
+          <a:off x="0" y="0"/>
+          <a:ext cx="0" cy="0"/>
+          <a:chOff x="0" y="0"/>
+          <a:chExt cx="0" cy="0"/>
+        </a:xfrm>
+      </p:grpSpPr>
+      <p:sp>
+        <p:nvSpPr>
+          <p:cNvPr id="2" name="Title 1">
+            <a:extLst>
+              <a:ext uri="{FF2B5EF4-FFF2-40B4-BE49-F238E27FC236}">
+                <a16:creationId xmlns:a16="http://schemas.microsoft.com/office/drawing/2014/main" id="{63482FFF-7EC4-4691-BF8C-91E0066F6BE9}"/>
+              </a:ext>
+            </a:extLst>
+          </p:cNvPr>
+          <p:cNvSpPr>
+            <a:spLocks noGrp="1"/>
+          </p:cNvSpPr>
+          <p:nvPr>
+            <p:ph type="title"/>
+          </p:nvPr>
+        </p:nvSpPr>
+        <p:spPr/>
+        <p:txBody>
+          <a:bodyPr/>
+          <a:lstStyle/>
+          <a:p>
+            <a:r>
+              <a:rPr lang="en-US" dirty="0"/>
+              <a:t>Chp.5 - Results</a:t>
+            </a:r>
+            <a:endParaRPr lang="fr-BE" dirty="0"/>
+          </a:p>
+        </p:txBody>
+      </p:sp>
+      <p:sp>
+        <p:nvSpPr>
+          <p:cNvPr id="5" name="TextBox 4">
+            <a:extLst>
+              <a:ext uri="{FF2B5EF4-FFF2-40B4-BE49-F238E27FC236}">
+                <a16:creationId xmlns:a16="http://schemas.microsoft.com/office/drawing/2014/main" id="{1C70F5EB-D628-4D33-90C3-908BAEAACF37}"/>
+              </a:ext>
+            </a:extLst>
+          </p:cNvPr>
+          <p:cNvSpPr txBox="1"/>
+          <p:nvPr/>
+        </p:nvSpPr>
+        <p:spPr>
+          <a:xfrm>
+            <a:off x="958970" y="1759610"/>
+            <a:ext cx="6883400" cy="1200329"/>
+          </a:xfrm>
+          <a:prstGeom prst="rect">
+            <a:avLst/>
+          </a:prstGeom>
+          <a:noFill/>
+        </p:spPr>
+        <p:txBody>
+          <a:bodyPr wrap="square">
+            <a:spAutoFit/>
+          </a:bodyPr>
+          <a:lstStyle/>
+          <a:p>
+            <a:pPr marL="171450" indent="-171450">
+              <a:buFont typeface="Wingdings" panose="05000000000000000000" pitchFamily="2" charset="2"/>
+              <a:buChar char="à"/>
+            </a:pPr>
+            <a:r>
+              <a:rPr lang="en-US" dirty="0">
+                <a:sym typeface="Wingdings" panose="05000000000000000000" pitchFamily="2" charset="2"/>
+              </a:rPr>
+              <a:t>Operational: Speed &amp; Frequency</a:t>
+            </a:r>
+          </a:p>
+          <a:p>
+            <a:pPr marL="171450" indent="-171450">
+              <a:buFontTx/>
+              <a:buChar char="-"/>
+            </a:pPr>
+            <a:r>
+              <a:rPr lang="en-US" dirty="0">
+                <a:sym typeface="Wingdings" panose="05000000000000000000" pitchFamily="2" charset="2"/>
+              </a:rPr>
+              <a:t>Histogram (charts)</a:t>
+            </a:r>
+          </a:p>
+          <a:p>
+            <a:pPr marL="171450" indent="-171450">
+              <a:buFontTx/>
+              <a:buChar char="-"/>
+            </a:pPr>
+            <a:r>
+              <a:rPr lang="en-US" dirty="0">
+                <a:sym typeface="Wingdings" panose="05000000000000000000" pitchFamily="2" charset="2"/>
+              </a:rPr>
+              <a:t>Maps (</a:t>
+            </a:r>
+            <a:r>
+              <a:rPr lang="en-US" dirty="0" err="1">
+                <a:sym typeface="Wingdings" panose="05000000000000000000" pitchFamily="2" charset="2"/>
+              </a:rPr>
+              <a:t>Networkx</a:t>
+            </a:r>
+            <a:r>
+              <a:rPr lang="en-US" dirty="0">
+                <a:sym typeface="Wingdings" panose="05000000000000000000" pitchFamily="2" charset="2"/>
+              </a:rPr>
+              <a:t>)</a:t>
+            </a:r>
+          </a:p>
+          <a:p>
+            <a:pPr marL="0" indent="0">
+              <a:buFontTx/>
+              <a:buNone/>
+            </a:pPr>
+            <a:endParaRPr lang="en-US" dirty="0">
+              <a:sym typeface="Wingdings" panose="05000000000000000000" pitchFamily="2" charset="2"/>
+            </a:endParaRPr>
+          </a:p>
+        </p:txBody>
+      </p:sp>
+    </p:spTree>
+    <p:extLst>
+      <p:ext uri="{BB962C8B-B14F-4D97-AF65-F5344CB8AC3E}">
+        <p14:creationId xmlns:p14="http://schemas.microsoft.com/office/powerpoint/2010/main" val="468144026"/>
+      </p:ext>
+    </p:extLst>
+  </p:cSld>
+  <p:clrMapOvr>
+    <a:masterClrMapping/>
+  </p:clrMapOvr>
+</p:sld>
+</file>
+
+<file path=ppt/slides/slide24.xml><?xml version="1.0" encoding="utf-8"?>
+<p:sld xmlns:a="http://schemas.openxmlformats.org/drawingml/2006/main" xmlns:r="http://schemas.openxmlformats.org/officeDocument/2006/relationships" xmlns:p="http://schemas.openxmlformats.org/presentationml/2006/main">
+  <p:cSld>
+    <p:spTree>
+      <p:nvGrpSpPr>
+        <p:cNvPr id="1" name=""/>
+        <p:cNvGrpSpPr/>
+        <p:nvPr/>
+      </p:nvGrpSpPr>
+      <p:grpSpPr>
+        <a:xfrm>
+          <a:off x="0" y="0"/>
+          <a:ext cx="0" cy="0"/>
+          <a:chOff x="0" y="0"/>
+          <a:chExt cx="0" cy="0"/>
+        </a:xfrm>
+      </p:grpSpPr>
+      <p:sp>
+        <p:nvSpPr>
+          <p:cNvPr id="2" name="Title 1">
+            <a:extLst>
+              <a:ext uri="{FF2B5EF4-FFF2-40B4-BE49-F238E27FC236}">
+                <a16:creationId xmlns:a16="http://schemas.microsoft.com/office/drawing/2014/main" id="{63482FFF-7EC4-4691-BF8C-91E0066F6BE9}"/>
+              </a:ext>
+            </a:extLst>
+          </p:cNvPr>
+          <p:cNvSpPr>
+            <a:spLocks noGrp="1"/>
+          </p:cNvSpPr>
+          <p:nvPr>
+            <p:ph type="title"/>
+          </p:nvPr>
+        </p:nvSpPr>
+        <p:spPr/>
+        <p:txBody>
+          <a:bodyPr/>
+          <a:lstStyle/>
+          <a:p>
+            <a:r>
+              <a:rPr lang="en-US" dirty="0"/>
+              <a:t>Chp.5 - Results</a:t>
+            </a:r>
+            <a:endParaRPr lang="fr-BE" dirty="0"/>
+          </a:p>
+        </p:txBody>
+      </p:sp>
+      <p:sp>
+        <p:nvSpPr>
+          <p:cNvPr id="5" name="TextBox 4">
+            <a:extLst>
+              <a:ext uri="{FF2B5EF4-FFF2-40B4-BE49-F238E27FC236}">
+                <a16:creationId xmlns:a16="http://schemas.microsoft.com/office/drawing/2014/main" id="{1C70F5EB-D628-4D33-90C3-908BAEAACF37}"/>
+              </a:ext>
+            </a:extLst>
+          </p:cNvPr>
+          <p:cNvSpPr txBox="1"/>
+          <p:nvPr/>
+        </p:nvSpPr>
+        <p:spPr>
+          <a:xfrm>
+            <a:off x="958970" y="1759610"/>
+            <a:ext cx="6883400" cy="923330"/>
+          </a:xfrm>
+          <a:prstGeom prst="rect">
+            <a:avLst/>
+          </a:prstGeom>
+          <a:noFill/>
+        </p:spPr>
+        <p:txBody>
+          <a:bodyPr wrap="square">
+            <a:spAutoFit/>
+          </a:bodyPr>
+          <a:lstStyle/>
+          <a:p>
+            <a:pPr marL="0" marR="0" lvl="0" indent="0" algn="l" defTabSz="914400" rtl="0" eaLnBrk="1" fontAlgn="auto" latinLnBrk="0" hangingPunct="1">
+              <a:lnSpc>
+                <a:spcPct val="100000"/>
+              </a:lnSpc>
+              <a:spcBef>
+                <a:spcPts val="0"/>
+              </a:spcBef>
+              <a:spcAft>
+                <a:spcPts val="0"/>
+              </a:spcAft>
+              <a:buClrTx/>
+              <a:buSzTx/>
+              <a:buFontTx/>
+              <a:buNone/>
+              <a:tabLst/>
+              <a:defRPr/>
+            </a:pPr>
+            <a:r>
+              <a:rPr lang="en-US" dirty="0">
+                <a:sym typeface="Wingdings" panose="05000000000000000000" pitchFamily="2" charset="2"/>
+              </a:rPr>
+              <a:t> User importance:</a:t>
+            </a:r>
+          </a:p>
+          <a:p>
+            <a:pPr marL="171450" indent="-171450">
+              <a:buFontTx/>
+              <a:buChar char="-"/>
+            </a:pPr>
+            <a:r>
+              <a:rPr lang="en-US" dirty="0" err="1">
+                <a:sym typeface="Wingdings" panose="05000000000000000000" pitchFamily="2" charset="2"/>
+              </a:rPr>
+              <a:t>Efficience</a:t>
+            </a:r>
+            <a:r>
+              <a:rPr lang="en-US" dirty="0">
+                <a:sym typeface="Wingdings" panose="05000000000000000000" pitchFamily="2" charset="2"/>
+              </a:rPr>
+              <a:t> ranking comparison</a:t>
+            </a:r>
+          </a:p>
+          <a:p>
+            <a:pPr marL="171450" indent="-171450">
+              <a:buFontTx/>
+              <a:buChar char="-"/>
+            </a:pPr>
+            <a:endParaRPr lang="en-US" dirty="0">
+              <a:sym typeface="Wingdings" panose="05000000000000000000" pitchFamily="2" charset="2"/>
+            </a:endParaRPr>
+          </a:p>
+        </p:txBody>
+      </p:sp>
+    </p:spTree>
+    <p:extLst>
+      <p:ext uri="{BB962C8B-B14F-4D97-AF65-F5344CB8AC3E}">
+        <p14:creationId xmlns:p14="http://schemas.microsoft.com/office/powerpoint/2010/main" val="2555179648"/>
+      </p:ext>
+    </p:extLst>
+  </p:cSld>
+  <p:clrMapOvr>
+    <a:masterClrMapping/>
+  </p:clrMapOvr>
+</p:sld>
+</file>
+
+<file path=ppt/slides/slide25.xml><?xml version="1.0" encoding="utf-8"?>
+<p:sld xmlns:a="http://schemas.openxmlformats.org/drawingml/2006/main" xmlns:r="http://schemas.openxmlformats.org/officeDocument/2006/relationships" xmlns:p="http://schemas.openxmlformats.org/presentationml/2006/main">
+  <p:cSld>
+    <p:spTree>
+      <p:nvGrpSpPr>
+        <p:cNvPr id="1" name=""/>
+        <p:cNvGrpSpPr/>
+        <p:nvPr/>
+      </p:nvGrpSpPr>
+      <p:grpSpPr>
+        <a:xfrm>
+          <a:off x="0" y="0"/>
+          <a:ext cx="0" cy="0"/>
+          <a:chOff x="0" y="0"/>
+          <a:chExt cx="0" cy="0"/>
+        </a:xfrm>
+      </p:grpSpPr>
+      <p:sp>
+        <p:nvSpPr>
+          <p:cNvPr id="2" name="Title 1">
+            <a:extLst>
+              <a:ext uri="{FF2B5EF4-FFF2-40B4-BE49-F238E27FC236}">
+                <a16:creationId xmlns:a16="http://schemas.microsoft.com/office/drawing/2014/main" id="{63482FFF-7EC4-4691-BF8C-91E0066F6BE9}"/>
+              </a:ext>
+            </a:extLst>
+          </p:cNvPr>
+          <p:cNvSpPr>
+            <a:spLocks noGrp="1"/>
+          </p:cNvSpPr>
+          <p:nvPr>
+            <p:ph type="title"/>
+          </p:nvPr>
+        </p:nvSpPr>
+        <p:spPr/>
+        <p:txBody>
+          <a:bodyPr/>
+          <a:lstStyle/>
+          <a:p>
+            <a:r>
+              <a:rPr lang="en-US" dirty="0"/>
+              <a:t>Chp.5 - Results</a:t>
+            </a:r>
+            <a:endParaRPr lang="fr-BE" dirty="0"/>
+          </a:p>
+        </p:txBody>
+      </p:sp>
+      <p:sp>
+        <p:nvSpPr>
+          <p:cNvPr id="5" name="TextBox 4">
+            <a:extLst>
+              <a:ext uri="{FF2B5EF4-FFF2-40B4-BE49-F238E27FC236}">
+                <a16:creationId xmlns:a16="http://schemas.microsoft.com/office/drawing/2014/main" id="{1C70F5EB-D628-4D33-90C3-908BAEAACF37}"/>
+              </a:ext>
+            </a:extLst>
+          </p:cNvPr>
+          <p:cNvSpPr txBox="1"/>
+          <p:nvPr/>
+        </p:nvSpPr>
+        <p:spPr>
+          <a:xfrm>
+            <a:off x="958970" y="1759610"/>
+            <a:ext cx="6883400" cy="646331"/>
+          </a:xfrm>
+          <a:prstGeom prst="rect">
+            <a:avLst/>
+          </a:prstGeom>
+          <a:noFill/>
+        </p:spPr>
+        <p:txBody>
+          <a:bodyPr wrap="square">
+            <a:spAutoFit/>
+          </a:bodyPr>
+          <a:lstStyle/>
+          <a:p>
+            <a:pPr marL="0" marR="0" lvl="0" indent="0" algn="l" defTabSz="914400" rtl="0" eaLnBrk="1" fontAlgn="auto" latinLnBrk="0" hangingPunct="1">
+              <a:lnSpc>
+                <a:spcPct val="100000"/>
+              </a:lnSpc>
+              <a:spcBef>
+                <a:spcPts val="0"/>
+              </a:spcBef>
+              <a:spcAft>
+                <a:spcPts val="0"/>
+              </a:spcAft>
+              <a:buClrTx/>
+              <a:buSzTx/>
+              <a:buFontTx/>
+              <a:buNone/>
+              <a:tabLst/>
+              <a:defRPr/>
+            </a:pPr>
+            <a:r>
+              <a:rPr lang="en-US" dirty="0">
+                <a:sym typeface="Wingdings" panose="05000000000000000000" pitchFamily="2" charset="2"/>
+              </a:rPr>
+              <a:t> Collective importance:</a:t>
+            </a:r>
+          </a:p>
+          <a:p>
+            <a:pPr marL="171450" indent="-171450">
+              <a:buFontTx/>
+              <a:buChar char="-"/>
+            </a:pPr>
+            <a:r>
+              <a:rPr lang="en-US" dirty="0">
+                <a:sym typeface="Wingdings" panose="05000000000000000000" pitchFamily="2" charset="2"/>
+              </a:rPr>
+              <a:t>Distress ranking comparison</a:t>
+            </a:r>
+          </a:p>
+        </p:txBody>
+      </p:sp>
+    </p:spTree>
+    <p:extLst>
+      <p:ext uri="{BB962C8B-B14F-4D97-AF65-F5344CB8AC3E}">
+        <p14:creationId xmlns:p14="http://schemas.microsoft.com/office/powerpoint/2010/main" val="2702504304"/>
+      </p:ext>
+    </p:extLst>
+  </p:cSld>
+  <p:clrMapOvr>
+    <a:masterClrMapping/>
+  </p:clrMapOvr>
+</p:sld>
+</file>
+
+<file path=ppt/slides/slide26.xml><?xml version="1.0" encoding="utf-8"?>
+<p:sld xmlns:a="http://schemas.openxmlformats.org/drawingml/2006/main" xmlns:r="http://schemas.openxmlformats.org/officeDocument/2006/relationships" xmlns:p="http://schemas.openxmlformats.org/presentationml/2006/main">
+  <p:cSld>
+    <p:spTree>
+      <p:nvGrpSpPr>
+        <p:cNvPr id="1" name=""/>
+        <p:cNvGrpSpPr/>
+        <p:nvPr/>
+      </p:nvGrpSpPr>
+      <p:grpSpPr>
+        <a:xfrm>
+          <a:off x="0" y="0"/>
+          <a:ext cx="0" cy="0"/>
+          <a:chOff x="0" y="0"/>
+          <a:chExt cx="0" cy="0"/>
+        </a:xfrm>
+      </p:grpSpPr>
+      <p:sp>
+        <p:nvSpPr>
+          <p:cNvPr id="2" name="Title 1">
+            <a:extLst>
+              <a:ext uri="{FF2B5EF4-FFF2-40B4-BE49-F238E27FC236}">
+                <a16:creationId xmlns:a16="http://schemas.microsoft.com/office/drawing/2014/main" id="{63482FFF-7EC4-4691-BF8C-91E0066F6BE9}"/>
+              </a:ext>
+            </a:extLst>
+          </p:cNvPr>
+          <p:cNvSpPr>
+            <a:spLocks noGrp="1"/>
+          </p:cNvSpPr>
+          <p:nvPr>
+            <p:ph type="title"/>
+          </p:nvPr>
+        </p:nvSpPr>
+        <p:spPr/>
+        <p:txBody>
+          <a:bodyPr/>
+          <a:lstStyle/>
+          <a:p>
+            <a:r>
+              <a:rPr lang="en-US" dirty="0"/>
               <a:t>Chp.6 - Following Steps</a:t>
             </a:r>
             <a:endParaRPr lang="fr-BE" dirty="0"/>
@@ -14086,7 +15573,7 @@
 </p:sld>
 </file>
 
-<file path=ppt/slides/slide23.xml><?xml version="1.0" encoding="utf-8"?>
+<file path=ppt/slides/slide27.xml><?xml version="1.0" encoding="utf-8"?>
 <p:sld xmlns:a="http://schemas.openxmlformats.org/drawingml/2006/main" xmlns:r="http://schemas.openxmlformats.org/officeDocument/2006/relationships" xmlns:p="http://schemas.openxmlformats.org/presentationml/2006/main">
   <p:cSld>
     <p:spTree>

--- a/11.Presenttaions/big-cities-transport.pptx
+++ b/11.Presenttaions/big-cities-transport.pptx
@@ -5,36 +5,37 @@
     <p:sldMasterId id="2147483648" r:id="rId1"/>
   </p:sldMasterIdLst>
   <p:notesMasterIdLst>
-    <p:notesMasterId r:id="rId29"/>
+    <p:notesMasterId r:id="rId30"/>
   </p:notesMasterIdLst>
   <p:sldIdLst>
     <p:sldId id="257" r:id="rId2"/>
-    <p:sldId id="258" r:id="rId3"/>
-    <p:sldId id="273" r:id="rId4"/>
-    <p:sldId id="259" r:id="rId5"/>
-    <p:sldId id="260" r:id="rId6"/>
-    <p:sldId id="278" r:id="rId7"/>
-    <p:sldId id="282" r:id="rId8"/>
-    <p:sldId id="283" r:id="rId9"/>
-    <p:sldId id="284" r:id="rId10"/>
-    <p:sldId id="280" r:id="rId11"/>
-    <p:sldId id="271" r:id="rId12"/>
-    <p:sldId id="286" r:id="rId13"/>
-    <p:sldId id="285" r:id="rId14"/>
-    <p:sldId id="269" r:id="rId15"/>
-    <p:sldId id="272" r:id="rId16"/>
-    <p:sldId id="287" r:id="rId17"/>
-    <p:sldId id="261" r:id="rId18"/>
-    <p:sldId id="274" r:id="rId19"/>
-    <p:sldId id="270" r:id="rId20"/>
-    <p:sldId id="262" r:id="rId21"/>
-    <p:sldId id="263" r:id="rId22"/>
-    <p:sldId id="288" r:id="rId23"/>
-    <p:sldId id="290" r:id="rId24"/>
-    <p:sldId id="289" r:id="rId25"/>
-    <p:sldId id="291" r:id="rId26"/>
-    <p:sldId id="264" r:id="rId27"/>
-    <p:sldId id="265" r:id="rId28"/>
+    <p:sldId id="292" r:id="rId3"/>
+    <p:sldId id="258" r:id="rId4"/>
+    <p:sldId id="273" r:id="rId5"/>
+    <p:sldId id="259" r:id="rId6"/>
+    <p:sldId id="260" r:id="rId7"/>
+    <p:sldId id="278" r:id="rId8"/>
+    <p:sldId id="282" r:id="rId9"/>
+    <p:sldId id="283" r:id="rId10"/>
+    <p:sldId id="284" r:id="rId11"/>
+    <p:sldId id="280" r:id="rId12"/>
+    <p:sldId id="271" r:id="rId13"/>
+    <p:sldId id="286" r:id="rId14"/>
+    <p:sldId id="285" r:id="rId15"/>
+    <p:sldId id="269" r:id="rId16"/>
+    <p:sldId id="272" r:id="rId17"/>
+    <p:sldId id="287" r:id="rId18"/>
+    <p:sldId id="261" r:id="rId19"/>
+    <p:sldId id="274" r:id="rId20"/>
+    <p:sldId id="270" r:id="rId21"/>
+    <p:sldId id="262" r:id="rId22"/>
+    <p:sldId id="263" r:id="rId23"/>
+    <p:sldId id="288" r:id="rId24"/>
+    <p:sldId id="290" r:id="rId25"/>
+    <p:sldId id="289" r:id="rId26"/>
+    <p:sldId id="291" r:id="rId27"/>
+    <p:sldId id="264" r:id="rId28"/>
+    <p:sldId id="265" r:id="rId29"/>
   </p:sldIdLst>
   <p:sldSz cx="12192000" cy="6858000"/>
   <p:notesSz cx="6858000" cy="9144000"/>
@@ -223,7 +224,7 @@
           <a:p>
             <a:fld id="{E0227317-6136-4B22-B169-340711FF5F77}" type="datetimeFigureOut">
               <a:rPr lang="fr-BE" smtClean="0"/>
-              <a:t>29-10-23</a:t>
+              <a:t>02-11-23</a:t>
             </a:fld>
             <a:endParaRPr lang="fr-BE"/>
           </a:p>
@@ -537,7 +538,13 @@
           <a:p>
             <a:r>
               <a:rPr lang="en-US" dirty="0"/>
-              <a:t>It would be too pretentious to say I discovered interesting things about TFL for London because I used a public dataset and the graph methods applied are well-known. </a:t>
+              <a:t>“I saved people’s lifetime”. That is bottom line. A civil engineer who saves century of lifetime by undermining the modern chaoticity.  </a:t>
+            </a:r>
+          </a:p>
+          <a:p>
+            <a:r>
+              <a:rPr lang="en-US" dirty="0"/>
+              <a:t>In any big cities, transport systems is crucial to people’s life quality and one of its biggest challenges. How do we commutate in a big city?</a:t>
             </a:r>
           </a:p>
           <a:p>
@@ -546,120 +553,117 @@
           <a:p>
             <a:r>
               <a:rPr lang="en-US" dirty="0"/>
-              <a:t>The only distinct new factor in this project is my good sense and my creativity that guided through modelling and analyzing a such efficient and complex system of transport.</a:t>
-            </a:r>
-          </a:p>
-          <a:p>
-            <a:endParaRPr lang="en-US" dirty="0"/>
-          </a:p>
-          <a:p>
-            <a:r>
-              <a:rPr lang="en-US" dirty="0"/>
-              <a:t>The main objective is to rank edges relevance.  In public system, it is natural that we think in collective relevance, but a single user do not think collectively when choosing how to commute. OK, you opt to bike to reduce CO2 emissions.</a:t>
-            </a:r>
-          </a:p>
-          <a:p>
-            <a:endParaRPr lang="en-US" dirty="0"/>
-          </a:p>
-          <a:p>
-            <a:pPr marL="0" marR="0" lvl="0" indent="0" algn="l" defTabSz="914400" rtl="0" eaLnBrk="1" fontAlgn="auto" latinLnBrk="0" hangingPunct="1">
-              <a:lnSpc>
-                <a:spcPct val="100000"/>
-              </a:lnSpc>
-              <a:spcBef>
-                <a:spcPts val="0"/>
-              </a:spcBef>
-              <a:spcAft>
-                <a:spcPts val="0"/>
-              </a:spcAft>
-              <a:buClrTx/>
-              <a:buSzTx/>
-              <a:buFontTx/>
-              <a:buNone/>
-              <a:tabLst/>
-              <a:defRPr/>
-            </a:pPr>
-            <a:r>
-              <a:rPr lang="en-US" dirty="0"/>
-              <a:t>You will base you decision in your values but also to why you need to dislocate. But assumes it raining and it is cold and you need to go from A to B. Cost, time, CO2 emission, seated or standing, wi-fi connection … What drives a single users when choosing a path?</a:t>
-            </a:r>
-          </a:p>
-          <a:p>
-            <a:endParaRPr lang="en-US" dirty="0"/>
-          </a:p>
-          <a:p>
-            <a:r>
-              <a:rPr lang="en-US" dirty="0"/>
-              <a:t>Very loosely, let’s say it time. Everyone seeks to spend as least time possible at the transport system. Why? Reason are not hard to be </a:t>
-            </a:r>
-            <a:r>
-              <a:rPr lang="en-US" dirty="0" err="1"/>
-              <a:t>enummerated</a:t>
-            </a:r>
-            <a:r>
-              <a:rPr lang="en-US" dirty="0"/>
-              <a:t>…</a:t>
-            </a:r>
-          </a:p>
-          <a:p>
-            <a:endParaRPr lang="en-US" dirty="0"/>
-          </a:p>
-          <a:p>
-            <a:r>
-              <a:rPr lang="en-US" dirty="0"/>
-              <a:t>What drives operation when planning?</a:t>
-            </a:r>
-          </a:p>
-          <a:p>
-            <a:endParaRPr lang="en-US" dirty="0"/>
-          </a:p>
-          <a:p>
-            <a:endParaRPr lang="en-US" dirty="0"/>
-          </a:p>
-          <a:p>
-            <a:r>
-              <a:rPr lang="en-US" dirty="0"/>
-              <a:t>The sum of single users reflect the collectivity?</a:t>
-            </a:r>
-          </a:p>
-          <a:p>
-            <a:r>
-              <a:rPr lang="en-US" dirty="0"/>
-              <a:t>Single users opt for new path with minimum time, not to maximize the efficiency?</a:t>
-            </a:r>
-          </a:p>
-          <a:p>
-            <a:endParaRPr lang="en-US" dirty="0"/>
-          </a:p>
-          <a:p>
-            <a:endParaRPr lang="en-US" dirty="0"/>
-          </a:p>
-          <a:p>
-            <a:endParaRPr lang="en-US" dirty="0"/>
-          </a:p>
-          <a:p>
-            <a:endParaRPr lang="en-US" dirty="0"/>
-          </a:p>
-          <a:p>
-            <a:endParaRPr lang="en-US" dirty="0"/>
-          </a:p>
-          <a:p>
-            <a:r>
-              <a:rPr lang="en-US" dirty="0"/>
-              <a:t>Firstly, I will apply a disparity filter to rank weighted connection between stations (edges) using a NetworkX. </a:t>
-            </a:r>
-          </a:p>
-          <a:p>
-            <a:endParaRPr lang="en-US" dirty="0"/>
-          </a:p>
-          <a:p>
-            <a:r>
-              <a:rPr lang="en-US" dirty="0"/>
-              <a:t>Secondly, I will use Neo4J to run a lot of shortest path queries to assemble another edge ranking method, considering the same weight metrics.</a:t>
+              <a:t>The “Free-will” and the “Right to come and go” </a:t>
+            </a:r>
+            <a:r>
+              <a:rPr lang="fr-BE" dirty="0" err="1"/>
+              <a:t>make</a:t>
+            </a:r>
+            <a:r>
+              <a:rPr lang="fr-BE" dirty="0"/>
+              <a:t> </a:t>
+            </a:r>
+            <a:r>
+              <a:rPr lang="fr-BE" dirty="0" err="1"/>
+              <a:t>this</a:t>
+            </a:r>
+            <a:r>
+              <a:rPr lang="fr-BE" dirty="0"/>
+              <a:t> question not </a:t>
+            </a:r>
+            <a:r>
+              <a:rPr lang="fr-BE" dirty="0" err="1"/>
+              <a:t>so</a:t>
+            </a:r>
+            <a:r>
+              <a:rPr lang="fr-BE" dirty="0"/>
+              <a:t> </a:t>
+            </a:r>
+            <a:r>
+              <a:rPr lang="fr-BE" dirty="0" err="1"/>
+              <a:t>easy</a:t>
+            </a:r>
+            <a:r>
+              <a:rPr lang="fr-BE" dirty="0"/>
+              <a:t> to </a:t>
+            </a:r>
+            <a:r>
+              <a:rPr lang="fr-BE" dirty="0" err="1"/>
+              <a:t>answered</a:t>
+            </a:r>
+            <a:r>
+              <a:rPr lang="fr-BE" dirty="0"/>
+              <a:t>. But </a:t>
+            </a:r>
+            <a:r>
+              <a:rPr lang="fr-BE" dirty="0" err="1"/>
+              <a:t>still</a:t>
+            </a:r>
+            <a:r>
+              <a:rPr lang="fr-BE" dirty="0"/>
+              <a:t>, </a:t>
+            </a:r>
+            <a:r>
+              <a:rPr lang="fr-BE" dirty="0" err="1"/>
+              <a:t>most</a:t>
+            </a:r>
+            <a:r>
+              <a:rPr lang="fr-BE" dirty="0"/>
+              <a:t> can </a:t>
+            </a:r>
+            <a:r>
+              <a:rPr lang="fr-BE" dirty="0" err="1"/>
+              <a:t>done</a:t>
+            </a:r>
+            <a:r>
+              <a:rPr lang="fr-BE" dirty="0"/>
+              <a:t> to </a:t>
+            </a:r>
+            <a:r>
+              <a:rPr lang="fr-BE" dirty="0" err="1"/>
+              <a:t>assess</a:t>
+            </a:r>
+            <a:r>
+              <a:rPr lang="fr-BE" dirty="0"/>
+              <a:t> </a:t>
+            </a:r>
+            <a:r>
+              <a:rPr lang="fr-BE" dirty="0" err="1"/>
+              <a:t>this</a:t>
+            </a:r>
+            <a:r>
+              <a:rPr lang="fr-BE" dirty="0"/>
+              <a:t> important question.</a:t>
             </a:r>
           </a:p>
           <a:p>
             <a:endParaRPr lang="fr-BE" dirty="0"/>
+          </a:p>
+          <a:p>
+            <a:r>
+              <a:rPr lang="fr-BE" dirty="0" err="1"/>
+              <a:t>Let’s</a:t>
+            </a:r>
+            <a:r>
+              <a:rPr lang="fr-BE" dirty="0"/>
+              <a:t> </a:t>
+            </a:r>
+            <a:r>
+              <a:rPr lang="fr-BE" dirty="0" err="1"/>
+              <a:t>pick</a:t>
+            </a:r>
+            <a:r>
+              <a:rPr lang="fr-BE" dirty="0"/>
+              <a:t> the city of London a an </a:t>
+            </a:r>
+            <a:r>
+              <a:rPr lang="fr-BE" dirty="0" err="1"/>
+              <a:t>example</a:t>
+            </a:r>
+            <a:r>
+              <a:rPr lang="fr-BE" dirty="0"/>
+              <a:t>.</a:t>
+            </a:r>
           </a:p>
         </p:txBody>
       </p:sp>
@@ -743,6 +747,29 @@
           <a:bodyPr/>
           <a:lstStyle/>
           <a:p>
+            <a:pPr marL="0" marR="0" lvl="0" indent="0" algn="l" defTabSz="914400" rtl="0" eaLnBrk="1" fontAlgn="auto" latinLnBrk="0" hangingPunct="1">
+              <a:lnSpc>
+                <a:spcPct val="100000"/>
+              </a:lnSpc>
+              <a:spcBef>
+                <a:spcPts val="0"/>
+              </a:spcBef>
+              <a:spcAft>
+                <a:spcPts val="0"/>
+              </a:spcAft>
+              <a:buClrTx/>
+              <a:buSzTx/>
+              <a:buFontTx/>
+              <a:buNone/>
+              <a:tabLst/>
+              <a:defRPr/>
+            </a:pPr>
+            <a:r>
+              <a:rPr lang="en-US" dirty="0"/>
+              <a:t>TODO</a:t>
+            </a:r>
+          </a:p>
+          <a:p>
             <a:r>
               <a:rPr lang="en-US" dirty="0"/>
               <a:t>Abou the data, chapter</a:t>
@@ -777,7 +804,7 @@
     </p:spTree>
     <p:extLst>
       <p:ext uri="{BB962C8B-B14F-4D97-AF65-F5344CB8AC3E}">
-        <p14:creationId xmlns:p14="http://schemas.microsoft.com/office/powerpoint/2010/main" val="1184285913"/>
+        <p14:creationId xmlns:p14="http://schemas.microsoft.com/office/powerpoint/2010/main" val="1440031773"/>
       </p:ext>
     </p:extLst>
   </p:cSld>
@@ -831,225 +858,33 @@
           <a:bodyPr/>
           <a:lstStyle/>
           <a:p>
-            <a:r>
-              <a:rPr lang="en-US" dirty="0"/>
-              <a:t>Ranking Methods:</a:t>
-            </a:r>
-          </a:p>
-          <a:p>
-            <a:endParaRPr lang="en-US" dirty="0"/>
-          </a:p>
-          <a:p>
-            <a:pPr marL="171450" indent="-171450">
-              <a:buFont typeface="Wingdings" panose="05000000000000000000" pitchFamily="2" charset="2"/>
-              <a:buChar char="à"/>
-            </a:pPr>
-            <a:r>
-              <a:rPr lang="en-US" dirty="0"/>
-              <a:t>Disparity Filter (Networkx):</a:t>
-            </a:r>
-          </a:p>
-          <a:p>
-            <a:pPr marL="0" indent="0">
-              <a:buFont typeface="Wingdings" panose="05000000000000000000" pitchFamily="2" charset="2"/>
-              <a:buNone/>
-            </a:pPr>
-            <a:r>
-              <a:rPr lang="en-US" dirty="0"/>
-              <a:t>It filters out edges deemed not compatible with a random distribution with a certain statistical significance (alpha). </a:t>
-            </a:r>
-          </a:p>
-          <a:p>
-            <a:pPr marL="0" indent="0">
-              <a:buFont typeface="Wingdings" panose="05000000000000000000" pitchFamily="2" charset="2"/>
-              <a:buNone/>
-            </a:pPr>
-            <a:r>
-              <a:rPr lang="en-US" dirty="0"/>
-              <a:t>This manner its possible to encounter different levels of heterogeneities. </a:t>
-            </a:r>
-          </a:p>
-          <a:p>
-            <a:pPr marL="0" indent="0">
-              <a:buFont typeface="Wingdings" panose="05000000000000000000" pitchFamily="2" charset="2"/>
-              <a:buNone/>
-            </a:pPr>
-            <a:r>
-              <a:rPr lang="en-US" dirty="0">
-                <a:sym typeface="Wingdings" panose="05000000000000000000" pitchFamily="2" charset="2"/>
-              </a:rPr>
-              <a:t>Indicator: Efficient </a:t>
-            </a:r>
-            <a:r>
-              <a:rPr lang="en-US" dirty="0"/>
-              <a:t>Indicator (weight), weight prob. distribution, statistical relevance, node strength, node degree, </a:t>
-            </a:r>
-          </a:p>
-          <a:p>
-            <a:pPr marL="0" indent="0">
-              <a:buFont typeface="Wingdings" panose="05000000000000000000" pitchFamily="2" charset="2"/>
-              <a:buNone/>
-            </a:pPr>
-            <a:r>
-              <a:rPr lang="en-US" dirty="0"/>
-              <a:t>Ranks: what are the most relevant edges in Collective angle. </a:t>
-            </a:r>
-          </a:p>
-          <a:p>
-            <a:pPr marL="0" indent="0">
-              <a:buFont typeface="Wingdings" panose="05000000000000000000" pitchFamily="2" charset="2"/>
-              <a:buNone/>
-            </a:pPr>
-            <a:endParaRPr lang="en-US" dirty="0"/>
-          </a:p>
-          <a:p>
-            <a:pPr marL="0" indent="0">
-              <a:buFont typeface="Wingdings" panose="05000000000000000000" pitchFamily="2" charset="2"/>
-              <a:buNone/>
-            </a:pPr>
-            <a:r>
-              <a:rPr lang="en-US" dirty="0"/>
-              <a:t>*</a:t>
-            </a:r>
-            <a:r>
-              <a:rPr lang="en-US" b="0" i="0" dirty="0">
-                <a:solidFill>
-                  <a:srgbClr val="57606A"/>
-                </a:solidFill>
-                <a:effectLst/>
-                <a:latin typeface="-apple-system"/>
-              </a:rPr>
-              <a:t>The disparity filter exploits local heterogeneity and local correlations among weights to extract the network backbone by considering the relevant edges at all the scales present in the system. The methodology preserves an edge whenever its intensity is a statistically not compatible with respect to a null hypothesis of uniform randomness for at least one of the two nodes the edge is incident to, which ensures that small nodes in terms of strength are not neglected. As result, the disparity filter reduces the number of edges in the original network significantly keeping, at the same time, almost all the weight and a large fraction of nodes. As well, this filter preserves the cut-off of the degree distribution, the form of the weight distribution, and the clustering coefficient.</a:t>
-            </a:r>
-            <a:endParaRPr lang="en-US" dirty="0"/>
-          </a:p>
-          <a:p>
-            <a:pPr marL="0" indent="0">
-              <a:buFont typeface="Wingdings" panose="05000000000000000000" pitchFamily="2" charset="2"/>
-              <a:buNone/>
-            </a:pPr>
-            <a:endParaRPr lang="en-US" dirty="0"/>
-          </a:p>
-          <a:p>
-            <a:pPr marL="171450" indent="-171450">
-              <a:buFont typeface="Wingdings" panose="05000000000000000000" pitchFamily="2" charset="2"/>
-              <a:buChar char="à"/>
-            </a:pPr>
-            <a:r>
-              <a:rPr lang="en-US" dirty="0"/>
-              <a:t>Shortest Path: (Neo4j):</a:t>
-            </a:r>
-          </a:p>
-          <a:p>
-            <a:pPr marL="0" indent="0">
-              <a:buFont typeface="Wingdings" panose="05000000000000000000" pitchFamily="2" charset="2"/>
-              <a:buNone/>
-            </a:pPr>
-            <a:r>
-              <a:rPr lang="en-US" dirty="0"/>
-              <a:t>Each edges will be ranked with the possible distress caused by its disruption. It means, the loss of time.</a:t>
-            </a:r>
-          </a:p>
-          <a:p>
-            <a:pPr marL="0" indent="0">
-              <a:buFont typeface="Wingdings" panose="05000000000000000000" pitchFamily="2" charset="2"/>
-              <a:buNone/>
-            </a:pPr>
-            <a:r>
-              <a:rPr lang="en-US" dirty="0"/>
-              <a:t>For that, it is necessary to take the user’s perspective. Thanks to NUMBAT dataset, it was possible to statically </a:t>
-            </a:r>
-          </a:p>
-          <a:p>
-            <a:pPr marL="0" indent="0">
-              <a:buFont typeface="Wingdings" panose="05000000000000000000" pitchFamily="2" charset="2"/>
-              <a:buNone/>
-            </a:pPr>
-            <a:r>
-              <a:rPr lang="en-US" dirty="0"/>
-              <a:t>recreate the of the user O/D route at each segment.</a:t>
-            </a:r>
-          </a:p>
-          <a:p>
-            <a:pPr marL="0" indent="0">
-              <a:buFont typeface="Wingdings" panose="05000000000000000000" pitchFamily="2" charset="2"/>
-              <a:buNone/>
-            </a:pPr>
-            <a:r>
-              <a:rPr lang="en-US" dirty="0"/>
-              <a:t>Indicator: Times (the less </a:t>
-            </a:r>
-            <a:r>
-              <a:rPr lang="en-US" dirty="0">
-                <a:sym typeface="Wingdings" panose="05000000000000000000" pitchFamily="2" charset="2"/>
-              </a:rPr>
-              <a:t>possible) </a:t>
-            </a:r>
-          </a:p>
-          <a:p>
-            <a:pPr marL="0" indent="0">
-              <a:buFont typeface="Wingdings" panose="05000000000000000000" pitchFamily="2" charset="2"/>
-              <a:buNone/>
-            </a:pPr>
-            <a:r>
-              <a:rPr lang="en-US" dirty="0">
-                <a:sym typeface="Wingdings" panose="05000000000000000000" pitchFamily="2" charset="2"/>
-              </a:rPr>
-              <a:t>Ranks: what are the most relevant edges in User angle. The ones that saves more journey time. </a:t>
-            </a:r>
-            <a:endParaRPr lang="en-US" dirty="0"/>
-          </a:p>
-          <a:p>
-            <a:pPr marL="0" indent="0">
-              <a:buFont typeface="Wingdings" panose="05000000000000000000" pitchFamily="2" charset="2"/>
-              <a:buNone/>
-            </a:pPr>
-            <a:endParaRPr lang="en-US" dirty="0"/>
-          </a:p>
-          <a:p>
-            <a:pPr marL="0" indent="0">
-              <a:buFont typeface="Wingdings" panose="05000000000000000000" pitchFamily="2" charset="2"/>
-              <a:buNone/>
-            </a:pPr>
-            <a:r>
-              <a:rPr lang="en-US" dirty="0"/>
-              <a:t>Comparison Method:</a:t>
-            </a:r>
-          </a:p>
-          <a:p>
-            <a:pPr marL="0" indent="0">
-              <a:buFont typeface="Wingdings" panose="05000000000000000000" pitchFamily="2" charset="2"/>
-              <a:buNone/>
-            </a:pPr>
-            <a:endParaRPr lang="en-US" dirty="0"/>
-          </a:p>
-          <a:p>
-            <a:pPr marL="0" indent="0">
-              <a:buFont typeface="Wingdings" panose="05000000000000000000" pitchFamily="2" charset="2"/>
-              <a:buNone/>
-            </a:pPr>
-            <a:r>
-              <a:rPr lang="en-US" dirty="0">
-                <a:sym typeface="Wingdings" panose="05000000000000000000" pitchFamily="2" charset="2"/>
-              </a:rPr>
-              <a:t> Kendall Correlation Coefficient</a:t>
-            </a:r>
-            <a:endParaRPr lang="en-US" dirty="0"/>
-          </a:p>
-          <a:p>
-            <a:pPr marL="0" indent="0">
-              <a:buFont typeface="Wingdings" panose="05000000000000000000" pitchFamily="2" charset="2"/>
-              <a:buNone/>
-            </a:pPr>
-            <a:r>
-              <a:rPr lang="en-US" dirty="0"/>
-              <a:t>    </a:t>
-            </a:r>
-          </a:p>
-          <a:p>
-            <a:endParaRPr lang="en-US" dirty="0"/>
-          </a:p>
-          <a:p>
+            <a:pPr marL="0" marR="0" lvl="0" indent="0" algn="l" defTabSz="914400" rtl="0" eaLnBrk="1" fontAlgn="auto" latinLnBrk="0" hangingPunct="1">
+              <a:lnSpc>
+                <a:spcPct val="100000"/>
+              </a:lnSpc>
+              <a:spcBef>
+                <a:spcPts val="0"/>
+              </a:spcBef>
+              <a:spcAft>
+                <a:spcPts val="0"/>
+              </a:spcAft>
+              <a:buClrTx/>
+              <a:buSzTx/>
+              <a:buFontTx/>
+              <a:buNone/>
+              <a:tabLst/>
+              <a:defRPr/>
+            </a:pPr>
+            <a:r>
+              <a:rPr lang="en-US" dirty="0"/>
+              <a:t>TODO</a:t>
+            </a:r>
+          </a:p>
+          <a:p>
+            <a:r>
+              <a:rPr lang="en-US" dirty="0"/>
+              <a:t>Abou the data, chapter</a:t>
+            </a:r>
             <a:endParaRPr lang="fr-BE" dirty="0"/>
           </a:p>
         </p:txBody>
@@ -1080,7 +915,7 @@
     </p:spTree>
     <p:extLst>
       <p:ext uri="{BB962C8B-B14F-4D97-AF65-F5344CB8AC3E}">
-        <p14:creationId xmlns:p14="http://schemas.microsoft.com/office/powerpoint/2010/main" val="2978181096"/>
+        <p14:creationId xmlns:p14="http://schemas.microsoft.com/office/powerpoint/2010/main" val="1184285913"/>
       </p:ext>
     </p:extLst>
   </p:cSld>
@@ -1134,6 +969,29 @@
           <a:bodyPr/>
           <a:lstStyle/>
           <a:p>
+            <a:pPr marL="0" marR="0" lvl="0" indent="0" algn="l" defTabSz="914400" rtl="0" eaLnBrk="1" fontAlgn="auto" latinLnBrk="0" hangingPunct="1">
+              <a:lnSpc>
+                <a:spcPct val="100000"/>
+              </a:lnSpc>
+              <a:spcBef>
+                <a:spcPts val="0"/>
+              </a:spcBef>
+              <a:spcAft>
+                <a:spcPts val="0"/>
+              </a:spcAft>
+              <a:buClrTx/>
+              <a:buSzTx/>
+              <a:buFontTx/>
+              <a:buNone/>
+              <a:tabLst/>
+              <a:defRPr/>
+            </a:pPr>
+            <a:r>
+              <a:rPr lang="en-US" dirty="0"/>
+              <a:t>TODO</a:t>
+            </a:r>
+          </a:p>
+          <a:p>
             <a:r>
               <a:rPr lang="en-US" dirty="0"/>
               <a:t>Ranking Methods:</a:t>
@@ -1383,7 +1241,7 @@
     </p:spTree>
     <p:extLst>
       <p:ext uri="{BB962C8B-B14F-4D97-AF65-F5344CB8AC3E}">
-        <p14:creationId xmlns:p14="http://schemas.microsoft.com/office/powerpoint/2010/main" val="1563839648"/>
+        <p14:creationId xmlns:p14="http://schemas.microsoft.com/office/powerpoint/2010/main" val="2978181096"/>
       </p:ext>
     </p:extLst>
   </p:cSld>
@@ -1437,6 +1295,29 @@
           <a:bodyPr/>
           <a:lstStyle/>
           <a:p>
+            <a:pPr marL="0" marR="0" lvl="0" indent="0" algn="l" defTabSz="914400" rtl="0" eaLnBrk="1" fontAlgn="auto" latinLnBrk="0" hangingPunct="1">
+              <a:lnSpc>
+                <a:spcPct val="100000"/>
+              </a:lnSpc>
+              <a:spcBef>
+                <a:spcPts val="0"/>
+              </a:spcBef>
+              <a:spcAft>
+                <a:spcPts val="0"/>
+              </a:spcAft>
+              <a:buClrTx/>
+              <a:buSzTx/>
+              <a:buFontTx/>
+              <a:buNone/>
+              <a:tabLst/>
+              <a:defRPr/>
+            </a:pPr>
+            <a:r>
+              <a:rPr lang="en-US" dirty="0"/>
+              <a:t>TODO</a:t>
+            </a:r>
+          </a:p>
+          <a:p>
             <a:r>
               <a:rPr lang="en-US" dirty="0"/>
               <a:t>Ranking Methods:</a:t>
@@ -1686,7 +1567,7 @@
     </p:spTree>
     <p:extLst>
       <p:ext uri="{BB962C8B-B14F-4D97-AF65-F5344CB8AC3E}">
-        <p14:creationId xmlns:p14="http://schemas.microsoft.com/office/powerpoint/2010/main" val="2824797188"/>
+        <p14:creationId xmlns:p14="http://schemas.microsoft.com/office/powerpoint/2010/main" val="1563839648"/>
       </p:ext>
     </p:extLst>
   </p:cSld>
@@ -1740,6 +1621,29 @@
           <a:bodyPr/>
           <a:lstStyle/>
           <a:p>
+            <a:pPr marL="0" marR="0" lvl="0" indent="0" algn="l" defTabSz="914400" rtl="0" eaLnBrk="1" fontAlgn="auto" latinLnBrk="0" hangingPunct="1">
+              <a:lnSpc>
+                <a:spcPct val="100000"/>
+              </a:lnSpc>
+              <a:spcBef>
+                <a:spcPts val="0"/>
+              </a:spcBef>
+              <a:spcAft>
+                <a:spcPts val="0"/>
+              </a:spcAft>
+              <a:buClrTx/>
+              <a:buSzTx/>
+              <a:buFontTx/>
+              <a:buNone/>
+              <a:tabLst/>
+              <a:defRPr/>
+            </a:pPr>
+            <a:r>
+              <a:rPr lang="en-US" dirty="0"/>
+              <a:t>TODO</a:t>
+            </a:r>
+          </a:p>
+          <a:p>
             <a:r>
               <a:rPr lang="en-US" dirty="0"/>
               <a:t>Ranking Methods:</a:t>
@@ -1989,7 +1893,7 @@
     </p:spTree>
     <p:extLst>
       <p:ext uri="{BB962C8B-B14F-4D97-AF65-F5344CB8AC3E}">
-        <p14:creationId xmlns:p14="http://schemas.microsoft.com/office/powerpoint/2010/main" val="908241522"/>
+        <p14:creationId xmlns:p14="http://schemas.microsoft.com/office/powerpoint/2010/main" val="2824797188"/>
       </p:ext>
     </p:extLst>
   </p:cSld>
@@ -2043,6 +1947,29 @@
           <a:bodyPr/>
           <a:lstStyle/>
           <a:p>
+            <a:pPr marL="0" marR="0" lvl="0" indent="0" algn="l" defTabSz="914400" rtl="0" eaLnBrk="1" fontAlgn="auto" latinLnBrk="0" hangingPunct="1">
+              <a:lnSpc>
+                <a:spcPct val="100000"/>
+              </a:lnSpc>
+              <a:spcBef>
+                <a:spcPts val="0"/>
+              </a:spcBef>
+              <a:spcAft>
+                <a:spcPts val="0"/>
+              </a:spcAft>
+              <a:buClrTx/>
+              <a:buSzTx/>
+              <a:buFontTx/>
+              <a:buNone/>
+              <a:tabLst/>
+              <a:defRPr/>
+            </a:pPr>
+            <a:r>
+              <a:rPr lang="en-US" dirty="0"/>
+              <a:t>TODO</a:t>
+            </a:r>
+          </a:p>
+          <a:p>
             <a:r>
               <a:rPr lang="en-US" dirty="0"/>
               <a:t>Ranking Methods:</a:t>
@@ -2292,7 +2219,7 @@
     </p:spTree>
     <p:extLst>
       <p:ext uri="{BB962C8B-B14F-4D97-AF65-F5344CB8AC3E}">
-        <p14:creationId xmlns:p14="http://schemas.microsoft.com/office/powerpoint/2010/main" val="2146949491"/>
+        <p14:creationId xmlns:p14="http://schemas.microsoft.com/office/powerpoint/2010/main" val="908241522"/>
       </p:ext>
     </p:extLst>
   </p:cSld>
@@ -2346,6 +2273,29 @@
           <a:bodyPr/>
           <a:lstStyle/>
           <a:p>
+            <a:pPr marL="0" marR="0" lvl="0" indent="0" algn="l" defTabSz="914400" rtl="0" eaLnBrk="1" fontAlgn="auto" latinLnBrk="0" hangingPunct="1">
+              <a:lnSpc>
+                <a:spcPct val="100000"/>
+              </a:lnSpc>
+              <a:spcBef>
+                <a:spcPts val="0"/>
+              </a:spcBef>
+              <a:spcAft>
+                <a:spcPts val="0"/>
+              </a:spcAft>
+              <a:buClrTx/>
+              <a:buSzTx/>
+              <a:buFontTx/>
+              <a:buNone/>
+              <a:tabLst/>
+              <a:defRPr/>
+            </a:pPr>
+            <a:r>
+              <a:rPr lang="en-US" dirty="0"/>
+              <a:t>TODO</a:t>
+            </a:r>
+          </a:p>
+          <a:p>
             <a:r>
               <a:rPr lang="en-US" dirty="0"/>
               <a:t>Ranking Methods:</a:t>
@@ -2595,7 +2545,7 @@
     </p:spTree>
     <p:extLst>
       <p:ext uri="{BB962C8B-B14F-4D97-AF65-F5344CB8AC3E}">
-        <p14:creationId xmlns:p14="http://schemas.microsoft.com/office/powerpoint/2010/main" val="2430498062"/>
+        <p14:creationId xmlns:p14="http://schemas.microsoft.com/office/powerpoint/2010/main" val="2146949491"/>
       </p:ext>
     </p:extLst>
   </p:cSld>
@@ -2649,6 +2599,29 @@
           <a:bodyPr/>
           <a:lstStyle/>
           <a:p>
+            <a:pPr marL="0" marR="0" lvl="0" indent="0" algn="l" defTabSz="914400" rtl="0" eaLnBrk="1" fontAlgn="auto" latinLnBrk="0" hangingPunct="1">
+              <a:lnSpc>
+                <a:spcPct val="100000"/>
+              </a:lnSpc>
+              <a:spcBef>
+                <a:spcPts val="0"/>
+              </a:spcBef>
+              <a:spcAft>
+                <a:spcPts val="0"/>
+              </a:spcAft>
+              <a:buClrTx/>
+              <a:buSzTx/>
+              <a:buFontTx/>
+              <a:buNone/>
+              <a:tabLst/>
+              <a:defRPr/>
+            </a:pPr>
+            <a:r>
+              <a:rPr lang="en-US" dirty="0"/>
+              <a:t>TODO</a:t>
+            </a:r>
+          </a:p>
+          <a:p>
             <a:r>
               <a:rPr lang="en-US" dirty="0"/>
               <a:t>Ranking Methods:</a:t>
@@ -2898,7 +2871,7 @@
     </p:spTree>
     <p:extLst>
       <p:ext uri="{BB962C8B-B14F-4D97-AF65-F5344CB8AC3E}">
-        <p14:creationId xmlns:p14="http://schemas.microsoft.com/office/powerpoint/2010/main" val="3916150140"/>
+        <p14:creationId xmlns:p14="http://schemas.microsoft.com/office/powerpoint/2010/main" val="2430498062"/>
       </p:ext>
     </p:extLst>
   </p:cSld>
@@ -2952,6 +2925,29 @@
           <a:bodyPr/>
           <a:lstStyle/>
           <a:p>
+            <a:pPr marL="0" marR="0" lvl="0" indent="0" algn="l" defTabSz="914400" rtl="0" eaLnBrk="1" fontAlgn="auto" latinLnBrk="0" hangingPunct="1">
+              <a:lnSpc>
+                <a:spcPct val="100000"/>
+              </a:lnSpc>
+              <a:spcBef>
+                <a:spcPts val="0"/>
+              </a:spcBef>
+              <a:spcAft>
+                <a:spcPts val="0"/>
+              </a:spcAft>
+              <a:buClrTx/>
+              <a:buSzTx/>
+              <a:buFontTx/>
+              <a:buNone/>
+              <a:tabLst/>
+              <a:defRPr/>
+            </a:pPr>
+            <a:r>
+              <a:rPr lang="en-US" dirty="0"/>
+              <a:t>TODO</a:t>
+            </a:r>
+          </a:p>
+          <a:p>
             <a:r>
               <a:rPr lang="en-US" dirty="0"/>
               <a:t>Ranking Methods:</a:t>
@@ -3201,7 +3197,7 @@
     </p:spTree>
     <p:extLst>
       <p:ext uri="{BB962C8B-B14F-4D97-AF65-F5344CB8AC3E}">
-        <p14:creationId xmlns:p14="http://schemas.microsoft.com/office/powerpoint/2010/main" val="4176508412"/>
+        <p14:creationId xmlns:p14="http://schemas.microsoft.com/office/powerpoint/2010/main" val="3916150140"/>
       </p:ext>
     </p:extLst>
   </p:cSld>
@@ -3255,6 +3251,29 @@
           <a:bodyPr/>
           <a:lstStyle/>
           <a:p>
+            <a:pPr marL="0" marR="0" lvl="0" indent="0" algn="l" defTabSz="914400" rtl="0" eaLnBrk="1" fontAlgn="auto" latinLnBrk="0" hangingPunct="1">
+              <a:lnSpc>
+                <a:spcPct val="100000"/>
+              </a:lnSpc>
+              <a:spcBef>
+                <a:spcPts val="0"/>
+              </a:spcBef>
+              <a:spcAft>
+                <a:spcPts val="0"/>
+              </a:spcAft>
+              <a:buClrTx/>
+              <a:buSzTx/>
+              <a:buFontTx/>
+              <a:buNone/>
+              <a:tabLst/>
+              <a:defRPr/>
+            </a:pPr>
+            <a:r>
+              <a:rPr lang="en-US" dirty="0"/>
+              <a:t>TODO</a:t>
+            </a:r>
+          </a:p>
+          <a:p>
             <a:r>
               <a:rPr lang="en-US" dirty="0"/>
               <a:t>Ranking Methods:</a:t>
@@ -3504,7 +3523,7 @@
     </p:spTree>
     <p:extLst>
       <p:ext uri="{BB962C8B-B14F-4D97-AF65-F5344CB8AC3E}">
-        <p14:creationId xmlns:p14="http://schemas.microsoft.com/office/powerpoint/2010/main" val="3727461740"/>
+        <p14:creationId xmlns:p14="http://schemas.microsoft.com/office/powerpoint/2010/main" val="4176508412"/>
       </p:ext>
     </p:extLst>
   </p:cSld>
@@ -3560,7 +3579,13 @@
           <a:p>
             <a:r>
               <a:rPr lang="en-US" dirty="0"/>
-              <a:t>“Before anything, I discovered that plan and operate an efficient transport system demands much more than what takes to use it.”</a:t>
+              <a:t>TODO</a:t>
+            </a:r>
+          </a:p>
+          <a:p>
+            <a:r>
+              <a:rPr lang="en-US" dirty="0"/>
+              <a:t>It would be too pretentious to say I discovered interesting things about TFL for London because I used a public dataset and the graph methods applied are well-known. </a:t>
             </a:r>
           </a:p>
           <a:p>
@@ -3569,7 +3594,7 @@
           <a:p>
             <a:r>
               <a:rPr lang="en-US" dirty="0"/>
-              <a:t>For that you need to thing in two things: TRAFFIC x ENGINEERING;</a:t>
+              <a:t>The only distinct new factor in this project is my good sense and my creativity that guided through modelling and analyzing a such efficient and complex system of transport.</a:t>
             </a:r>
           </a:p>
           <a:p>
@@ -3578,210 +3603,107 @@
           <a:p>
             <a:r>
               <a:rPr lang="en-US" dirty="0"/>
-              <a:t>Then in three: </a:t>
-            </a:r>
-            <a:r>
-              <a:rPr lang="en-US" dirty="0">
-                <a:sym typeface="Wingdings" panose="05000000000000000000" pitchFamily="2" charset="2"/>
-              </a:rPr>
-              <a:t>Traffic  (Infra) x (Operations)</a:t>
-            </a:r>
+              <a:t>The main objective is to rank edges relevance.  In public system, it is natural that we think in collective relevance, but a single user do not think collectively when choosing how to commute. OK, you opt to bike to reduce CO2 emissions.</a:t>
+            </a:r>
+          </a:p>
+          <a:p>
             <a:endParaRPr lang="en-US" dirty="0"/>
           </a:p>
           <a:p>
-            <a:endParaRPr lang="fr-BE" dirty="0"/>
-          </a:p>
-          <a:p>
-            <a:r>
-              <a:rPr lang="fr-BE" dirty="0"/>
-              <a:t>INFRA: </a:t>
-            </a:r>
-            <a:r>
-              <a:rPr lang="fr-BE" dirty="0" err="1"/>
-              <a:t>what</a:t>
-            </a:r>
-            <a:r>
-              <a:rPr lang="fr-BE" dirty="0"/>
-              <a:t> </a:t>
-            </a:r>
-            <a:r>
-              <a:rPr lang="fr-BE" dirty="0" err="1"/>
-              <a:t>is</a:t>
-            </a:r>
-            <a:r>
-              <a:rPr lang="fr-BE" dirty="0"/>
-              <a:t> the best possible </a:t>
-            </a:r>
-            <a:r>
-              <a:rPr lang="fr-BE" dirty="0" err="1"/>
-              <a:t>infra-structure</a:t>
-            </a:r>
-            <a:r>
-              <a:rPr lang="fr-BE" dirty="0"/>
-              <a:t> to serve the public?</a:t>
-            </a:r>
-          </a:p>
-          <a:p>
-            <a:endParaRPr lang="fr-BE" dirty="0"/>
-          </a:p>
-          <a:p>
-            <a:r>
-              <a:rPr lang="fr-BE" dirty="0"/>
-              <a:t>OPERATIONS: </a:t>
-            </a:r>
-            <a:r>
-              <a:rPr lang="fr-BE" dirty="0" err="1"/>
-              <a:t>what</a:t>
-            </a:r>
-            <a:r>
-              <a:rPr lang="fr-BE" dirty="0"/>
-              <a:t> </a:t>
-            </a:r>
-            <a:r>
-              <a:rPr lang="fr-BE" dirty="0" err="1"/>
-              <a:t>is</a:t>
-            </a:r>
-            <a:r>
-              <a:rPr lang="fr-BE" dirty="0"/>
-              <a:t> the best </a:t>
-            </a:r>
-            <a:r>
-              <a:rPr lang="fr-BE" dirty="0" err="1"/>
-              <a:t>strategy</a:t>
-            </a:r>
-            <a:r>
-              <a:rPr lang="fr-BE" dirty="0"/>
-              <a:t> to </a:t>
-            </a:r>
-            <a:r>
-              <a:rPr lang="fr-BE" dirty="0" err="1"/>
-              <a:t>optimizes</a:t>
-            </a:r>
-            <a:r>
-              <a:rPr lang="fr-BE" dirty="0"/>
-              <a:t> the infra-</a:t>
-            </a:r>
-            <a:r>
-              <a:rPr lang="fr-BE" dirty="0" err="1"/>
-              <a:t>strutures</a:t>
-            </a:r>
-            <a:r>
-              <a:rPr lang="fr-BE" dirty="0"/>
-              <a:t> best </a:t>
-            </a:r>
-            <a:r>
-              <a:rPr lang="fr-BE" dirty="0" err="1"/>
-              <a:t>serving</a:t>
-            </a:r>
-            <a:r>
-              <a:rPr lang="fr-BE" dirty="0"/>
-              <a:t> the public?</a:t>
-            </a:r>
-          </a:p>
-          <a:p>
-            <a:endParaRPr lang="fr-BE" dirty="0"/>
-          </a:p>
-          <a:p>
-            <a:r>
-              <a:rPr lang="fr-BE" dirty="0"/>
-              <a:t>I can </a:t>
-            </a:r>
-            <a:r>
-              <a:rPr lang="fr-BE" dirty="0" err="1"/>
-              <a:t>already</a:t>
-            </a:r>
-            <a:r>
-              <a:rPr lang="fr-BE" dirty="0"/>
-              <a:t> tell </a:t>
-            </a:r>
-            <a:r>
-              <a:rPr lang="fr-BE" dirty="0" err="1"/>
-              <a:t>you</a:t>
-            </a:r>
-            <a:r>
-              <a:rPr lang="fr-BE" dirty="0"/>
-              <a:t> </a:t>
-            </a:r>
-            <a:r>
-              <a:rPr lang="fr-BE" dirty="0" err="1"/>
-              <a:t>that</a:t>
-            </a:r>
-            <a:r>
-              <a:rPr lang="fr-BE" dirty="0"/>
-              <a:t> I do not have </a:t>
-            </a:r>
-            <a:r>
-              <a:rPr lang="fr-BE" dirty="0" err="1"/>
-              <a:t>those</a:t>
-            </a:r>
-            <a:r>
-              <a:rPr lang="fr-BE" dirty="0"/>
-              <a:t> </a:t>
-            </a:r>
-            <a:r>
-              <a:rPr lang="fr-BE" dirty="0" err="1"/>
-              <a:t>answers</a:t>
-            </a:r>
-            <a:r>
-              <a:rPr lang="fr-BE" dirty="0"/>
-              <a:t>. </a:t>
-            </a:r>
-          </a:p>
-          <a:p>
-            <a:endParaRPr lang="en-GB" noProof="0" dirty="0"/>
-          </a:p>
-          <a:p>
-            <a:r>
-              <a:rPr lang="fr-BE" dirty="0"/>
-              <a:t>A </a:t>
-            </a:r>
-            <a:r>
-              <a:rPr lang="fr-BE" dirty="0" err="1"/>
-              <a:t>fully</a:t>
-            </a:r>
-            <a:r>
-              <a:rPr lang="fr-BE" dirty="0"/>
-              <a:t> </a:t>
-            </a:r>
-            <a:r>
-              <a:rPr lang="fr-BE" dirty="0" err="1"/>
-              <a:t>connected</a:t>
-            </a:r>
-            <a:r>
-              <a:rPr lang="fr-BE" dirty="0"/>
-              <a:t> Net </a:t>
-            </a:r>
-            <a:r>
-              <a:rPr lang="fr-BE" dirty="0" err="1"/>
-              <a:t>is</a:t>
-            </a:r>
-            <a:r>
-              <a:rPr lang="fr-BE" dirty="0"/>
-              <a:t> the </a:t>
-            </a:r>
-            <a:r>
-              <a:rPr lang="fr-BE" dirty="0" err="1"/>
-              <a:t>most</a:t>
-            </a:r>
-            <a:r>
-              <a:rPr lang="fr-BE" dirty="0"/>
-              <a:t> efficient one. </a:t>
-            </a:r>
-            <a:r>
-              <a:rPr lang="fr-BE" dirty="0" err="1"/>
-              <a:t>However</a:t>
-            </a:r>
-            <a:r>
-              <a:rPr lang="fr-BE" dirty="0"/>
-              <a:t>, It has the </a:t>
-            </a:r>
-            <a:r>
-              <a:rPr lang="en-GB" noProof="0" dirty="0" err="1"/>
-              <a:t>highiest</a:t>
-            </a:r>
-            <a:r>
-              <a:rPr lang="fr-BE" dirty="0"/>
-              <a:t> stress potentiel. </a:t>
+            <a:pPr marL="0" marR="0" lvl="0" indent="0" algn="l" defTabSz="914400" rtl="0" eaLnBrk="1" fontAlgn="auto" latinLnBrk="0" hangingPunct="1">
+              <a:lnSpc>
+                <a:spcPct val="100000"/>
+              </a:lnSpc>
+              <a:spcBef>
+                <a:spcPts val="0"/>
+              </a:spcBef>
+              <a:spcAft>
+                <a:spcPts val="0"/>
+              </a:spcAft>
+              <a:buClrTx/>
+              <a:buSzTx/>
+              <a:buFontTx/>
+              <a:buNone/>
+              <a:tabLst/>
+              <a:defRPr/>
+            </a:pPr>
+            <a:r>
+              <a:rPr lang="en-US" dirty="0"/>
+              <a:t>You will base you decision in your values but also to why you need to dislocate. But assumes it raining and it is cold and you need to go from A to B. Cost, time, CO2 emission, seated or standing, wi-fi connection … What drives a single users when choosing a path?</a:t>
+            </a:r>
+          </a:p>
+          <a:p>
+            <a:endParaRPr lang="en-US" dirty="0"/>
+          </a:p>
+          <a:p>
+            <a:r>
+              <a:rPr lang="en-US" dirty="0"/>
+              <a:t>Very loosely, let’s say it time. Everyone seeks to spend as least time possible at the transport system. Why? Reason are not hard to be </a:t>
+            </a:r>
+            <a:r>
+              <a:rPr lang="en-US" dirty="0" err="1"/>
+              <a:t>enummerated</a:t>
+            </a:r>
+            <a:r>
+              <a:rPr lang="en-US" dirty="0"/>
+              <a:t>…</a:t>
+            </a:r>
+          </a:p>
+          <a:p>
+            <a:endParaRPr lang="en-US" dirty="0"/>
+          </a:p>
+          <a:p>
+            <a:r>
+              <a:rPr lang="en-US" dirty="0"/>
+              <a:t>What drives operation when planning?</a:t>
+            </a:r>
+          </a:p>
+          <a:p>
+            <a:endParaRPr lang="en-US" dirty="0"/>
+          </a:p>
+          <a:p>
+            <a:endParaRPr lang="en-US" dirty="0"/>
+          </a:p>
+          <a:p>
+            <a:r>
+              <a:rPr lang="en-US" dirty="0"/>
+              <a:t>The sum of single users reflect the collectivity?</a:t>
+            </a:r>
+          </a:p>
+          <a:p>
+            <a:r>
+              <a:rPr lang="en-US" dirty="0"/>
+              <a:t>Single users opt for new path with minimum time, not to maximize the efficiency?</a:t>
+            </a:r>
+          </a:p>
+          <a:p>
+            <a:endParaRPr lang="en-US" dirty="0"/>
+          </a:p>
+          <a:p>
+            <a:endParaRPr lang="en-US" dirty="0"/>
+          </a:p>
+          <a:p>
+            <a:endParaRPr lang="en-US" dirty="0"/>
+          </a:p>
+          <a:p>
+            <a:endParaRPr lang="en-US" dirty="0"/>
+          </a:p>
+          <a:p>
+            <a:endParaRPr lang="en-US" dirty="0"/>
+          </a:p>
+          <a:p>
+            <a:r>
+              <a:rPr lang="en-US" dirty="0"/>
+              <a:t>Firstly, I will apply a disparity filter to rank weighted connection between stations (edges) using a NetworkX. </a:t>
+            </a:r>
+          </a:p>
+          <a:p>
+            <a:endParaRPr lang="en-US" dirty="0"/>
+          </a:p>
+          <a:p>
+            <a:r>
+              <a:rPr lang="en-US" dirty="0"/>
+              <a:t>Secondly, I will use Neo4J to run a lot of shortest path queries to assemble another edge ranking method, considering the same weight metrics.</a:t>
             </a:r>
           </a:p>
           <a:p>
@@ -3808,14 +3730,14 @@
               <a:rPr lang="fr-BE" smtClean="0"/>
               <a:t>2</a:t>
             </a:fld>
-            <a:endParaRPr lang="fr-BE"/>
+            <a:endParaRPr lang="fr-BE" dirty="0"/>
           </a:p>
         </p:txBody>
       </p:sp>
     </p:spTree>
     <p:extLst>
       <p:ext uri="{BB962C8B-B14F-4D97-AF65-F5344CB8AC3E}">
-        <p14:creationId xmlns:p14="http://schemas.microsoft.com/office/powerpoint/2010/main" val="66036145"/>
+        <p14:creationId xmlns:p14="http://schemas.microsoft.com/office/powerpoint/2010/main" val="1559235599"/>
       </p:ext>
     </p:extLst>
   </p:cSld>
@@ -3869,51 +3791,6 @@
           <a:bodyPr/>
           <a:lstStyle/>
           <a:p>
-            <a:pPr marL="171450" indent="-171450">
-              <a:buFont typeface="Wingdings" panose="05000000000000000000" pitchFamily="2" charset="2"/>
-              <a:buChar char="à"/>
-            </a:pPr>
-            <a:r>
-              <a:rPr lang="en-US" dirty="0">
-                <a:sym typeface="Wingdings" panose="05000000000000000000" pitchFamily="2" charset="2"/>
-              </a:rPr>
-              <a:t>Operational: Speed &amp; Frequency</a:t>
-            </a:r>
-          </a:p>
-          <a:p>
-            <a:pPr marL="171450" indent="-171450">
-              <a:buFontTx/>
-              <a:buChar char="-"/>
-            </a:pPr>
-            <a:r>
-              <a:rPr lang="en-US" dirty="0">
-                <a:sym typeface="Wingdings" panose="05000000000000000000" pitchFamily="2" charset="2"/>
-              </a:rPr>
-              <a:t>Histogram (charts) weight</a:t>
-            </a:r>
-          </a:p>
-          <a:p>
-            <a:pPr marL="171450" indent="-171450">
-              <a:buFontTx/>
-              <a:buChar char="-"/>
-            </a:pPr>
-            <a:r>
-              <a:rPr lang="en-US" dirty="0">
-                <a:sym typeface="Wingdings" panose="05000000000000000000" pitchFamily="2" charset="2"/>
-              </a:rPr>
-              <a:t>Maps (Networkx)</a:t>
-            </a:r>
-          </a:p>
-          <a:p>
-            <a:pPr marL="0" indent="0">
-              <a:buFontTx/>
-              <a:buNone/>
-            </a:pPr>
-            <a:endParaRPr lang="en-US" dirty="0">
-              <a:sym typeface="Wingdings" panose="05000000000000000000" pitchFamily="2" charset="2"/>
-            </a:endParaRPr>
-          </a:p>
-          <a:p>
             <a:pPr marL="0" marR="0" lvl="0" indent="0" algn="l" defTabSz="914400" rtl="0" eaLnBrk="1" fontAlgn="auto" latinLnBrk="0" hangingPunct="1">
               <a:lnSpc>
                 <a:spcPct val="100000"/>
@@ -3932,127 +3809,231 @@
               <a:defRPr/>
             </a:pPr>
             <a:r>
+              <a:rPr lang="en-US" dirty="0"/>
+              <a:t>TODO</a:t>
+            </a:r>
+          </a:p>
+          <a:p>
+            <a:r>
+              <a:rPr lang="en-US" dirty="0"/>
+              <a:t>Ranking Methods:</a:t>
+            </a:r>
+          </a:p>
+          <a:p>
+            <a:endParaRPr lang="en-US" dirty="0"/>
+          </a:p>
+          <a:p>
+            <a:pPr marL="171450" indent="-171450">
+              <a:buFont typeface="Wingdings" panose="05000000000000000000" pitchFamily="2" charset="2"/>
+              <a:buChar char="à"/>
+            </a:pPr>
+            <a:r>
+              <a:rPr lang="en-US" dirty="0"/>
+              <a:t>Disparity Filter (Networkx):</a:t>
+            </a:r>
+          </a:p>
+          <a:p>
+            <a:pPr marL="0" indent="0">
+              <a:buFont typeface="Wingdings" panose="05000000000000000000" pitchFamily="2" charset="2"/>
+              <a:buNone/>
+            </a:pPr>
+            <a:r>
+              <a:rPr lang="en-US" dirty="0"/>
+              <a:t>It filters out edges deemed not compatible with a random distribution with a certain statistical significance (alpha). </a:t>
+            </a:r>
+          </a:p>
+          <a:p>
+            <a:pPr marL="0" indent="0">
+              <a:buFont typeface="Wingdings" panose="05000000000000000000" pitchFamily="2" charset="2"/>
+              <a:buNone/>
+            </a:pPr>
+            <a:r>
+              <a:rPr lang="en-US" dirty="0"/>
+              <a:t>This manner its possible to encounter different levels of heterogeneities. </a:t>
+            </a:r>
+          </a:p>
+          <a:p>
+            <a:pPr marL="0" indent="0">
+              <a:buFont typeface="Wingdings" panose="05000000000000000000" pitchFamily="2" charset="2"/>
+              <a:buNone/>
+            </a:pPr>
+            <a:r>
               <a:rPr lang="en-US" dirty="0">
                 <a:sym typeface="Wingdings" panose="05000000000000000000" pitchFamily="2" charset="2"/>
               </a:rPr>
-              <a:t> Traffic</a:t>
-            </a:r>
+              <a:t>Indicator: Efficient </a:t>
+            </a:r>
+            <a:r>
+              <a:rPr lang="en-US" dirty="0"/>
+              <a:t>Indicator (weight), weight prob. distribution, statistical relevance, node strength, node degree, </a:t>
+            </a:r>
+          </a:p>
+          <a:p>
+            <a:pPr marL="0" indent="0">
+              <a:buFont typeface="Wingdings" panose="05000000000000000000" pitchFamily="2" charset="2"/>
+              <a:buNone/>
+            </a:pPr>
+            <a:r>
+              <a:rPr lang="en-US" dirty="0"/>
+              <a:t>Ranks: what are the most relevant edges in Collective angle. </a:t>
+            </a:r>
+          </a:p>
+          <a:p>
+            <a:pPr marL="0" indent="0">
+              <a:buFont typeface="Wingdings" panose="05000000000000000000" pitchFamily="2" charset="2"/>
+              <a:buNone/>
+            </a:pPr>
+            <a:endParaRPr lang="en-US" dirty="0"/>
+          </a:p>
+          <a:p>
+            <a:pPr marL="0" indent="0">
+              <a:buFont typeface="Wingdings" panose="05000000000000000000" pitchFamily="2" charset="2"/>
+              <a:buNone/>
+            </a:pPr>
+            <a:r>
+              <a:rPr lang="en-US" dirty="0"/>
+              <a:t>*</a:t>
+            </a:r>
+            <a:r>
+              <a:rPr lang="en-US" b="0" i="0" dirty="0">
+                <a:solidFill>
+                  <a:srgbClr val="57606A"/>
+                </a:solidFill>
+                <a:effectLst/>
+                <a:latin typeface="-apple-system"/>
+              </a:rPr>
+              <a:t>The disparity filter exploits local heterogeneity and local correlations among weights to extract the network backbone by considering the relevant edges at all the scales present in the system. The methodology preserves an edge whenever its intensity is a statistically not compatible with respect to a null hypothesis of uniform randomness for at least one of the two nodes the edge is incident to, which ensures that small nodes in terms of strength are not neglected. As result, the disparity filter reduces the number of edges in the original network significantly keeping, at the same time, almost all the weight and a large fraction of nodes. As well, this filter preserves the cut-off of the degree distribution, the form of the weight distribution, and the clustering coefficient.</a:t>
+            </a:r>
+            <a:endParaRPr lang="en-US" dirty="0"/>
+          </a:p>
+          <a:p>
+            <a:pPr marL="0" indent="0">
+              <a:buFont typeface="Wingdings" panose="05000000000000000000" pitchFamily="2" charset="2"/>
+              <a:buNone/>
+            </a:pPr>
+            <a:endParaRPr lang="en-US" dirty="0"/>
           </a:p>
           <a:p>
             <a:pPr marL="171450" indent="-171450">
-              <a:buFontTx/>
-              <a:buChar char="-"/>
-            </a:pPr>
+              <a:buFont typeface="Wingdings" panose="05000000000000000000" pitchFamily="2" charset="2"/>
+              <a:buChar char="à"/>
+            </a:pPr>
+            <a:r>
+              <a:rPr lang="en-US" dirty="0"/>
+              <a:t>Shortest Path: (Neo4j):</a:t>
+            </a:r>
+          </a:p>
+          <a:p>
+            <a:pPr marL="0" indent="0">
+              <a:buFont typeface="Wingdings" panose="05000000000000000000" pitchFamily="2" charset="2"/>
+              <a:buNone/>
+            </a:pPr>
+            <a:r>
+              <a:rPr lang="en-US" dirty="0"/>
+              <a:t>Each edges will be ranked with the possible distress caused by its disruption. It means, the loss of time.</a:t>
+            </a:r>
+          </a:p>
+          <a:p>
+            <a:pPr marL="0" indent="0">
+              <a:buFont typeface="Wingdings" panose="05000000000000000000" pitchFamily="2" charset="2"/>
+              <a:buNone/>
+            </a:pPr>
+            <a:r>
+              <a:rPr lang="en-US" dirty="0"/>
+              <a:t>For that, it is necessary to take the user’s perspective. Thanks to NUMBAT dataset, it was possible to statically </a:t>
+            </a:r>
+          </a:p>
+          <a:p>
+            <a:pPr marL="0" indent="0">
+              <a:buFont typeface="Wingdings" panose="05000000000000000000" pitchFamily="2" charset="2"/>
+              <a:buNone/>
+            </a:pPr>
+            <a:r>
+              <a:rPr lang="en-US" dirty="0"/>
+              <a:t>recreate the of the user O/D route at each segment.</a:t>
+            </a:r>
+          </a:p>
+          <a:p>
+            <a:pPr marL="0" indent="0">
+              <a:buFont typeface="Wingdings" panose="05000000000000000000" pitchFamily="2" charset="2"/>
+              <a:buNone/>
+            </a:pPr>
+            <a:r>
+              <a:rPr lang="en-US" dirty="0"/>
+              <a:t>Indicator: Times (the less </a:t>
+            </a:r>
             <a:r>
               <a:rPr lang="en-US" dirty="0">
                 <a:sym typeface="Wingdings" panose="05000000000000000000" pitchFamily="2" charset="2"/>
               </a:rPr>
-              <a:t>Enter/Exists in stations (Networkx)</a:t>
-            </a:r>
-          </a:p>
-          <a:p>
-            <a:pPr marL="171450" indent="-171450">
-              <a:buFontTx/>
-              <a:buChar char="-"/>
+              <a:t>possible) </a:t>
+            </a:r>
+          </a:p>
+          <a:p>
+            <a:pPr marL="0" indent="0">
+              <a:buFont typeface="Wingdings" panose="05000000000000000000" pitchFamily="2" charset="2"/>
+              <a:buNone/>
             </a:pPr>
             <a:r>
               <a:rPr lang="en-US" dirty="0">
                 <a:sym typeface="Wingdings" panose="05000000000000000000" pitchFamily="2" charset="2"/>
               </a:rPr>
-              <a:t>Load in segments (Networkx)</a:t>
-            </a:r>
-          </a:p>
-          <a:p>
-            <a:pPr marL="171450" indent="-171450">
-              <a:buFontTx/>
-              <a:buChar char="-"/>
-            </a:pPr>
-            <a:endParaRPr lang="en-US" dirty="0">
-              <a:sym typeface="Wingdings" panose="05000000000000000000" pitchFamily="2" charset="2"/>
-            </a:endParaRPr>
-          </a:p>
-          <a:p>
-            <a:pPr marL="0" marR="0" lvl="0" indent="0" algn="l" defTabSz="914400" rtl="0" eaLnBrk="1" fontAlgn="auto" latinLnBrk="0" hangingPunct="1">
-              <a:lnSpc>
-                <a:spcPct val="100000"/>
-              </a:lnSpc>
-              <a:spcBef>
-                <a:spcPts val="0"/>
-              </a:spcBef>
-              <a:spcAft>
-                <a:spcPts val="0"/>
-              </a:spcAft>
-              <a:buClrTx/>
-              <a:buSzTx/>
-              <a:buFontTx/>
-              <a:buNone/>
-              <a:tabLst/>
-              <a:defRPr/>
+              <a:t>Ranks: what are the most relevant edges in User angle. The ones that saves more journey time. </a:t>
+            </a:r>
+            <a:endParaRPr lang="en-US" dirty="0"/>
+          </a:p>
+          <a:p>
+            <a:pPr marL="0" indent="0">
+              <a:buFont typeface="Wingdings" panose="05000000000000000000" pitchFamily="2" charset="2"/>
+              <a:buNone/>
+            </a:pPr>
+            <a:endParaRPr lang="en-US" dirty="0"/>
+          </a:p>
+          <a:p>
+            <a:pPr marL="0" indent="0">
+              <a:buFont typeface="Wingdings" panose="05000000000000000000" pitchFamily="2" charset="2"/>
+              <a:buNone/>
+            </a:pPr>
+            <a:r>
+              <a:rPr lang="en-US" dirty="0"/>
+              <a:t>Comparison Method:</a:t>
+            </a:r>
+          </a:p>
+          <a:p>
+            <a:pPr marL="0" indent="0">
+              <a:buFont typeface="Wingdings" panose="05000000000000000000" pitchFamily="2" charset="2"/>
+              <a:buNone/>
+            </a:pPr>
+            <a:endParaRPr lang="en-US" dirty="0"/>
+          </a:p>
+          <a:p>
+            <a:pPr marL="0" indent="0">
+              <a:buFont typeface="Wingdings" panose="05000000000000000000" pitchFamily="2" charset="2"/>
+              <a:buNone/>
             </a:pPr>
             <a:r>
               <a:rPr lang="en-US" dirty="0">
                 <a:sym typeface="Wingdings" panose="05000000000000000000" pitchFamily="2" charset="2"/>
               </a:rPr>
-              <a:t> User importance:</a:t>
-            </a:r>
-          </a:p>
-          <a:p>
-            <a:pPr marL="171450" indent="-171450">
-              <a:buFontTx/>
-              <a:buChar char="-"/>
-            </a:pPr>
-            <a:r>
-              <a:rPr lang="en-US" dirty="0">
-                <a:sym typeface="Wingdings" panose="05000000000000000000" pitchFamily="2" charset="2"/>
-              </a:rPr>
-              <a:t>Disparity ranking comparison</a:t>
-            </a:r>
-          </a:p>
-          <a:p>
-            <a:pPr marL="171450" indent="-171450">
-              <a:buFontTx/>
-              <a:buChar char="-"/>
-            </a:pPr>
-            <a:endParaRPr lang="en-US" dirty="0">
-              <a:sym typeface="Wingdings" panose="05000000000000000000" pitchFamily="2" charset="2"/>
-            </a:endParaRPr>
-          </a:p>
-          <a:p>
-            <a:pPr marL="0" marR="0" lvl="0" indent="0" algn="l" defTabSz="914400" rtl="0" eaLnBrk="1" fontAlgn="auto" latinLnBrk="0" hangingPunct="1">
-              <a:lnSpc>
-                <a:spcPct val="100000"/>
-              </a:lnSpc>
-              <a:spcBef>
-                <a:spcPts val="0"/>
-              </a:spcBef>
-              <a:spcAft>
-                <a:spcPts val="0"/>
-              </a:spcAft>
-              <a:buClrTx/>
-              <a:buSzTx/>
-              <a:buFontTx/>
-              <a:buNone/>
-              <a:tabLst/>
-              <a:defRPr/>
-            </a:pPr>
-            <a:r>
-              <a:rPr lang="en-US" dirty="0">
-                <a:sym typeface="Wingdings" panose="05000000000000000000" pitchFamily="2" charset="2"/>
-              </a:rPr>
-              <a:t> Collective importance:</a:t>
-            </a:r>
-          </a:p>
-          <a:p>
-            <a:pPr marL="171450" indent="-171450">
-              <a:buFontTx/>
-              <a:buChar char="-"/>
-            </a:pPr>
-            <a:r>
-              <a:rPr lang="en-US" dirty="0">
-                <a:sym typeface="Wingdings" panose="05000000000000000000" pitchFamily="2" charset="2"/>
-              </a:rPr>
-              <a:t>Distress ranking comparison</a:t>
-            </a:r>
+              <a:t> Kendall Correlation Coefficient</a:t>
+            </a:r>
+            <a:endParaRPr lang="en-US" dirty="0"/>
+          </a:p>
+          <a:p>
+            <a:pPr marL="0" indent="0">
+              <a:buFont typeface="Wingdings" panose="05000000000000000000" pitchFamily="2" charset="2"/>
+              <a:buNone/>
+            </a:pPr>
+            <a:r>
+              <a:rPr lang="en-US" dirty="0"/>
+              <a:t>    </a:t>
+            </a:r>
+          </a:p>
+          <a:p>
+            <a:endParaRPr lang="en-US" dirty="0"/>
+          </a:p>
+          <a:p>
+            <a:endParaRPr lang="fr-BE" dirty="0"/>
           </a:p>
         </p:txBody>
       </p:sp>
@@ -4073,7 +4054,7 @@
           <a:p>
             <a:fld id="{3D19D2C4-D801-4083-8F60-14491AD78394}" type="slidenum">
               <a:rPr lang="fr-BE" smtClean="0"/>
-              <a:t>21</a:t>
+              <a:t>20</a:t>
             </a:fld>
             <a:endParaRPr lang="fr-BE"/>
           </a:p>
@@ -4082,7 +4063,7 @@
     </p:spTree>
     <p:extLst>
       <p:ext uri="{BB962C8B-B14F-4D97-AF65-F5344CB8AC3E}">
-        <p14:creationId xmlns:p14="http://schemas.microsoft.com/office/powerpoint/2010/main" val="3129316229"/>
+        <p14:creationId xmlns:p14="http://schemas.microsoft.com/office/powerpoint/2010/main" val="3727461740"/>
       </p:ext>
     </p:extLst>
   </p:cSld>
@@ -4136,51 +4117,6 @@
           <a:bodyPr/>
           <a:lstStyle/>
           <a:p>
-            <a:pPr marL="171450" indent="-171450">
-              <a:buFont typeface="Wingdings" panose="05000000000000000000" pitchFamily="2" charset="2"/>
-              <a:buChar char="à"/>
-            </a:pPr>
-            <a:r>
-              <a:rPr lang="en-US" dirty="0">
-                <a:sym typeface="Wingdings" panose="05000000000000000000" pitchFamily="2" charset="2"/>
-              </a:rPr>
-              <a:t>Operational: Speed &amp; Frequency</a:t>
-            </a:r>
-          </a:p>
-          <a:p>
-            <a:pPr marL="171450" indent="-171450">
-              <a:buFontTx/>
-              <a:buChar char="-"/>
-            </a:pPr>
-            <a:r>
-              <a:rPr lang="en-US" dirty="0">
-                <a:sym typeface="Wingdings" panose="05000000000000000000" pitchFamily="2" charset="2"/>
-              </a:rPr>
-              <a:t>Histogram (charts) weight</a:t>
-            </a:r>
-          </a:p>
-          <a:p>
-            <a:pPr marL="171450" indent="-171450">
-              <a:buFontTx/>
-              <a:buChar char="-"/>
-            </a:pPr>
-            <a:r>
-              <a:rPr lang="en-US" dirty="0">
-                <a:sym typeface="Wingdings" panose="05000000000000000000" pitchFamily="2" charset="2"/>
-              </a:rPr>
-              <a:t>Maps (Networkx)</a:t>
-            </a:r>
-          </a:p>
-          <a:p>
-            <a:pPr marL="0" indent="0">
-              <a:buFontTx/>
-              <a:buNone/>
-            </a:pPr>
-            <a:endParaRPr lang="en-US" dirty="0">
-              <a:sym typeface="Wingdings" panose="05000000000000000000" pitchFamily="2" charset="2"/>
-            </a:endParaRPr>
-          </a:p>
-          <a:p>
             <a:pPr marL="0" marR="0" lvl="0" indent="0" algn="l" defTabSz="914400" rtl="0" eaLnBrk="1" fontAlgn="auto" latinLnBrk="0" hangingPunct="1">
               <a:lnSpc>
                 <a:spcPct val="100000"/>
@@ -4199,127 +4135,12 @@
               <a:defRPr/>
             </a:pPr>
             <a:r>
-              <a:rPr lang="en-US" dirty="0">
-                <a:sym typeface="Wingdings" panose="05000000000000000000" pitchFamily="2" charset="2"/>
-              </a:rPr>
-              <a:t> Traffic</a:t>
-            </a:r>
-          </a:p>
-          <a:p>
-            <a:pPr marL="171450" indent="-171450">
-              <a:buFontTx/>
-              <a:buChar char="-"/>
-            </a:pPr>
-            <a:r>
-              <a:rPr lang="en-US" dirty="0">
-                <a:sym typeface="Wingdings" panose="05000000000000000000" pitchFamily="2" charset="2"/>
-              </a:rPr>
-              <a:t>Enter/Exists in stations (Networkx)</a:t>
-            </a:r>
-          </a:p>
-          <a:p>
-            <a:pPr marL="171450" indent="-171450">
-              <a:buFontTx/>
-              <a:buChar char="-"/>
-            </a:pPr>
-            <a:r>
-              <a:rPr lang="en-US" dirty="0">
-                <a:sym typeface="Wingdings" panose="05000000000000000000" pitchFamily="2" charset="2"/>
-              </a:rPr>
-              <a:t>Load in segments (Networkx)</a:t>
-            </a:r>
-          </a:p>
-          <a:p>
-            <a:pPr marL="171450" indent="-171450">
-              <a:buFontTx/>
-              <a:buChar char="-"/>
-            </a:pPr>
-            <a:endParaRPr lang="en-US" dirty="0">
-              <a:sym typeface="Wingdings" panose="05000000000000000000" pitchFamily="2" charset="2"/>
-            </a:endParaRPr>
-          </a:p>
-          <a:p>
-            <a:pPr marL="0" marR="0" lvl="0" indent="0" algn="l" defTabSz="914400" rtl="0" eaLnBrk="1" fontAlgn="auto" latinLnBrk="0" hangingPunct="1">
-              <a:lnSpc>
-                <a:spcPct val="100000"/>
-              </a:lnSpc>
-              <a:spcBef>
-                <a:spcPts val="0"/>
-              </a:spcBef>
-              <a:spcAft>
-                <a:spcPts val="0"/>
-              </a:spcAft>
-              <a:buClrTx/>
-              <a:buSzTx/>
-              <a:buFontTx/>
-              <a:buNone/>
-              <a:tabLst/>
-              <a:defRPr/>
-            </a:pPr>
-            <a:r>
-              <a:rPr lang="en-US" dirty="0">
-                <a:sym typeface="Wingdings" panose="05000000000000000000" pitchFamily="2" charset="2"/>
-              </a:rPr>
-              <a:t> User importance:</a:t>
-            </a:r>
-          </a:p>
-          <a:p>
-            <a:pPr marL="171450" indent="-171450">
-              <a:buFontTx/>
-              <a:buChar char="-"/>
-            </a:pPr>
-            <a:r>
-              <a:rPr lang="en-US" dirty="0">
-                <a:sym typeface="Wingdings" panose="05000000000000000000" pitchFamily="2" charset="2"/>
-              </a:rPr>
-              <a:t>Disparity ranking comparison</a:t>
-            </a:r>
-          </a:p>
-          <a:p>
-            <a:pPr marL="171450" indent="-171450">
-              <a:buFontTx/>
-              <a:buChar char="-"/>
-            </a:pPr>
-            <a:endParaRPr lang="en-US" dirty="0">
-              <a:sym typeface="Wingdings" panose="05000000000000000000" pitchFamily="2" charset="2"/>
-            </a:endParaRPr>
-          </a:p>
-          <a:p>
-            <a:pPr marL="0" marR="0" lvl="0" indent="0" algn="l" defTabSz="914400" rtl="0" eaLnBrk="1" fontAlgn="auto" latinLnBrk="0" hangingPunct="1">
-              <a:lnSpc>
-                <a:spcPct val="100000"/>
-              </a:lnSpc>
-              <a:spcBef>
-                <a:spcPts val="0"/>
-              </a:spcBef>
-              <a:spcAft>
-                <a:spcPts val="0"/>
-              </a:spcAft>
-              <a:buClrTx/>
-              <a:buSzTx/>
-              <a:buFontTx/>
-              <a:buNone/>
-              <a:tabLst/>
-              <a:defRPr/>
-            </a:pPr>
-            <a:r>
-              <a:rPr lang="en-US" dirty="0">
-                <a:sym typeface="Wingdings" panose="05000000000000000000" pitchFamily="2" charset="2"/>
-              </a:rPr>
-              <a:t> Collective importance:</a:t>
-            </a:r>
-          </a:p>
-          <a:p>
-            <a:pPr marL="171450" indent="-171450">
-              <a:buFontTx/>
-              <a:buChar char="-"/>
-            </a:pPr>
-            <a:r>
-              <a:rPr lang="en-US" dirty="0">
-                <a:sym typeface="Wingdings" panose="05000000000000000000" pitchFamily="2" charset="2"/>
-              </a:rPr>
-              <a:t>Distress ranking comparison</a:t>
-            </a:r>
+              <a:rPr lang="en-US" dirty="0"/>
+              <a:t>TODO</a:t>
+            </a:r>
+          </a:p>
+          <a:p>
+            <a:endParaRPr lang="en-GB" dirty="0"/>
           </a:p>
         </p:txBody>
       </p:sp>
@@ -4340,7 +4161,7 @@
           <a:p>
             <a:fld id="{3D19D2C4-D801-4083-8F60-14491AD78394}" type="slidenum">
               <a:rPr lang="fr-BE" smtClean="0"/>
-              <a:t>22</a:t>
+              <a:t>21</a:t>
             </a:fld>
             <a:endParaRPr lang="fr-BE"/>
           </a:p>
@@ -4349,7 +4170,7 @@
     </p:spTree>
     <p:extLst>
       <p:ext uri="{BB962C8B-B14F-4D97-AF65-F5344CB8AC3E}">
-        <p14:creationId xmlns:p14="http://schemas.microsoft.com/office/powerpoint/2010/main" val="2407261714"/>
+        <p14:creationId xmlns:p14="http://schemas.microsoft.com/office/powerpoint/2010/main" val="4055886187"/>
       </p:ext>
     </p:extLst>
   </p:cSld>
@@ -4403,51 +4224,6 @@
           <a:bodyPr/>
           <a:lstStyle/>
           <a:p>
-            <a:pPr marL="171450" indent="-171450">
-              <a:buFont typeface="Wingdings" panose="05000000000000000000" pitchFamily="2" charset="2"/>
-              <a:buChar char="à"/>
-            </a:pPr>
-            <a:r>
-              <a:rPr lang="en-US" dirty="0">
-                <a:sym typeface="Wingdings" panose="05000000000000000000" pitchFamily="2" charset="2"/>
-              </a:rPr>
-              <a:t>Operational: Speed &amp; Frequency</a:t>
-            </a:r>
-          </a:p>
-          <a:p>
-            <a:pPr marL="171450" indent="-171450">
-              <a:buFontTx/>
-              <a:buChar char="-"/>
-            </a:pPr>
-            <a:r>
-              <a:rPr lang="en-US" dirty="0">
-                <a:sym typeface="Wingdings" panose="05000000000000000000" pitchFamily="2" charset="2"/>
-              </a:rPr>
-              <a:t>Histogram (charts) weight</a:t>
-            </a:r>
-          </a:p>
-          <a:p>
-            <a:pPr marL="171450" indent="-171450">
-              <a:buFontTx/>
-              <a:buChar char="-"/>
-            </a:pPr>
-            <a:r>
-              <a:rPr lang="en-US" dirty="0">
-                <a:sym typeface="Wingdings" panose="05000000000000000000" pitchFamily="2" charset="2"/>
-              </a:rPr>
-              <a:t>Maps (Networkx)</a:t>
-            </a:r>
-          </a:p>
-          <a:p>
-            <a:pPr marL="0" indent="0">
-              <a:buFontTx/>
-              <a:buNone/>
-            </a:pPr>
-            <a:endParaRPr lang="en-US" dirty="0">
-              <a:sym typeface="Wingdings" panose="05000000000000000000" pitchFamily="2" charset="2"/>
-            </a:endParaRPr>
-          </a:p>
-          <a:p>
             <a:pPr marL="0" marR="0" lvl="0" indent="0" algn="l" defTabSz="914400" rtl="0" eaLnBrk="1" fontAlgn="auto" latinLnBrk="0" hangingPunct="1">
               <a:lnSpc>
                 <a:spcPct val="100000"/>
@@ -4460,133 +4236,18 @@
               </a:spcAft>
               <a:buClrTx/>
               <a:buSzTx/>
-              <a:buFontTx/>
+              <a:buFont typeface="Wingdings" panose="05000000000000000000" pitchFamily="2" charset="2"/>
               <a:buNone/>
               <a:tabLst/>
               <a:defRPr/>
             </a:pPr>
             <a:r>
-              <a:rPr lang="en-US" dirty="0">
-                <a:sym typeface="Wingdings" panose="05000000000000000000" pitchFamily="2" charset="2"/>
-              </a:rPr>
-              <a:t> Traffic</a:t>
-            </a:r>
-          </a:p>
-          <a:p>
-            <a:pPr marL="171450" indent="-171450">
-              <a:buFontTx/>
-              <a:buChar char="-"/>
-            </a:pPr>
-            <a:r>
-              <a:rPr lang="en-US" dirty="0">
-                <a:sym typeface="Wingdings" panose="05000000000000000000" pitchFamily="2" charset="2"/>
-              </a:rPr>
-              <a:t>Enter/Exists in stations (Networkx)</a:t>
-            </a:r>
-          </a:p>
-          <a:p>
-            <a:pPr marL="171450" indent="-171450">
-              <a:buFontTx/>
-              <a:buChar char="-"/>
-            </a:pPr>
-            <a:r>
-              <a:rPr lang="en-US" dirty="0">
-                <a:sym typeface="Wingdings" panose="05000000000000000000" pitchFamily="2" charset="2"/>
-              </a:rPr>
-              <a:t>Load in segments (Networkx)</a:t>
-            </a:r>
-          </a:p>
-          <a:p>
-            <a:pPr marL="171450" indent="-171450">
-              <a:buFontTx/>
-              <a:buChar char="-"/>
-            </a:pPr>
+              <a:rPr lang="en-US" dirty="0"/>
+              <a:t>TODO</a:t>
+            </a:r>
             <a:endParaRPr lang="en-US" dirty="0">
               <a:sym typeface="Wingdings" panose="05000000000000000000" pitchFamily="2" charset="2"/>
             </a:endParaRPr>
-          </a:p>
-          <a:p>
-            <a:pPr marL="0" marR="0" lvl="0" indent="0" algn="l" defTabSz="914400" rtl="0" eaLnBrk="1" fontAlgn="auto" latinLnBrk="0" hangingPunct="1">
-              <a:lnSpc>
-                <a:spcPct val="100000"/>
-              </a:lnSpc>
-              <a:spcBef>
-                <a:spcPts val="0"/>
-              </a:spcBef>
-              <a:spcAft>
-                <a:spcPts val="0"/>
-              </a:spcAft>
-              <a:buClrTx/>
-              <a:buSzTx/>
-              <a:buFontTx/>
-              <a:buNone/>
-              <a:tabLst/>
-              <a:defRPr/>
-            </a:pPr>
-            <a:r>
-              <a:rPr lang="en-US" dirty="0">
-                <a:sym typeface="Wingdings" panose="05000000000000000000" pitchFamily="2" charset="2"/>
-              </a:rPr>
-              <a:t> User importance:</a:t>
-            </a:r>
-          </a:p>
-          <a:p>
-            <a:pPr marL="171450" indent="-171450">
-              <a:buFontTx/>
-              <a:buChar char="-"/>
-            </a:pPr>
-            <a:r>
-              <a:rPr lang="en-US" dirty="0">
-                <a:sym typeface="Wingdings" panose="05000000000000000000" pitchFamily="2" charset="2"/>
-              </a:rPr>
-              <a:t>Disparity ranking comparison</a:t>
-            </a:r>
-          </a:p>
-          <a:p>
-            <a:pPr marL="171450" indent="-171450">
-              <a:buFontTx/>
-              <a:buChar char="-"/>
-            </a:pPr>
-            <a:endParaRPr lang="en-US" dirty="0">
-              <a:sym typeface="Wingdings" panose="05000000000000000000" pitchFamily="2" charset="2"/>
-            </a:endParaRPr>
-          </a:p>
-          <a:p>
-            <a:pPr marL="0" marR="0" lvl="0" indent="0" algn="l" defTabSz="914400" rtl="0" eaLnBrk="1" fontAlgn="auto" latinLnBrk="0" hangingPunct="1">
-              <a:lnSpc>
-                <a:spcPct val="100000"/>
-              </a:lnSpc>
-              <a:spcBef>
-                <a:spcPts val="0"/>
-              </a:spcBef>
-              <a:spcAft>
-                <a:spcPts val="0"/>
-              </a:spcAft>
-              <a:buClrTx/>
-              <a:buSzTx/>
-              <a:buFontTx/>
-              <a:buNone/>
-              <a:tabLst/>
-              <a:defRPr/>
-            </a:pPr>
-            <a:r>
-              <a:rPr lang="en-US" dirty="0">
-                <a:sym typeface="Wingdings" panose="05000000000000000000" pitchFamily="2" charset="2"/>
-              </a:rPr>
-              <a:t> Collective importance:</a:t>
-            </a:r>
-          </a:p>
-          <a:p>
-            <a:pPr marL="171450" indent="-171450">
-              <a:buFontTx/>
-              <a:buChar char="-"/>
-            </a:pPr>
-            <a:r>
-              <a:rPr lang="en-US" dirty="0">
-                <a:sym typeface="Wingdings" panose="05000000000000000000" pitchFamily="2" charset="2"/>
-              </a:rPr>
-              <a:t>Distress ranking comparison</a:t>
-            </a:r>
           </a:p>
         </p:txBody>
       </p:sp>
@@ -4607,7 +4268,7 @@
           <a:p>
             <a:fld id="{3D19D2C4-D801-4083-8F60-14491AD78394}" type="slidenum">
               <a:rPr lang="fr-BE" smtClean="0"/>
-              <a:t>23</a:t>
+              <a:t>22</a:t>
             </a:fld>
             <a:endParaRPr lang="fr-BE"/>
           </a:p>
@@ -4616,7 +4277,7 @@
     </p:spTree>
     <p:extLst>
       <p:ext uri="{BB962C8B-B14F-4D97-AF65-F5344CB8AC3E}">
-        <p14:creationId xmlns:p14="http://schemas.microsoft.com/office/powerpoint/2010/main" val="2305896"/>
+        <p14:creationId xmlns:p14="http://schemas.microsoft.com/office/powerpoint/2010/main" val="3129316229"/>
       </p:ext>
     </p:extLst>
   </p:cSld>
@@ -4670,46 +4331,27 @@
           <a:bodyPr/>
           <a:lstStyle/>
           <a:p>
-            <a:pPr marL="171450" indent="-171450">
+            <a:pPr marL="171450" marR="0" lvl="0" indent="-171450" algn="l" defTabSz="914400" rtl="0" eaLnBrk="1" fontAlgn="auto" latinLnBrk="0" hangingPunct="1">
+              <a:lnSpc>
+                <a:spcPct val="100000"/>
+              </a:lnSpc>
+              <a:spcBef>
+                <a:spcPts val="0"/>
+              </a:spcBef>
+              <a:spcAft>
+                <a:spcPts val="0"/>
+              </a:spcAft>
+              <a:buClrTx/>
+              <a:buSzTx/>
               <a:buFont typeface="Wingdings" panose="05000000000000000000" pitchFamily="2" charset="2"/>
               <a:buChar char="à"/>
-            </a:pPr>
-            <a:r>
-              <a:rPr lang="en-US" dirty="0">
-                <a:sym typeface="Wingdings" panose="05000000000000000000" pitchFamily="2" charset="2"/>
-              </a:rPr>
-              <a:t>Operational: Speed &amp; Frequency</a:t>
-            </a:r>
-          </a:p>
-          <a:p>
-            <a:pPr marL="171450" indent="-171450">
-              <a:buFontTx/>
-              <a:buChar char="-"/>
-            </a:pPr>
-            <a:r>
-              <a:rPr lang="en-US" dirty="0">
-                <a:sym typeface="Wingdings" panose="05000000000000000000" pitchFamily="2" charset="2"/>
-              </a:rPr>
-              <a:t>Histogram (charts) weight</a:t>
-            </a:r>
-          </a:p>
-          <a:p>
-            <a:pPr marL="171450" indent="-171450">
-              <a:buFontTx/>
-              <a:buChar char="-"/>
-            </a:pPr>
-            <a:r>
-              <a:rPr lang="en-US" dirty="0">
-                <a:sym typeface="Wingdings" panose="05000000000000000000" pitchFamily="2" charset="2"/>
-              </a:rPr>
-              <a:t>Maps (Networkx)</a:t>
-            </a:r>
-          </a:p>
-          <a:p>
-            <a:pPr marL="0" indent="0">
-              <a:buFontTx/>
-              <a:buNone/>
-            </a:pPr>
+              <a:tabLst/>
+              <a:defRPr/>
+            </a:pPr>
+            <a:r>
+              <a:rPr lang="en-US" dirty="0"/>
+              <a:t>TODO</a:t>
+            </a:r>
             <a:endParaRPr lang="en-US" dirty="0">
               <a:sym typeface="Wingdings" panose="05000000000000000000" pitchFamily="2" charset="2"/>
             </a:endParaRPr>
@@ -4772,89 +4414,6 @@
               <a:sym typeface="Wingdings" panose="05000000000000000000" pitchFamily="2" charset="2"/>
             </a:endParaRPr>
           </a:p>
-          <a:p>
-            <a:pPr marL="0" marR="0" lvl="0" indent="0" algn="l" defTabSz="914400" rtl="0" eaLnBrk="1" fontAlgn="auto" latinLnBrk="0" hangingPunct="1">
-              <a:lnSpc>
-                <a:spcPct val="100000"/>
-              </a:lnSpc>
-              <a:spcBef>
-                <a:spcPts val="0"/>
-              </a:spcBef>
-              <a:spcAft>
-                <a:spcPts val="0"/>
-              </a:spcAft>
-              <a:buClrTx/>
-              <a:buSzTx/>
-              <a:buFontTx/>
-              <a:buNone/>
-              <a:tabLst/>
-              <a:defRPr/>
-            </a:pPr>
-            <a:r>
-              <a:rPr lang="en-US" dirty="0">
-                <a:sym typeface="Wingdings" panose="05000000000000000000" pitchFamily="2" charset="2"/>
-              </a:rPr>
-              <a:t> User importance:</a:t>
-            </a:r>
-          </a:p>
-          <a:p>
-            <a:pPr marL="171450" indent="-171450">
-              <a:buFontTx/>
-              <a:buChar char="-"/>
-            </a:pPr>
-            <a:r>
-              <a:rPr lang="en-US" dirty="0">
-                <a:sym typeface="Wingdings" panose="05000000000000000000" pitchFamily="2" charset="2"/>
-              </a:rPr>
-              <a:t>Disparity ranking comparison</a:t>
-            </a:r>
-          </a:p>
-          <a:p>
-            <a:pPr marL="171450" indent="-171450">
-              <a:buFontTx/>
-              <a:buChar char="-"/>
-            </a:pPr>
-            <a:endParaRPr lang="en-US" dirty="0">
-              <a:sym typeface="Wingdings" panose="05000000000000000000" pitchFamily="2" charset="2"/>
-            </a:endParaRPr>
-          </a:p>
-          <a:p>
-            <a:pPr marL="0" marR="0" lvl="0" indent="0" algn="l" defTabSz="914400" rtl="0" eaLnBrk="1" fontAlgn="auto" latinLnBrk="0" hangingPunct="1">
-              <a:lnSpc>
-                <a:spcPct val="100000"/>
-              </a:lnSpc>
-              <a:spcBef>
-                <a:spcPts val="0"/>
-              </a:spcBef>
-              <a:spcAft>
-                <a:spcPts val="0"/>
-              </a:spcAft>
-              <a:buClrTx/>
-              <a:buSzTx/>
-              <a:buFontTx/>
-              <a:buNone/>
-              <a:tabLst/>
-              <a:defRPr/>
-            </a:pPr>
-            <a:r>
-              <a:rPr lang="en-US" dirty="0">
-                <a:sym typeface="Wingdings" panose="05000000000000000000" pitchFamily="2" charset="2"/>
-              </a:rPr>
-              <a:t> Collective importance:</a:t>
-            </a:r>
-          </a:p>
-          <a:p>
-            <a:pPr marL="171450" indent="-171450">
-              <a:buFontTx/>
-              <a:buChar char="-"/>
-            </a:pPr>
-            <a:r>
-              <a:rPr lang="en-US" dirty="0">
-                <a:sym typeface="Wingdings" panose="05000000000000000000" pitchFamily="2" charset="2"/>
-              </a:rPr>
-              <a:t>Distress ranking comparison</a:t>
-            </a:r>
-          </a:p>
         </p:txBody>
       </p:sp>
       <p:sp>
@@ -4874,7 +4433,7 @@
           <a:p>
             <a:fld id="{3D19D2C4-D801-4083-8F60-14491AD78394}" type="slidenum">
               <a:rPr lang="fr-BE" smtClean="0"/>
-              <a:t>24</a:t>
+              <a:t>23</a:t>
             </a:fld>
             <a:endParaRPr lang="fr-BE"/>
           </a:p>
@@ -4883,7 +4442,7 @@
     </p:spTree>
     <p:extLst>
       <p:ext uri="{BB962C8B-B14F-4D97-AF65-F5344CB8AC3E}">
-        <p14:creationId xmlns:p14="http://schemas.microsoft.com/office/powerpoint/2010/main" val="3774980255"/>
+        <p14:creationId xmlns:p14="http://schemas.microsoft.com/office/powerpoint/2010/main" val="2407261714"/>
       </p:ext>
     </p:extLst>
   </p:cSld>
@@ -4969,157 +4528,19 @@
               <a:rPr lang="en-US" dirty="0">
                 <a:sym typeface="Wingdings" panose="05000000000000000000" pitchFamily="2" charset="2"/>
               </a:rPr>
-              <a:t>Maps (Networkx)</a:t>
-            </a:r>
-          </a:p>
-          <a:p>
-            <a:pPr marL="0" indent="0">
-              <a:buFontTx/>
-              <a:buNone/>
-            </a:pPr>
-            <a:endParaRPr lang="en-US" dirty="0">
-              <a:sym typeface="Wingdings" panose="05000000000000000000" pitchFamily="2" charset="2"/>
-            </a:endParaRPr>
-          </a:p>
-          <a:p>
-            <a:pPr marL="0" marR="0" lvl="0" indent="0" algn="l" defTabSz="914400" rtl="0" eaLnBrk="1" fontAlgn="auto" latinLnBrk="0" hangingPunct="1">
-              <a:lnSpc>
-                <a:spcPct val="100000"/>
-              </a:lnSpc>
-              <a:spcBef>
-                <a:spcPts val="0"/>
-              </a:spcBef>
-              <a:spcAft>
-                <a:spcPts val="0"/>
-              </a:spcAft>
-              <a:buClrTx/>
-              <a:buSzTx/>
-              <a:buFontTx/>
-              <a:buNone/>
-              <a:tabLst/>
-              <a:defRPr/>
-            </a:pPr>
+              <a:t>Maps (</a:t>
+            </a:r>
+            <a:r>
+              <a:rPr lang="en-US" dirty="0" err="1">
+                <a:sym typeface="Wingdings" panose="05000000000000000000" pitchFamily="2" charset="2"/>
+              </a:rPr>
+              <a:t>Networkx</a:t>
+            </a:r>
             <a:r>
               <a:rPr lang="en-US" dirty="0">
                 <a:sym typeface="Wingdings" panose="05000000000000000000" pitchFamily="2" charset="2"/>
               </a:rPr>
-              <a:t> Traffic</a:t>
-            </a:r>
-          </a:p>
-          <a:p>
-            <a:pPr marL="171450" indent="-171450">
-              <a:buFontTx/>
-              <a:buChar char="-"/>
-            </a:pPr>
-            <a:r>
-              <a:rPr lang="en-US" dirty="0">
-                <a:sym typeface="Wingdings" panose="05000000000000000000" pitchFamily="2" charset="2"/>
-              </a:rPr>
-              <a:t>Enter/Exists in stations (Networkx)</a:t>
-            </a:r>
-          </a:p>
-          <a:p>
-            <a:pPr marL="171450" indent="-171450">
-              <a:buFontTx/>
-              <a:buChar char="-"/>
-            </a:pPr>
-            <a:r>
-              <a:rPr lang="en-US" dirty="0">
-                <a:sym typeface="Wingdings" panose="05000000000000000000" pitchFamily="2" charset="2"/>
-              </a:rPr>
-              <a:t>Load in segments (Networkx)</a:t>
-            </a:r>
-          </a:p>
-          <a:p>
-            <a:pPr marL="171450" indent="-171450">
-              <a:buFontTx/>
-              <a:buChar char="-"/>
-            </a:pPr>
-            <a:endParaRPr lang="en-US" dirty="0">
-              <a:sym typeface="Wingdings" panose="05000000000000000000" pitchFamily="2" charset="2"/>
-            </a:endParaRPr>
-          </a:p>
-          <a:p>
-            <a:pPr marL="0" marR="0" lvl="0" indent="0" algn="l" defTabSz="914400" rtl="0" eaLnBrk="1" fontAlgn="auto" latinLnBrk="0" hangingPunct="1">
-              <a:lnSpc>
-                <a:spcPct val="100000"/>
-              </a:lnSpc>
-              <a:spcBef>
-                <a:spcPts val="0"/>
-              </a:spcBef>
-              <a:spcAft>
-                <a:spcPts val="0"/>
-              </a:spcAft>
-              <a:buClrTx/>
-              <a:buSzTx/>
-              <a:buFontTx/>
-              <a:buNone/>
-              <a:tabLst/>
-              <a:defRPr/>
-            </a:pPr>
-            <a:r>
-              <a:rPr lang="en-US" dirty="0">
-                <a:sym typeface="Wingdings" panose="05000000000000000000" pitchFamily="2" charset="2"/>
-              </a:rPr>
-              <a:t> User importance:</a:t>
-            </a:r>
-          </a:p>
-          <a:p>
-            <a:pPr marL="171450" indent="-171450">
-              <a:buFontTx/>
-              <a:buChar char="-"/>
-            </a:pPr>
-            <a:r>
-              <a:rPr lang="en-US" dirty="0">
-                <a:sym typeface="Wingdings" panose="05000000000000000000" pitchFamily="2" charset="2"/>
-              </a:rPr>
-              <a:t>Disparity ranking comparison</a:t>
-            </a:r>
-          </a:p>
-          <a:p>
-            <a:pPr marL="171450" indent="-171450">
-              <a:buFontTx/>
-              <a:buChar char="-"/>
-            </a:pPr>
-            <a:endParaRPr lang="en-US" dirty="0">
-              <a:sym typeface="Wingdings" panose="05000000000000000000" pitchFamily="2" charset="2"/>
-            </a:endParaRPr>
-          </a:p>
-          <a:p>
-            <a:pPr marL="0" marR="0" lvl="0" indent="0" algn="l" defTabSz="914400" rtl="0" eaLnBrk="1" fontAlgn="auto" latinLnBrk="0" hangingPunct="1">
-              <a:lnSpc>
-                <a:spcPct val="100000"/>
-              </a:lnSpc>
-              <a:spcBef>
-                <a:spcPts val="0"/>
-              </a:spcBef>
-              <a:spcAft>
-                <a:spcPts val="0"/>
-              </a:spcAft>
-              <a:buClrTx/>
-              <a:buSzTx/>
-              <a:buFontTx/>
-              <a:buNone/>
-              <a:tabLst/>
-              <a:defRPr/>
-            </a:pPr>
-            <a:r>
-              <a:rPr lang="en-US" dirty="0">
-                <a:sym typeface="Wingdings" panose="05000000000000000000" pitchFamily="2" charset="2"/>
-              </a:rPr>
-              <a:t> Collective importance:</a:t>
-            </a:r>
-          </a:p>
-          <a:p>
-            <a:pPr marL="171450" indent="-171450">
-              <a:buFontTx/>
-              <a:buChar char="-"/>
-            </a:pPr>
-            <a:r>
-              <a:rPr lang="en-US" dirty="0">
-                <a:sym typeface="Wingdings" panose="05000000000000000000" pitchFamily="2" charset="2"/>
-              </a:rPr>
-              <a:t>Distress ranking comparison</a:t>
+              <a:t>)</a:t>
             </a:r>
           </a:p>
         </p:txBody>
@@ -5141,7 +4562,7 @@
           <a:p>
             <a:fld id="{3D19D2C4-D801-4083-8F60-14491AD78394}" type="slidenum">
               <a:rPr lang="fr-BE" smtClean="0"/>
-              <a:t>25</a:t>
+              <a:t>24</a:t>
             </a:fld>
             <a:endParaRPr lang="fr-BE"/>
           </a:p>
@@ -5150,7 +4571,7 @@
     </p:spTree>
     <p:extLst>
       <p:ext uri="{BB962C8B-B14F-4D97-AF65-F5344CB8AC3E}">
-        <p14:creationId xmlns:p14="http://schemas.microsoft.com/office/powerpoint/2010/main" val="203907506"/>
+        <p14:creationId xmlns:p14="http://schemas.microsoft.com/office/powerpoint/2010/main" val="2305896"/>
       </p:ext>
     </p:extLst>
   </p:cSld>
@@ -5204,10 +4625,49 @@
           <a:bodyPr/>
           <a:lstStyle/>
           <a:p>
+            <a:pPr marL="171450" indent="-171450">
+              <a:buFont typeface="Wingdings" panose="05000000000000000000" pitchFamily="2" charset="2"/>
+              <a:buChar char="à"/>
+            </a:pPr>
+            <a:r>
+              <a:rPr lang="en-US" dirty="0">
+                <a:sym typeface="Wingdings" panose="05000000000000000000" pitchFamily="2" charset="2"/>
+              </a:rPr>
+              <a:t>Operational: Speed &amp; Frequency</a:t>
+            </a:r>
+          </a:p>
+          <a:p>
+            <a:pPr marL="171450" indent="-171450">
+              <a:buFontTx/>
+              <a:buChar char="-"/>
+            </a:pPr>
+            <a:r>
+              <a:rPr lang="en-US" dirty="0">
+                <a:sym typeface="Wingdings" panose="05000000000000000000" pitchFamily="2" charset="2"/>
+              </a:rPr>
+              <a:t>Histogram (charts) weight</a:t>
+            </a:r>
+          </a:p>
+          <a:p>
+            <a:pPr marL="171450" indent="-171450">
+              <a:buFontTx/>
+              <a:buChar char="-"/>
+            </a:pPr>
+            <a:r>
+              <a:rPr lang="en-US" dirty="0">
+                <a:sym typeface="Wingdings" panose="05000000000000000000" pitchFamily="2" charset="2"/>
+              </a:rPr>
+              <a:t>Maps (Networkx)</a:t>
+            </a:r>
+          </a:p>
+          <a:p>
             <a:pPr marL="0" indent="0">
-              <a:buNone/>
-            </a:pPr>
-            <a:endParaRPr lang="en-US" dirty="0"/>
+              <a:buFontTx/>
+              <a:buNone/>
+            </a:pPr>
+            <a:endParaRPr lang="en-US" dirty="0">
+              <a:sym typeface="Wingdings" panose="05000000000000000000" pitchFamily="2" charset="2"/>
+            </a:endParaRPr>
           </a:p>
           <a:p>
             <a:pPr marL="0" marR="0" lvl="0" indent="0" algn="l" defTabSz="914400" rtl="0" eaLnBrk="1" fontAlgn="auto" latinLnBrk="0" hangingPunct="1">
@@ -5228,108 +4688,47 @@
               <a:defRPr/>
             </a:pPr>
             <a:r>
-              <a:rPr lang="en-US" dirty="0"/>
-              <a:t>1) </a:t>
-            </a:r>
-            <a:r>
               <a:rPr lang="en-US" dirty="0">
                 <a:sym typeface="Wingdings" panose="05000000000000000000" pitchFamily="2" charset="2"/>
               </a:rPr>
-              <a:t>Interconnect all possible modes of transport including bikes and walks.</a:t>
-            </a:r>
-            <a:endParaRPr lang="en-US" dirty="0"/>
-          </a:p>
-          <a:p>
-            <a:pPr marL="0" indent="0">
-              <a:buNone/>
-            </a:pPr>
-            <a:endParaRPr lang="en-US" dirty="0"/>
-          </a:p>
-          <a:p>
-            <a:pPr marL="0" indent="0">
-              <a:buNone/>
-            </a:pPr>
-            <a:endParaRPr lang="en-US" dirty="0"/>
-          </a:p>
-          <a:p>
-            <a:pPr marL="0" indent="0">
-              <a:buNone/>
-            </a:pPr>
-            <a:r>
-              <a:rPr lang="en-US" dirty="0"/>
-              <a:t>2) Use ML models for predictions of:</a:t>
-            </a:r>
-          </a:p>
-          <a:p>
-            <a:pPr marL="228600" indent="-228600">
-              <a:buAutoNum type="arabicParenR"/>
-            </a:pPr>
-            <a:endParaRPr lang="en-US" dirty="0"/>
+              <a:t> Traffic</a:t>
+            </a:r>
           </a:p>
           <a:p>
             <a:pPr marL="171450" indent="-171450">
-              <a:buFont typeface="Wingdings" panose="05000000000000000000" pitchFamily="2" charset="2"/>
-              <a:buChar char="à"/>
-            </a:pPr>
-            <a:r>
-              <a:rPr lang="en-US" dirty="0"/>
-              <a:t>TRAFFIC: Passenger flow: </a:t>
-            </a:r>
-            <a:r>
-              <a:rPr lang="en-US" b="0" i="0" dirty="0">
-                <a:solidFill>
-                  <a:srgbClr val="24292F"/>
-                </a:solidFill>
-                <a:effectLst/>
-                <a:latin typeface="-apple-system"/>
+              <a:buFontTx/>
+              <a:buChar char="-"/>
+            </a:pPr>
+            <a:r>
+              <a:rPr lang="en-US" dirty="0">
+                <a:sym typeface="Wingdings" panose="05000000000000000000" pitchFamily="2" charset="2"/>
               </a:rPr>
-              <a:t>From network lens (keeping passenger anonymity) , use more data (daily events) to more accurately understand why traffic is generated in each segments;</a:t>
+              <a:t>Enter/Exists in stations (Networkx)</a:t>
             </a:r>
           </a:p>
           <a:p>
             <a:pPr marL="171450" indent="-171450">
-              <a:buFont typeface="Wingdings" panose="05000000000000000000" pitchFamily="2" charset="2"/>
-              <a:buChar char="à"/>
-            </a:pPr>
-            <a:endParaRPr lang="en-US" b="0" i="0" dirty="0">
-              <a:solidFill>
-                <a:srgbClr val="24292F"/>
-              </a:solidFill>
-              <a:effectLst/>
-              <a:latin typeface="-apple-system"/>
+              <a:buFontTx/>
+              <a:buChar char="-"/>
+            </a:pPr>
+            <a:r>
+              <a:rPr lang="en-US" dirty="0">
+                <a:sym typeface="Wingdings" panose="05000000000000000000" pitchFamily="2" charset="2"/>
+              </a:rPr>
+              <a:t>Load in segments (Networkx)</a:t>
+            </a:r>
+          </a:p>
+          <a:p>
+            <a:pPr marL="171450" indent="-171450">
+              <a:buFontTx/>
+              <a:buChar char="-"/>
+            </a:pPr>
+            <a:endParaRPr lang="en-US" dirty="0">
+              <a:sym typeface="Wingdings" panose="05000000000000000000" pitchFamily="2" charset="2"/>
             </a:endParaRPr>
           </a:p>
           <a:p>
-            <a:pPr marL="171450" indent="-171450">
-              <a:buFont typeface="Wingdings" panose="05000000000000000000" pitchFamily="2" charset="2"/>
-              <a:buChar char="à"/>
-            </a:pPr>
-            <a:r>
-              <a:rPr lang="en-US" b="0" i="0" dirty="0">
-                <a:solidFill>
-                  <a:srgbClr val="24292F"/>
-                </a:solidFill>
-                <a:effectLst/>
-                <a:latin typeface="-apple-system"/>
-              </a:rPr>
-              <a:t>OPEX: Predict disruptions and its impact considering forecasted passenger traffic to optimize maintenance planning.</a:t>
-            </a:r>
-          </a:p>
-          <a:p>
-            <a:pPr marL="171450" indent="-171450">
-              <a:buFont typeface="Wingdings" panose="05000000000000000000" pitchFamily="2" charset="2"/>
-              <a:buChar char="à"/>
-            </a:pPr>
-            <a:endParaRPr lang="en-US" b="0" i="0" dirty="0">
-              <a:solidFill>
-                <a:srgbClr val="24292F"/>
-              </a:solidFill>
-              <a:effectLst/>
-              <a:latin typeface="-apple-system"/>
-            </a:endParaRPr>
-          </a:p>
-          <a:p>
-            <a:pPr marL="171450" marR="0" lvl="0" indent="-171450" algn="l" defTabSz="914400" rtl="0" eaLnBrk="1" fontAlgn="auto" latinLnBrk="0" hangingPunct="1">
+            <a:pPr marL="0" marR="0" lvl="0" indent="0" algn="l" defTabSz="914400" rtl="0" eaLnBrk="1" fontAlgn="auto" latinLnBrk="0" hangingPunct="1">
               <a:lnSpc>
                 <a:spcPct val="100000"/>
               </a:lnSpc>
@@ -5341,102 +4740,75 @@
               </a:spcAft>
               <a:buClrTx/>
               <a:buSzTx/>
-              <a:buFont typeface="Wingdings" panose="05000000000000000000" pitchFamily="2" charset="2"/>
-              <a:buChar char="à"/>
+              <a:buFontTx/>
+              <a:buNone/>
               <a:tabLst/>
               <a:defRPr/>
             </a:pPr>
             <a:r>
-              <a:rPr lang="en-US" b="0" i="0" dirty="0">
-                <a:solidFill>
-                  <a:srgbClr val="24292F"/>
-                </a:solidFill>
-                <a:effectLst/>
-                <a:latin typeface="-apple-system"/>
+              <a:rPr lang="en-US" dirty="0">
+                <a:sym typeface="Wingdings" panose="05000000000000000000" pitchFamily="2" charset="2"/>
               </a:rPr>
-              <a:t>Create a timetable dynamically tailored that optimize infra-structure towards the commuters needs.</a:t>
+              <a:t> User importance:</a:t>
             </a:r>
           </a:p>
           <a:p>
             <a:pPr marL="171450" indent="-171450">
-              <a:buFont typeface="Wingdings" panose="05000000000000000000" pitchFamily="2" charset="2"/>
-              <a:buChar char="à"/>
-            </a:pPr>
-            <a:endParaRPr lang="en-US" b="0" i="0" dirty="0">
-              <a:solidFill>
-                <a:srgbClr val="24292F"/>
-              </a:solidFill>
-              <a:effectLst/>
-              <a:latin typeface="-apple-system"/>
+              <a:buFontTx/>
+              <a:buChar char="-"/>
+            </a:pPr>
+            <a:r>
+              <a:rPr lang="en-US" dirty="0">
+                <a:sym typeface="Wingdings" panose="05000000000000000000" pitchFamily="2" charset="2"/>
+              </a:rPr>
+              <a:t>Disparity ranking comparison</a:t>
+            </a:r>
+          </a:p>
+          <a:p>
+            <a:pPr marL="171450" indent="-171450">
+              <a:buFontTx/>
+              <a:buChar char="-"/>
+            </a:pPr>
+            <a:endParaRPr lang="en-US" dirty="0">
+              <a:sym typeface="Wingdings" panose="05000000000000000000" pitchFamily="2" charset="2"/>
             </a:endParaRPr>
           </a:p>
           <a:p>
+            <a:pPr marL="0" marR="0" lvl="0" indent="0" algn="l" defTabSz="914400" rtl="0" eaLnBrk="1" fontAlgn="auto" latinLnBrk="0" hangingPunct="1">
+              <a:lnSpc>
+                <a:spcPct val="100000"/>
+              </a:lnSpc>
+              <a:spcBef>
+                <a:spcPts val="0"/>
+              </a:spcBef>
+              <a:spcAft>
+                <a:spcPts val="0"/>
+              </a:spcAft>
+              <a:buClrTx/>
+              <a:buSzTx/>
+              <a:buFontTx/>
+              <a:buNone/>
+              <a:tabLst/>
+              <a:defRPr/>
+            </a:pPr>
+            <a:r>
+              <a:rPr lang="en-US" dirty="0">
+                <a:sym typeface="Wingdings" panose="05000000000000000000" pitchFamily="2" charset="2"/>
+              </a:rPr>
+              <a:t> Collective importance:</a:t>
+            </a:r>
+          </a:p>
+          <a:p>
             <a:pPr marL="171450" indent="-171450">
-              <a:buFont typeface="Wingdings" panose="05000000000000000000" pitchFamily="2" charset="2"/>
-              <a:buChar char="à"/>
-            </a:pPr>
-            <a:r>
-              <a:rPr lang="en-US" b="0" i="0" dirty="0">
-                <a:solidFill>
-                  <a:srgbClr val="24292F"/>
-                </a:solidFill>
-                <a:effectLst/>
-                <a:latin typeface="-apple-system"/>
+              <a:buFontTx/>
+              <a:buChar char="-"/>
+            </a:pPr>
+            <a:r>
+              <a:rPr lang="en-US" dirty="0">
+                <a:sym typeface="Wingdings" panose="05000000000000000000" pitchFamily="2" charset="2"/>
               </a:rPr>
-              <a:t>CAPEX: More maintenance, less disruptions, less need for redundancy and more investment express lanes (study of origin and destination). </a:t>
-            </a:r>
-          </a:p>
-          <a:p>
-            <a:pPr marL="171450" indent="-171450">
-              <a:buFont typeface="Wingdings" panose="05000000000000000000" pitchFamily="2" charset="2"/>
-              <a:buChar char="à"/>
-            </a:pPr>
-            <a:endParaRPr lang="en-US" b="0" i="0" dirty="0">
-              <a:solidFill>
-                <a:srgbClr val="24292F"/>
-              </a:solidFill>
-              <a:effectLst/>
-              <a:latin typeface="-apple-system"/>
-            </a:endParaRPr>
-          </a:p>
-          <a:p>
-            <a:pPr marL="171450" indent="-171450">
-              <a:buFont typeface="Wingdings" panose="05000000000000000000" pitchFamily="2" charset="2"/>
-              <a:buChar char="à"/>
-            </a:pPr>
-            <a:endParaRPr lang="en-US" b="0" i="0" dirty="0">
-              <a:solidFill>
-                <a:srgbClr val="24292F"/>
-              </a:solidFill>
-              <a:effectLst/>
-              <a:latin typeface="-apple-system"/>
-            </a:endParaRPr>
-          </a:p>
-          <a:p>
-            <a:pPr marL="0" indent="0">
-              <a:buFont typeface="Wingdings" panose="05000000000000000000" pitchFamily="2" charset="2"/>
-              <a:buNone/>
-            </a:pPr>
-            <a:endParaRPr lang="en-US" b="0" i="0" dirty="0">
-              <a:solidFill>
-                <a:srgbClr val="24292F"/>
-              </a:solidFill>
-              <a:effectLst/>
-              <a:latin typeface="-apple-system"/>
-            </a:endParaRPr>
-          </a:p>
-          <a:p>
-            <a:pPr marL="171450" indent="-171450">
-              <a:buFont typeface="Wingdings" panose="05000000000000000000" pitchFamily="2" charset="2"/>
-              <a:buChar char="à"/>
-            </a:pPr>
-            <a:endParaRPr lang="en-US" b="0" i="0" dirty="0">
-              <a:solidFill>
-                <a:srgbClr val="24292F"/>
-              </a:solidFill>
-              <a:effectLst/>
-              <a:latin typeface="-apple-system"/>
-            </a:endParaRPr>
+              <a:t>Distress ranking comparison</a:t>
+            </a:r>
           </a:p>
         </p:txBody>
       </p:sp>
@@ -5457,7 +4829,7 @@
           <a:p>
             <a:fld id="{3D19D2C4-D801-4083-8F60-14491AD78394}" type="slidenum">
               <a:rPr lang="fr-BE" smtClean="0"/>
-              <a:t>26</a:t>
+              <a:t>25</a:t>
             </a:fld>
             <a:endParaRPr lang="fr-BE"/>
           </a:p>
@@ -5466,7 +4838,7 @@
     </p:spTree>
     <p:extLst>
       <p:ext uri="{BB962C8B-B14F-4D97-AF65-F5344CB8AC3E}">
-        <p14:creationId xmlns:p14="http://schemas.microsoft.com/office/powerpoint/2010/main" val="2618829657"/>
+        <p14:creationId xmlns:p14="http://schemas.microsoft.com/office/powerpoint/2010/main" val="3774980255"/>
       </p:ext>
     </p:extLst>
   </p:cSld>
@@ -5520,10 +4892,49 @@
           <a:bodyPr/>
           <a:lstStyle/>
           <a:p>
-            <a:r>
-              <a:rPr lang="en-US" dirty="0"/>
-              <a:t>What is a efficient network = minimizes travel time and costs (vehicles, energy, emissions, price) assuring passenger “comfort” and “prompt mobility”.</a:t>
-            </a:r>
+            <a:pPr marL="171450" indent="-171450">
+              <a:buFont typeface="Wingdings" panose="05000000000000000000" pitchFamily="2" charset="2"/>
+              <a:buChar char="à"/>
+            </a:pPr>
+            <a:r>
+              <a:rPr lang="en-US" dirty="0">
+                <a:sym typeface="Wingdings" panose="05000000000000000000" pitchFamily="2" charset="2"/>
+              </a:rPr>
+              <a:t>Operational: Speed &amp; Frequency</a:t>
+            </a:r>
+          </a:p>
+          <a:p>
+            <a:pPr marL="171450" indent="-171450">
+              <a:buFontTx/>
+              <a:buChar char="-"/>
+            </a:pPr>
+            <a:r>
+              <a:rPr lang="en-US" dirty="0">
+                <a:sym typeface="Wingdings" panose="05000000000000000000" pitchFamily="2" charset="2"/>
+              </a:rPr>
+              <a:t>Histogram (charts) weight</a:t>
+            </a:r>
+          </a:p>
+          <a:p>
+            <a:pPr marL="171450" indent="-171450">
+              <a:buFontTx/>
+              <a:buChar char="-"/>
+            </a:pPr>
+            <a:r>
+              <a:rPr lang="en-US" dirty="0">
+                <a:sym typeface="Wingdings" panose="05000000000000000000" pitchFamily="2" charset="2"/>
+              </a:rPr>
+              <a:t>Maps (Networkx)</a:t>
+            </a:r>
+          </a:p>
+          <a:p>
+            <a:pPr marL="0" indent="0">
+              <a:buFontTx/>
+              <a:buNone/>
+            </a:pPr>
+            <a:endParaRPr lang="en-US" dirty="0">
+              <a:sym typeface="Wingdings" panose="05000000000000000000" pitchFamily="2" charset="2"/>
+            </a:endParaRPr>
           </a:p>
           <a:p>
             <a:pPr marL="0" marR="0" lvl="0" indent="0" algn="l" defTabSz="914400" rtl="0" eaLnBrk="1" fontAlgn="auto" latinLnBrk="0" hangingPunct="1">
@@ -5543,67 +4954,128 @@
               <a:tabLst/>
               <a:defRPr/>
             </a:pPr>
-            <a:endParaRPr lang="en-US" dirty="0"/>
-          </a:p>
-          <a:p>
-            <a:r>
-              <a:rPr lang="en-US" dirty="0"/>
-              <a:t>It is important to mention that a more efficient network inherently requires more maintenance.</a:t>
-            </a:r>
-          </a:p>
-          <a:p>
-            <a:endParaRPr lang="en-US" dirty="0"/>
-          </a:p>
-          <a:p>
-            <a:r>
-              <a:rPr lang="en-US" dirty="0"/>
-              <a:t>It is not necessary related to its size. But is related to how it was projected to assist the commuters.</a:t>
-            </a:r>
-          </a:p>
-          <a:p>
-            <a:endParaRPr lang="en-US" dirty="0"/>
-          </a:p>
-          <a:p>
-            <a:r>
-              <a:rPr lang="en-US" dirty="0"/>
-              <a:t>In a network without disruption, for instance, it would be a waste invest in redundancies. More money could be destinated to reduce travels time. </a:t>
-            </a:r>
-          </a:p>
-          <a:p>
-            <a:endParaRPr lang="en-US" dirty="0"/>
-          </a:p>
-          <a:p>
-            <a:r>
-              <a:rPr lang="en-US" dirty="0"/>
-              <a:t>In a real world, however, no disruptions comes with a high maintenance price. </a:t>
-            </a:r>
-          </a:p>
-          <a:p>
-            <a:endParaRPr lang="en-US" dirty="0"/>
-          </a:p>
-          <a:p>
-            <a:r>
-              <a:rPr lang="en-US" dirty="0"/>
-              <a:t>The balance between effectiveness and robustness is a major question when comes down to a such important factor of the society evolvement.</a:t>
-            </a:r>
-          </a:p>
-          <a:p>
-            <a:endParaRPr lang="en-US" dirty="0"/>
-          </a:p>
-          <a:p>
-            <a:endParaRPr lang="en-US" dirty="0"/>
-          </a:p>
-          <a:p>
-            <a:endParaRPr lang="en-US" dirty="0"/>
-          </a:p>
-          <a:p>
-            <a:endParaRPr lang="en-US" dirty="0"/>
-          </a:p>
-          <a:p>
-            <a:endParaRPr lang="en-US" dirty="0"/>
-          </a:p>
-          <a:p>
-            <a:endParaRPr lang="en-US" dirty="0"/>
+            <a:r>
+              <a:rPr lang="en-US" dirty="0">
+                <a:sym typeface="Wingdings" panose="05000000000000000000" pitchFamily="2" charset="2"/>
+              </a:rPr>
+              <a:t> Traffic</a:t>
+            </a:r>
+          </a:p>
+          <a:p>
+            <a:pPr marL="171450" indent="-171450">
+              <a:buFontTx/>
+              <a:buChar char="-"/>
+            </a:pPr>
+            <a:r>
+              <a:rPr lang="en-US" dirty="0">
+                <a:sym typeface="Wingdings" panose="05000000000000000000" pitchFamily="2" charset="2"/>
+              </a:rPr>
+              <a:t>Enter/Exists in stations (Networkx)</a:t>
+            </a:r>
+          </a:p>
+          <a:p>
+            <a:pPr marL="171450" indent="-171450">
+              <a:buFontTx/>
+              <a:buChar char="-"/>
+            </a:pPr>
+            <a:r>
+              <a:rPr lang="en-US" dirty="0">
+                <a:sym typeface="Wingdings" panose="05000000000000000000" pitchFamily="2" charset="2"/>
+              </a:rPr>
+              <a:t>Load in segments (Networkx)</a:t>
+            </a:r>
+          </a:p>
+          <a:p>
+            <a:pPr marL="171450" indent="-171450">
+              <a:buFontTx/>
+              <a:buChar char="-"/>
+            </a:pPr>
+            <a:endParaRPr lang="en-US" dirty="0">
+              <a:sym typeface="Wingdings" panose="05000000000000000000" pitchFamily="2" charset="2"/>
+            </a:endParaRPr>
+          </a:p>
+          <a:p>
+            <a:pPr marL="0" marR="0" lvl="0" indent="0" algn="l" defTabSz="914400" rtl="0" eaLnBrk="1" fontAlgn="auto" latinLnBrk="0" hangingPunct="1">
+              <a:lnSpc>
+                <a:spcPct val="100000"/>
+              </a:lnSpc>
+              <a:spcBef>
+                <a:spcPts val="0"/>
+              </a:spcBef>
+              <a:spcAft>
+                <a:spcPts val="0"/>
+              </a:spcAft>
+              <a:buClrTx/>
+              <a:buSzTx/>
+              <a:buFontTx/>
+              <a:buNone/>
+              <a:tabLst/>
+              <a:defRPr/>
+            </a:pPr>
+            <a:r>
+              <a:rPr lang="en-US" dirty="0">
+                <a:sym typeface="Wingdings" panose="05000000000000000000" pitchFamily="2" charset="2"/>
+              </a:rPr>
+              <a:t> User importance:</a:t>
+            </a:r>
+          </a:p>
+          <a:p>
+            <a:pPr marL="171450" indent="-171450">
+              <a:buFontTx/>
+              <a:buChar char="-"/>
+            </a:pPr>
+            <a:r>
+              <a:rPr lang="en-US" dirty="0">
+                <a:sym typeface="Wingdings" panose="05000000000000000000" pitchFamily="2" charset="2"/>
+              </a:rPr>
+              <a:t>Disparity ranking comparison</a:t>
+            </a:r>
+          </a:p>
+          <a:p>
+            <a:pPr marL="171450" indent="-171450">
+              <a:buFontTx/>
+              <a:buChar char="-"/>
+            </a:pPr>
+            <a:endParaRPr lang="en-US" dirty="0">
+              <a:sym typeface="Wingdings" panose="05000000000000000000" pitchFamily="2" charset="2"/>
+            </a:endParaRPr>
+          </a:p>
+          <a:p>
+            <a:pPr marL="0" marR="0" lvl="0" indent="0" algn="l" defTabSz="914400" rtl="0" eaLnBrk="1" fontAlgn="auto" latinLnBrk="0" hangingPunct="1">
+              <a:lnSpc>
+                <a:spcPct val="100000"/>
+              </a:lnSpc>
+              <a:spcBef>
+                <a:spcPts val="0"/>
+              </a:spcBef>
+              <a:spcAft>
+                <a:spcPts val="0"/>
+              </a:spcAft>
+              <a:buClrTx/>
+              <a:buSzTx/>
+              <a:buFontTx/>
+              <a:buNone/>
+              <a:tabLst/>
+              <a:defRPr/>
+            </a:pPr>
+            <a:r>
+              <a:rPr lang="en-US" dirty="0">
+                <a:sym typeface="Wingdings" panose="05000000000000000000" pitchFamily="2" charset="2"/>
+              </a:rPr>
+              <a:t> Collective importance:</a:t>
+            </a:r>
+          </a:p>
+          <a:p>
+            <a:pPr marL="171450" indent="-171450">
+              <a:buFontTx/>
+              <a:buChar char="-"/>
+            </a:pPr>
+            <a:r>
+              <a:rPr lang="en-US" dirty="0">
+                <a:sym typeface="Wingdings" panose="05000000000000000000" pitchFamily="2" charset="2"/>
+              </a:rPr>
+              <a:t>Distress ranking comparison</a:t>
+            </a:r>
           </a:p>
         </p:txBody>
       </p:sp>
@@ -5624,7 +5096,490 @@
           <a:p>
             <a:fld id="{3D19D2C4-D801-4083-8F60-14491AD78394}" type="slidenum">
               <a:rPr lang="fr-BE" smtClean="0"/>
+              <a:t>26</a:t>
+            </a:fld>
+            <a:endParaRPr lang="fr-BE"/>
+          </a:p>
+        </p:txBody>
+      </p:sp>
+    </p:spTree>
+    <p:extLst>
+      <p:ext uri="{BB962C8B-B14F-4D97-AF65-F5344CB8AC3E}">
+        <p14:creationId xmlns:p14="http://schemas.microsoft.com/office/powerpoint/2010/main" val="203907506"/>
+      </p:ext>
+    </p:extLst>
+  </p:cSld>
+  <p:clrMapOvr>
+    <a:masterClrMapping/>
+  </p:clrMapOvr>
+</p:notes>
+</file>
+
+<file path=ppt/notesSlides/notesSlide27.xml><?xml version="1.0" encoding="utf-8"?>
+<p:notes xmlns:a="http://schemas.openxmlformats.org/drawingml/2006/main" xmlns:r="http://schemas.openxmlformats.org/officeDocument/2006/relationships" xmlns:p="http://schemas.openxmlformats.org/presentationml/2006/main">
+  <p:cSld>
+    <p:spTree>
+      <p:nvGrpSpPr>
+        <p:cNvPr id="1" name=""/>
+        <p:cNvGrpSpPr/>
+        <p:nvPr/>
+      </p:nvGrpSpPr>
+      <p:grpSpPr>
+        <a:xfrm>
+          <a:off x="0" y="0"/>
+          <a:ext cx="0" cy="0"/>
+          <a:chOff x="0" y="0"/>
+          <a:chExt cx="0" cy="0"/>
+        </a:xfrm>
+      </p:grpSpPr>
+      <p:sp>
+        <p:nvSpPr>
+          <p:cNvPr id="2" name="Slide Image Placeholder 1"/>
+          <p:cNvSpPr>
+            <a:spLocks noGrp="1" noRot="1" noChangeAspect="1"/>
+          </p:cNvSpPr>
+          <p:nvPr>
+            <p:ph type="sldImg"/>
+          </p:nvPr>
+        </p:nvSpPr>
+        <p:spPr/>
+      </p:sp>
+      <p:sp>
+        <p:nvSpPr>
+          <p:cNvPr id="3" name="Notes Placeholder 2"/>
+          <p:cNvSpPr>
+            <a:spLocks noGrp="1"/>
+          </p:cNvSpPr>
+          <p:nvPr>
+            <p:ph type="body" idx="1"/>
+          </p:nvPr>
+        </p:nvSpPr>
+        <p:spPr/>
+        <p:txBody>
+          <a:bodyPr/>
+          <a:lstStyle/>
+          <a:p>
+            <a:pPr marL="0" indent="0">
+              <a:buNone/>
+            </a:pPr>
+            <a:endParaRPr lang="en-US" dirty="0"/>
+          </a:p>
+          <a:p>
+            <a:pPr marL="0" marR="0" lvl="0" indent="0" algn="l" defTabSz="914400" rtl="0" eaLnBrk="1" fontAlgn="auto" latinLnBrk="0" hangingPunct="1">
+              <a:lnSpc>
+                <a:spcPct val="100000"/>
+              </a:lnSpc>
+              <a:spcBef>
+                <a:spcPts val="0"/>
+              </a:spcBef>
+              <a:spcAft>
+                <a:spcPts val="0"/>
+              </a:spcAft>
+              <a:buClrTx/>
+              <a:buSzTx/>
+              <a:buFontTx/>
+              <a:buNone/>
+              <a:tabLst/>
+              <a:defRPr/>
+            </a:pPr>
+            <a:r>
+              <a:rPr lang="en-US" dirty="0"/>
+              <a:t>1) </a:t>
+            </a:r>
+            <a:r>
+              <a:rPr lang="en-US" dirty="0">
+                <a:sym typeface="Wingdings" panose="05000000000000000000" pitchFamily="2" charset="2"/>
+              </a:rPr>
+              <a:t>Interconnect all possible modes of transport including bikes and walks.</a:t>
+            </a:r>
+            <a:endParaRPr lang="en-US" dirty="0"/>
+          </a:p>
+          <a:p>
+            <a:pPr marL="0" indent="0">
+              <a:buNone/>
+            </a:pPr>
+            <a:endParaRPr lang="en-US" dirty="0"/>
+          </a:p>
+          <a:p>
+            <a:pPr marL="0" indent="0">
+              <a:buNone/>
+            </a:pPr>
+            <a:endParaRPr lang="en-US" dirty="0"/>
+          </a:p>
+          <a:p>
+            <a:pPr marL="0" indent="0">
+              <a:buNone/>
+            </a:pPr>
+            <a:r>
+              <a:rPr lang="en-US" dirty="0"/>
+              <a:t>2) Use ML models for predictions of:</a:t>
+            </a:r>
+          </a:p>
+          <a:p>
+            <a:pPr marL="228600" indent="-228600">
+              <a:buAutoNum type="arabicParenR"/>
+            </a:pPr>
+            <a:endParaRPr lang="en-US" dirty="0"/>
+          </a:p>
+          <a:p>
+            <a:pPr marL="171450" indent="-171450">
+              <a:buFont typeface="Wingdings" panose="05000000000000000000" pitchFamily="2" charset="2"/>
+              <a:buChar char="à"/>
+            </a:pPr>
+            <a:r>
+              <a:rPr lang="en-US" dirty="0"/>
+              <a:t>TRAFFIC: Passenger flow: </a:t>
+            </a:r>
+            <a:r>
+              <a:rPr lang="en-US" b="0" i="0" dirty="0">
+                <a:solidFill>
+                  <a:srgbClr val="24292F"/>
+                </a:solidFill>
+                <a:effectLst/>
+                <a:latin typeface="-apple-system"/>
+              </a:rPr>
+              <a:t>From network lens (keeping passenger anonymity) , use more data (daily events) to more accurately understand why traffic is generated in each segments;</a:t>
+            </a:r>
+          </a:p>
+          <a:p>
+            <a:pPr marL="171450" indent="-171450">
+              <a:buFont typeface="Wingdings" panose="05000000000000000000" pitchFamily="2" charset="2"/>
+              <a:buChar char="à"/>
+            </a:pPr>
+            <a:endParaRPr lang="en-US" b="0" i="0" dirty="0">
+              <a:solidFill>
+                <a:srgbClr val="24292F"/>
+              </a:solidFill>
+              <a:effectLst/>
+              <a:latin typeface="-apple-system"/>
+            </a:endParaRPr>
+          </a:p>
+          <a:p>
+            <a:pPr marL="171450" indent="-171450">
+              <a:buFont typeface="Wingdings" panose="05000000000000000000" pitchFamily="2" charset="2"/>
+              <a:buChar char="à"/>
+            </a:pPr>
+            <a:r>
+              <a:rPr lang="en-US" b="0" i="0" dirty="0">
+                <a:solidFill>
+                  <a:srgbClr val="24292F"/>
+                </a:solidFill>
+                <a:effectLst/>
+                <a:latin typeface="-apple-system"/>
+              </a:rPr>
+              <a:t>OPEX: Predict disruptions and its impact considering forecasted passenger traffic to optimize maintenance planning.</a:t>
+            </a:r>
+          </a:p>
+          <a:p>
+            <a:pPr marL="171450" indent="-171450">
+              <a:buFont typeface="Wingdings" panose="05000000000000000000" pitchFamily="2" charset="2"/>
+              <a:buChar char="à"/>
+            </a:pPr>
+            <a:endParaRPr lang="en-US" b="0" i="0" dirty="0">
+              <a:solidFill>
+                <a:srgbClr val="24292F"/>
+              </a:solidFill>
+              <a:effectLst/>
+              <a:latin typeface="-apple-system"/>
+            </a:endParaRPr>
+          </a:p>
+          <a:p>
+            <a:pPr marL="171450" marR="0" lvl="0" indent="-171450" algn="l" defTabSz="914400" rtl="0" eaLnBrk="1" fontAlgn="auto" latinLnBrk="0" hangingPunct="1">
+              <a:lnSpc>
+                <a:spcPct val="100000"/>
+              </a:lnSpc>
+              <a:spcBef>
+                <a:spcPts val="0"/>
+              </a:spcBef>
+              <a:spcAft>
+                <a:spcPts val="0"/>
+              </a:spcAft>
+              <a:buClrTx/>
+              <a:buSzTx/>
+              <a:buFont typeface="Wingdings" panose="05000000000000000000" pitchFamily="2" charset="2"/>
+              <a:buChar char="à"/>
+              <a:tabLst/>
+              <a:defRPr/>
+            </a:pPr>
+            <a:r>
+              <a:rPr lang="en-US" b="0" i="0" dirty="0">
+                <a:solidFill>
+                  <a:srgbClr val="24292F"/>
+                </a:solidFill>
+                <a:effectLst/>
+                <a:latin typeface="-apple-system"/>
+              </a:rPr>
+              <a:t>Create a timetable dynamically tailored that optimize infra-structure towards the commuters needs.</a:t>
+            </a:r>
+          </a:p>
+          <a:p>
+            <a:pPr marL="171450" indent="-171450">
+              <a:buFont typeface="Wingdings" panose="05000000000000000000" pitchFamily="2" charset="2"/>
+              <a:buChar char="à"/>
+            </a:pPr>
+            <a:endParaRPr lang="en-US" b="0" i="0" dirty="0">
+              <a:solidFill>
+                <a:srgbClr val="24292F"/>
+              </a:solidFill>
+              <a:effectLst/>
+              <a:latin typeface="-apple-system"/>
+            </a:endParaRPr>
+          </a:p>
+          <a:p>
+            <a:pPr marL="171450" indent="-171450">
+              <a:buFont typeface="Wingdings" panose="05000000000000000000" pitchFamily="2" charset="2"/>
+              <a:buChar char="à"/>
+            </a:pPr>
+            <a:r>
+              <a:rPr lang="en-US" b="0" i="0" dirty="0">
+                <a:solidFill>
+                  <a:srgbClr val="24292F"/>
+                </a:solidFill>
+                <a:effectLst/>
+                <a:latin typeface="-apple-system"/>
+              </a:rPr>
+              <a:t>CAPEX: More maintenance, less disruptions, less need for redundancy and more investment express lanes (study of origin and destination). </a:t>
+            </a:r>
+          </a:p>
+          <a:p>
+            <a:pPr marL="171450" indent="-171450">
+              <a:buFont typeface="Wingdings" panose="05000000000000000000" pitchFamily="2" charset="2"/>
+              <a:buChar char="à"/>
+            </a:pPr>
+            <a:endParaRPr lang="en-US" b="0" i="0" dirty="0">
+              <a:solidFill>
+                <a:srgbClr val="24292F"/>
+              </a:solidFill>
+              <a:effectLst/>
+              <a:latin typeface="-apple-system"/>
+            </a:endParaRPr>
+          </a:p>
+          <a:p>
+            <a:pPr marL="171450" indent="-171450">
+              <a:buFont typeface="Wingdings" panose="05000000000000000000" pitchFamily="2" charset="2"/>
+              <a:buChar char="à"/>
+            </a:pPr>
+            <a:endParaRPr lang="en-US" b="0" i="0" dirty="0">
+              <a:solidFill>
+                <a:srgbClr val="24292F"/>
+              </a:solidFill>
+              <a:effectLst/>
+              <a:latin typeface="-apple-system"/>
+            </a:endParaRPr>
+          </a:p>
+          <a:p>
+            <a:pPr marL="0" indent="0">
+              <a:buFont typeface="Wingdings" panose="05000000000000000000" pitchFamily="2" charset="2"/>
+              <a:buNone/>
+            </a:pPr>
+            <a:endParaRPr lang="en-US" b="0" i="0" dirty="0">
+              <a:solidFill>
+                <a:srgbClr val="24292F"/>
+              </a:solidFill>
+              <a:effectLst/>
+              <a:latin typeface="-apple-system"/>
+            </a:endParaRPr>
+          </a:p>
+          <a:p>
+            <a:pPr marL="171450" indent="-171450">
+              <a:buFont typeface="Wingdings" panose="05000000000000000000" pitchFamily="2" charset="2"/>
+              <a:buChar char="à"/>
+            </a:pPr>
+            <a:endParaRPr lang="en-US" b="0" i="0" dirty="0">
+              <a:solidFill>
+                <a:srgbClr val="24292F"/>
+              </a:solidFill>
+              <a:effectLst/>
+              <a:latin typeface="-apple-system"/>
+            </a:endParaRPr>
+          </a:p>
+        </p:txBody>
+      </p:sp>
+      <p:sp>
+        <p:nvSpPr>
+          <p:cNvPr id="4" name="Slide Number Placeholder 3"/>
+          <p:cNvSpPr>
+            <a:spLocks noGrp="1"/>
+          </p:cNvSpPr>
+          <p:nvPr>
+            <p:ph type="sldNum" sz="quarter" idx="5"/>
+          </p:nvPr>
+        </p:nvSpPr>
+        <p:spPr/>
+        <p:txBody>
+          <a:bodyPr/>
+          <a:lstStyle/>
+          <a:p>
+            <a:fld id="{3D19D2C4-D801-4083-8F60-14491AD78394}" type="slidenum">
+              <a:rPr lang="fr-BE" smtClean="0"/>
               <a:t>27</a:t>
+            </a:fld>
+            <a:endParaRPr lang="fr-BE"/>
+          </a:p>
+        </p:txBody>
+      </p:sp>
+    </p:spTree>
+    <p:extLst>
+      <p:ext uri="{BB962C8B-B14F-4D97-AF65-F5344CB8AC3E}">
+        <p14:creationId xmlns:p14="http://schemas.microsoft.com/office/powerpoint/2010/main" val="2618829657"/>
+      </p:ext>
+    </p:extLst>
+  </p:cSld>
+  <p:clrMapOvr>
+    <a:masterClrMapping/>
+  </p:clrMapOvr>
+</p:notes>
+</file>
+
+<file path=ppt/notesSlides/notesSlide28.xml><?xml version="1.0" encoding="utf-8"?>
+<p:notes xmlns:a="http://schemas.openxmlformats.org/drawingml/2006/main" xmlns:r="http://schemas.openxmlformats.org/officeDocument/2006/relationships" xmlns:p="http://schemas.openxmlformats.org/presentationml/2006/main">
+  <p:cSld>
+    <p:spTree>
+      <p:nvGrpSpPr>
+        <p:cNvPr id="1" name=""/>
+        <p:cNvGrpSpPr/>
+        <p:nvPr/>
+      </p:nvGrpSpPr>
+      <p:grpSpPr>
+        <a:xfrm>
+          <a:off x="0" y="0"/>
+          <a:ext cx="0" cy="0"/>
+          <a:chOff x="0" y="0"/>
+          <a:chExt cx="0" cy="0"/>
+        </a:xfrm>
+      </p:grpSpPr>
+      <p:sp>
+        <p:nvSpPr>
+          <p:cNvPr id="2" name="Slide Image Placeholder 1"/>
+          <p:cNvSpPr>
+            <a:spLocks noGrp="1" noRot="1" noChangeAspect="1"/>
+          </p:cNvSpPr>
+          <p:nvPr>
+            <p:ph type="sldImg"/>
+          </p:nvPr>
+        </p:nvSpPr>
+        <p:spPr/>
+      </p:sp>
+      <p:sp>
+        <p:nvSpPr>
+          <p:cNvPr id="3" name="Notes Placeholder 2"/>
+          <p:cNvSpPr>
+            <a:spLocks noGrp="1"/>
+          </p:cNvSpPr>
+          <p:nvPr>
+            <p:ph type="body" idx="1"/>
+          </p:nvPr>
+        </p:nvSpPr>
+        <p:spPr/>
+        <p:txBody>
+          <a:bodyPr/>
+          <a:lstStyle/>
+          <a:p>
+            <a:r>
+              <a:rPr lang="en-US" dirty="0"/>
+              <a:t>What is a efficient network = minimizes travel time and costs (vehicles, energy, emissions, price) assuring passenger “comfort” and “prompt mobility”.</a:t>
+            </a:r>
+          </a:p>
+          <a:p>
+            <a:pPr marL="0" marR="0" lvl="0" indent="0" algn="l" defTabSz="914400" rtl="0" eaLnBrk="1" fontAlgn="auto" latinLnBrk="0" hangingPunct="1">
+              <a:lnSpc>
+                <a:spcPct val="100000"/>
+              </a:lnSpc>
+              <a:spcBef>
+                <a:spcPts val="0"/>
+              </a:spcBef>
+              <a:spcAft>
+                <a:spcPts val="0"/>
+              </a:spcAft>
+              <a:buClrTx/>
+              <a:buSzTx/>
+              <a:buFontTx/>
+              <a:buNone/>
+              <a:tabLst/>
+              <a:defRPr/>
+            </a:pPr>
+            <a:endParaRPr lang="en-US" dirty="0"/>
+          </a:p>
+          <a:p>
+            <a:r>
+              <a:rPr lang="en-US" dirty="0"/>
+              <a:t>It is important to mention that a more efficient network inherently requires more maintenance.</a:t>
+            </a:r>
+          </a:p>
+          <a:p>
+            <a:endParaRPr lang="en-US" dirty="0"/>
+          </a:p>
+          <a:p>
+            <a:r>
+              <a:rPr lang="en-US" dirty="0"/>
+              <a:t>It is not necessary related to its size. But is related to how it was projected to assist the commuters.</a:t>
+            </a:r>
+          </a:p>
+          <a:p>
+            <a:endParaRPr lang="en-US" dirty="0"/>
+          </a:p>
+          <a:p>
+            <a:r>
+              <a:rPr lang="en-US" dirty="0"/>
+              <a:t>In a network without disruption, for instance, it would be a waste invest in redundancies. More money could be destinated to reduce travels time. </a:t>
+            </a:r>
+          </a:p>
+          <a:p>
+            <a:endParaRPr lang="en-US" dirty="0"/>
+          </a:p>
+          <a:p>
+            <a:r>
+              <a:rPr lang="en-US" dirty="0"/>
+              <a:t>In a real world, however, no disruptions comes with a high maintenance price. </a:t>
+            </a:r>
+          </a:p>
+          <a:p>
+            <a:endParaRPr lang="en-US" dirty="0"/>
+          </a:p>
+          <a:p>
+            <a:r>
+              <a:rPr lang="en-US" dirty="0"/>
+              <a:t>The balance between effectiveness and robustness is a major question when comes down to a such important factor of the society evolvement.</a:t>
+            </a:r>
+          </a:p>
+          <a:p>
+            <a:endParaRPr lang="en-US" dirty="0"/>
+          </a:p>
+          <a:p>
+            <a:endParaRPr lang="en-US" dirty="0"/>
+          </a:p>
+          <a:p>
+            <a:endParaRPr lang="en-US" dirty="0"/>
+          </a:p>
+          <a:p>
+            <a:endParaRPr lang="en-US" dirty="0"/>
+          </a:p>
+          <a:p>
+            <a:endParaRPr lang="en-US" dirty="0"/>
+          </a:p>
+          <a:p>
+            <a:endParaRPr lang="en-US" dirty="0"/>
+          </a:p>
+        </p:txBody>
+      </p:sp>
+      <p:sp>
+        <p:nvSpPr>
+          <p:cNvPr id="4" name="Slide Number Placeholder 3"/>
+          <p:cNvSpPr>
+            <a:spLocks noGrp="1"/>
+          </p:cNvSpPr>
+          <p:nvPr>
+            <p:ph type="sldNum" sz="quarter" idx="5"/>
+          </p:nvPr>
+        </p:nvSpPr>
+        <p:spPr/>
+        <p:txBody>
+          <a:bodyPr/>
+          <a:lstStyle/>
+          <a:p>
+            <a:fld id="{3D19D2C4-D801-4083-8F60-14491AD78394}" type="slidenum">
+              <a:rPr lang="fr-BE" smtClean="0"/>
+              <a:t>28</a:t>
             </a:fld>
             <a:endParaRPr lang="fr-BE"/>
           </a:p>
@@ -5689,6 +5644,12 @@
           <a:p>
             <a:r>
               <a:rPr lang="en-US" dirty="0"/>
+              <a:t>TODO</a:t>
+            </a:r>
+          </a:p>
+          <a:p>
+            <a:r>
+              <a:rPr lang="en-US" dirty="0"/>
               <a:t>“Before anything, I discovered that plan and operate an efficient transport system demands much more than what takes to use it.”</a:t>
             </a:r>
           </a:p>
@@ -5944,7 +5905,7 @@
     </p:spTree>
     <p:extLst>
       <p:ext uri="{BB962C8B-B14F-4D97-AF65-F5344CB8AC3E}">
-        <p14:creationId xmlns:p14="http://schemas.microsoft.com/office/powerpoint/2010/main" val="2973285418"/>
+        <p14:creationId xmlns:p14="http://schemas.microsoft.com/office/powerpoint/2010/main" val="66036145"/>
       </p:ext>
     </p:extLst>
   </p:cSld>
@@ -5998,9 +5959,32 @@
           <a:bodyPr/>
           <a:lstStyle/>
           <a:p>
-            <a:r>
-              <a:rPr lang="en-US" dirty="0"/>
-              <a:t>What I have is results of trials which allows to compares different perspectives of a same transport system.</a:t>
+            <a:pPr marL="0" marR="0" lvl="0" indent="0" algn="l" defTabSz="914400" rtl="0" eaLnBrk="1" fontAlgn="auto" latinLnBrk="0" hangingPunct="1">
+              <a:lnSpc>
+                <a:spcPct val="100000"/>
+              </a:lnSpc>
+              <a:spcBef>
+                <a:spcPts val="0"/>
+              </a:spcBef>
+              <a:spcAft>
+                <a:spcPts val="0"/>
+              </a:spcAft>
+              <a:buClrTx/>
+              <a:buSzTx/>
+              <a:buFontTx/>
+              <a:buNone/>
+              <a:tabLst/>
+              <a:defRPr/>
+            </a:pPr>
+            <a:r>
+              <a:rPr lang="en-US" dirty="0"/>
+              <a:t>TODO</a:t>
+            </a:r>
+          </a:p>
+          <a:p>
+            <a:r>
+              <a:rPr lang="en-US" dirty="0"/>
+              <a:t>“Before anything, I discovered that plan and operate an efficient transport system demands much more than what takes to use it.”</a:t>
             </a:r>
           </a:p>
           <a:p>
@@ -6009,7 +5993,7 @@
           <a:p>
             <a:r>
               <a:rPr lang="en-US" dirty="0"/>
-              <a:t>How it behaves in accordance to the day of the week or the time of the day. In other words, how edges relevance change accordingly the amount of people and disposal vehicles.</a:t>
+              <a:t>For that you need to thing in two things: TRAFFIC x ENGINEERING;</a:t>
             </a:r>
           </a:p>
           <a:p>
@@ -6018,53 +6002,213 @@
           <a:p>
             <a:r>
               <a:rPr lang="en-US" dirty="0"/>
-              <a:t>The speed is also relevant, but it will variate. The numerous interval_id map variety of travel time that a vehicle can reach it destiny based on the weekday and time of the day. I apologize for simplifying some of the meticulous information made available for the TFL.</a:t>
-            </a:r>
-          </a:p>
-          <a:p>
+              <a:t>Then in three: </a:t>
+            </a:r>
+            <a:r>
+              <a:rPr lang="en-US" dirty="0">
+                <a:sym typeface="Wingdings" panose="05000000000000000000" pitchFamily="2" charset="2"/>
+              </a:rPr>
+              <a:t>Traffic  (Infra) x (Operations)</a:t>
+            </a:r>
             <a:endParaRPr lang="en-US" dirty="0"/>
           </a:p>
           <a:p>
-            <a:r>
-              <a:rPr lang="en-US" dirty="0"/>
-              <a:t>Those simplification will be detailed in the Data chapter as well as the approaches used to encounter the ranks in the methodology section. </a:t>
-            </a:r>
-          </a:p>
-          <a:p>
-            <a:endParaRPr lang="en-US" dirty="0"/>
-          </a:p>
-          <a:p>
-            <a:r>
-              <a:rPr lang="en-US" dirty="0"/>
-              <a:t>Later I will present and discuss the similarities and discrepancy of ranking methods and the transport system traffic variation. Finally, I also would like to present following steps and comment of the challenge of providing a efficient &amp; equalitarian transportation service.</a:t>
-            </a:r>
-          </a:p>
-          <a:p>
-            <a:endParaRPr lang="en-US" dirty="0"/>
-          </a:p>
-          <a:p>
-            <a:endParaRPr lang="en-US" dirty="0"/>
-          </a:p>
-          <a:p>
-            <a:endParaRPr lang="en-US" dirty="0"/>
-          </a:p>
-          <a:p>
-            <a:endParaRPr lang="en-US" dirty="0"/>
-          </a:p>
-          <a:p>
-            <a:endParaRPr lang="en-US" dirty="0"/>
-          </a:p>
-          <a:p>
-            <a:endParaRPr lang="en-US" dirty="0"/>
-          </a:p>
-          <a:p>
-            <a:endParaRPr lang="en-US" dirty="0"/>
-          </a:p>
-          <a:p>
-            <a:r>
-              <a:rPr lang="en-US" dirty="0"/>
+            <a:endParaRPr lang="fr-BE" dirty="0"/>
+          </a:p>
+          <a:p>
+            <a:r>
+              <a:rPr lang="fr-BE" dirty="0"/>
+              <a:t>INFRA: </a:t>
+            </a:r>
+            <a:r>
+              <a:rPr lang="fr-BE" dirty="0" err="1"/>
+              <a:t>what</a:t>
+            </a:r>
+            <a:r>
+              <a:rPr lang="fr-BE" dirty="0"/>
               <a:t> </a:t>
             </a:r>
+            <a:r>
+              <a:rPr lang="fr-BE" dirty="0" err="1"/>
+              <a:t>is</a:t>
+            </a:r>
+            <a:r>
+              <a:rPr lang="fr-BE" dirty="0"/>
+              <a:t> the best possible </a:t>
+            </a:r>
+            <a:r>
+              <a:rPr lang="fr-BE" dirty="0" err="1"/>
+              <a:t>infra-structure</a:t>
+            </a:r>
+            <a:r>
+              <a:rPr lang="fr-BE" dirty="0"/>
+              <a:t> to serve the public?</a:t>
+            </a:r>
+          </a:p>
+          <a:p>
+            <a:endParaRPr lang="fr-BE" dirty="0"/>
+          </a:p>
+          <a:p>
+            <a:r>
+              <a:rPr lang="fr-BE" dirty="0"/>
+              <a:t>OPERATIONS: </a:t>
+            </a:r>
+            <a:r>
+              <a:rPr lang="fr-BE" dirty="0" err="1"/>
+              <a:t>what</a:t>
+            </a:r>
+            <a:r>
+              <a:rPr lang="fr-BE" dirty="0"/>
+              <a:t> </a:t>
+            </a:r>
+            <a:r>
+              <a:rPr lang="fr-BE" dirty="0" err="1"/>
+              <a:t>is</a:t>
+            </a:r>
+            <a:r>
+              <a:rPr lang="fr-BE" dirty="0"/>
+              <a:t> the best </a:t>
+            </a:r>
+            <a:r>
+              <a:rPr lang="fr-BE" dirty="0" err="1"/>
+              <a:t>strategy</a:t>
+            </a:r>
+            <a:r>
+              <a:rPr lang="fr-BE" dirty="0"/>
+              <a:t> to </a:t>
+            </a:r>
+            <a:r>
+              <a:rPr lang="fr-BE" dirty="0" err="1"/>
+              <a:t>optimizes</a:t>
+            </a:r>
+            <a:r>
+              <a:rPr lang="fr-BE" dirty="0"/>
+              <a:t> the infra-</a:t>
+            </a:r>
+            <a:r>
+              <a:rPr lang="fr-BE" dirty="0" err="1"/>
+              <a:t>strutures</a:t>
+            </a:r>
+            <a:r>
+              <a:rPr lang="fr-BE" dirty="0"/>
+              <a:t> best </a:t>
+            </a:r>
+            <a:r>
+              <a:rPr lang="fr-BE" dirty="0" err="1"/>
+              <a:t>serving</a:t>
+            </a:r>
+            <a:r>
+              <a:rPr lang="fr-BE" dirty="0"/>
+              <a:t> the public?</a:t>
+            </a:r>
+          </a:p>
+          <a:p>
+            <a:endParaRPr lang="fr-BE" dirty="0"/>
+          </a:p>
+          <a:p>
+            <a:r>
+              <a:rPr lang="fr-BE" dirty="0"/>
+              <a:t>I can </a:t>
+            </a:r>
+            <a:r>
+              <a:rPr lang="fr-BE" dirty="0" err="1"/>
+              <a:t>already</a:t>
+            </a:r>
+            <a:r>
+              <a:rPr lang="fr-BE" dirty="0"/>
+              <a:t> tell </a:t>
+            </a:r>
+            <a:r>
+              <a:rPr lang="fr-BE" dirty="0" err="1"/>
+              <a:t>you</a:t>
+            </a:r>
+            <a:r>
+              <a:rPr lang="fr-BE" dirty="0"/>
+              <a:t> </a:t>
+            </a:r>
+            <a:r>
+              <a:rPr lang="fr-BE" dirty="0" err="1"/>
+              <a:t>that</a:t>
+            </a:r>
+            <a:r>
+              <a:rPr lang="fr-BE" dirty="0"/>
+              <a:t> I do not have </a:t>
+            </a:r>
+            <a:r>
+              <a:rPr lang="fr-BE" dirty="0" err="1"/>
+              <a:t>those</a:t>
+            </a:r>
+            <a:r>
+              <a:rPr lang="fr-BE" dirty="0"/>
+              <a:t> </a:t>
+            </a:r>
+            <a:r>
+              <a:rPr lang="fr-BE" dirty="0" err="1"/>
+              <a:t>answers</a:t>
+            </a:r>
+            <a:r>
+              <a:rPr lang="fr-BE" dirty="0"/>
+              <a:t>. </a:t>
+            </a:r>
+          </a:p>
+          <a:p>
+            <a:endParaRPr lang="en-GB" noProof="0" dirty="0"/>
+          </a:p>
+          <a:p>
+            <a:r>
+              <a:rPr lang="fr-BE" dirty="0"/>
+              <a:t>A </a:t>
+            </a:r>
+            <a:r>
+              <a:rPr lang="fr-BE" dirty="0" err="1"/>
+              <a:t>fully</a:t>
+            </a:r>
+            <a:r>
+              <a:rPr lang="fr-BE" dirty="0"/>
+              <a:t> </a:t>
+            </a:r>
+            <a:r>
+              <a:rPr lang="fr-BE" dirty="0" err="1"/>
+              <a:t>connected</a:t>
+            </a:r>
+            <a:r>
+              <a:rPr lang="fr-BE" dirty="0"/>
+              <a:t> Net </a:t>
+            </a:r>
+            <a:r>
+              <a:rPr lang="fr-BE" dirty="0" err="1"/>
+              <a:t>is</a:t>
+            </a:r>
+            <a:r>
+              <a:rPr lang="fr-BE" dirty="0"/>
+              <a:t> the </a:t>
+            </a:r>
+            <a:r>
+              <a:rPr lang="fr-BE" dirty="0" err="1"/>
+              <a:t>most</a:t>
+            </a:r>
+            <a:r>
+              <a:rPr lang="fr-BE" dirty="0"/>
+              <a:t> efficient one. </a:t>
+            </a:r>
+            <a:r>
+              <a:rPr lang="fr-BE" dirty="0" err="1"/>
+              <a:t>However</a:t>
+            </a:r>
+            <a:r>
+              <a:rPr lang="fr-BE" dirty="0"/>
+              <a:t>, It has the </a:t>
+            </a:r>
+            <a:r>
+              <a:rPr lang="en-GB" noProof="0" dirty="0" err="1"/>
+              <a:t>highiest</a:t>
+            </a:r>
+            <a:r>
+              <a:rPr lang="fr-BE" dirty="0"/>
+              <a:t> stress potentiel. </a:t>
+            </a:r>
+          </a:p>
+          <a:p>
             <a:endParaRPr lang="fr-BE" dirty="0"/>
           </a:p>
         </p:txBody>
@@ -6095,7 +6239,7 @@
     </p:spTree>
     <p:extLst>
       <p:ext uri="{BB962C8B-B14F-4D97-AF65-F5344CB8AC3E}">
-        <p14:creationId xmlns:p14="http://schemas.microsoft.com/office/powerpoint/2010/main" val="147694252"/>
+        <p14:creationId xmlns:p14="http://schemas.microsoft.com/office/powerpoint/2010/main" val="2973285418"/>
       </p:ext>
     </p:extLst>
   </p:cSld>
@@ -6149,9 +6293,95 @@
           <a:bodyPr/>
           <a:lstStyle/>
           <a:p>
-            <a:r>
-              <a:rPr lang="en-US" dirty="0"/>
-              <a:t>Abou the data, chapter</a:t>
+            <a:pPr marL="0" marR="0" lvl="0" indent="0" algn="l" defTabSz="914400" rtl="0" eaLnBrk="1" fontAlgn="auto" latinLnBrk="0" hangingPunct="1">
+              <a:lnSpc>
+                <a:spcPct val="100000"/>
+              </a:lnSpc>
+              <a:spcBef>
+                <a:spcPts val="0"/>
+              </a:spcBef>
+              <a:spcAft>
+                <a:spcPts val="0"/>
+              </a:spcAft>
+              <a:buClrTx/>
+              <a:buSzTx/>
+              <a:buFontTx/>
+              <a:buNone/>
+              <a:tabLst/>
+              <a:defRPr/>
+            </a:pPr>
+            <a:r>
+              <a:rPr lang="en-US" dirty="0"/>
+              <a:t>TODO</a:t>
+            </a:r>
+          </a:p>
+          <a:p>
+            <a:r>
+              <a:rPr lang="en-US" dirty="0"/>
+              <a:t>What I have is results of trials which allows to compares different perspectives of a same transport system.</a:t>
+            </a:r>
+          </a:p>
+          <a:p>
+            <a:endParaRPr lang="en-US" dirty="0"/>
+          </a:p>
+          <a:p>
+            <a:r>
+              <a:rPr lang="en-US" dirty="0"/>
+              <a:t>How it behaves in accordance to the day of the week or the time of the day. In other words, how edges relevance change accordingly the amount of people and disposal vehicles.</a:t>
+            </a:r>
+          </a:p>
+          <a:p>
+            <a:endParaRPr lang="en-US" dirty="0"/>
+          </a:p>
+          <a:p>
+            <a:r>
+              <a:rPr lang="en-US" dirty="0"/>
+              <a:t>The speed is also relevant, but it will variate. The numerous interval_id map variety of travel time that a vehicle can reach it destiny based on the weekday and time of the day. I apologize for simplifying some of the meticulous information made available for the TFL.</a:t>
+            </a:r>
+          </a:p>
+          <a:p>
+            <a:endParaRPr lang="en-US" dirty="0"/>
+          </a:p>
+          <a:p>
+            <a:r>
+              <a:rPr lang="en-US" dirty="0"/>
+              <a:t>Those simplification will be detailed in the Data chapter as well as the approaches used to encounter the ranks in the methodology section. </a:t>
+            </a:r>
+          </a:p>
+          <a:p>
+            <a:endParaRPr lang="en-US" dirty="0"/>
+          </a:p>
+          <a:p>
+            <a:r>
+              <a:rPr lang="en-US" dirty="0"/>
+              <a:t>Later I will present and discuss the similarities and discrepancy of ranking methods and the transport system traffic variation. Finally, I also would like to present following steps and comment of the challenge of providing a efficient &amp; equalitarian transportation service.</a:t>
+            </a:r>
+          </a:p>
+          <a:p>
+            <a:endParaRPr lang="en-US" dirty="0"/>
+          </a:p>
+          <a:p>
+            <a:endParaRPr lang="en-US" dirty="0"/>
+          </a:p>
+          <a:p>
+            <a:endParaRPr lang="en-US" dirty="0"/>
+          </a:p>
+          <a:p>
+            <a:endParaRPr lang="en-US" dirty="0"/>
+          </a:p>
+          <a:p>
+            <a:endParaRPr lang="en-US" dirty="0"/>
+          </a:p>
+          <a:p>
+            <a:endParaRPr lang="en-US" dirty="0"/>
+          </a:p>
+          <a:p>
+            <a:endParaRPr lang="en-US" dirty="0"/>
+          </a:p>
+          <a:p>
+            <a:r>
+              <a:rPr lang="en-US" dirty="0"/>
+              <a:t> </a:t>
             </a:r>
             <a:endParaRPr lang="fr-BE" dirty="0"/>
           </a:p>
@@ -6183,7 +6413,7 @@
     </p:spTree>
     <p:extLst>
       <p:ext uri="{BB962C8B-B14F-4D97-AF65-F5344CB8AC3E}">
-        <p14:creationId xmlns:p14="http://schemas.microsoft.com/office/powerpoint/2010/main" val="3747133136"/>
+        <p14:creationId xmlns:p14="http://schemas.microsoft.com/office/powerpoint/2010/main" val="147694252"/>
       </p:ext>
     </p:extLst>
   </p:cSld>
@@ -6237,6 +6467,29 @@
           <a:bodyPr/>
           <a:lstStyle/>
           <a:p>
+            <a:pPr marL="0" marR="0" lvl="0" indent="0" algn="l" defTabSz="914400" rtl="0" eaLnBrk="1" fontAlgn="auto" latinLnBrk="0" hangingPunct="1">
+              <a:lnSpc>
+                <a:spcPct val="100000"/>
+              </a:lnSpc>
+              <a:spcBef>
+                <a:spcPts val="0"/>
+              </a:spcBef>
+              <a:spcAft>
+                <a:spcPts val="0"/>
+              </a:spcAft>
+              <a:buClrTx/>
+              <a:buSzTx/>
+              <a:buFontTx/>
+              <a:buNone/>
+              <a:tabLst/>
+              <a:defRPr/>
+            </a:pPr>
+            <a:r>
+              <a:rPr lang="en-US" dirty="0"/>
+              <a:t>TODO</a:t>
+            </a:r>
+          </a:p>
+          <a:p>
             <a:r>
               <a:rPr lang="en-US" dirty="0"/>
               <a:t>Abou the data, chapter</a:t>
@@ -6271,7 +6524,7 @@
     </p:spTree>
     <p:extLst>
       <p:ext uri="{BB962C8B-B14F-4D97-AF65-F5344CB8AC3E}">
-        <p14:creationId xmlns:p14="http://schemas.microsoft.com/office/powerpoint/2010/main" val="2739573316"/>
+        <p14:creationId xmlns:p14="http://schemas.microsoft.com/office/powerpoint/2010/main" val="3747133136"/>
       </p:ext>
     </p:extLst>
   </p:cSld>
@@ -6325,6 +6578,29 @@
           <a:bodyPr/>
           <a:lstStyle/>
           <a:p>
+            <a:pPr marL="0" marR="0" lvl="0" indent="0" algn="l" defTabSz="914400" rtl="0" eaLnBrk="1" fontAlgn="auto" latinLnBrk="0" hangingPunct="1">
+              <a:lnSpc>
+                <a:spcPct val="100000"/>
+              </a:lnSpc>
+              <a:spcBef>
+                <a:spcPts val="0"/>
+              </a:spcBef>
+              <a:spcAft>
+                <a:spcPts val="0"/>
+              </a:spcAft>
+              <a:buClrTx/>
+              <a:buSzTx/>
+              <a:buFontTx/>
+              <a:buNone/>
+              <a:tabLst/>
+              <a:defRPr/>
+            </a:pPr>
+            <a:r>
+              <a:rPr lang="en-US" dirty="0"/>
+              <a:t>TODO</a:t>
+            </a:r>
+          </a:p>
+          <a:p>
             <a:r>
               <a:rPr lang="en-US" dirty="0"/>
               <a:t>Abou the data, chapter</a:t>
@@ -6359,7 +6635,7 @@
     </p:spTree>
     <p:extLst>
       <p:ext uri="{BB962C8B-B14F-4D97-AF65-F5344CB8AC3E}">
-        <p14:creationId xmlns:p14="http://schemas.microsoft.com/office/powerpoint/2010/main" val="320994595"/>
+        <p14:creationId xmlns:p14="http://schemas.microsoft.com/office/powerpoint/2010/main" val="2739573316"/>
       </p:ext>
     </p:extLst>
   </p:cSld>
@@ -6413,6 +6689,29 @@
           <a:bodyPr/>
           <a:lstStyle/>
           <a:p>
+            <a:pPr marL="0" marR="0" lvl="0" indent="0" algn="l" defTabSz="914400" rtl="0" eaLnBrk="1" fontAlgn="auto" latinLnBrk="0" hangingPunct="1">
+              <a:lnSpc>
+                <a:spcPct val="100000"/>
+              </a:lnSpc>
+              <a:spcBef>
+                <a:spcPts val="0"/>
+              </a:spcBef>
+              <a:spcAft>
+                <a:spcPts val="0"/>
+              </a:spcAft>
+              <a:buClrTx/>
+              <a:buSzTx/>
+              <a:buFontTx/>
+              <a:buNone/>
+              <a:tabLst/>
+              <a:defRPr/>
+            </a:pPr>
+            <a:r>
+              <a:rPr lang="en-US" dirty="0"/>
+              <a:t>TODO</a:t>
+            </a:r>
+          </a:p>
+          <a:p>
             <a:r>
               <a:rPr lang="en-US" dirty="0"/>
               <a:t>Abou the data, chapter</a:t>
@@ -6447,7 +6746,7 @@
     </p:spTree>
     <p:extLst>
       <p:ext uri="{BB962C8B-B14F-4D97-AF65-F5344CB8AC3E}">
-        <p14:creationId xmlns:p14="http://schemas.microsoft.com/office/powerpoint/2010/main" val="2355241181"/>
+        <p14:creationId xmlns:p14="http://schemas.microsoft.com/office/powerpoint/2010/main" val="320994595"/>
       </p:ext>
     </p:extLst>
   </p:cSld>
@@ -6501,6 +6800,29 @@
           <a:bodyPr/>
           <a:lstStyle/>
           <a:p>
+            <a:pPr marL="0" marR="0" lvl="0" indent="0" algn="l" defTabSz="914400" rtl="0" eaLnBrk="1" fontAlgn="auto" latinLnBrk="0" hangingPunct="1">
+              <a:lnSpc>
+                <a:spcPct val="100000"/>
+              </a:lnSpc>
+              <a:spcBef>
+                <a:spcPts val="0"/>
+              </a:spcBef>
+              <a:spcAft>
+                <a:spcPts val="0"/>
+              </a:spcAft>
+              <a:buClrTx/>
+              <a:buSzTx/>
+              <a:buFontTx/>
+              <a:buNone/>
+              <a:tabLst/>
+              <a:defRPr/>
+            </a:pPr>
+            <a:r>
+              <a:rPr lang="en-US" dirty="0"/>
+              <a:t>TODO</a:t>
+            </a:r>
+          </a:p>
+          <a:p>
             <a:r>
               <a:rPr lang="en-US" dirty="0"/>
               <a:t>Abou the data, chapter</a:t>
@@ -6535,7 +6857,7 @@
     </p:spTree>
     <p:extLst>
       <p:ext uri="{BB962C8B-B14F-4D97-AF65-F5344CB8AC3E}">
-        <p14:creationId xmlns:p14="http://schemas.microsoft.com/office/powerpoint/2010/main" val="1440031773"/>
+        <p14:creationId xmlns:p14="http://schemas.microsoft.com/office/powerpoint/2010/main" val="2355241181"/>
       </p:ext>
     </p:extLst>
   </p:cSld>
@@ -6694,7 +7016,7 @@
           <a:p>
             <a:fld id="{CCC07DD4-E8D6-4581-B1F4-04F48CF9E11E}" type="datetimeFigureOut">
               <a:rPr lang="fr-BE" smtClean="0"/>
-              <a:t>29-10-23</a:t>
+              <a:t>02-11-23</a:t>
             </a:fld>
             <a:endParaRPr lang="fr-BE"/>
           </a:p>
@@ -6894,7 +7216,7 @@
           <a:p>
             <a:fld id="{CCC07DD4-E8D6-4581-B1F4-04F48CF9E11E}" type="datetimeFigureOut">
               <a:rPr lang="fr-BE" smtClean="0"/>
-              <a:t>29-10-23</a:t>
+              <a:t>02-11-23</a:t>
             </a:fld>
             <a:endParaRPr lang="fr-BE"/>
           </a:p>
@@ -7104,7 +7426,7 @@
           <a:p>
             <a:fld id="{CCC07DD4-E8D6-4581-B1F4-04F48CF9E11E}" type="datetimeFigureOut">
               <a:rPr lang="fr-BE" smtClean="0"/>
-              <a:t>29-10-23</a:t>
+              <a:t>02-11-23</a:t>
             </a:fld>
             <a:endParaRPr lang="fr-BE"/>
           </a:p>
@@ -7304,7 +7626,7 @@
           <a:p>
             <a:fld id="{CCC07DD4-E8D6-4581-B1F4-04F48CF9E11E}" type="datetimeFigureOut">
               <a:rPr lang="fr-BE" smtClean="0"/>
-              <a:t>29-10-23</a:t>
+              <a:t>02-11-23</a:t>
             </a:fld>
             <a:endParaRPr lang="fr-BE"/>
           </a:p>
@@ -7580,7 +7902,7 @@
           <a:p>
             <a:fld id="{CCC07DD4-E8D6-4581-B1F4-04F48CF9E11E}" type="datetimeFigureOut">
               <a:rPr lang="fr-BE" smtClean="0"/>
-              <a:t>29-10-23</a:t>
+              <a:t>02-11-23</a:t>
             </a:fld>
             <a:endParaRPr lang="fr-BE"/>
           </a:p>
@@ -7848,7 +8170,7 @@
           <a:p>
             <a:fld id="{CCC07DD4-E8D6-4581-B1F4-04F48CF9E11E}" type="datetimeFigureOut">
               <a:rPr lang="fr-BE" smtClean="0"/>
-              <a:t>29-10-23</a:t>
+              <a:t>02-11-23</a:t>
             </a:fld>
             <a:endParaRPr lang="fr-BE"/>
           </a:p>
@@ -8263,7 +8585,7 @@
           <a:p>
             <a:fld id="{CCC07DD4-E8D6-4581-B1F4-04F48CF9E11E}" type="datetimeFigureOut">
               <a:rPr lang="fr-BE" smtClean="0"/>
-              <a:t>29-10-23</a:t>
+              <a:t>02-11-23</a:t>
             </a:fld>
             <a:endParaRPr lang="fr-BE"/>
           </a:p>
@@ -8405,7 +8727,7 @@
           <a:p>
             <a:fld id="{CCC07DD4-E8D6-4581-B1F4-04F48CF9E11E}" type="datetimeFigureOut">
               <a:rPr lang="fr-BE" smtClean="0"/>
-              <a:t>29-10-23</a:t>
+              <a:t>02-11-23</a:t>
             </a:fld>
             <a:endParaRPr lang="fr-BE"/>
           </a:p>
@@ -8518,7 +8840,7 @@
           <a:p>
             <a:fld id="{CCC07DD4-E8D6-4581-B1F4-04F48CF9E11E}" type="datetimeFigureOut">
               <a:rPr lang="fr-BE" smtClean="0"/>
-              <a:t>29-10-23</a:t>
+              <a:t>02-11-23</a:t>
             </a:fld>
             <a:endParaRPr lang="fr-BE"/>
           </a:p>
@@ -8831,7 +9153,7 @@
           <a:p>
             <a:fld id="{CCC07DD4-E8D6-4581-B1F4-04F48CF9E11E}" type="datetimeFigureOut">
               <a:rPr lang="fr-BE" smtClean="0"/>
-              <a:t>29-10-23</a:t>
+              <a:t>02-11-23</a:t>
             </a:fld>
             <a:endParaRPr lang="fr-BE"/>
           </a:p>
@@ -9120,7 +9442,7 @@
           <a:p>
             <a:fld id="{CCC07DD4-E8D6-4581-B1F4-04F48CF9E11E}" type="datetimeFigureOut">
               <a:rPr lang="fr-BE" smtClean="0"/>
-              <a:t>29-10-23</a:t>
+              <a:t>02-11-23</a:t>
             </a:fld>
             <a:endParaRPr lang="fr-BE"/>
           </a:p>
@@ -9363,7 +9685,7 @@
           <a:p>
             <a:fld id="{CCC07DD4-E8D6-4581-B1F4-04F48CF9E11E}" type="datetimeFigureOut">
               <a:rPr lang="fr-BE" smtClean="0"/>
-              <a:t>29-10-23</a:t>
+              <a:t>02-11-23</a:t>
             </a:fld>
             <a:endParaRPr lang="fr-BE"/>
           </a:p>
@@ -9780,328 +10102,6 @@
           <a:chExt cx="0" cy="0"/>
         </a:xfrm>
       </p:grpSpPr>
-      <p:sp>
-        <p:nvSpPr>
-          <p:cNvPr id="2" name="Title 1">
-            <a:extLst>
-              <a:ext uri="{FF2B5EF4-FFF2-40B4-BE49-F238E27FC236}">
-                <a16:creationId xmlns:a16="http://schemas.microsoft.com/office/drawing/2014/main" id="{1E7D1F5D-346E-488D-89B3-51FC7FC253EC}"/>
-              </a:ext>
-            </a:extLst>
-          </p:cNvPr>
-          <p:cNvSpPr>
-            <a:spLocks noGrp="1"/>
-          </p:cNvSpPr>
-          <p:nvPr>
-            <p:ph type="title"/>
-          </p:nvPr>
-        </p:nvSpPr>
-        <p:spPr>
-          <a:xfrm>
-            <a:off x="838200" y="212725"/>
-            <a:ext cx="10515600" cy="1325563"/>
-          </a:xfrm>
-        </p:spPr>
-        <p:txBody>
-          <a:bodyPr/>
-          <a:lstStyle/>
-          <a:p>
-            <a:r>
-              <a:rPr lang="en-US" dirty="0"/>
-              <a:t>Chp.1 - Introduction (What is about)</a:t>
-            </a:r>
-            <a:endParaRPr lang="fr-BE" dirty="0"/>
-          </a:p>
-        </p:txBody>
-      </p:sp>
-      <p:pic>
-        <p:nvPicPr>
-          <p:cNvPr id="5" name="Picture 4">
-            <a:extLst>
-              <a:ext uri="{FF2B5EF4-FFF2-40B4-BE49-F238E27FC236}">
-                <a16:creationId xmlns:a16="http://schemas.microsoft.com/office/drawing/2014/main" id="{D79E8237-720F-47FC-B8BA-D5E984C60634}"/>
-              </a:ext>
-            </a:extLst>
-          </p:cNvPr>
-          <p:cNvPicPr>
-            <a:picLocks noChangeAspect="1"/>
-          </p:cNvPicPr>
-          <p:nvPr/>
-        </p:nvPicPr>
-        <p:blipFill>
-          <a:blip r:embed="rId3">
-            <a:extLst>
-              <a:ext uri="{28A0092B-C50C-407E-A947-70E740481C1C}">
-                <a14:useLocalDpi xmlns:a14="http://schemas.microsoft.com/office/drawing/2010/main" val="0"/>
-              </a:ext>
-            </a:extLst>
-          </a:blip>
-          <a:stretch>
-            <a:fillRect/>
-          </a:stretch>
-        </p:blipFill>
-        <p:spPr>
-          <a:xfrm>
-            <a:off x="23330" y="3211162"/>
-            <a:ext cx="2381250" cy="1790700"/>
-          </a:xfrm>
-          <a:prstGeom prst="rect">
-            <a:avLst/>
-          </a:prstGeom>
-        </p:spPr>
-      </p:pic>
-      <p:pic>
-        <p:nvPicPr>
-          <p:cNvPr id="9" name="Picture 8">
-            <a:extLst>
-              <a:ext uri="{FF2B5EF4-FFF2-40B4-BE49-F238E27FC236}">
-                <a16:creationId xmlns:a16="http://schemas.microsoft.com/office/drawing/2014/main" id="{1F6D955F-055B-40B9-A23B-4CE14010FEAC}"/>
-              </a:ext>
-            </a:extLst>
-          </p:cNvPr>
-          <p:cNvPicPr>
-            <a:picLocks noChangeAspect="1"/>
-          </p:cNvPicPr>
-          <p:nvPr/>
-        </p:nvPicPr>
-        <p:blipFill>
-          <a:blip r:embed="rId4">
-            <a:extLst>
-              <a:ext uri="{28A0092B-C50C-407E-A947-70E740481C1C}">
-                <a14:useLocalDpi xmlns:a14="http://schemas.microsoft.com/office/drawing/2010/main" val="0"/>
-              </a:ext>
-            </a:extLst>
-          </a:blip>
-          <a:stretch>
-            <a:fillRect/>
-          </a:stretch>
-        </p:blipFill>
-        <p:spPr>
-          <a:xfrm>
-            <a:off x="3314532" y="3185254"/>
-            <a:ext cx="2682695" cy="1790699"/>
-          </a:xfrm>
-          <a:prstGeom prst="rect">
-            <a:avLst/>
-          </a:prstGeom>
-        </p:spPr>
-      </p:pic>
-      <p:pic>
-        <p:nvPicPr>
-          <p:cNvPr id="11" name="Picture 10">
-            <a:extLst>
-              <a:ext uri="{FF2B5EF4-FFF2-40B4-BE49-F238E27FC236}">
-                <a16:creationId xmlns:a16="http://schemas.microsoft.com/office/drawing/2014/main" id="{186BA74A-4B85-41C5-B16E-44B3A93EEE09}"/>
-              </a:ext>
-            </a:extLst>
-          </p:cNvPr>
-          <p:cNvPicPr>
-            <a:picLocks noChangeAspect="1"/>
-          </p:cNvPicPr>
-          <p:nvPr/>
-        </p:nvPicPr>
-        <p:blipFill>
-          <a:blip r:embed="rId5">
-            <a:extLst>
-              <a:ext uri="{28A0092B-C50C-407E-A947-70E740481C1C}">
-                <a14:useLocalDpi xmlns:a14="http://schemas.microsoft.com/office/drawing/2010/main" val="0"/>
-              </a:ext>
-            </a:extLst>
-          </a:blip>
-          <a:stretch>
-            <a:fillRect/>
-          </a:stretch>
-        </p:blipFill>
-        <p:spPr>
-          <a:xfrm>
-            <a:off x="5554361" y="5041390"/>
-            <a:ext cx="3274249" cy="1816610"/>
-          </a:xfrm>
-          <a:prstGeom prst="rect">
-            <a:avLst/>
-          </a:prstGeom>
-        </p:spPr>
-      </p:pic>
-      <p:pic>
-        <p:nvPicPr>
-          <p:cNvPr id="13" name="Picture 12">
-            <a:extLst>
-              <a:ext uri="{FF2B5EF4-FFF2-40B4-BE49-F238E27FC236}">
-                <a16:creationId xmlns:a16="http://schemas.microsoft.com/office/drawing/2014/main" id="{ABE9E16D-AF5D-4E1C-9336-175D30A85A1D}"/>
-              </a:ext>
-            </a:extLst>
-          </p:cNvPr>
-          <p:cNvPicPr>
-            <a:picLocks noChangeAspect="1"/>
-          </p:cNvPicPr>
-          <p:nvPr/>
-        </p:nvPicPr>
-        <p:blipFill>
-          <a:blip r:embed="rId6">
-            <a:extLst>
-              <a:ext uri="{28A0092B-C50C-407E-A947-70E740481C1C}">
-                <a14:useLocalDpi xmlns:a14="http://schemas.microsoft.com/office/drawing/2010/main" val="0"/>
-              </a:ext>
-            </a:extLst>
-          </a:blip>
-          <a:stretch>
-            <a:fillRect/>
-          </a:stretch>
-        </p:blipFill>
-        <p:spPr>
-          <a:xfrm>
-            <a:off x="6748430" y="3185254"/>
-            <a:ext cx="3012099" cy="1790698"/>
-          </a:xfrm>
-          <a:prstGeom prst="rect">
-            <a:avLst/>
-          </a:prstGeom>
-        </p:spPr>
-      </p:pic>
-      <p:pic>
-        <p:nvPicPr>
-          <p:cNvPr id="15" name="Picture 14">
-            <a:extLst>
-              <a:ext uri="{FF2B5EF4-FFF2-40B4-BE49-F238E27FC236}">
-                <a16:creationId xmlns:a16="http://schemas.microsoft.com/office/drawing/2014/main" id="{ABCFE079-B507-47A4-9A35-1571C935C042}"/>
-              </a:ext>
-            </a:extLst>
-          </p:cNvPr>
-          <p:cNvPicPr>
-            <a:picLocks noChangeAspect="1"/>
-          </p:cNvPicPr>
-          <p:nvPr/>
-        </p:nvPicPr>
-        <p:blipFill>
-          <a:blip r:embed="rId7">
-            <a:extLst>
-              <a:ext uri="{28A0092B-C50C-407E-A947-70E740481C1C}">
-                <a14:useLocalDpi xmlns:a14="http://schemas.microsoft.com/office/drawing/2010/main" val="0"/>
-              </a:ext>
-            </a:extLst>
-          </a:blip>
-          <a:stretch>
-            <a:fillRect/>
-          </a:stretch>
-        </p:blipFill>
-        <p:spPr>
-          <a:xfrm>
-            <a:off x="5680596" y="1243150"/>
-            <a:ext cx="3283855" cy="1838959"/>
-          </a:xfrm>
-          <a:prstGeom prst="rect">
-            <a:avLst/>
-          </a:prstGeom>
-        </p:spPr>
-      </p:pic>
-      <p:pic>
-        <p:nvPicPr>
-          <p:cNvPr id="17" name="Picture 16">
-            <a:extLst>
-              <a:ext uri="{FF2B5EF4-FFF2-40B4-BE49-F238E27FC236}">
-                <a16:creationId xmlns:a16="http://schemas.microsoft.com/office/drawing/2014/main" id="{1797B6FC-8B75-454D-BD25-9D4CC750A890}"/>
-              </a:ext>
-            </a:extLst>
-          </p:cNvPr>
-          <p:cNvPicPr>
-            <a:picLocks noChangeAspect="1"/>
-          </p:cNvPicPr>
-          <p:nvPr/>
-        </p:nvPicPr>
-        <p:blipFill>
-          <a:blip r:embed="rId8">
-            <a:extLst>
-              <a:ext uri="{28A0092B-C50C-407E-A947-70E740481C1C}">
-                <a14:useLocalDpi xmlns:a14="http://schemas.microsoft.com/office/drawing/2010/main" val="0"/>
-              </a:ext>
-            </a:extLst>
-          </a:blip>
-          <a:stretch>
-            <a:fillRect/>
-          </a:stretch>
-        </p:blipFill>
-        <p:spPr>
-          <a:xfrm>
-            <a:off x="1543520" y="1254947"/>
-            <a:ext cx="2758440" cy="1838960"/>
-          </a:xfrm>
-          <a:prstGeom prst="rect">
-            <a:avLst/>
-          </a:prstGeom>
-        </p:spPr>
-      </p:pic>
-      <p:pic>
-        <p:nvPicPr>
-          <p:cNvPr id="19" name="Picture 18">
-            <a:extLst>
-              <a:ext uri="{FF2B5EF4-FFF2-40B4-BE49-F238E27FC236}">
-                <a16:creationId xmlns:a16="http://schemas.microsoft.com/office/drawing/2014/main" id="{6D6C8B04-399B-4771-8CF0-BEAE592D0563}"/>
-              </a:ext>
-            </a:extLst>
-          </p:cNvPr>
-          <p:cNvPicPr>
-            <a:picLocks noChangeAspect="1"/>
-          </p:cNvPicPr>
-          <p:nvPr/>
-        </p:nvPicPr>
-        <p:blipFill>
-          <a:blip r:embed="rId9">
-            <a:extLst>
-              <a:ext uri="{28A0092B-C50C-407E-A947-70E740481C1C}">
-                <a14:useLocalDpi xmlns:a14="http://schemas.microsoft.com/office/drawing/2010/main" val="0"/>
-              </a:ext>
-            </a:extLst>
-          </a:blip>
-          <a:stretch>
-            <a:fillRect/>
-          </a:stretch>
-        </p:blipFill>
-        <p:spPr>
-          <a:xfrm>
-            <a:off x="8964451" y="5050572"/>
-            <a:ext cx="3227549" cy="1807428"/>
-          </a:xfrm>
-          <a:prstGeom prst="rect">
-            <a:avLst/>
-          </a:prstGeom>
-        </p:spPr>
-      </p:pic>
-      <p:pic>
-        <p:nvPicPr>
-          <p:cNvPr id="21" name="Picture 20">
-            <a:extLst>
-              <a:ext uri="{FF2B5EF4-FFF2-40B4-BE49-F238E27FC236}">
-                <a16:creationId xmlns:a16="http://schemas.microsoft.com/office/drawing/2014/main" id="{3D19E14D-C409-4A2F-A1D5-313672754AF7}"/>
-              </a:ext>
-            </a:extLst>
-          </p:cNvPr>
-          <p:cNvPicPr>
-            <a:picLocks noChangeAspect="1"/>
-          </p:cNvPicPr>
-          <p:nvPr/>
-        </p:nvPicPr>
-        <p:blipFill>
-          <a:blip r:embed="rId10">
-            <a:extLst>
-              <a:ext uri="{28A0092B-C50C-407E-A947-70E740481C1C}">
-                <a14:useLocalDpi xmlns:a14="http://schemas.microsoft.com/office/drawing/2010/main" val="0"/>
-              </a:ext>
-            </a:extLst>
-          </a:blip>
-          <a:stretch>
-            <a:fillRect/>
-          </a:stretch>
-        </p:blipFill>
-        <p:spPr>
-          <a:xfrm>
-            <a:off x="-28043" y="5067300"/>
-            <a:ext cx="5399864" cy="1790700"/>
-          </a:xfrm>
-          <a:prstGeom prst="rect">
-            <a:avLst/>
-          </a:prstGeom>
-        </p:spPr>
-      </p:pic>
     </p:spTree>
     <p:extLst>
       <p:ext uri="{BB962C8B-B14F-4D97-AF65-F5344CB8AC3E}">
@@ -10116,6 +10116,140 @@
 </file>
 
 <file path=ppt/slides/slide10.xml><?xml version="1.0" encoding="utf-8"?>
+<p:sld xmlns:a="http://schemas.openxmlformats.org/drawingml/2006/main" xmlns:r="http://schemas.openxmlformats.org/officeDocument/2006/relationships" xmlns:p="http://schemas.openxmlformats.org/presentationml/2006/main">
+  <p:cSld>
+    <p:spTree>
+      <p:nvGrpSpPr>
+        <p:cNvPr id="1" name=""/>
+        <p:cNvGrpSpPr/>
+        <p:nvPr/>
+      </p:nvGrpSpPr>
+      <p:grpSpPr>
+        <a:xfrm>
+          <a:off x="0" y="0"/>
+          <a:ext cx="0" cy="0"/>
+          <a:chOff x="0" y="0"/>
+          <a:chExt cx="0" cy="0"/>
+        </a:xfrm>
+      </p:grpSpPr>
+      <p:sp>
+        <p:nvSpPr>
+          <p:cNvPr id="2" name="Title 1">
+            <a:extLst>
+              <a:ext uri="{FF2B5EF4-FFF2-40B4-BE49-F238E27FC236}">
+                <a16:creationId xmlns:a16="http://schemas.microsoft.com/office/drawing/2014/main" id="{624452A9-FBE1-433E-B907-5D8698440D8F}"/>
+              </a:ext>
+            </a:extLst>
+          </p:cNvPr>
+          <p:cNvSpPr>
+            <a:spLocks noGrp="1"/>
+          </p:cNvSpPr>
+          <p:nvPr>
+            <p:ph type="title"/>
+          </p:nvPr>
+        </p:nvSpPr>
+        <p:spPr/>
+        <p:txBody>
+          <a:bodyPr/>
+          <a:lstStyle/>
+          <a:p>
+            <a:r>
+              <a:rPr lang="en-US" dirty="0"/>
+              <a:t>Chp.3 – Data Anomalies</a:t>
+            </a:r>
+            <a:endParaRPr lang="fr-BE" dirty="0"/>
+          </a:p>
+        </p:txBody>
+      </p:sp>
+      <p:sp>
+        <p:nvSpPr>
+          <p:cNvPr id="6" name="TextBox 5">
+            <a:extLst>
+              <a:ext uri="{FF2B5EF4-FFF2-40B4-BE49-F238E27FC236}">
+                <a16:creationId xmlns:a16="http://schemas.microsoft.com/office/drawing/2014/main" id="{A11CD5CC-C07D-5E80-3D58-87D4D8ABDF52}"/>
+              </a:ext>
+            </a:extLst>
+          </p:cNvPr>
+          <p:cNvSpPr txBox="1"/>
+          <p:nvPr/>
+        </p:nvSpPr>
+        <p:spPr>
+          <a:xfrm>
+            <a:off x="954156" y="1401417"/>
+            <a:ext cx="8239540" cy="1200329"/>
+          </a:xfrm>
+          <a:prstGeom prst="rect">
+            <a:avLst/>
+          </a:prstGeom>
+          <a:noFill/>
+        </p:spPr>
+        <p:txBody>
+          <a:bodyPr wrap="square" rtlCol="0">
+            <a:spAutoFit/>
+          </a:bodyPr>
+          <a:lstStyle/>
+          <a:p>
+            <a:r>
+              <a:rPr lang="en-US" dirty="0"/>
+              <a:t>However, it's not always the case in our data. We kept it respecting the data source and we will use it to illustrate the validity of the mode.</a:t>
+            </a:r>
+          </a:p>
+          <a:p>
+            <a:endParaRPr lang="en-US" dirty="0"/>
+          </a:p>
+          <a:p>
+            <a:r>
+              <a:rPr lang="en-US" dirty="0"/>
+              <a:t>Take by example the following subgraph:</a:t>
+            </a:r>
+            <a:endParaRPr lang="fr-BE" dirty="0"/>
+          </a:p>
+        </p:txBody>
+      </p:sp>
+      <p:pic>
+        <p:nvPicPr>
+          <p:cNvPr id="3" name="Picture 2">
+            <a:extLst>
+              <a:ext uri="{FF2B5EF4-FFF2-40B4-BE49-F238E27FC236}">
+                <a16:creationId xmlns:a16="http://schemas.microsoft.com/office/drawing/2014/main" id="{163D9839-9AA7-A4BA-A5EB-17F1112629B2}"/>
+              </a:ext>
+            </a:extLst>
+          </p:cNvPr>
+          <p:cNvPicPr>
+            <a:picLocks noChangeAspect="1"/>
+          </p:cNvPicPr>
+          <p:nvPr/>
+        </p:nvPicPr>
+        <p:blipFill>
+          <a:blip r:embed="rId3"/>
+          <a:stretch>
+            <a:fillRect/>
+          </a:stretch>
+        </p:blipFill>
+        <p:spPr>
+          <a:xfrm>
+            <a:off x="609124" y="2812096"/>
+            <a:ext cx="10973751" cy="3680779"/>
+          </a:xfrm>
+          <a:prstGeom prst="rect">
+            <a:avLst/>
+          </a:prstGeom>
+        </p:spPr>
+      </p:pic>
+    </p:spTree>
+    <p:extLst>
+      <p:ext uri="{BB962C8B-B14F-4D97-AF65-F5344CB8AC3E}">
+        <p14:creationId xmlns:p14="http://schemas.microsoft.com/office/powerpoint/2010/main" val="2207421586"/>
+      </p:ext>
+    </p:extLst>
+  </p:cSld>
+  <p:clrMapOvr>
+    <a:masterClrMapping/>
+  </p:clrMapOvr>
+</p:sld>
+</file>
+
+<file path=ppt/slides/slide11.xml><?xml version="1.0" encoding="utf-8"?>
 <p:sld xmlns:a="http://schemas.openxmlformats.org/drawingml/2006/main" xmlns:r="http://schemas.openxmlformats.org/officeDocument/2006/relationships" xmlns:p="http://schemas.openxmlformats.org/presentationml/2006/main">
   <p:cSld>
     <p:spTree>
@@ -11217,7 +11351,7 @@
 </p:sld>
 </file>
 
-<file path=ppt/slides/slide11.xml><?xml version="1.0" encoding="utf-8"?>
+<file path=ppt/slides/slide12.xml><?xml version="1.0" encoding="utf-8"?>
 <p:sld xmlns:a="http://schemas.openxmlformats.org/drawingml/2006/main" xmlns:r="http://schemas.openxmlformats.org/officeDocument/2006/relationships" xmlns:p="http://schemas.openxmlformats.org/presentationml/2006/main">
   <p:cSld>
     <p:spTree>
@@ -11332,7 +11466,7 @@
 </p:sld>
 </file>
 
-<file path=ppt/slides/slide12.xml><?xml version="1.0" encoding="utf-8"?>
+<file path=ppt/slides/slide13.xml><?xml version="1.0" encoding="utf-8"?>
 <p:sld xmlns:a="http://schemas.openxmlformats.org/drawingml/2006/main" xmlns:r="http://schemas.openxmlformats.org/officeDocument/2006/relationships" xmlns:p="http://schemas.openxmlformats.org/presentationml/2006/main">
   <p:cSld>
     <p:spTree>
@@ -11509,7 +11643,7 @@
 </p:sld>
 </file>
 
-<file path=ppt/slides/slide13.xml><?xml version="1.0" encoding="utf-8"?>
+<file path=ppt/slides/slide14.xml><?xml version="1.0" encoding="utf-8"?>
 <p:sld xmlns:a="http://schemas.openxmlformats.org/drawingml/2006/main" xmlns:r="http://schemas.openxmlformats.org/officeDocument/2006/relationships" xmlns:p="http://schemas.openxmlformats.org/presentationml/2006/main">
   <p:cSld>
     <p:spTree>
@@ -11901,7 +12035,7 @@
 </p:sld>
 </file>
 
-<file path=ppt/slides/slide14.xml><?xml version="1.0" encoding="utf-8"?>
+<file path=ppt/slides/slide15.xml><?xml version="1.0" encoding="utf-8"?>
 <p:sld xmlns:a="http://schemas.openxmlformats.org/drawingml/2006/main" xmlns:r="http://schemas.openxmlformats.org/officeDocument/2006/relationships" xmlns:p="http://schemas.openxmlformats.org/presentationml/2006/main">
   <p:cSld>
     <p:spTree>
@@ -12160,7 +12294,7 @@
 </p:sld>
 </file>
 
-<file path=ppt/slides/slide15.xml><?xml version="1.0" encoding="utf-8"?>
+<file path=ppt/slides/slide16.xml><?xml version="1.0" encoding="utf-8"?>
 <p:sld xmlns:a="http://schemas.openxmlformats.org/drawingml/2006/main" xmlns:r="http://schemas.openxmlformats.org/officeDocument/2006/relationships" xmlns:p="http://schemas.openxmlformats.org/presentationml/2006/main">
   <p:cSld>
     <p:spTree>
@@ -12442,7 +12576,7 @@
 </p:sld>
 </file>
 
-<file path=ppt/slides/slide16.xml><?xml version="1.0" encoding="utf-8"?>
+<file path=ppt/slides/slide17.xml><?xml version="1.0" encoding="utf-8"?>
 <p:sld xmlns:a="http://schemas.openxmlformats.org/drawingml/2006/main" xmlns:r="http://schemas.openxmlformats.org/officeDocument/2006/relationships" xmlns:p="http://schemas.openxmlformats.org/presentationml/2006/main">
   <p:cSld>
     <p:spTree>
@@ -12724,7 +12858,7 @@
 </p:sld>
 </file>
 
-<file path=ppt/slides/slide17.xml><?xml version="1.0" encoding="utf-8"?>
+<file path=ppt/slides/slide18.xml><?xml version="1.0" encoding="utf-8"?>
 <p:sld xmlns:a="http://schemas.openxmlformats.org/drawingml/2006/main" xmlns:r="http://schemas.openxmlformats.org/officeDocument/2006/relationships" xmlns:p="http://schemas.openxmlformats.org/presentationml/2006/main">
   <p:cSld>
     <p:spTree>
@@ -13483,7 +13617,7 @@
 </p:sld>
 </file>
 
-<file path=ppt/slides/slide18.xml><?xml version="1.0" encoding="utf-8"?>
+<file path=ppt/slides/slide19.xml><?xml version="1.0" encoding="utf-8"?>
 <p:sld xmlns:a="http://schemas.openxmlformats.org/drawingml/2006/main" xmlns:r="http://schemas.openxmlformats.org/officeDocument/2006/relationships" xmlns:p="http://schemas.openxmlformats.org/presentationml/2006/main">
   <p:cSld>
     <p:spTree>
@@ -13859,7 +13993,7 @@
 </p:sld>
 </file>
 
-<file path=ppt/slides/slide19.xml><?xml version="1.0" encoding="utf-8"?>
+<file path=ppt/slides/slide2.xml><?xml version="1.0" encoding="utf-8"?>
 <p:sld xmlns:a="http://schemas.openxmlformats.org/drawingml/2006/main" xmlns:r="http://schemas.openxmlformats.org/officeDocument/2006/relationships" xmlns:p="http://schemas.openxmlformats.org/presentationml/2006/main">
   <p:cSld>
     <p:spTree>
@@ -13881,6 +14015,358 @@
           <p:cNvPr id="2" name="Title 1">
             <a:extLst>
               <a:ext uri="{FF2B5EF4-FFF2-40B4-BE49-F238E27FC236}">
+                <a16:creationId xmlns:a16="http://schemas.microsoft.com/office/drawing/2014/main" id="{1E7D1F5D-346E-488D-89B3-51FC7FC253EC}"/>
+              </a:ext>
+            </a:extLst>
+          </p:cNvPr>
+          <p:cNvSpPr>
+            <a:spLocks noGrp="1"/>
+          </p:cNvSpPr>
+          <p:nvPr>
+            <p:ph type="title"/>
+          </p:nvPr>
+        </p:nvSpPr>
+        <p:spPr>
+          <a:xfrm>
+            <a:off x="838200" y="212725"/>
+            <a:ext cx="10515600" cy="1325563"/>
+          </a:xfrm>
+        </p:spPr>
+        <p:txBody>
+          <a:bodyPr/>
+          <a:lstStyle/>
+          <a:p>
+            <a:r>
+              <a:rPr lang="en-US" dirty="0"/>
+              <a:t>Chp.1 - Introduction (What is about)</a:t>
+            </a:r>
+            <a:endParaRPr lang="fr-BE" dirty="0"/>
+          </a:p>
+        </p:txBody>
+      </p:sp>
+      <p:pic>
+        <p:nvPicPr>
+          <p:cNvPr id="5" name="Picture 4">
+            <a:extLst>
+              <a:ext uri="{FF2B5EF4-FFF2-40B4-BE49-F238E27FC236}">
+                <a16:creationId xmlns:a16="http://schemas.microsoft.com/office/drawing/2014/main" id="{D79E8237-720F-47FC-B8BA-D5E984C60634}"/>
+              </a:ext>
+            </a:extLst>
+          </p:cNvPr>
+          <p:cNvPicPr>
+            <a:picLocks noChangeAspect="1"/>
+          </p:cNvPicPr>
+          <p:nvPr/>
+        </p:nvPicPr>
+        <p:blipFill>
+          <a:blip r:embed="rId3">
+            <a:extLst>
+              <a:ext uri="{28A0092B-C50C-407E-A947-70E740481C1C}">
+                <a14:useLocalDpi xmlns:a14="http://schemas.microsoft.com/office/drawing/2010/main" val="0"/>
+              </a:ext>
+            </a:extLst>
+          </a:blip>
+          <a:stretch>
+            <a:fillRect/>
+          </a:stretch>
+        </p:blipFill>
+        <p:spPr>
+          <a:xfrm>
+            <a:off x="23330" y="3211162"/>
+            <a:ext cx="2381250" cy="1790700"/>
+          </a:xfrm>
+          <a:prstGeom prst="rect">
+            <a:avLst/>
+          </a:prstGeom>
+        </p:spPr>
+      </p:pic>
+      <p:pic>
+        <p:nvPicPr>
+          <p:cNvPr id="9" name="Picture 8">
+            <a:extLst>
+              <a:ext uri="{FF2B5EF4-FFF2-40B4-BE49-F238E27FC236}">
+                <a16:creationId xmlns:a16="http://schemas.microsoft.com/office/drawing/2014/main" id="{1F6D955F-055B-40B9-A23B-4CE14010FEAC}"/>
+              </a:ext>
+            </a:extLst>
+          </p:cNvPr>
+          <p:cNvPicPr>
+            <a:picLocks noChangeAspect="1"/>
+          </p:cNvPicPr>
+          <p:nvPr/>
+        </p:nvPicPr>
+        <p:blipFill>
+          <a:blip r:embed="rId4">
+            <a:extLst>
+              <a:ext uri="{28A0092B-C50C-407E-A947-70E740481C1C}">
+                <a14:useLocalDpi xmlns:a14="http://schemas.microsoft.com/office/drawing/2010/main" val="0"/>
+              </a:ext>
+            </a:extLst>
+          </a:blip>
+          <a:stretch>
+            <a:fillRect/>
+          </a:stretch>
+        </p:blipFill>
+        <p:spPr>
+          <a:xfrm>
+            <a:off x="3314532" y="3185254"/>
+            <a:ext cx="2682695" cy="1790699"/>
+          </a:xfrm>
+          <a:prstGeom prst="rect">
+            <a:avLst/>
+          </a:prstGeom>
+        </p:spPr>
+      </p:pic>
+      <p:pic>
+        <p:nvPicPr>
+          <p:cNvPr id="11" name="Picture 10">
+            <a:extLst>
+              <a:ext uri="{FF2B5EF4-FFF2-40B4-BE49-F238E27FC236}">
+                <a16:creationId xmlns:a16="http://schemas.microsoft.com/office/drawing/2014/main" id="{186BA74A-4B85-41C5-B16E-44B3A93EEE09}"/>
+              </a:ext>
+            </a:extLst>
+          </p:cNvPr>
+          <p:cNvPicPr>
+            <a:picLocks noChangeAspect="1"/>
+          </p:cNvPicPr>
+          <p:nvPr/>
+        </p:nvPicPr>
+        <p:blipFill>
+          <a:blip r:embed="rId5">
+            <a:extLst>
+              <a:ext uri="{28A0092B-C50C-407E-A947-70E740481C1C}">
+                <a14:useLocalDpi xmlns:a14="http://schemas.microsoft.com/office/drawing/2010/main" val="0"/>
+              </a:ext>
+            </a:extLst>
+          </a:blip>
+          <a:stretch>
+            <a:fillRect/>
+          </a:stretch>
+        </p:blipFill>
+        <p:spPr>
+          <a:xfrm>
+            <a:off x="5554361" y="5041390"/>
+            <a:ext cx="3274249" cy="1816610"/>
+          </a:xfrm>
+          <a:prstGeom prst="rect">
+            <a:avLst/>
+          </a:prstGeom>
+        </p:spPr>
+      </p:pic>
+      <p:pic>
+        <p:nvPicPr>
+          <p:cNvPr id="13" name="Picture 12">
+            <a:extLst>
+              <a:ext uri="{FF2B5EF4-FFF2-40B4-BE49-F238E27FC236}">
+                <a16:creationId xmlns:a16="http://schemas.microsoft.com/office/drawing/2014/main" id="{ABE9E16D-AF5D-4E1C-9336-175D30A85A1D}"/>
+              </a:ext>
+            </a:extLst>
+          </p:cNvPr>
+          <p:cNvPicPr>
+            <a:picLocks noChangeAspect="1"/>
+          </p:cNvPicPr>
+          <p:nvPr/>
+        </p:nvPicPr>
+        <p:blipFill>
+          <a:blip r:embed="rId6">
+            <a:extLst>
+              <a:ext uri="{28A0092B-C50C-407E-A947-70E740481C1C}">
+                <a14:useLocalDpi xmlns:a14="http://schemas.microsoft.com/office/drawing/2010/main" val="0"/>
+              </a:ext>
+            </a:extLst>
+          </a:blip>
+          <a:stretch>
+            <a:fillRect/>
+          </a:stretch>
+        </p:blipFill>
+        <p:spPr>
+          <a:xfrm>
+            <a:off x="6748430" y="3185254"/>
+            <a:ext cx="3012099" cy="1790698"/>
+          </a:xfrm>
+          <a:prstGeom prst="rect">
+            <a:avLst/>
+          </a:prstGeom>
+        </p:spPr>
+      </p:pic>
+      <p:pic>
+        <p:nvPicPr>
+          <p:cNvPr id="15" name="Picture 14">
+            <a:extLst>
+              <a:ext uri="{FF2B5EF4-FFF2-40B4-BE49-F238E27FC236}">
+                <a16:creationId xmlns:a16="http://schemas.microsoft.com/office/drawing/2014/main" id="{ABCFE079-B507-47A4-9A35-1571C935C042}"/>
+              </a:ext>
+            </a:extLst>
+          </p:cNvPr>
+          <p:cNvPicPr>
+            <a:picLocks noChangeAspect="1"/>
+          </p:cNvPicPr>
+          <p:nvPr/>
+        </p:nvPicPr>
+        <p:blipFill>
+          <a:blip r:embed="rId7">
+            <a:extLst>
+              <a:ext uri="{28A0092B-C50C-407E-A947-70E740481C1C}">
+                <a14:useLocalDpi xmlns:a14="http://schemas.microsoft.com/office/drawing/2010/main" val="0"/>
+              </a:ext>
+            </a:extLst>
+          </a:blip>
+          <a:stretch>
+            <a:fillRect/>
+          </a:stretch>
+        </p:blipFill>
+        <p:spPr>
+          <a:xfrm>
+            <a:off x="5680596" y="1243150"/>
+            <a:ext cx="3283855" cy="1838959"/>
+          </a:xfrm>
+          <a:prstGeom prst="rect">
+            <a:avLst/>
+          </a:prstGeom>
+        </p:spPr>
+      </p:pic>
+      <p:pic>
+        <p:nvPicPr>
+          <p:cNvPr id="17" name="Picture 16">
+            <a:extLst>
+              <a:ext uri="{FF2B5EF4-FFF2-40B4-BE49-F238E27FC236}">
+                <a16:creationId xmlns:a16="http://schemas.microsoft.com/office/drawing/2014/main" id="{1797B6FC-8B75-454D-BD25-9D4CC750A890}"/>
+              </a:ext>
+            </a:extLst>
+          </p:cNvPr>
+          <p:cNvPicPr>
+            <a:picLocks noChangeAspect="1"/>
+          </p:cNvPicPr>
+          <p:nvPr/>
+        </p:nvPicPr>
+        <p:blipFill>
+          <a:blip r:embed="rId8">
+            <a:extLst>
+              <a:ext uri="{28A0092B-C50C-407E-A947-70E740481C1C}">
+                <a14:useLocalDpi xmlns:a14="http://schemas.microsoft.com/office/drawing/2010/main" val="0"/>
+              </a:ext>
+            </a:extLst>
+          </a:blip>
+          <a:stretch>
+            <a:fillRect/>
+          </a:stretch>
+        </p:blipFill>
+        <p:spPr>
+          <a:xfrm>
+            <a:off x="1543520" y="1254947"/>
+            <a:ext cx="2758440" cy="1838960"/>
+          </a:xfrm>
+          <a:prstGeom prst="rect">
+            <a:avLst/>
+          </a:prstGeom>
+        </p:spPr>
+      </p:pic>
+      <p:pic>
+        <p:nvPicPr>
+          <p:cNvPr id="19" name="Picture 18">
+            <a:extLst>
+              <a:ext uri="{FF2B5EF4-FFF2-40B4-BE49-F238E27FC236}">
+                <a16:creationId xmlns:a16="http://schemas.microsoft.com/office/drawing/2014/main" id="{6D6C8B04-399B-4771-8CF0-BEAE592D0563}"/>
+              </a:ext>
+            </a:extLst>
+          </p:cNvPr>
+          <p:cNvPicPr>
+            <a:picLocks noChangeAspect="1"/>
+          </p:cNvPicPr>
+          <p:nvPr/>
+        </p:nvPicPr>
+        <p:blipFill>
+          <a:blip r:embed="rId9">
+            <a:extLst>
+              <a:ext uri="{28A0092B-C50C-407E-A947-70E740481C1C}">
+                <a14:useLocalDpi xmlns:a14="http://schemas.microsoft.com/office/drawing/2010/main" val="0"/>
+              </a:ext>
+            </a:extLst>
+          </a:blip>
+          <a:stretch>
+            <a:fillRect/>
+          </a:stretch>
+        </p:blipFill>
+        <p:spPr>
+          <a:xfrm>
+            <a:off x="8964451" y="5050572"/>
+            <a:ext cx="3227549" cy="1807428"/>
+          </a:xfrm>
+          <a:prstGeom prst="rect">
+            <a:avLst/>
+          </a:prstGeom>
+        </p:spPr>
+      </p:pic>
+      <p:pic>
+        <p:nvPicPr>
+          <p:cNvPr id="21" name="Picture 20">
+            <a:extLst>
+              <a:ext uri="{FF2B5EF4-FFF2-40B4-BE49-F238E27FC236}">
+                <a16:creationId xmlns:a16="http://schemas.microsoft.com/office/drawing/2014/main" id="{3D19E14D-C409-4A2F-A1D5-313672754AF7}"/>
+              </a:ext>
+            </a:extLst>
+          </p:cNvPr>
+          <p:cNvPicPr>
+            <a:picLocks noChangeAspect="1"/>
+          </p:cNvPicPr>
+          <p:nvPr/>
+        </p:nvPicPr>
+        <p:blipFill>
+          <a:blip r:embed="rId10">
+            <a:extLst>
+              <a:ext uri="{28A0092B-C50C-407E-A947-70E740481C1C}">
+                <a14:useLocalDpi xmlns:a14="http://schemas.microsoft.com/office/drawing/2010/main" val="0"/>
+              </a:ext>
+            </a:extLst>
+          </a:blip>
+          <a:stretch>
+            <a:fillRect/>
+          </a:stretch>
+        </p:blipFill>
+        <p:spPr>
+          <a:xfrm>
+            <a:off x="-28043" y="5067300"/>
+            <a:ext cx="5399864" cy="1790700"/>
+          </a:xfrm>
+          <a:prstGeom prst="rect">
+            <a:avLst/>
+          </a:prstGeom>
+        </p:spPr>
+      </p:pic>
+    </p:spTree>
+    <p:extLst>
+      <p:ext uri="{BB962C8B-B14F-4D97-AF65-F5344CB8AC3E}">
+        <p14:creationId xmlns:p14="http://schemas.microsoft.com/office/powerpoint/2010/main" val="561393157"/>
+      </p:ext>
+    </p:extLst>
+  </p:cSld>
+  <p:clrMapOvr>
+    <a:masterClrMapping/>
+  </p:clrMapOvr>
+</p:sld>
+</file>
+
+<file path=ppt/slides/slide20.xml><?xml version="1.0" encoding="utf-8"?>
+<p:sld xmlns:a="http://schemas.openxmlformats.org/drawingml/2006/main" xmlns:r="http://schemas.openxmlformats.org/officeDocument/2006/relationships" xmlns:p="http://schemas.openxmlformats.org/presentationml/2006/main">
+  <p:cSld>
+    <p:spTree>
+      <p:nvGrpSpPr>
+        <p:cNvPr id="1" name=""/>
+        <p:cNvGrpSpPr/>
+        <p:nvPr/>
+      </p:nvGrpSpPr>
+      <p:grpSpPr>
+        <a:xfrm>
+          <a:off x="0" y="0"/>
+          <a:ext cx="0" cy="0"/>
+          <a:chOff x="0" y="0"/>
+          <a:chExt cx="0" cy="0"/>
+        </a:xfrm>
+      </p:grpSpPr>
+      <p:sp>
+        <p:nvSpPr>
+          <p:cNvPr id="2" name="Title 1">
+            <a:extLst>
+              <a:ext uri="{FF2B5EF4-FFF2-40B4-BE49-F238E27FC236}">
                 <a16:creationId xmlns:a16="http://schemas.microsoft.com/office/drawing/2014/main" id="{94B08F57-E0BC-4A23-925B-B0CADBAF77FC}"/>
               </a:ext>
             </a:extLst>
@@ -13979,7 +14465,1269 @@
 </p:sld>
 </file>
 
-<file path=ppt/slides/slide2.xml><?xml version="1.0" encoding="utf-8"?>
+<file path=ppt/slides/slide21.xml><?xml version="1.0" encoding="utf-8"?>
+<p:sld xmlns:a="http://schemas.openxmlformats.org/drawingml/2006/main" xmlns:r="http://schemas.openxmlformats.org/officeDocument/2006/relationships" xmlns:p="http://schemas.openxmlformats.org/presentationml/2006/main">
+  <p:cSld>
+    <p:spTree>
+      <p:nvGrpSpPr>
+        <p:cNvPr id="1" name=""/>
+        <p:cNvGrpSpPr/>
+        <p:nvPr/>
+      </p:nvGrpSpPr>
+      <p:grpSpPr>
+        <a:xfrm>
+          <a:off x="0" y="0"/>
+          <a:ext cx="0" cy="0"/>
+          <a:chOff x="0" y="0"/>
+          <a:chExt cx="0" cy="0"/>
+        </a:xfrm>
+      </p:grpSpPr>
+      <p:sp>
+        <p:nvSpPr>
+          <p:cNvPr id="2" name="Title 1">
+            <a:extLst>
+              <a:ext uri="{FF2B5EF4-FFF2-40B4-BE49-F238E27FC236}">
+                <a16:creationId xmlns:a16="http://schemas.microsoft.com/office/drawing/2014/main" id="{63482FFF-7EC4-4691-BF8C-91E0066F6BE9}"/>
+              </a:ext>
+            </a:extLst>
+          </p:cNvPr>
+          <p:cNvSpPr>
+            <a:spLocks noGrp="1"/>
+          </p:cNvSpPr>
+          <p:nvPr>
+            <p:ph type="title"/>
+          </p:nvPr>
+        </p:nvSpPr>
+        <p:spPr/>
+        <p:txBody>
+          <a:bodyPr/>
+          <a:lstStyle/>
+          <a:p>
+            <a:r>
+              <a:rPr lang="en-US" dirty="0"/>
+              <a:t>Chp.4 - Modelling</a:t>
+            </a:r>
+            <a:endParaRPr lang="fr-BE" dirty="0"/>
+          </a:p>
+        </p:txBody>
+      </p:sp>
+      <p:pic>
+        <p:nvPicPr>
+          <p:cNvPr id="5" name="Picture 4">
+            <a:extLst>
+              <a:ext uri="{FF2B5EF4-FFF2-40B4-BE49-F238E27FC236}">
+                <a16:creationId xmlns:a16="http://schemas.microsoft.com/office/drawing/2014/main" id="{E5B807A3-C215-444C-9CF9-24FC1D8B565B}"/>
+              </a:ext>
+            </a:extLst>
+          </p:cNvPr>
+          <p:cNvPicPr>
+            <a:picLocks noChangeAspect="1"/>
+          </p:cNvPicPr>
+          <p:nvPr/>
+        </p:nvPicPr>
+        <p:blipFill>
+          <a:blip r:embed="rId3"/>
+          <a:stretch>
+            <a:fillRect/>
+          </a:stretch>
+        </p:blipFill>
+        <p:spPr>
+          <a:xfrm>
+            <a:off x="6918955" y="2844088"/>
+            <a:ext cx="4921530" cy="2821677"/>
+          </a:xfrm>
+          <a:prstGeom prst="rect">
+            <a:avLst/>
+          </a:prstGeom>
+        </p:spPr>
+      </p:pic>
+      <p:pic>
+        <p:nvPicPr>
+          <p:cNvPr id="1032" name="Picture 8">
+            <a:extLst>
+              <a:ext uri="{FF2B5EF4-FFF2-40B4-BE49-F238E27FC236}">
+                <a16:creationId xmlns:a16="http://schemas.microsoft.com/office/drawing/2014/main" id="{3E0027DD-4153-4257-BC3C-65CEC71D3BB2}"/>
+              </a:ext>
+            </a:extLst>
+          </p:cNvPr>
+          <p:cNvPicPr>
+            <a:picLocks noChangeAspect="1" noChangeArrowheads="1"/>
+          </p:cNvPicPr>
+          <p:nvPr/>
+        </p:nvPicPr>
+        <p:blipFill>
+          <a:blip r:embed="rId4">
+            <a:extLst>
+              <a:ext uri="{28A0092B-C50C-407E-A947-70E740481C1C}">
+                <a14:useLocalDpi xmlns:a14="http://schemas.microsoft.com/office/drawing/2010/main" val="0"/>
+              </a:ext>
+            </a:extLst>
+          </a:blip>
+          <a:srcRect/>
+          <a:stretch>
+            <a:fillRect/>
+          </a:stretch>
+        </p:blipFill>
+        <p:spPr bwMode="auto">
+          <a:xfrm>
+            <a:off x="351515" y="4200842"/>
+            <a:ext cx="5291759" cy="2489840"/>
+          </a:xfrm>
+          <a:prstGeom prst="rect">
+            <a:avLst/>
+          </a:prstGeom>
+          <a:noFill/>
+          <a:extLst>
+            <a:ext uri="{909E8E84-426E-40DD-AFC4-6F175D3DCCD1}">
+              <a14:hiddenFill xmlns:a14="http://schemas.microsoft.com/office/drawing/2010/main">
+                <a:solidFill>
+                  <a:srgbClr val="FFFFFF"/>
+                </a:solidFill>
+              </a14:hiddenFill>
+            </a:ext>
+          </a:extLst>
+        </p:spPr>
+      </p:pic>
+      <p:pic>
+        <p:nvPicPr>
+          <p:cNvPr id="6" name="Picture 4">
+            <a:extLst>
+              <a:ext uri="{FF2B5EF4-FFF2-40B4-BE49-F238E27FC236}">
+                <a16:creationId xmlns:a16="http://schemas.microsoft.com/office/drawing/2014/main" id="{D0B51982-F0E9-507F-6E59-10723F698187}"/>
+              </a:ext>
+            </a:extLst>
+          </p:cNvPr>
+          <p:cNvPicPr>
+            <a:picLocks noChangeAspect="1" noChangeArrowheads="1"/>
+          </p:cNvPicPr>
+          <p:nvPr/>
+        </p:nvPicPr>
+        <p:blipFill>
+          <a:blip r:embed="rId5">
+            <a:extLst>
+              <a:ext uri="{28A0092B-C50C-407E-A947-70E740481C1C}">
+                <a14:useLocalDpi xmlns:a14="http://schemas.microsoft.com/office/drawing/2010/main" val="0"/>
+              </a:ext>
+            </a:extLst>
+          </a:blip>
+          <a:srcRect/>
+          <a:stretch>
+            <a:fillRect/>
+          </a:stretch>
+        </p:blipFill>
+        <p:spPr bwMode="auto">
+          <a:xfrm>
+            <a:off x="351515" y="1556583"/>
+            <a:ext cx="5231345" cy="2644259"/>
+          </a:xfrm>
+          <a:prstGeom prst="rect">
+            <a:avLst/>
+          </a:prstGeom>
+          <a:noFill/>
+          <a:extLst>
+            <a:ext uri="{909E8E84-426E-40DD-AFC4-6F175D3DCCD1}">
+              <a14:hiddenFill xmlns:a14="http://schemas.microsoft.com/office/drawing/2010/main">
+                <a:solidFill>
+                  <a:srgbClr val="FFFFFF"/>
+                </a:solidFill>
+              </a14:hiddenFill>
+            </a:ext>
+          </a:extLst>
+        </p:spPr>
+      </p:pic>
+    </p:spTree>
+    <p:extLst>
+      <p:ext uri="{BB962C8B-B14F-4D97-AF65-F5344CB8AC3E}">
+        <p14:creationId xmlns:p14="http://schemas.microsoft.com/office/powerpoint/2010/main" val="668154826"/>
+      </p:ext>
+    </p:extLst>
+  </p:cSld>
+  <p:clrMapOvr>
+    <a:masterClrMapping/>
+  </p:clrMapOvr>
+</p:sld>
+</file>
+
+<file path=ppt/slides/slide22.xml><?xml version="1.0" encoding="utf-8"?>
+<p:sld xmlns:a="http://schemas.openxmlformats.org/drawingml/2006/main" xmlns:r="http://schemas.openxmlformats.org/officeDocument/2006/relationships" xmlns:p="http://schemas.openxmlformats.org/presentationml/2006/main">
+  <p:cSld>
+    <p:spTree>
+      <p:nvGrpSpPr>
+        <p:cNvPr id="1" name=""/>
+        <p:cNvGrpSpPr/>
+        <p:nvPr/>
+      </p:nvGrpSpPr>
+      <p:grpSpPr>
+        <a:xfrm>
+          <a:off x="0" y="0"/>
+          <a:ext cx="0" cy="0"/>
+          <a:chOff x="0" y="0"/>
+          <a:chExt cx="0" cy="0"/>
+        </a:xfrm>
+      </p:grpSpPr>
+      <p:sp>
+        <p:nvSpPr>
+          <p:cNvPr id="2" name="Title 1">
+            <a:extLst>
+              <a:ext uri="{FF2B5EF4-FFF2-40B4-BE49-F238E27FC236}">
+                <a16:creationId xmlns:a16="http://schemas.microsoft.com/office/drawing/2014/main" id="{63482FFF-7EC4-4691-BF8C-91E0066F6BE9}"/>
+              </a:ext>
+            </a:extLst>
+          </p:cNvPr>
+          <p:cNvSpPr>
+            <a:spLocks noGrp="1"/>
+          </p:cNvSpPr>
+          <p:nvPr>
+            <p:ph type="title"/>
+          </p:nvPr>
+        </p:nvSpPr>
+        <p:spPr/>
+        <p:txBody>
+          <a:bodyPr/>
+          <a:lstStyle/>
+          <a:p>
+            <a:r>
+              <a:rPr lang="en-US" dirty="0"/>
+              <a:t>Chp.5 - Results</a:t>
+            </a:r>
+            <a:endParaRPr lang="fr-BE" dirty="0"/>
+          </a:p>
+        </p:txBody>
+      </p:sp>
+      <p:sp>
+        <p:nvSpPr>
+          <p:cNvPr id="5" name="TextBox 4">
+            <a:extLst>
+              <a:ext uri="{FF2B5EF4-FFF2-40B4-BE49-F238E27FC236}">
+                <a16:creationId xmlns:a16="http://schemas.microsoft.com/office/drawing/2014/main" id="{1C70F5EB-D628-4D33-90C3-908BAEAACF37}"/>
+              </a:ext>
+            </a:extLst>
+          </p:cNvPr>
+          <p:cNvSpPr txBox="1"/>
+          <p:nvPr/>
+        </p:nvSpPr>
+        <p:spPr>
+          <a:xfrm>
+            <a:off x="958970" y="1759610"/>
+            <a:ext cx="6883400" cy="923330"/>
+          </a:xfrm>
+          <a:prstGeom prst="rect">
+            <a:avLst/>
+          </a:prstGeom>
+          <a:noFill/>
+        </p:spPr>
+        <p:txBody>
+          <a:bodyPr wrap="square">
+            <a:spAutoFit/>
+          </a:bodyPr>
+          <a:lstStyle/>
+          <a:p>
+            <a:pPr marL="171450" indent="-171450">
+              <a:buFont typeface="Wingdings" panose="05000000000000000000" pitchFamily="2" charset="2"/>
+              <a:buChar char="à"/>
+            </a:pPr>
+            <a:r>
+              <a:rPr lang="en-US" dirty="0">
+                <a:sym typeface="Wingdings" panose="05000000000000000000" pitchFamily="2" charset="2"/>
+              </a:rPr>
+              <a:t>Inbound &amp; Outbound Traffic: Morning (5-7) x Evening (19-22) </a:t>
+            </a:r>
+          </a:p>
+          <a:p>
+            <a:pPr marL="171450" indent="-171450">
+              <a:buFontTx/>
+              <a:buChar char="-"/>
+            </a:pPr>
+            <a:r>
+              <a:rPr lang="en-US" dirty="0">
+                <a:sym typeface="Wingdings" panose="05000000000000000000" pitchFamily="2" charset="2"/>
+              </a:rPr>
+              <a:t>(DLR, </a:t>
+            </a:r>
+            <a:r>
+              <a:rPr lang="en-US" dirty="0" err="1">
+                <a:sym typeface="Wingdings" panose="05000000000000000000" pitchFamily="2" charset="2"/>
+              </a:rPr>
+              <a:t>OverGround</a:t>
+            </a:r>
+            <a:r>
+              <a:rPr lang="en-US" dirty="0">
+                <a:sym typeface="Wingdings" panose="05000000000000000000" pitchFamily="2" charset="2"/>
+              </a:rPr>
+              <a:t>, Tube) </a:t>
+            </a:r>
+          </a:p>
+          <a:p>
+            <a:pPr marL="171450" indent="-171450">
+              <a:buFontTx/>
+              <a:buChar char="-"/>
+            </a:pPr>
+            <a:r>
+              <a:rPr lang="en-US" dirty="0">
+                <a:sym typeface="Wingdings" panose="05000000000000000000" pitchFamily="2" charset="2"/>
+              </a:rPr>
+              <a:t>MTT, FRI, SAT and SUN</a:t>
+            </a:r>
+          </a:p>
+        </p:txBody>
+      </p:sp>
+    </p:spTree>
+    <p:extLst>
+      <p:ext uri="{BB962C8B-B14F-4D97-AF65-F5344CB8AC3E}">
+        <p14:creationId xmlns:p14="http://schemas.microsoft.com/office/powerpoint/2010/main" val="831078479"/>
+      </p:ext>
+    </p:extLst>
+  </p:cSld>
+  <p:clrMapOvr>
+    <a:masterClrMapping/>
+  </p:clrMapOvr>
+</p:sld>
+</file>
+
+<file path=ppt/slides/slide23.xml><?xml version="1.0" encoding="utf-8"?>
+<p:sld xmlns:a="http://schemas.openxmlformats.org/drawingml/2006/main" xmlns:r="http://schemas.openxmlformats.org/officeDocument/2006/relationships" xmlns:p="http://schemas.openxmlformats.org/presentationml/2006/main">
+  <p:cSld>
+    <p:spTree>
+      <p:nvGrpSpPr>
+        <p:cNvPr id="1" name=""/>
+        <p:cNvGrpSpPr/>
+        <p:nvPr/>
+      </p:nvGrpSpPr>
+      <p:grpSpPr>
+        <a:xfrm>
+          <a:off x="0" y="0"/>
+          <a:ext cx="0" cy="0"/>
+          <a:chOff x="0" y="0"/>
+          <a:chExt cx="0" cy="0"/>
+        </a:xfrm>
+      </p:grpSpPr>
+      <p:sp>
+        <p:nvSpPr>
+          <p:cNvPr id="2" name="Title 1">
+            <a:extLst>
+              <a:ext uri="{FF2B5EF4-FFF2-40B4-BE49-F238E27FC236}">
+                <a16:creationId xmlns:a16="http://schemas.microsoft.com/office/drawing/2014/main" id="{63482FFF-7EC4-4691-BF8C-91E0066F6BE9}"/>
+              </a:ext>
+            </a:extLst>
+          </p:cNvPr>
+          <p:cNvSpPr>
+            <a:spLocks noGrp="1"/>
+          </p:cNvSpPr>
+          <p:nvPr>
+            <p:ph type="title"/>
+          </p:nvPr>
+        </p:nvSpPr>
+        <p:spPr/>
+        <p:txBody>
+          <a:bodyPr/>
+          <a:lstStyle/>
+          <a:p>
+            <a:r>
+              <a:rPr lang="en-US" dirty="0"/>
+              <a:t>Chp.5 - Results</a:t>
+            </a:r>
+            <a:endParaRPr lang="fr-BE" dirty="0"/>
+          </a:p>
+        </p:txBody>
+      </p:sp>
+      <p:sp>
+        <p:nvSpPr>
+          <p:cNvPr id="5" name="TextBox 4">
+            <a:extLst>
+              <a:ext uri="{FF2B5EF4-FFF2-40B4-BE49-F238E27FC236}">
+                <a16:creationId xmlns:a16="http://schemas.microsoft.com/office/drawing/2014/main" id="{1C70F5EB-D628-4D33-90C3-908BAEAACF37}"/>
+              </a:ext>
+            </a:extLst>
+          </p:cNvPr>
+          <p:cNvSpPr txBox="1"/>
+          <p:nvPr/>
+        </p:nvSpPr>
+        <p:spPr>
+          <a:xfrm>
+            <a:off x="958970" y="1759610"/>
+            <a:ext cx="6883400" cy="923330"/>
+          </a:xfrm>
+          <a:prstGeom prst="rect">
+            <a:avLst/>
+          </a:prstGeom>
+          <a:noFill/>
+        </p:spPr>
+        <p:txBody>
+          <a:bodyPr wrap="square">
+            <a:spAutoFit/>
+          </a:bodyPr>
+          <a:lstStyle/>
+          <a:p>
+            <a:pPr marL="0" marR="0" lvl="0" indent="0" algn="l" defTabSz="914400" rtl="0" eaLnBrk="1" fontAlgn="auto" latinLnBrk="0" hangingPunct="1">
+              <a:lnSpc>
+                <a:spcPct val="100000"/>
+              </a:lnSpc>
+              <a:spcBef>
+                <a:spcPts val="0"/>
+              </a:spcBef>
+              <a:spcAft>
+                <a:spcPts val="0"/>
+              </a:spcAft>
+              <a:buClrTx/>
+              <a:buSzTx/>
+              <a:buFontTx/>
+              <a:buNone/>
+              <a:tabLst/>
+              <a:defRPr/>
+            </a:pPr>
+            <a:r>
+              <a:rPr lang="en-US" dirty="0">
+                <a:sym typeface="Wingdings" panose="05000000000000000000" pitchFamily="2" charset="2"/>
+              </a:rPr>
+              <a:t> Traffic</a:t>
+            </a:r>
+          </a:p>
+          <a:p>
+            <a:pPr marL="171450" indent="-171450">
+              <a:buFontTx/>
+              <a:buChar char="-"/>
+            </a:pPr>
+            <a:r>
+              <a:rPr lang="en-US" dirty="0">
+                <a:sym typeface="Wingdings" panose="05000000000000000000" pitchFamily="2" charset="2"/>
+              </a:rPr>
+              <a:t>Enter/Exists in stations (Networkx)</a:t>
+            </a:r>
+          </a:p>
+          <a:p>
+            <a:pPr marL="171450" indent="-171450">
+              <a:buFontTx/>
+              <a:buChar char="-"/>
+            </a:pPr>
+            <a:r>
+              <a:rPr lang="en-US" dirty="0">
+                <a:sym typeface="Wingdings" panose="05000000000000000000" pitchFamily="2" charset="2"/>
+              </a:rPr>
+              <a:t>Load in segments (</a:t>
+            </a:r>
+            <a:r>
+              <a:rPr lang="en-US" dirty="0" err="1">
+                <a:sym typeface="Wingdings" panose="05000000000000000000" pitchFamily="2" charset="2"/>
+              </a:rPr>
+              <a:t>Networkx</a:t>
+            </a:r>
+            <a:r>
+              <a:rPr lang="en-US" dirty="0">
+                <a:sym typeface="Wingdings" panose="05000000000000000000" pitchFamily="2" charset="2"/>
+              </a:rPr>
+              <a:t>)</a:t>
+            </a:r>
+          </a:p>
+        </p:txBody>
+      </p:sp>
+    </p:spTree>
+    <p:extLst>
+      <p:ext uri="{BB962C8B-B14F-4D97-AF65-F5344CB8AC3E}">
+        <p14:creationId xmlns:p14="http://schemas.microsoft.com/office/powerpoint/2010/main" val="2043830219"/>
+      </p:ext>
+    </p:extLst>
+  </p:cSld>
+  <p:clrMapOvr>
+    <a:masterClrMapping/>
+  </p:clrMapOvr>
+</p:sld>
+</file>
+
+<file path=ppt/slides/slide24.xml><?xml version="1.0" encoding="utf-8"?>
+<p:sld xmlns:a="http://schemas.openxmlformats.org/drawingml/2006/main" xmlns:r="http://schemas.openxmlformats.org/officeDocument/2006/relationships" xmlns:p="http://schemas.openxmlformats.org/presentationml/2006/main">
+  <p:cSld>
+    <p:spTree>
+      <p:nvGrpSpPr>
+        <p:cNvPr id="1" name=""/>
+        <p:cNvGrpSpPr/>
+        <p:nvPr/>
+      </p:nvGrpSpPr>
+      <p:grpSpPr>
+        <a:xfrm>
+          <a:off x="0" y="0"/>
+          <a:ext cx="0" cy="0"/>
+          <a:chOff x="0" y="0"/>
+          <a:chExt cx="0" cy="0"/>
+        </a:xfrm>
+      </p:grpSpPr>
+      <p:sp>
+        <p:nvSpPr>
+          <p:cNvPr id="2" name="Title 1">
+            <a:extLst>
+              <a:ext uri="{FF2B5EF4-FFF2-40B4-BE49-F238E27FC236}">
+                <a16:creationId xmlns:a16="http://schemas.microsoft.com/office/drawing/2014/main" id="{63482FFF-7EC4-4691-BF8C-91E0066F6BE9}"/>
+              </a:ext>
+            </a:extLst>
+          </p:cNvPr>
+          <p:cNvSpPr>
+            <a:spLocks noGrp="1"/>
+          </p:cNvSpPr>
+          <p:nvPr>
+            <p:ph type="title"/>
+          </p:nvPr>
+        </p:nvSpPr>
+        <p:spPr/>
+        <p:txBody>
+          <a:bodyPr/>
+          <a:lstStyle/>
+          <a:p>
+            <a:r>
+              <a:rPr lang="en-US" dirty="0"/>
+              <a:t>Chp.5 - Results</a:t>
+            </a:r>
+            <a:endParaRPr lang="fr-BE" dirty="0"/>
+          </a:p>
+        </p:txBody>
+      </p:sp>
+      <p:sp>
+        <p:nvSpPr>
+          <p:cNvPr id="5" name="TextBox 4">
+            <a:extLst>
+              <a:ext uri="{FF2B5EF4-FFF2-40B4-BE49-F238E27FC236}">
+                <a16:creationId xmlns:a16="http://schemas.microsoft.com/office/drawing/2014/main" id="{1C70F5EB-D628-4D33-90C3-908BAEAACF37}"/>
+              </a:ext>
+            </a:extLst>
+          </p:cNvPr>
+          <p:cNvSpPr txBox="1"/>
+          <p:nvPr/>
+        </p:nvSpPr>
+        <p:spPr>
+          <a:xfrm>
+            <a:off x="958970" y="1759610"/>
+            <a:ext cx="6883400" cy="1200329"/>
+          </a:xfrm>
+          <a:prstGeom prst="rect">
+            <a:avLst/>
+          </a:prstGeom>
+          <a:noFill/>
+        </p:spPr>
+        <p:txBody>
+          <a:bodyPr wrap="square">
+            <a:spAutoFit/>
+          </a:bodyPr>
+          <a:lstStyle/>
+          <a:p>
+            <a:pPr marL="171450" indent="-171450">
+              <a:buFont typeface="Wingdings" panose="05000000000000000000" pitchFamily="2" charset="2"/>
+              <a:buChar char="à"/>
+            </a:pPr>
+            <a:r>
+              <a:rPr lang="en-US" dirty="0">
+                <a:sym typeface="Wingdings" panose="05000000000000000000" pitchFamily="2" charset="2"/>
+              </a:rPr>
+              <a:t>Operational: Speed &amp; Frequency</a:t>
+            </a:r>
+          </a:p>
+          <a:p>
+            <a:pPr marL="171450" indent="-171450">
+              <a:buFontTx/>
+              <a:buChar char="-"/>
+            </a:pPr>
+            <a:r>
+              <a:rPr lang="en-US" dirty="0">
+                <a:sym typeface="Wingdings" panose="05000000000000000000" pitchFamily="2" charset="2"/>
+              </a:rPr>
+              <a:t>Histogram (charts)</a:t>
+            </a:r>
+          </a:p>
+          <a:p>
+            <a:pPr marL="171450" indent="-171450">
+              <a:buFontTx/>
+              <a:buChar char="-"/>
+            </a:pPr>
+            <a:r>
+              <a:rPr lang="en-US" dirty="0">
+                <a:sym typeface="Wingdings" panose="05000000000000000000" pitchFamily="2" charset="2"/>
+              </a:rPr>
+              <a:t>Maps (</a:t>
+            </a:r>
+            <a:r>
+              <a:rPr lang="en-US" dirty="0" err="1">
+                <a:sym typeface="Wingdings" panose="05000000000000000000" pitchFamily="2" charset="2"/>
+              </a:rPr>
+              <a:t>Networkx</a:t>
+            </a:r>
+            <a:r>
+              <a:rPr lang="en-US" dirty="0">
+                <a:sym typeface="Wingdings" panose="05000000000000000000" pitchFamily="2" charset="2"/>
+              </a:rPr>
+              <a:t>)</a:t>
+            </a:r>
+          </a:p>
+          <a:p>
+            <a:pPr marL="0" indent="0">
+              <a:buFontTx/>
+              <a:buNone/>
+            </a:pPr>
+            <a:endParaRPr lang="en-US" dirty="0">
+              <a:sym typeface="Wingdings" panose="05000000000000000000" pitchFamily="2" charset="2"/>
+            </a:endParaRPr>
+          </a:p>
+        </p:txBody>
+      </p:sp>
+    </p:spTree>
+    <p:extLst>
+      <p:ext uri="{BB962C8B-B14F-4D97-AF65-F5344CB8AC3E}">
+        <p14:creationId xmlns:p14="http://schemas.microsoft.com/office/powerpoint/2010/main" val="468144026"/>
+      </p:ext>
+    </p:extLst>
+  </p:cSld>
+  <p:clrMapOvr>
+    <a:masterClrMapping/>
+  </p:clrMapOvr>
+</p:sld>
+</file>
+
+<file path=ppt/slides/slide25.xml><?xml version="1.0" encoding="utf-8"?>
+<p:sld xmlns:a="http://schemas.openxmlformats.org/drawingml/2006/main" xmlns:r="http://schemas.openxmlformats.org/officeDocument/2006/relationships" xmlns:p="http://schemas.openxmlformats.org/presentationml/2006/main">
+  <p:cSld>
+    <p:spTree>
+      <p:nvGrpSpPr>
+        <p:cNvPr id="1" name=""/>
+        <p:cNvGrpSpPr/>
+        <p:nvPr/>
+      </p:nvGrpSpPr>
+      <p:grpSpPr>
+        <a:xfrm>
+          <a:off x="0" y="0"/>
+          <a:ext cx="0" cy="0"/>
+          <a:chOff x="0" y="0"/>
+          <a:chExt cx="0" cy="0"/>
+        </a:xfrm>
+      </p:grpSpPr>
+      <p:sp>
+        <p:nvSpPr>
+          <p:cNvPr id="2" name="Title 1">
+            <a:extLst>
+              <a:ext uri="{FF2B5EF4-FFF2-40B4-BE49-F238E27FC236}">
+                <a16:creationId xmlns:a16="http://schemas.microsoft.com/office/drawing/2014/main" id="{63482FFF-7EC4-4691-BF8C-91E0066F6BE9}"/>
+              </a:ext>
+            </a:extLst>
+          </p:cNvPr>
+          <p:cNvSpPr>
+            <a:spLocks noGrp="1"/>
+          </p:cNvSpPr>
+          <p:nvPr>
+            <p:ph type="title"/>
+          </p:nvPr>
+        </p:nvSpPr>
+        <p:spPr/>
+        <p:txBody>
+          <a:bodyPr/>
+          <a:lstStyle/>
+          <a:p>
+            <a:r>
+              <a:rPr lang="en-US" dirty="0"/>
+              <a:t>Chp.5 - Results</a:t>
+            </a:r>
+            <a:endParaRPr lang="fr-BE" dirty="0"/>
+          </a:p>
+        </p:txBody>
+      </p:sp>
+      <p:sp>
+        <p:nvSpPr>
+          <p:cNvPr id="5" name="TextBox 4">
+            <a:extLst>
+              <a:ext uri="{FF2B5EF4-FFF2-40B4-BE49-F238E27FC236}">
+                <a16:creationId xmlns:a16="http://schemas.microsoft.com/office/drawing/2014/main" id="{1C70F5EB-D628-4D33-90C3-908BAEAACF37}"/>
+              </a:ext>
+            </a:extLst>
+          </p:cNvPr>
+          <p:cNvSpPr txBox="1"/>
+          <p:nvPr/>
+        </p:nvSpPr>
+        <p:spPr>
+          <a:xfrm>
+            <a:off x="958970" y="1759610"/>
+            <a:ext cx="6883400" cy="923330"/>
+          </a:xfrm>
+          <a:prstGeom prst="rect">
+            <a:avLst/>
+          </a:prstGeom>
+          <a:noFill/>
+        </p:spPr>
+        <p:txBody>
+          <a:bodyPr wrap="square">
+            <a:spAutoFit/>
+          </a:bodyPr>
+          <a:lstStyle/>
+          <a:p>
+            <a:pPr marL="0" marR="0" lvl="0" indent="0" algn="l" defTabSz="914400" rtl="0" eaLnBrk="1" fontAlgn="auto" latinLnBrk="0" hangingPunct="1">
+              <a:lnSpc>
+                <a:spcPct val="100000"/>
+              </a:lnSpc>
+              <a:spcBef>
+                <a:spcPts val="0"/>
+              </a:spcBef>
+              <a:spcAft>
+                <a:spcPts val="0"/>
+              </a:spcAft>
+              <a:buClrTx/>
+              <a:buSzTx/>
+              <a:buFontTx/>
+              <a:buNone/>
+              <a:tabLst/>
+              <a:defRPr/>
+            </a:pPr>
+            <a:r>
+              <a:rPr lang="en-US" dirty="0">
+                <a:sym typeface="Wingdings" panose="05000000000000000000" pitchFamily="2" charset="2"/>
+              </a:rPr>
+              <a:t> User importance:</a:t>
+            </a:r>
+          </a:p>
+          <a:p>
+            <a:pPr marL="171450" indent="-171450">
+              <a:buFontTx/>
+              <a:buChar char="-"/>
+            </a:pPr>
+            <a:r>
+              <a:rPr lang="en-US" dirty="0" err="1">
+                <a:sym typeface="Wingdings" panose="05000000000000000000" pitchFamily="2" charset="2"/>
+              </a:rPr>
+              <a:t>Efficience</a:t>
+            </a:r>
+            <a:r>
+              <a:rPr lang="en-US" dirty="0">
+                <a:sym typeface="Wingdings" panose="05000000000000000000" pitchFamily="2" charset="2"/>
+              </a:rPr>
+              <a:t> ranking comparison</a:t>
+            </a:r>
+          </a:p>
+          <a:p>
+            <a:pPr marL="171450" indent="-171450">
+              <a:buFontTx/>
+              <a:buChar char="-"/>
+            </a:pPr>
+            <a:endParaRPr lang="en-US" dirty="0">
+              <a:sym typeface="Wingdings" panose="05000000000000000000" pitchFamily="2" charset="2"/>
+            </a:endParaRPr>
+          </a:p>
+        </p:txBody>
+      </p:sp>
+    </p:spTree>
+    <p:extLst>
+      <p:ext uri="{BB962C8B-B14F-4D97-AF65-F5344CB8AC3E}">
+        <p14:creationId xmlns:p14="http://schemas.microsoft.com/office/powerpoint/2010/main" val="2555179648"/>
+      </p:ext>
+    </p:extLst>
+  </p:cSld>
+  <p:clrMapOvr>
+    <a:masterClrMapping/>
+  </p:clrMapOvr>
+</p:sld>
+</file>
+
+<file path=ppt/slides/slide26.xml><?xml version="1.0" encoding="utf-8"?>
+<p:sld xmlns:a="http://schemas.openxmlformats.org/drawingml/2006/main" xmlns:r="http://schemas.openxmlformats.org/officeDocument/2006/relationships" xmlns:p="http://schemas.openxmlformats.org/presentationml/2006/main">
+  <p:cSld>
+    <p:spTree>
+      <p:nvGrpSpPr>
+        <p:cNvPr id="1" name=""/>
+        <p:cNvGrpSpPr/>
+        <p:nvPr/>
+      </p:nvGrpSpPr>
+      <p:grpSpPr>
+        <a:xfrm>
+          <a:off x="0" y="0"/>
+          <a:ext cx="0" cy="0"/>
+          <a:chOff x="0" y="0"/>
+          <a:chExt cx="0" cy="0"/>
+        </a:xfrm>
+      </p:grpSpPr>
+      <p:sp>
+        <p:nvSpPr>
+          <p:cNvPr id="2" name="Title 1">
+            <a:extLst>
+              <a:ext uri="{FF2B5EF4-FFF2-40B4-BE49-F238E27FC236}">
+                <a16:creationId xmlns:a16="http://schemas.microsoft.com/office/drawing/2014/main" id="{63482FFF-7EC4-4691-BF8C-91E0066F6BE9}"/>
+              </a:ext>
+            </a:extLst>
+          </p:cNvPr>
+          <p:cNvSpPr>
+            <a:spLocks noGrp="1"/>
+          </p:cNvSpPr>
+          <p:nvPr>
+            <p:ph type="title"/>
+          </p:nvPr>
+        </p:nvSpPr>
+        <p:spPr/>
+        <p:txBody>
+          <a:bodyPr/>
+          <a:lstStyle/>
+          <a:p>
+            <a:r>
+              <a:rPr lang="en-US" dirty="0"/>
+              <a:t>Chp.5 - Results</a:t>
+            </a:r>
+            <a:endParaRPr lang="fr-BE" dirty="0"/>
+          </a:p>
+        </p:txBody>
+      </p:sp>
+      <p:sp>
+        <p:nvSpPr>
+          <p:cNvPr id="5" name="TextBox 4">
+            <a:extLst>
+              <a:ext uri="{FF2B5EF4-FFF2-40B4-BE49-F238E27FC236}">
+                <a16:creationId xmlns:a16="http://schemas.microsoft.com/office/drawing/2014/main" id="{1C70F5EB-D628-4D33-90C3-908BAEAACF37}"/>
+              </a:ext>
+            </a:extLst>
+          </p:cNvPr>
+          <p:cNvSpPr txBox="1"/>
+          <p:nvPr/>
+        </p:nvSpPr>
+        <p:spPr>
+          <a:xfrm>
+            <a:off x="958970" y="1759610"/>
+            <a:ext cx="6883400" cy="646331"/>
+          </a:xfrm>
+          <a:prstGeom prst="rect">
+            <a:avLst/>
+          </a:prstGeom>
+          <a:noFill/>
+        </p:spPr>
+        <p:txBody>
+          <a:bodyPr wrap="square">
+            <a:spAutoFit/>
+          </a:bodyPr>
+          <a:lstStyle/>
+          <a:p>
+            <a:pPr marL="0" marR="0" lvl="0" indent="0" algn="l" defTabSz="914400" rtl="0" eaLnBrk="1" fontAlgn="auto" latinLnBrk="0" hangingPunct="1">
+              <a:lnSpc>
+                <a:spcPct val="100000"/>
+              </a:lnSpc>
+              <a:spcBef>
+                <a:spcPts val="0"/>
+              </a:spcBef>
+              <a:spcAft>
+                <a:spcPts val="0"/>
+              </a:spcAft>
+              <a:buClrTx/>
+              <a:buSzTx/>
+              <a:buFontTx/>
+              <a:buNone/>
+              <a:tabLst/>
+              <a:defRPr/>
+            </a:pPr>
+            <a:r>
+              <a:rPr lang="en-US" dirty="0">
+                <a:sym typeface="Wingdings" panose="05000000000000000000" pitchFamily="2" charset="2"/>
+              </a:rPr>
+              <a:t> Collective importance:</a:t>
+            </a:r>
+          </a:p>
+          <a:p>
+            <a:pPr marL="171450" indent="-171450">
+              <a:buFontTx/>
+              <a:buChar char="-"/>
+            </a:pPr>
+            <a:r>
+              <a:rPr lang="en-US" dirty="0">
+                <a:sym typeface="Wingdings" panose="05000000000000000000" pitchFamily="2" charset="2"/>
+              </a:rPr>
+              <a:t>Distress ranking comparison</a:t>
+            </a:r>
+          </a:p>
+        </p:txBody>
+      </p:sp>
+    </p:spTree>
+    <p:extLst>
+      <p:ext uri="{BB962C8B-B14F-4D97-AF65-F5344CB8AC3E}">
+        <p14:creationId xmlns:p14="http://schemas.microsoft.com/office/powerpoint/2010/main" val="2702504304"/>
+      </p:ext>
+    </p:extLst>
+  </p:cSld>
+  <p:clrMapOvr>
+    <a:masterClrMapping/>
+  </p:clrMapOvr>
+</p:sld>
+</file>
+
+<file path=ppt/slides/slide27.xml><?xml version="1.0" encoding="utf-8"?>
+<p:sld xmlns:a="http://schemas.openxmlformats.org/drawingml/2006/main" xmlns:r="http://schemas.openxmlformats.org/officeDocument/2006/relationships" xmlns:p="http://schemas.openxmlformats.org/presentationml/2006/main">
+  <p:cSld>
+    <p:spTree>
+      <p:nvGrpSpPr>
+        <p:cNvPr id="1" name=""/>
+        <p:cNvGrpSpPr/>
+        <p:nvPr/>
+      </p:nvGrpSpPr>
+      <p:grpSpPr>
+        <a:xfrm>
+          <a:off x="0" y="0"/>
+          <a:ext cx="0" cy="0"/>
+          <a:chOff x="0" y="0"/>
+          <a:chExt cx="0" cy="0"/>
+        </a:xfrm>
+      </p:grpSpPr>
+      <p:sp>
+        <p:nvSpPr>
+          <p:cNvPr id="2" name="Title 1">
+            <a:extLst>
+              <a:ext uri="{FF2B5EF4-FFF2-40B4-BE49-F238E27FC236}">
+                <a16:creationId xmlns:a16="http://schemas.microsoft.com/office/drawing/2014/main" id="{63482FFF-7EC4-4691-BF8C-91E0066F6BE9}"/>
+              </a:ext>
+            </a:extLst>
+          </p:cNvPr>
+          <p:cNvSpPr>
+            <a:spLocks noGrp="1"/>
+          </p:cNvSpPr>
+          <p:nvPr>
+            <p:ph type="title"/>
+          </p:nvPr>
+        </p:nvSpPr>
+        <p:spPr/>
+        <p:txBody>
+          <a:bodyPr/>
+          <a:lstStyle/>
+          <a:p>
+            <a:r>
+              <a:rPr lang="en-US" dirty="0"/>
+              <a:t>Chp.6 - Following Steps</a:t>
+            </a:r>
+            <a:endParaRPr lang="fr-BE" dirty="0"/>
+          </a:p>
+        </p:txBody>
+      </p:sp>
+      <p:sp>
+        <p:nvSpPr>
+          <p:cNvPr id="5" name="TextBox 4">
+            <a:extLst>
+              <a:ext uri="{FF2B5EF4-FFF2-40B4-BE49-F238E27FC236}">
+                <a16:creationId xmlns:a16="http://schemas.microsoft.com/office/drawing/2014/main" id="{C5BDFFFD-DF47-4673-8095-E9BA459078C9}"/>
+              </a:ext>
+            </a:extLst>
+          </p:cNvPr>
+          <p:cNvSpPr txBox="1"/>
+          <p:nvPr/>
+        </p:nvSpPr>
+        <p:spPr>
+          <a:xfrm>
+            <a:off x="541867" y="1690687"/>
+            <a:ext cx="11243733" cy="4708981"/>
+          </a:xfrm>
+          <a:prstGeom prst="rect">
+            <a:avLst/>
+          </a:prstGeom>
+          <a:noFill/>
+        </p:spPr>
+        <p:txBody>
+          <a:bodyPr wrap="square">
+            <a:spAutoFit/>
+          </a:bodyPr>
+          <a:lstStyle/>
+          <a:p>
+            <a:pPr marL="0" marR="0" lvl="0" indent="0" algn="l" defTabSz="914400" rtl="0" eaLnBrk="1" fontAlgn="auto" latinLnBrk="0" hangingPunct="1">
+              <a:lnSpc>
+                <a:spcPct val="100000"/>
+              </a:lnSpc>
+              <a:spcBef>
+                <a:spcPts val="0"/>
+              </a:spcBef>
+              <a:spcAft>
+                <a:spcPts val="0"/>
+              </a:spcAft>
+              <a:buClrTx/>
+              <a:buSzTx/>
+              <a:buFontTx/>
+              <a:buNone/>
+              <a:tabLst/>
+              <a:defRPr/>
+            </a:pPr>
+            <a:r>
+              <a:rPr lang="en-US" sz="2000" dirty="0"/>
+              <a:t>1) </a:t>
+            </a:r>
+            <a:r>
+              <a:rPr lang="en-US" sz="2000" dirty="0">
+                <a:sym typeface="Wingdings" panose="05000000000000000000" pitchFamily="2" charset="2"/>
+              </a:rPr>
+              <a:t>Interconnect all possible modes of transport including bikes and walks.</a:t>
+            </a:r>
+            <a:endParaRPr lang="en-US" sz="2000" dirty="0"/>
+          </a:p>
+          <a:p>
+            <a:pPr marL="0" indent="0">
+              <a:buNone/>
+            </a:pPr>
+            <a:endParaRPr lang="en-US" sz="2000" dirty="0"/>
+          </a:p>
+          <a:p>
+            <a:pPr marL="0" indent="0">
+              <a:buNone/>
+            </a:pPr>
+            <a:endParaRPr lang="en-US" sz="2000" dirty="0"/>
+          </a:p>
+          <a:p>
+            <a:pPr marL="0" indent="0">
+              <a:buNone/>
+            </a:pPr>
+            <a:r>
+              <a:rPr lang="en-US" sz="2000" dirty="0"/>
+              <a:t>2) Use ML models for predictions of:</a:t>
+            </a:r>
+          </a:p>
+          <a:p>
+            <a:pPr marL="228600" indent="-228600">
+              <a:buAutoNum type="arabicParenR"/>
+            </a:pPr>
+            <a:endParaRPr lang="en-US" sz="2000" dirty="0"/>
+          </a:p>
+          <a:p>
+            <a:pPr marL="171450" indent="-171450">
+              <a:buFont typeface="Wingdings" panose="05000000000000000000" pitchFamily="2" charset="2"/>
+              <a:buChar char="à"/>
+            </a:pPr>
+            <a:r>
+              <a:rPr lang="en-US" sz="2000" dirty="0"/>
+              <a:t>TRAFFIC: Passenger flow: </a:t>
+            </a:r>
+            <a:r>
+              <a:rPr lang="en-US" sz="2000" b="0" i="0" dirty="0">
+                <a:solidFill>
+                  <a:srgbClr val="24292F"/>
+                </a:solidFill>
+                <a:effectLst/>
+                <a:latin typeface="-apple-system"/>
+              </a:rPr>
+              <a:t>From network lens (keeping passenger anonymity) , use more data (daily events) to more accurately understand why traffic is generated in each segments;</a:t>
+            </a:r>
+          </a:p>
+          <a:p>
+            <a:pPr marL="171450" indent="-171450">
+              <a:buFont typeface="Wingdings" panose="05000000000000000000" pitchFamily="2" charset="2"/>
+              <a:buChar char="à"/>
+            </a:pPr>
+            <a:endParaRPr lang="en-US" sz="2000" b="0" i="0" dirty="0">
+              <a:solidFill>
+                <a:srgbClr val="24292F"/>
+              </a:solidFill>
+              <a:effectLst/>
+              <a:latin typeface="-apple-system"/>
+            </a:endParaRPr>
+          </a:p>
+          <a:p>
+            <a:pPr marL="171450" indent="-171450">
+              <a:buFont typeface="Wingdings" panose="05000000000000000000" pitchFamily="2" charset="2"/>
+              <a:buChar char="à"/>
+            </a:pPr>
+            <a:r>
+              <a:rPr lang="en-US" sz="2000" b="0" i="0" dirty="0">
+                <a:solidFill>
+                  <a:srgbClr val="24292F"/>
+                </a:solidFill>
+                <a:effectLst/>
+                <a:latin typeface="-apple-system"/>
+              </a:rPr>
+              <a:t>OPEX: Predict disruptions and its impact considering forecasted passenger traffic to optimize maintenance planning.</a:t>
+            </a:r>
+          </a:p>
+          <a:p>
+            <a:pPr marL="171450" indent="-171450">
+              <a:buFont typeface="Wingdings" panose="05000000000000000000" pitchFamily="2" charset="2"/>
+              <a:buChar char="à"/>
+            </a:pPr>
+            <a:endParaRPr lang="en-US" sz="2000" b="0" i="0" dirty="0">
+              <a:solidFill>
+                <a:srgbClr val="24292F"/>
+              </a:solidFill>
+              <a:effectLst/>
+              <a:latin typeface="-apple-system"/>
+            </a:endParaRPr>
+          </a:p>
+          <a:p>
+            <a:pPr marL="171450" marR="0" lvl="0" indent="-171450" algn="l" defTabSz="914400" rtl="0" eaLnBrk="1" fontAlgn="auto" latinLnBrk="0" hangingPunct="1">
+              <a:lnSpc>
+                <a:spcPct val="100000"/>
+              </a:lnSpc>
+              <a:spcBef>
+                <a:spcPts val="0"/>
+              </a:spcBef>
+              <a:spcAft>
+                <a:spcPts val="0"/>
+              </a:spcAft>
+              <a:buClrTx/>
+              <a:buSzTx/>
+              <a:buFont typeface="Wingdings" panose="05000000000000000000" pitchFamily="2" charset="2"/>
+              <a:buChar char="à"/>
+              <a:tabLst/>
+              <a:defRPr/>
+            </a:pPr>
+            <a:r>
+              <a:rPr lang="en-US" sz="2000" b="0" i="0" dirty="0">
+                <a:solidFill>
+                  <a:srgbClr val="24292F"/>
+                </a:solidFill>
+                <a:effectLst/>
+                <a:latin typeface="-apple-system"/>
+              </a:rPr>
+              <a:t>Create a timetable dynamically tailored that optimize infra-structure towards the commuters needs.</a:t>
+            </a:r>
+          </a:p>
+          <a:p>
+            <a:pPr marL="171450" indent="-171450">
+              <a:buFont typeface="Wingdings" panose="05000000000000000000" pitchFamily="2" charset="2"/>
+              <a:buChar char="à"/>
+            </a:pPr>
+            <a:endParaRPr lang="en-US" sz="2000" b="0" i="0" dirty="0">
+              <a:solidFill>
+                <a:srgbClr val="24292F"/>
+              </a:solidFill>
+              <a:effectLst/>
+              <a:latin typeface="-apple-system"/>
+            </a:endParaRPr>
+          </a:p>
+          <a:p>
+            <a:pPr marL="171450" indent="-171450">
+              <a:buFont typeface="Wingdings" panose="05000000000000000000" pitchFamily="2" charset="2"/>
+              <a:buChar char="à"/>
+            </a:pPr>
+            <a:r>
+              <a:rPr lang="en-US" sz="2000" b="0" i="0" dirty="0">
+                <a:solidFill>
+                  <a:srgbClr val="24292F"/>
+                </a:solidFill>
+                <a:effectLst/>
+                <a:latin typeface="-apple-system"/>
+              </a:rPr>
+              <a:t>CAPEX: More maintenance, less disruptions, less need for redundancy and more investment express lanes (study of origin and destination).  A study considering entries and exist of studies.</a:t>
+            </a:r>
+          </a:p>
+        </p:txBody>
+      </p:sp>
+    </p:spTree>
+    <p:extLst>
+      <p:ext uri="{BB962C8B-B14F-4D97-AF65-F5344CB8AC3E}">
+        <p14:creationId xmlns:p14="http://schemas.microsoft.com/office/powerpoint/2010/main" val="3254598016"/>
+      </p:ext>
+    </p:extLst>
+  </p:cSld>
+  <p:clrMapOvr>
+    <a:masterClrMapping/>
+  </p:clrMapOvr>
+</p:sld>
+</file>
+
+<file path=ppt/slides/slide28.xml><?xml version="1.0" encoding="utf-8"?>
+<p:sld xmlns:a="http://schemas.openxmlformats.org/drawingml/2006/main" xmlns:r="http://schemas.openxmlformats.org/officeDocument/2006/relationships" xmlns:p="http://schemas.openxmlformats.org/presentationml/2006/main">
+  <p:cSld>
+    <p:spTree>
+      <p:nvGrpSpPr>
+        <p:cNvPr id="1" name=""/>
+        <p:cNvGrpSpPr/>
+        <p:nvPr/>
+      </p:nvGrpSpPr>
+      <p:grpSpPr>
+        <a:xfrm>
+          <a:off x="0" y="0"/>
+          <a:ext cx="0" cy="0"/>
+          <a:chOff x="0" y="0"/>
+          <a:chExt cx="0" cy="0"/>
+        </a:xfrm>
+      </p:grpSpPr>
+      <p:sp>
+        <p:nvSpPr>
+          <p:cNvPr id="2" name="Title 1">
+            <a:extLst>
+              <a:ext uri="{FF2B5EF4-FFF2-40B4-BE49-F238E27FC236}">
+                <a16:creationId xmlns:a16="http://schemas.microsoft.com/office/drawing/2014/main" id="{63482FFF-7EC4-4691-BF8C-91E0066F6BE9}"/>
+              </a:ext>
+            </a:extLst>
+          </p:cNvPr>
+          <p:cNvSpPr>
+            <a:spLocks noGrp="1"/>
+          </p:cNvSpPr>
+          <p:nvPr>
+            <p:ph type="title"/>
+          </p:nvPr>
+        </p:nvSpPr>
+        <p:spPr/>
+        <p:txBody>
+          <a:bodyPr/>
+          <a:lstStyle/>
+          <a:p>
+            <a:r>
+              <a:rPr lang="en-US" dirty="0"/>
+              <a:t>Chp.7 - Conclusion</a:t>
+            </a:r>
+            <a:endParaRPr lang="fr-BE" dirty="0"/>
+          </a:p>
+        </p:txBody>
+      </p:sp>
+      <p:sp>
+        <p:nvSpPr>
+          <p:cNvPr id="3" name="Content Placeholder 2">
+            <a:extLst>
+              <a:ext uri="{FF2B5EF4-FFF2-40B4-BE49-F238E27FC236}">
+                <a16:creationId xmlns:a16="http://schemas.microsoft.com/office/drawing/2014/main" id="{DAE38D01-88EE-41C2-B9C1-6627C65A5A93}"/>
+              </a:ext>
+            </a:extLst>
+          </p:cNvPr>
+          <p:cNvSpPr>
+            <a:spLocks noGrp="1"/>
+          </p:cNvSpPr>
+          <p:nvPr>
+            <p:ph idx="1"/>
+          </p:nvPr>
+        </p:nvSpPr>
+        <p:spPr/>
+        <p:txBody>
+          <a:bodyPr>
+            <a:normAutofit fontScale="92500" lnSpcReduction="20000"/>
+          </a:bodyPr>
+          <a:lstStyle/>
+          <a:p>
+            <a:r>
+              <a:rPr lang="en-US" dirty="0"/>
+              <a:t>It is not necessary related to its size. But is related to how it was projected to assist the commuters.</a:t>
+            </a:r>
+          </a:p>
+          <a:p>
+            <a:endParaRPr lang="en-US" dirty="0"/>
+          </a:p>
+          <a:p>
+            <a:r>
+              <a:rPr lang="en-US" dirty="0"/>
+              <a:t>Proper maintenances can reduce the number of disruption, for instance, it would be a waste invest in redundancies. More money could be destinated to reduce travels time. </a:t>
+            </a:r>
+          </a:p>
+          <a:p>
+            <a:endParaRPr lang="en-US" dirty="0"/>
+          </a:p>
+          <a:p>
+            <a:r>
+              <a:rPr lang="en-US" dirty="0"/>
+              <a:t>In a real world, however, no disruptions comes with a high maintenance price. </a:t>
+            </a:r>
+          </a:p>
+          <a:p>
+            <a:endParaRPr lang="en-US" dirty="0"/>
+          </a:p>
+          <a:p>
+            <a:r>
+              <a:rPr lang="en-US" dirty="0"/>
+              <a:t>The balance between effectiveness and robustness is a major question when comes down to a such important factor of the society evolvement.</a:t>
+            </a:r>
+          </a:p>
+          <a:p>
+            <a:endParaRPr lang="fr-BE" dirty="0"/>
+          </a:p>
+        </p:txBody>
+      </p:sp>
+    </p:spTree>
+    <p:extLst>
+      <p:ext uri="{BB962C8B-B14F-4D97-AF65-F5344CB8AC3E}">
+        <p14:creationId xmlns:p14="http://schemas.microsoft.com/office/powerpoint/2010/main" val="3798559975"/>
+      </p:ext>
+    </p:extLst>
+  </p:cSld>
+  <p:clrMapOvr>
+    <a:masterClrMapping/>
+  </p:clrMapOvr>
+</p:sld>
+</file>
+
+<file path=ppt/slides/slide3.xml><?xml version="1.0" encoding="utf-8"?>
 <p:sld xmlns:a="http://schemas.openxmlformats.org/drawingml/2006/main" xmlns:r="http://schemas.openxmlformats.org/officeDocument/2006/relationships" xmlns:p="http://schemas.openxmlformats.org/presentationml/2006/main">
   <p:cSld>
     <p:spTree>
@@ -14430,1327 +16178,6 @@
 </p:sld>
 </file>
 
-<file path=ppt/slides/slide20.xml><?xml version="1.0" encoding="utf-8"?>
-<p:sld xmlns:a="http://schemas.openxmlformats.org/drawingml/2006/main" xmlns:r="http://schemas.openxmlformats.org/officeDocument/2006/relationships" xmlns:p="http://schemas.openxmlformats.org/presentationml/2006/main">
-  <p:cSld>
-    <p:spTree>
-      <p:nvGrpSpPr>
-        <p:cNvPr id="1" name=""/>
-        <p:cNvGrpSpPr/>
-        <p:nvPr/>
-      </p:nvGrpSpPr>
-      <p:grpSpPr>
-        <a:xfrm>
-          <a:off x="0" y="0"/>
-          <a:ext cx="0" cy="0"/>
-          <a:chOff x="0" y="0"/>
-          <a:chExt cx="0" cy="0"/>
-        </a:xfrm>
-      </p:grpSpPr>
-      <p:sp>
-        <p:nvSpPr>
-          <p:cNvPr id="2" name="Title 1">
-            <a:extLst>
-              <a:ext uri="{FF2B5EF4-FFF2-40B4-BE49-F238E27FC236}">
-                <a16:creationId xmlns:a16="http://schemas.microsoft.com/office/drawing/2014/main" id="{63482FFF-7EC4-4691-BF8C-91E0066F6BE9}"/>
-              </a:ext>
-            </a:extLst>
-          </p:cNvPr>
-          <p:cNvSpPr>
-            <a:spLocks noGrp="1"/>
-          </p:cNvSpPr>
-          <p:nvPr>
-            <p:ph type="title"/>
-          </p:nvPr>
-        </p:nvSpPr>
-        <p:spPr/>
-        <p:txBody>
-          <a:bodyPr/>
-          <a:lstStyle/>
-          <a:p>
-            <a:r>
-              <a:rPr lang="en-US" dirty="0"/>
-              <a:t>Chp.4 - Modelling</a:t>
-            </a:r>
-            <a:endParaRPr lang="fr-BE" dirty="0"/>
-          </a:p>
-        </p:txBody>
-      </p:sp>
-      <p:pic>
-        <p:nvPicPr>
-          <p:cNvPr id="5" name="Picture 4">
-            <a:extLst>
-              <a:ext uri="{FF2B5EF4-FFF2-40B4-BE49-F238E27FC236}">
-                <a16:creationId xmlns:a16="http://schemas.microsoft.com/office/drawing/2014/main" id="{E5B807A3-C215-444C-9CF9-24FC1D8B565B}"/>
-              </a:ext>
-            </a:extLst>
-          </p:cNvPr>
-          <p:cNvPicPr>
-            <a:picLocks noChangeAspect="1"/>
-          </p:cNvPicPr>
-          <p:nvPr/>
-        </p:nvPicPr>
-        <p:blipFill>
-          <a:blip r:embed="rId2"/>
-          <a:stretch>
-            <a:fillRect/>
-          </a:stretch>
-        </p:blipFill>
-        <p:spPr>
-          <a:xfrm>
-            <a:off x="6918955" y="2844088"/>
-            <a:ext cx="4921530" cy="2821677"/>
-          </a:xfrm>
-          <a:prstGeom prst="rect">
-            <a:avLst/>
-          </a:prstGeom>
-        </p:spPr>
-      </p:pic>
-      <p:pic>
-        <p:nvPicPr>
-          <p:cNvPr id="1032" name="Picture 8">
-            <a:extLst>
-              <a:ext uri="{FF2B5EF4-FFF2-40B4-BE49-F238E27FC236}">
-                <a16:creationId xmlns:a16="http://schemas.microsoft.com/office/drawing/2014/main" id="{3E0027DD-4153-4257-BC3C-65CEC71D3BB2}"/>
-              </a:ext>
-            </a:extLst>
-          </p:cNvPr>
-          <p:cNvPicPr>
-            <a:picLocks noChangeAspect="1" noChangeArrowheads="1"/>
-          </p:cNvPicPr>
-          <p:nvPr/>
-        </p:nvPicPr>
-        <p:blipFill>
-          <a:blip r:embed="rId3">
-            <a:extLst>
-              <a:ext uri="{28A0092B-C50C-407E-A947-70E740481C1C}">
-                <a14:useLocalDpi xmlns:a14="http://schemas.microsoft.com/office/drawing/2010/main" val="0"/>
-              </a:ext>
-            </a:extLst>
-          </a:blip>
-          <a:srcRect/>
-          <a:stretch>
-            <a:fillRect/>
-          </a:stretch>
-        </p:blipFill>
-        <p:spPr bwMode="auto">
-          <a:xfrm>
-            <a:off x="351515" y="4200842"/>
-            <a:ext cx="5291759" cy="2489840"/>
-          </a:xfrm>
-          <a:prstGeom prst="rect">
-            <a:avLst/>
-          </a:prstGeom>
-          <a:noFill/>
-          <a:extLst>
-            <a:ext uri="{909E8E84-426E-40DD-AFC4-6F175D3DCCD1}">
-              <a14:hiddenFill xmlns:a14="http://schemas.microsoft.com/office/drawing/2010/main">
-                <a:solidFill>
-                  <a:srgbClr val="FFFFFF"/>
-                </a:solidFill>
-              </a14:hiddenFill>
-            </a:ext>
-          </a:extLst>
-        </p:spPr>
-      </p:pic>
-      <p:pic>
-        <p:nvPicPr>
-          <p:cNvPr id="6" name="Picture 4">
-            <a:extLst>
-              <a:ext uri="{FF2B5EF4-FFF2-40B4-BE49-F238E27FC236}">
-                <a16:creationId xmlns:a16="http://schemas.microsoft.com/office/drawing/2014/main" id="{D0B51982-F0E9-507F-6E59-10723F698187}"/>
-              </a:ext>
-            </a:extLst>
-          </p:cNvPr>
-          <p:cNvPicPr>
-            <a:picLocks noChangeAspect="1" noChangeArrowheads="1"/>
-          </p:cNvPicPr>
-          <p:nvPr/>
-        </p:nvPicPr>
-        <p:blipFill>
-          <a:blip r:embed="rId4">
-            <a:extLst>
-              <a:ext uri="{28A0092B-C50C-407E-A947-70E740481C1C}">
-                <a14:useLocalDpi xmlns:a14="http://schemas.microsoft.com/office/drawing/2010/main" val="0"/>
-              </a:ext>
-            </a:extLst>
-          </a:blip>
-          <a:srcRect/>
-          <a:stretch>
-            <a:fillRect/>
-          </a:stretch>
-        </p:blipFill>
-        <p:spPr bwMode="auto">
-          <a:xfrm>
-            <a:off x="351515" y="1556583"/>
-            <a:ext cx="5231345" cy="2644259"/>
-          </a:xfrm>
-          <a:prstGeom prst="rect">
-            <a:avLst/>
-          </a:prstGeom>
-          <a:noFill/>
-          <a:extLst>
-            <a:ext uri="{909E8E84-426E-40DD-AFC4-6F175D3DCCD1}">
-              <a14:hiddenFill xmlns:a14="http://schemas.microsoft.com/office/drawing/2010/main">
-                <a:solidFill>
-                  <a:srgbClr val="FFFFFF"/>
-                </a:solidFill>
-              </a14:hiddenFill>
-            </a:ext>
-          </a:extLst>
-        </p:spPr>
-      </p:pic>
-    </p:spTree>
-    <p:extLst>
-      <p:ext uri="{BB962C8B-B14F-4D97-AF65-F5344CB8AC3E}">
-        <p14:creationId xmlns:p14="http://schemas.microsoft.com/office/powerpoint/2010/main" val="668154826"/>
-      </p:ext>
-    </p:extLst>
-  </p:cSld>
-  <p:clrMapOvr>
-    <a:masterClrMapping/>
-  </p:clrMapOvr>
-</p:sld>
-</file>
-
-<file path=ppt/slides/slide21.xml><?xml version="1.0" encoding="utf-8"?>
-<p:sld xmlns:a="http://schemas.openxmlformats.org/drawingml/2006/main" xmlns:r="http://schemas.openxmlformats.org/officeDocument/2006/relationships" xmlns:p="http://schemas.openxmlformats.org/presentationml/2006/main">
-  <p:cSld>
-    <p:spTree>
-      <p:nvGrpSpPr>
-        <p:cNvPr id="1" name=""/>
-        <p:cNvGrpSpPr/>
-        <p:nvPr/>
-      </p:nvGrpSpPr>
-      <p:grpSpPr>
-        <a:xfrm>
-          <a:off x="0" y="0"/>
-          <a:ext cx="0" cy="0"/>
-          <a:chOff x="0" y="0"/>
-          <a:chExt cx="0" cy="0"/>
-        </a:xfrm>
-      </p:grpSpPr>
-      <p:sp>
-        <p:nvSpPr>
-          <p:cNvPr id="2" name="Title 1">
-            <a:extLst>
-              <a:ext uri="{FF2B5EF4-FFF2-40B4-BE49-F238E27FC236}">
-                <a16:creationId xmlns:a16="http://schemas.microsoft.com/office/drawing/2014/main" id="{63482FFF-7EC4-4691-BF8C-91E0066F6BE9}"/>
-              </a:ext>
-            </a:extLst>
-          </p:cNvPr>
-          <p:cNvSpPr>
-            <a:spLocks noGrp="1"/>
-          </p:cNvSpPr>
-          <p:nvPr>
-            <p:ph type="title"/>
-          </p:nvPr>
-        </p:nvSpPr>
-        <p:spPr/>
-        <p:txBody>
-          <a:bodyPr/>
-          <a:lstStyle/>
-          <a:p>
-            <a:r>
-              <a:rPr lang="en-US" dirty="0"/>
-              <a:t>Chp.5 - Results</a:t>
-            </a:r>
-            <a:endParaRPr lang="fr-BE" dirty="0"/>
-          </a:p>
-        </p:txBody>
-      </p:sp>
-      <p:sp>
-        <p:nvSpPr>
-          <p:cNvPr id="5" name="TextBox 4">
-            <a:extLst>
-              <a:ext uri="{FF2B5EF4-FFF2-40B4-BE49-F238E27FC236}">
-                <a16:creationId xmlns:a16="http://schemas.microsoft.com/office/drawing/2014/main" id="{1C70F5EB-D628-4D33-90C3-908BAEAACF37}"/>
-              </a:ext>
-            </a:extLst>
-          </p:cNvPr>
-          <p:cNvSpPr txBox="1"/>
-          <p:nvPr/>
-        </p:nvSpPr>
-        <p:spPr>
-          <a:xfrm>
-            <a:off x="958970" y="1759610"/>
-            <a:ext cx="6883400" cy="923330"/>
-          </a:xfrm>
-          <a:prstGeom prst="rect">
-            <a:avLst/>
-          </a:prstGeom>
-          <a:noFill/>
-        </p:spPr>
-        <p:txBody>
-          <a:bodyPr wrap="square">
-            <a:spAutoFit/>
-          </a:bodyPr>
-          <a:lstStyle/>
-          <a:p>
-            <a:pPr marL="171450" indent="-171450">
-              <a:buFont typeface="Wingdings" panose="05000000000000000000" pitchFamily="2" charset="2"/>
-              <a:buChar char="à"/>
-            </a:pPr>
-            <a:r>
-              <a:rPr lang="en-US" dirty="0">
-                <a:sym typeface="Wingdings" panose="05000000000000000000" pitchFamily="2" charset="2"/>
-              </a:rPr>
-              <a:t>Inbound &amp; Outbound Traffic: Morning (5-7) x Evening (19-22) </a:t>
-            </a:r>
-          </a:p>
-          <a:p>
-            <a:pPr marL="171450" indent="-171450">
-              <a:buFontTx/>
-              <a:buChar char="-"/>
-            </a:pPr>
-            <a:r>
-              <a:rPr lang="en-US" dirty="0">
-                <a:sym typeface="Wingdings" panose="05000000000000000000" pitchFamily="2" charset="2"/>
-              </a:rPr>
-              <a:t>(DLR, </a:t>
-            </a:r>
-            <a:r>
-              <a:rPr lang="en-US" dirty="0" err="1">
-                <a:sym typeface="Wingdings" panose="05000000000000000000" pitchFamily="2" charset="2"/>
-              </a:rPr>
-              <a:t>OverGround</a:t>
-            </a:r>
-            <a:r>
-              <a:rPr lang="en-US" dirty="0">
-                <a:sym typeface="Wingdings" panose="05000000000000000000" pitchFamily="2" charset="2"/>
-              </a:rPr>
-              <a:t>, Tube) </a:t>
-            </a:r>
-          </a:p>
-          <a:p>
-            <a:pPr marL="171450" indent="-171450">
-              <a:buFontTx/>
-              <a:buChar char="-"/>
-            </a:pPr>
-            <a:r>
-              <a:rPr lang="en-US" dirty="0">
-                <a:sym typeface="Wingdings" panose="05000000000000000000" pitchFamily="2" charset="2"/>
-              </a:rPr>
-              <a:t>MTT, FRI, SAT and SUN</a:t>
-            </a:r>
-          </a:p>
-        </p:txBody>
-      </p:sp>
-    </p:spTree>
-    <p:extLst>
-      <p:ext uri="{BB962C8B-B14F-4D97-AF65-F5344CB8AC3E}">
-        <p14:creationId xmlns:p14="http://schemas.microsoft.com/office/powerpoint/2010/main" val="831078479"/>
-      </p:ext>
-    </p:extLst>
-  </p:cSld>
-  <p:clrMapOvr>
-    <a:masterClrMapping/>
-  </p:clrMapOvr>
-</p:sld>
-</file>
-
-<file path=ppt/slides/slide22.xml><?xml version="1.0" encoding="utf-8"?>
-<p:sld xmlns:a="http://schemas.openxmlformats.org/drawingml/2006/main" xmlns:r="http://schemas.openxmlformats.org/officeDocument/2006/relationships" xmlns:p="http://schemas.openxmlformats.org/presentationml/2006/main">
-  <p:cSld>
-    <p:spTree>
-      <p:nvGrpSpPr>
-        <p:cNvPr id="1" name=""/>
-        <p:cNvGrpSpPr/>
-        <p:nvPr/>
-      </p:nvGrpSpPr>
-      <p:grpSpPr>
-        <a:xfrm>
-          <a:off x="0" y="0"/>
-          <a:ext cx="0" cy="0"/>
-          <a:chOff x="0" y="0"/>
-          <a:chExt cx="0" cy="0"/>
-        </a:xfrm>
-      </p:grpSpPr>
-      <p:sp>
-        <p:nvSpPr>
-          <p:cNvPr id="2" name="Title 1">
-            <a:extLst>
-              <a:ext uri="{FF2B5EF4-FFF2-40B4-BE49-F238E27FC236}">
-                <a16:creationId xmlns:a16="http://schemas.microsoft.com/office/drawing/2014/main" id="{63482FFF-7EC4-4691-BF8C-91E0066F6BE9}"/>
-              </a:ext>
-            </a:extLst>
-          </p:cNvPr>
-          <p:cNvSpPr>
-            <a:spLocks noGrp="1"/>
-          </p:cNvSpPr>
-          <p:nvPr>
-            <p:ph type="title"/>
-          </p:nvPr>
-        </p:nvSpPr>
-        <p:spPr/>
-        <p:txBody>
-          <a:bodyPr/>
-          <a:lstStyle/>
-          <a:p>
-            <a:r>
-              <a:rPr lang="en-US" dirty="0"/>
-              <a:t>Chp.5 - Results</a:t>
-            </a:r>
-            <a:endParaRPr lang="fr-BE" dirty="0"/>
-          </a:p>
-        </p:txBody>
-      </p:sp>
-      <p:sp>
-        <p:nvSpPr>
-          <p:cNvPr id="5" name="TextBox 4">
-            <a:extLst>
-              <a:ext uri="{FF2B5EF4-FFF2-40B4-BE49-F238E27FC236}">
-                <a16:creationId xmlns:a16="http://schemas.microsoft.com/office/drawing/2014/main" id="{1C70F5EB-D628-4D33-90C3-908BAEAACF37}"/>
-              </a:ext>
-            </a:extLst>
-          </p:cNvPr>
-          <p:cNvSpPr txBox="1"/>
-          <p:nvPr/>
-        </p:nvSpPr>
-        <p:spPr>
-          <a:xfrm>
-            <a:off x="958970" y="1759610"/>
-            <a:ext cx="6883400" cy="923330"/>
-          </a:xfrm>
-          <a:prstGeom prst="rect">
-            <a:avLst/>
-          </a:prstGeom>
-          <a:noFill/>
-        </p:spPr>
-        <p:txBody>
-          <a:bodyPr wrap="square">
-            <a:spAutoFit/>
-          </a:bodyPr>
-          <a:lstStyle/>
-          <a:p>
-            <a:pPr marL="0" marR="0" lvl="0" indent="0" algn="l" defTabSz="914400" rtl="0" eaLnBrk="1" fontAlgn="auto" latinLnBrk="0" hangingPunct="1">
-              <a:lnSpc>
-                <a:spcPct val="100000"/>
-              </a:lnSpc>
-              <a:spcBef>
-                <a:spcPts val="0"/>
-              </a:spcBef>
-              <a:spcAft>
-                <a:spcPts val="0"/>
-              </a:spcAft>
-              <a:buClrTx/>
-              <a:buSzTx/>
-              <a:buFontTx/>
-              <a:buNone/>
-              <a:tabLst/>
-              <a:defRPr/>
-            </a:pPr>
-            <a:r>
-              <a:rPr lang="en-US" dirty="0">
-                <a:sym typeface="Wingdings" panose="05000000000000000000" pitchFamily="2" charset="2"/>
-              </a:rPr>
-              <a:t> Traffic</a:t>
-            </a:r>
-          </a:p>
-          <a:p>
-            <a:pPr marL="171450" indent="-171450">
-              <a:buFontTx/>
-              <a:buChar char="-"/>
-            </a:pPr>
-            <a:r>
-              <a:rPr lang="en-US" dirty="0">
-                <a:sym typeface="Wingdings" panose="05000000000000000000" pitchFamily="2" charset="2"/>
-              </a:rPr>
-              <a:t>Enter/Exists in stations (Networkx)</a:t>
-            </a:r>
-          </a:p>
-          <a:p>
-            <a:pPr marL="171450" indent="-171450">
-              <a:buFontTx/>
-              <a:buChar char="-"/>
-            </a:pPr>
-            <a:r>
-              <a:rPr lang="en-US" dirty="0">
-                <a:sym typeface="Wingdings" panose="05000000000000000000" pitchFamily="2" charset="2"/>
-              </a:rPr>
-              <a:t>Load in segments (</a:t>
-            </a:r>
-            <a:r>
-              <a:rPr lang="en-US" dirty="0" err="1">
-                <a:sym typeface="Wingdings" panose="05000000000000000000" pitchFamily="2" charset="2"/>
-              </a:rPr>
-              <a:t>Networkx</a:t>
-            </a:r>
-            <a:r>
-              <a:rPr lang="en-US" dirty="0">
-                <a:sym typeface="Wingdings" panose="05000000000000000000" pitchFamily="2" charset="2"/>
-              </a:rPr>
-              <a:t>)</a:t>
-            </a:r>
-          </a:p>
-        </p:txBody>
-      </p:sp>
-    </p:spTree>
-    <p:extLst>
-      <p:ext uri="{BB962C8B-B14F-4D97-AF65-F5344CB8AC3E}">
-        <p14:creationId xmlns:p14="http://schemas.microsoft.com/office/powerpoint/2010/main" val="2043830219"/>
-      </p:ext>
-    </p:extLst>
-  </p:cSld>
-  <p:clrMapOvr>
-    <a:masterClrMapping/>
-  </p:clrMapOvr>
-</p:sld>
-</file>
-
-<file path=ppt/slides/slide23.xml><?xml version="1.0" encoding="utf-8"?>
-<p:sld xmlns:a="http://schemas.openxmlformats.org/drawingml/2006/main" xmlns:r="http://schemas.openxmlformats.org/officeDocument/2006/relationships" xmlns:p="http://schemas.openxmlformats.org/presentationml/2006/main">
-  <p:cSld>
-    <p:spTree>
-      <p:nvGrpSpPr>
-        <p:cNvPr id="1" name=""/>
-        <p:cNvGrpSpPr/>
-        <p:nvPr/>
-      </p:nvGrpSpPr>
-      <p:grpSpPr>
-        <a:xfrm>
-          <a:off x="0" y="0"/>
-          <a:ext cx="0" cy="0"/>
-          <a:chOff x="0" y="0"/>
-          <a:chExt cx="0" cy="0"/>
-        </a:xfrm>
-      </p:grpSpPr>
-      <p:sp>
-        <p:nvSpPr>
-          <p:cNvPr id="2" name="Title 1">
-            <a:extLst>
-              <a:ext uri="{FF2B5EF4-FFF2-40B4-BE49-F238E27FC236}">
-                <a16:creationId xmlns:a16="http://schemas.microsoft.com/office/drawing/2014/main" id="{63482FFF-7EC4-4691-BF8C-91E0066F6BE9}"/>
-              </a:ext>
-            </a:extLst>
-          </p:cNvPr>
-          <p:cNvSpPr>
-            <a:spLocks noGrp="1"/>
-          </p:cNvSpPr>
-          <p:nvPr>
-            <p:ph type="title"/>
-          </p:nvPr>
-        </p:nvSpPr>
-        <p:spPr/>
-        <p:txBody>
-          <a:bodyPr/>
-          <a:lstStyle/>
-          <a:p>
-            <a:r>
-              <a:rPr lang="en-US" dirty="0"/>
-              <a:t>Chp.5 - Results</a:t>
-            </a:r>
-            <a:endParaRPr lang="fr-BE" dirty="0"/>
-          </a:p>
-        </p:txBody>
-      </p:sp>
-      <p:sp>
-        <p:nvSpPr>
-          <p:cNvPr id="5" name="TextBox 4">
-            <a:extLst>
-              <a:ext uri="{FF2B5EF4-FFF2-40B4-BE49-F238E27FC236}">
-                <a16:creationId xmlns:a16="http://schemas.microsoft.com/office/drawing/2014/main" id="{1C70F5EB-D628-4D33-90C3-908BAEAACF37}"/>
-              </a:ext>
-            </a:extLst>
-          </p:cNvPr>
-          <p:cNvSpPr txBox="1"/>
-          <p:nvPr/>
-        </p:nvSpPr>
-        <p:spPr>
-          <a:xfrm>
-            <a:off x="958970" y="1759610"/>
-            <a:ext cx="6883400" cy="1200329"/>
-          </a:xfrm>
-          <a:prstGeom prst="rect">
-            <a:avLst/>
-          </a:prstGeom>
-          <a:noFill/>
-        </p:spPr>
-        <p:txBody>
-          <a:bodyPr wrap="square">
-            <a:spAutoFit/>
-          </a:bodyPr>
-          <a:lstStyle/>
-          <a:p>
-            <a:pPr marL="171450" indent="-171450">
-              <a:buFont typeface="Wingdings" panose="05000000000000000000" pitchFamily="2" charset="2"/>
-              <a:buChar char="à"/>
-            </a:pPr>
-            <a:r>
-              <a:rPr lang="en-US" dirty="0">
-                <a:sym typeface="Wingdings" panose="05000000000000000000" pitchFamily="2" charset="2"/>
-              </a:rPr>
-              <a:t>Operational: Speed &amp; Frequency</a:t>
-            </a:r>
-          </a:p>
-          <a:p>
-            <a:pPr marL="171450" indent="-171450">
-              <a:buFontTx/>
-              <a:buChar char="-"/>
-            </a:pPr>
-            <a:r>
-              <a:rPr lang="en-US" dirty="0">
-                <a:sym typeface="Wingdings" panose="05000000000000000000" pitchFamily="2" charset="2"/>
-              </a:rPr>
-              <a:t>Histogram (charts)</a:t>
-            </a:r>
-          </a:p>
-          <a:p>
-            <a:pPr marL="171450" indent="-171450">
-              <a:buFontTx/>
-              <a:buChar char="-"/>
-            </a:pPr>
-            <a:r>
-              <a:rPr lang="en-US" dirty="0">
-                <a:sym typeface="Wingdings" panose="05000000000000000000" pitchFamily="2" charset="2"/>
-              </a:rPr>
-              <a:t>Maps (</a:t>
-            </a:r>
-            <a:r>
-              <a:rPr lang="en-US" dirty="0" err="1">
-                <a:sym typeface="Wingdings" panose="05000000000000000000" pitchFamily="2" charset="2"/>
-              </a:rPr>
-              <a:t>Networkx</a:t>
-            </a:r>
-            <a:r>
-              <a:rPr lang="en-US" dirty="0">
-                <a:sym typeface="Wingdings" panose="05000000000000000000" pitchFamily="2" charset="2"/>
-              </a:rPr>
-              <a:t>)</a:t>
-            </a:r>
-          </a:p>
-          <a:p>
-            <a:pPr marL="0" indent="0">
-              <a:buFontTx/>
-              <a:buNone/>
-            </a:pPr>
-            <a:endParaRPr lang="en-US" dirty="0">
-              <a:sym typeface="Wingdings" panose="05000000000000000000" pitchFamily="2" charset="2"/>
-            </a:endParaRPr>
-          </a:p>
-        </p:txBody>
-      </p:sp>
-    </p:spTree>
-    <p:extLst>
-      <p:ext uri="{BB962C8B-B14F-4D97-AF65-F5344CB8AC3E}">
-        <p14:creationId xmlns:p14="http://schemas.microsoft.com/office/powerpoint/2010/main" val="468144026"/>
-      </p:ext>
-    </p:extLst>
-  </p:cSld>
-  <p:clrMapOvr>
-    <a:masterClrMapping/>
-  </p:clrMapOvr>
-</p:sld>
-</file>
-
-<file path=ppt/slides/slide24.xml><?xml version="1.0" encoding="utf-8"?>
-<p:sld xmlns:a="http://schemas.openxmlformats.org/drawingml/2006/main" xmlns:r="http://schemas.openxmlformats.org/officeDocument/2006/relationships" xmlns:p="http://schemas.openxmlformats.org/presentationml/2006/main">
-  <p:cSld>
-    <p:spTree>
-      <p:nvGrpSpPr>
-        <p:cNvPr id="1" name=""/>
-        <p:cNvGrpSpPr/>
-        <p:nvPr/>
-      </p:nvGrpSpPr>
-      <p:grpSpPr>
-        <a:xfrm>
-          <a:off x="0" y="0"/>
-          <a:ext cx="0" cy="0"/>
-          <a:chOff x="0" y="0"/>
-          <a:chExt cx="0" cy="0"/>
-        </a:xfrm>
-      </p:grpSpPr>
-      <p:sp>
-        <p:nvSpPr>
-          <p:cNvPr id="2" name="Title 1">
-            <a:extLst>
-              <a:ext uri="{FF2B5EF4-FFF2-40B4-BE49-F238E27FC236}">
-                <a16:creationId xmlns:a16="http://schemas.microsoft.com/office/drawing/2014/main" id="{63482FFF-7EC4-4691-BF8C-91E0066F6BE9}"/>
-              </a:ext>
-            </a:extLst>
-          </p:cNvPr>
-          <p:cNvSpPr>
-            <a:spLocks noGrp="1"/>
-          </p:cNvSpPr>
-          <p:nvPr>
-            <p:ph type="title"/>
-          </p:nvPr>
-        </p:nvSpPr>
-        <p:spPr/>
-        <p:txBody>
-          <a:bodyPr/>
-          <a:lstStyle/>
-          <a:p>
-            <a:r>
-              <a:rPr lang="en-US" dirty="0"/>
-              <a:t>Chp.5 - Results</a:t>
-            </a:r>
-            <a:endParaRPr lang="fr-BE" dirty="0"/>
-          </a:p>
-        </p:txBody>
-      </p:sp>
-      <p:sp>
-        <p:nvSpPr>
-          <p:cNvPr id="5" name="TextBox 4">
-            <a:extLst>
-              <a:ext uri="{FF2B5EF4-FFF2-40B4-BE49-F238E27FC236}">
-                <a16:creationId xmlns:a16="http://schemas.microsoft.com/office/drawing/2014/main" id="{1C70F5EB-D628-4D33-90C3-908BAEAACF37}"/>
-              </a:ext>
-            </a:extLst>
-          </p:cNvPr>
-          <p:cNvSpPr txBox="1"/>
-          <p:nvPr/>
-        </p:nvSpPr>
-        <p:spPr>
-          <a:xfrm>
-            <a:off x="958970" y="1759610"/>
-            <a:ext cx="6883400" cy="923330"/>
-          </a:xfrm>
-          <a:prstGeom prst="rect">
-            <a:avLst/>
-          </a:prstGeom>
-          <a:noFill/>
-        </p:spPr>
-        <p:txBody>
-          <a:bodyPr wrap="square">
-            <a:spAutoFit/>
-          </a:bodyPr>
-          <a:lstStyle/>
-          <a:p>
-            <a:pPr marL="0" marR="0" lvl="0" indent="0" algn="l" defTabSz="914400" rtl="0" eaLnBrk="1" fontAlgn="auto" latinLnBrk="0" hangingPunct="1">
-              <a:lnSpc>
-                <a:spcPct val="100000"/>
-              </a:lnSpc>
-              <a:spcBef>
-                <a:spcPts val="0"/>
-              </a:spcBef>
-              <a:spcAft>
-                <a:spcPts val="0"/>
-              </a:spcAft>
-              <a:buClrTx/>
-              <a:buSzTx/>
-              <a:buFontTx/>
-              <a:buNone/>
-              <a:tabLst/>
-              <a:defRPr/>
-            </a:pPr>
-            <a:r>
-              <a:rPr lang="en-US" dirty="0">
-                <a:sym typeface="Wingdings" panose="05000000000000000000" pitchFamily="2" charset="2"/>
-              </a:rPr>
-              <a:t> User importance:</a:t>
-            </a:r>
-          </a:p>
-          <a:p>
-            <a:pPr marL="171450" indent="-171450">
-              <a:buFontTx/>
-              <a:buChar char="-"/>
-            </a:pPr>
-            <a:r>
-              <a:rPr lang="en-US" dirty="0" err="1">
-                <a:sym typeface="Wingdings" panose="05000000000000000000" pitchFamily="2" charset="2"/>
-              </a:rPr>
-              <a:t>Efficience</a:t>
-            </a:r>
-            <a:r>
-              <a:rPr lang="en-US" dirty="0">
-                <a:sym typeface="Wingdings" panose="05000000000000000000" pitchFamily="2" charset="2"/>
-              </a:rPr>
-              <a:t> ranking comparison</a:t>
-            </a:r>
-          </a:p>
-          <a:p>
-            <a:pPr marL="171450" indent="-171450">
-              <a:buFontTx/>
-              <a:buChar char="-"/>
-            </a:pPr>
-            <a:endParaRPr lang="en-US" dirty="0">
-              <a:sym typeface="Wingdings" panose="05000000000000000000" pitchFamily="2" charset="2"/>
-            </a:endParaRPr>
-          </a:p>
-        </p:txBody>
-      </p:sp>
-    </p:spTree>
-    <p:extLst>
-      <p:ext uri="{BB962C8B-B14F-4D97-AF65-F5344CB8AC3E}">
-        <p14:creationId xmlns:p14="http://schemas.microsoft.com/office/powerpoint/2010/main" val="2555179648"/>
-      </p:ext>
-    </p:extLst>
-  </p:cSld>
-  <p:clrMapOvr>
-    <a:masterClrMapping/>
-  </p:clrMapOvr>
-</p:sld>
-</file>
-
-<file path=ppt/slides/slide25.xml><?xml version="1.0" encoding="utf-8"?>
-<p:sld xmlns:a="http://schemas.openxmlformats.org/drawingml/2006/main" xmlns:r="http://schemas.openxmlformats.org/officeDocument/2006/relationships" xmlns:p="http://schemas.openxmlformats.org/presentationml/2006/main">
-  <p:cSld>
-    <p:spTree>
-      <p:nvGrpSpPr>
-        <p:cNvPr id="1" name=""/>
-        <p:cNvGrpSpPr/>
-        <p:nvPr/>
-      </p:nvGrpSpPr>
-      <p:grpSpPr>
-        <a:xfrm>
-          <a:off x="0" y="0"/>
-          <a:ext cx="0" cy="0"/>
-          <a:chOff x="0" y="0"/>
-          <a:chExt cx="0" cy="0"/>
-        </a:xfrm>
-      </p:grpSpPr>
-      <p:sp>
-        <p:nvSpPr>
-          <p:cNvPr id="2" name="Title 1">
-            <a:extLst>
-              <a:ext uri="{FF2B5EF4-FFF2-40B4-BE49-F238E27FC236}">
-                <a16:creationId xmlns:a16="http://schemas.microsoft.com/office/drawing/2014/main" id="{63482FFF-7EC4-4691-BF8C-91E0066F6BE9}"/>
-              </a:ext>
-            </a:extLst>
-          </p:cNvPr>
-          <p:cNvSpPr>
-            <a:spLocks noGrp="1"/>
-          </p:cNvSpPr>
-          <p:nvPr>
-            <p:ph type="title"/>
-          </p:nvPr>
-        </p:nvSpPr>
-        <p:spPr/>
-        <p:txBody>
-          <a:bodyPr/>
-          <a:lstStyle/>
-          <a:p>
-            <a:r>
-              <a:rPr lang="en-US" dirty="0"/>
-              <a:t>Chp.5 - Results</a:t>
-            </a:r>
-            <a:endParaRPr lang="fr-BE" dirty="0"/>
-          </a:p>
-        </p:txBody>
-      </p:sp>
-      <p:sp>
-        <p:nvSpPr>
-          <p:cNvPr id="5" name="TextBox 4">
-            <a:extLst>
-              <a:ext uri="{FF2B5EF4-FFF2-40B4-BE49-F238E27FC236}">
-                <a16:creationId xmlns:a16="http://schemas.microsoft.com/office/drawing/2014/main" id="{1C70F5EB-D628-4D33-90C3-908BAEAACF37}"/>
-              </a:ext>
-            </a:extLst>
-          </p:cNvPr>
-          <p:cNvSpPr txBox="1"/>
-          <p:nvPr/>
-        </p:nvSpPr>
-        <p:spPr>
-          <a:xfrm>
-            <a:off x="958970" y="1759610"/>
-            <a:ext cx="6883400" cy="646331"/>
-          </a:xfrm>
-          <a:prstGeom prst="rect">
-            <a:avLst/>
-          </a:prstGeom>
-          <a:noFill/>
-        </p:spPr>
-        <p:txBody>
-          <a:bodyPr wrap="square">
-            <a:spAutoFit/>
-          </a:bodyPr>
-          <a:lstStyle/>
-          <a:p>
-            <a:pPr marL="0" marR="0" lvl="0" indent="0" algn="l" defTabSz="914400" rtl="0" eaLnBrk="1" fontAlgn="auto" latinLnBrk="0" hangingPunct="1">
-              <a:lnSpc>
-                <a:spcPct val="100000"/>
-              </a:lnSpc>
-              <a:spcBef>
-                <a:spcPts val="0"/>
-              </a:spcBef>
-              <a:spcAft>
-                <a:spcPts val="0"/>
-              </a:spcAft>
-              <a:buClrTx/>
-              <a:buSzTx/>
-              <a:buFontTx/>
-              <a:buNone/>
-              <a:tabLst/>
-              <a:defRPr/>
-            </a:pPr>
-            <a:r>
-              <a:rPr lang="en-US" dirty="0">
-                <a:sym typeface="Wingdings" panose="05000000000000000000" pitchFamily="2" charset="2"/>
-              </a:rPr>
-              <a:t> Collective importance:</a:t>
-            </a:r>
-          </a:p>
-          <a:p>
-            <a:pPr marL="171450" indent="-171450">
-              <a:buFontTx/>
-              <a:buChar char="-"/>
-            </a:pPr>
-            <a:r>
-              <a:rPr lang="en-US" dirty="0">
-                <a:sym typeface="Wingdings" panose="05000000000000000000" pitchFamily="2" charset="2"/>
-              </a:rPr>
-              <a:t>Distress ranking comparison</a:t>
-            </a:r>
-          </a:p>
-        </p:txBody>
-      </p:sp>
-    </p:spTree>
-    <p:extLst>
-      <p:ext uri="{BB962C8B-B14F-4D97-AF65-F5344CB8AC3E}">
-        <p14:creationId xmlns:p14="http://schemas.microsoft.com/office/powerpoint/2010/main" val="2702504304"/>
-      </p:ext>
-    </p:extLst>
-  </p:cSld>
-  <p:clrMapOvr>
-    <a:masterClrMapping/>
-  </p:clrMapOvr>
-</p:sld>
-</file>
-
-<file path=ppt/slides/slide26.xml><?xml version="1.0" encoding="utf-8"?>
-<p:sld xmlns:a="http://schemas.openxmlformats.org/drawingml/2006/main" xmlns:r="http://schemas.openxmlformats.org/officeDocument/2006/relationships" xmlns:p="http://schemas.openxmlformats.org/presentationml/2006/main">
-  <p:cSld>
-    <p:spTree>
-      <p:nvGrpSpPr>
-        <p:cNvPr id="1" name=""/>
-        <p:cNvGrpSpPr/>
-        <p:nvPr/>
-      </p:nvGrpSpPr>
-      <p:grpSpPr>
-        <a:xfrm>
-          <a:off x="0" y="0"/>
-          <a:ext cx="0" cy="0"/>
-          <a:chOff x="0" y="0"/>
-          <a:chExt cx="0" cy="0"/>
-        </a:xfrm>
-      </p:grpSpPr>
-      <p:sp>
-        <p:nvSpPr>
-          <p:cNvPr id="2" name="Title 1">
-            <a:extLst>
-              <a:ext uri="{FF2B5EF4-FFF2-40B4-BE49-F238E27FC236}">
-                <a16:creationId xmlns:a16="http://schemas.microsoft.com/office/drawing/2014/main" id="{63482FFF-7EC4-4691-BF8C-91E0066F6BE9}"/>
-              </a:ext>
-            </a:extLst>
-          </p:cNvPr>
-          <p:cNvSpPr>
-            <a:spLocks noGrp="1"/>
-          </p:cNvSpPr>
-          <p:nvPr>
-            <p:ph type="title"/>
-          </p:nvPr>
-        </p:nvSpPr>
-        <p:spPr/>
-        <p:txBody>
-          <a:bodyPr/>
-          <a:lstStyle/>
-          <a:p>
-            <a:r>
-              <a:rPr lang="en-US" dirty="0"/>
-              <a:t>Chp.6 - Following Steps</a:t>
-            </a:r>
-            <a:endParaRPr lang="fr-BE" dirty="0"/>
-          </a:p>
-        </p:txBody>
-      </p:sp>
-      <p:sp>
-        <p:nvSpPr>
-          <p:cNvPr id="5" name="TextBox 4">
-            <a:extLst>
-              <a:ext uri="{FF2B5EF4-FFF2-40B4-BE49-F238E27FC236}">
-                <a16:creationId xmlns:a16="http://schemas.microsoft.com/office/drawing/2014/main" id="{C5BDFFFD-DF47-4673-8095-E9BA459078C9}"/>
-              </a:ext>
-            </a:extLst>
-          </p:cNvPr>
-          <p:cNvSpPr txBox="1"/>
-          <p:nvPr/>
-        </p:nvSpPr>
-        <p:spPr>
-          <a:xfrm>
-            <a:off x="541867" y="1690687"/>
-            <a:ext cx="11243733" cy="4708981"/>
-          </a:xfrm>
-          <a:prstGeom prst="rect">
-            <a:avLst/>
-          </a:prstGeom>
-          <a:noFill/>
-        </p:spPr>
-        <p:txBody>
-          <a:bodyPr wrap="square">
-            <a:spAutoFit/>
-          </a:bodyPr>
-          <a:lstStyle/>
-          <a:p>
-            <a:pPr marL="0" marR="0" lvl="0" indent="0" algn="l" defTabSz="914400" rtl="0" eaLnBrk="1" fontAlgn="auto" latinLnBrk="0" hangingPunct="1">
-              <a:lnSpc>
-                <a:spcPct val="100000"/>
-              </a:lnSpc>
-              <a:spcBef>
-                <a:spcPts val="0"/>
-              </a:spcBef>
-              <a:spcAft>
-                <a:spcPts val="0"/>
-              </a:spcAft>
-              <a:buClrTx/>
-              <a:buSzTx/>
-              <a:buFontTx/>
-              <a:buNone/>
-              <a:tabLst/>
-              <a:defRPr/>
-            </a:pPr>
-            <a:r>
-              <a:rPr lang="en-US" sz="2000" dirty="0"/>
-              <a:t>1) </a:t>
-            </a:r>
-            <a:r>
-              <a:rPr lang="en-US" sz="2000" dirty="0">
-                <a:sym typeface="Wingdings" panose="05000000000000000000" pitchFamily="2" charset="2"/>
-              </a:rPr>
-              <a:t>Interconnect all possible modes of transport including bikes and walks.</a:t>
-            </a:r>
-            <a:endParaRPr lang="en-US" sz="2000" dirty="0"/>
-          </a:p>
-          <a:p>
-            <a:pPr marL="0" indent="0">
-              <a:buNone/>
-            </a:pPr>
-            <a:endParaRPr lang="en-US" sz="2000" dirty="0"/>
-          </a:p>
-          <a:p>
-            <a:pPr marL="0" indent="0">
-              <a:buNone/>
-            </a:pPr>
-            <a:endParaRPr lang="en-US" sz="2000" dirty="0"/>
-          </a:p>
-          <a:p>
-            <a:pPr marL="0" indent="0">
-              <a:buNone/>
-            </a:pPr>
-            <a:r>
-              <a:rPr lang="en-US" sz="2000" dirty="0"/>
-              <a:t>2) Use ML models for predictions of:</a:t>
-            </a:r>
-          </a:p>
-          <a:p>
-            <a:pPr marL="228600" indent="-228600">
-              <a:buAutoNum type="arabicParenR"/>
-            </a:pPr>
-            <a:endParaRPr lang="en-US" sz="2000" dirty="0"/>
-          </a:p>
-          <a:p>
-            <a:pPr marL="171450" indent="-171450">
-              <a:buFont typeface="Wingdings" panose="05000000000000000000" pitchFamily="2" charset="2"/>
-              <a:buChar char="à"/>
-            </a:pPr>
-            <a:r>
-              <a:rPr lang="en-US" sz="2000" dirty="0"/>
-              <a:t>TRAFFIC: Passenger flow: </a:t>
-            </a:r>
-            <a:r>
-              <a:rPr lang="en-US" sz="2000" b="0" i="0" dirty="0">
-                <a:solidFill>
-                  <a:srgbClr val="24292F"/>
-                </a:solidFill>
-                <a:effectLst/>
-                <a:latin typeface="-apple-system"/>
-              </a:rPr>
-              <a:t>From network lens (keeping passenger anonymity) , use more data (daily events) to more accurately understand why traffic is generated in each segments;</a:t>
-            </a:r>
-          </a:p>
-          <a:p>
-            <a:pPr marL="171450" indent="-171450">
-              <a:buFont typeface="Wingdings" panose="05000000000000000000" pitchFamily="2" charset="2"/>
-              <a:buChar char="à"/>
-            </a:pPr>
-            <a:endParaRPr lang="en-US" sz="2000" b="0" i="0" dirty="0">
-              <a:solidFill>
-                <a:srgbClr val="24292F"/>
-              </a:solidFill>
-              <a:effectLst/>
-              <a:latin typeface="-apple-system"/>
-            </a:endParaRPr>
-          </a:p>
-          <a:p>
-            <a:pPr marL="171450" indent="-171450">
-              <a:buFont typeface="Wingdings" panose="05000000000000000000" pitchFamily="2" charset="2"/>
-              <a:buChar char="à"/>
-            </a:pPr>
-            <a:r>
-              <a:rPr lang="en-US" sz="2000" b="0" i="0" dirty="0">
-                <a:solidFill>
-                  <a:srgbClr val="24292F"/>
-                </a:solidFill>
-                <a:effectLst/>
-                <a:latin typeface="-apple-system"/>
-              </a:rPr>
-              <a:t>OPEX: Predict disruptions and its impact considering forecasted passenger traffic to optimize maintenance planning.</a:t>
-            </a:r>
-          </a:p>
-          <a:p>
-            <a:pPr marL="171450" indent="-171450">
-              <a:buFont typeface="Wingdings" panose="05000000000000000000" pitchFamily="2" charset="2"/>
-              <a:buChar char="à"/>
-            </a:pPr>
-            <a:endParaRPr lang="en-US" sz="2000" b="0" i="0" dirty="0">
-              <a:solidFill>
-                <a:srgbClr val="24292F"/>
-              </a:solidFill>
-              <a:effectLst/>
-              <a:latin typeface="-apple-system"/>
-            </a:endParaRPr>
-          </a:p>
-          <a:p>
-            <a:pPr marL="171450" marR="0" lvl="0" indent="-171450" algn="l" defTabSz="914400" rtl="0" eaLnBrk="1" fontAlgn="auto" latinLnBrk="0" hangingPunct="1">
-              <a:lnSpc>
-                <a:spcPct val="100000"/>
-              </a:lnSpc>
-              <a:spcBef>
-                <a:spcPts val="0"/>
-              </a:spcBef>
-              <a:spcAft>
-                <a:spcPts val="0"/>
-              </a:spcAft>
-              <a:buClrTx/>
-              <a:buSzTx/>
-              <a:buFont typeface="Wingdings" panose="05000000000000000000" pitchFamily="2" charset="2"/>
-              <a:buChar char="à"/>
-              <a:tabLst/>
-              <a:defRPr/>
-            </a:pPr>
-            <a:r>
-              <a:rPr lang="en-US" sz="2000" b="0" i="0" dirty="0">
-                <a:solidFill>
-                  <a:srgbClr val="24292F"/>
-                </a:solidFill>
-                <a:effectLst/>
-                <a:latin typeface="-apple-system"/>
-              </a:rPr>
-              <a:t>Create a timetable dynamically tailored that optimize infra-structure towards the commuters needs.</a:t>
-            </a:r>
-          </a:p>
-          <a:p>
-            <a:pPr marL="171450" indent="-171450">
-              <a:buFont typeface="Wingdings" panose="05000000000000000000" pitchFamily="2" charset="2"/>
-              <a:buChar char="à"/>
-            </a:pPr>
-            <a:endParaRPr lang="en-US" sz="2000" b="0" i="0" dirty="0">
-              <a:solidFill>
-                <a:srgbClr val="24292F"/>
-              </a:solidFill>
-              <a:effectLst/>
-              <a:latin typeface="-apple-system"/>
-            </a:endParaRPr>
-          </a:p>
-          <a:p>
-            <a:pPr marL="171450" indent="-171450">
-              <a:buFont typeface="Wingdings" panose="05000000000000000000" pitchFamily="2" charset="2"/>
-              <a:buChar char="à"/>
-            </a:pPr>
-            <a:r>
-              <a:rPr lang="en-US" sz="2000" b="0" i="0" dirty="0">
-                <a:solidFill>
-                  <a:srgbClr val="24292F"/>
-                </a:solidFill>
-                <a:effectLst/>
-                <a:latin typeface="-apple-system"/>
-              </a:rPr>
-              <a:t>CAPEX: More maintenance, less disruptions, less need for redundancy and more investment express lanes (study of origin and destination).  A study considering entries and exist of studies.</a:t>
-            </a:r>
-          </a:p>
-        </p:txBody>
-      </p:sp>
-    </p:spTree>
-    <p:extLst>
-      <p:ext uri="{BB962C8B-B14F-4D97-AF65-F5344CB8AC3E}">
-        <p14:creationId xmlns:p14="http://schemas.microsoft.com/office/powerpoint/2010/main" val="3254598016"/>
-      </p:ext>
-    </p:extLst>
-  </p:cSld>
-  <p:clrMapOvr>
-    <a:masterClrMapping/>
-  </p:clrMapOvr>
-</p:sld>
-</file>
-
-<file path=ppt/slides/slide27.xml><?xml version="1.0" encoding="utf-8"?>
-<p:sld xmlns:a="http://schemas.openxmlformats.org/drawingml/2006/main" xmlns:r="http://schemas.openxmlformats.org/officeDocument/2006/relationships" xmlns:p="http://schemas.openxmlformats.org/presentationml/2006/main">
-  <p:cSld>
-    <p:spTree>
-      <p:nvGrpSpPr>
-        <p:cNvPr id="1" name=""/>
-        <p:cNvGrpSpPr/>
-        <p:nvPr/>
-      </p:nvGrpSpPr>
-      <p:grpSpPr>
-        <a:xfrm>
-          <a:off x="0" y="0"/>
-          <a:ext cx="0" cy="0"/>
-          <a:chOff x="0" y="0"/>
-          <a:chExt cx="0" cy="0"/>
-        </a:xfrm>
-      </p:grpSpPr>
-      <p:sp>
-        <p:nvSpPr>
-          <p:cNvPr id="2" name="Title 1">
-            <a:extLst>
-              <a:ext uri="{FF2B5EF4-FFF2-40B4-BE49-F238E27FC236}">
-                <a16:creationId xmlns:a16="http://schemas.microsoft.com/office/drawing/2014/main" id="{63482FFF-7EC4-4691-BF8C-91E0066F6BE9}"/>
-              </a:ext>
-            </a:extLst>
-          </p:cNvPr>
-          <p:cNvSpPr>
-            <a:spLocks noGrp="1"/>
-          </p:cNvSpPr>
-          <p:nvPr>
-            <p:ph type="title"/>
-          </p:nvPr>
-        </p:nvSpPr>
-        <p:spPr/>
-        <p:txBody>
-          <a:bodyPr/>
-          <a:lstStyle/>
-          <a:p>
-            <a:r>
-              <a:rPr lang="en-US" dirty="0"/>
-              <a:t>Chp.7 - Conclusion</a:t>
-            </a:r>
-            <a:endParaRPr lang="fr-BE" dirty="0"/>
-          </a:p>
-        </p:txBody>
-      </p:sp>
-      <p:sp>
-        <p:nvSpPr>
-          <p:cNvPr id="3" name="Content Placeholder 2">
-            <a:extLst>
-              <a:ext uri="{FF2B5EF4-FFF2-40B4-BE49-F238E27FC236}">
-                <a16:creationId xmlns:a16="http://schemas.microsoft.com/office/drawing/2014/main" id="{DAE38D01-88EE-41C2-B9C1-6627C65A5A93}"/>
-              </a:ext>
-            </a:extLst>
-          </p:cNvPr>
-          <p:cNvSpPr>
-            <a:spLocks noGrp="1"/>
-          </p:cNvSpPr>
-          <p:nvPr>
-            <p:ph idx="1"/>
-          </p:nvPr>
-        </p:nvSpPr>
-        <p:spPr/>
-        <p:txBody>
-          <a:bodyPr>
-            <a:normAutofit fontScale="92500" lnSpcReduction="20000"/>
-          </a:bodyPr>
-          <a:lstStyle/>
-          <a:p>
-            <a:r>
-              <a:rPr lang="en-US" dirty="0"/>
-              <a:t>It is not necessary related to its size. But is related to how it was projected to assist the commuters.</a:t>
-            </a:r>
-          </a:p>
-          <a:p>
-            <a:endParaRPr lang="en-US" dirty="0"/>
-          </a:p>
-          <a:p>
-            <a:r>
-              <a:rPr lang="en-US" dirty="0"/>
-              <a:t>Proper maintenances can reduce the number of disruption, for instance, it would be a waste invest in redundancies. More money could be destinated to reduce travels time. </a:t>
-            </a:r>
-          </a:p>
-          <a:p>
-            <a:endParaRPr lang="en-US" dirty="0"/>
-          </a:p>
-          <a:p>
-            <a:r>
-              <a:rPr lang="en-US" dirty="0"/>
-              <a:t>In a real world, however, no disruptions comes with a high maintenance price. </a:t>
-            </a:r>
-          </a:p>
-          <a:p>
-            <a:endParaRPr lang="en-US" dirty="0"/>
-          </a:p>
-          <a:p>
-            <a:r>
-              <a:rPr lang="en-US" dirty="0"/>
-              <a:t>The balance between effectiveness and robustness is a major question when comes down to a such important factor of the society evolvement.</a:t>
-            </a:r>
-          </a:p>
-          <a:p>
-            <a:endParaRPr lang="fr-BE" dirty="0"/>
-          </a:p>
-        </p:txBody>
-      </p:sp>
-    </p:spTree>
-    <p:extLst>
-      <p:ext uri="{BB962C8B-B14F-4D97-AF65-F5344CB8AC3E}">
-        <p14:creationId xmlns:p14="http://schemas.microsoft.com/office/powerpoint/2010/main" val="3798559975"/>
-      </p:ext>
-    </p:extLst>
-  </p:cSld>
-  <p:clrMapOvr>
-    <a:masterClrMapping/>
-  </p:clrMapOvr>
-</p:sld>
-</file>
-
-<file path=ppt/slides/slide3.xml><?xml version="1.0" encoding="utf-8"?>
-<p:sld xmlns:a="http://schemas.openxmlformats.org/drawingml/2006/main" xmlns:r="http://schemas.openxmlformats.org/officeDocument/2006/relationships" xmlns:p="http://schemas.openxmlformats.org/presentationml/2006/main">
-  <p:cSld>
-    <p:spTree>
-      <p:nvGrpSpPr>
-        <p:cNvPr id="1" name=""/>
-        <p:cNvGrpSpPr/>
-        <p:nvPr/>
-      </p:nvGrpSpPr>
-      <p:grpSpPr>
-        <a:xfrm>
-          <a:off x="0" y="0"/>
-          <a:ext cx="0" cy="0"/>
-          <a:chOff x="0" y="0"/>
-          <a:chExt cx="0" cy="0"/>
-        </a:xfrm>
-      </p:grpSpPr>
-      <p:sp>
-        <p:nvSpPr>
-          <p:cNvPr id="2" name="Title 1">
-            <a:extLst>
-              <a:ext uri="{FF2B5EF4-FFF2-40B4-BE49-F238E27FC236}">
-                <a16:creationId xmlns:a16="http://schemas.microsoft.com/office/drawing/2014/main" id="{72D82C05-AD0C-49AA-9058-D1A254CA8A30}"/>
-              </a:ext>
-            </a:extLst>
-          </p:cNvPr>
-          <p:cNvSpPr>
-            <a:spLocks noGrp="1"/>
-          </p:cNvSpPr>
-          <p:nvPr>
-            <p:ph type="title"/>
-          </p:nvPr>
-        </p:nvSpPr>
-        <p:spPr/>
-        <p:txBody>
-          <a:bodyPr/>
-          <a:lstStyle/>
-          <a:p>
-            <a:r>
-              <a:rPr lang="en-US" dirty="0"/>
-              <a:t>Chp.1 – The problem</a:t>
-            </a:r>
-            <a:endParaRPr lang="fr-BE" dirty="0"/>
-          </a:p>
-        </p:txBody>
-      </p:sp>
-    </p:spTree>
-    <p:extLst>
-      <p:ext uri="{BB962C8B-B14F-4D97-AF65-F5344CB8AC3E}">
-        <p14:creationId xmlns:p14="http://schemas.microsoft.com/office/powerpoint/2010/main" val="2100203510"/>
-      </p:ext>
-    </p:extLst>
-  </p:cSld>
-  <p:clrMapOvr>
-    <a:masterClrMapping/>
-  </p:clrMapOvr>
-</p:sld>
-</file>
-
 <file path=ppt/slides/slide4.xml><?xml version="1.0" encoding="utf-8"?>
 <p:sld xmlns:a="http://schemas.openxmlformats.org/drawingml/2006/main" xmlns:r="http://schemas.openxmlformats.org/officeDocument/2006/relationships" xmlns:p="http://schemas.openxmlformats.org/presentationml/2006/main">
   <p:cSld>
@@ -15773,6 +16200,65 @@
           <p:cNvPr id="2" name="Title 1">
             <a:extLst>
               <a:ext uri="{FF2B5EF4-FFF2-40B4-BE49-F238E27FC236}">
+                <a16:creationId xmlns:a16="http://schemas.microsoft.com/office/drawing/2014/main" id="{72D82C05-AD0C-49AA-9058-D1A254CA8A30}"/>
+              </a:ext>
+            </a:extLst>
+          </p:cNvPr>
+          <p:cNvSpPr>
+            <a:spLocks noGrp="1"/>
+          </p:cNvSpPr>
+          <p:nvPr>
+            <p:ph type="title"/>
+          </p:nvPr>
+        </p:nvSpPr>
+        <p:spPr/>
+        <p:txBody>
+          <a:bodyPr/>
+          <a:lstStyle/>
+          <a:p>
+            <a:r>
+              <a:rPr lang="en-US" dirty="0"/>
+              <a:t>Chp.1 – The problem</a:t>
+            </a:r>
+            <a:endParaRPr lang="fr-BE" dirty="0"/>
+          </a:p>
+        </p:txBody>
+      </p:sp>
+    </p:spTree>
+    <p:extLst>
+      <p:ext uri="{BB962C8B-B14F-4D97-AF65-F5344CB8AC3E}">
+        <p14:creationId xmlns:p14="http://schemas.microsoft.com/office/powerpoint/2010/main" val="2100203510"/>
+      </p:ext>
+    </p:extLst>
+  </p:cSld>
+  <p:clrMapOvr>
+    <a:masterClrMapping/>
+  </p:clrMapOvr>
+</p:sld>
+</file>
+
+<file path=ppt/slides/slide5.xml><?xml version="1.0" encoding="utf-8"?>
+<p:sld xmlns:a="http://schemas.openxmlformats.org/drawingml/2006/main" xmlns:r="http://schemas.openxmlformats.org/officeDocument/2006/relationships" xmlns:p="http://schemas.openxmlformats.org/presentationml/2006/main">
+  <p:cSld>
+    <p:spTree>
+      <p:nvGrpSpPr>
+        <p:cNvPr id="1" name=""/>
+        <p:cNvGrpSpPr/>
+        <p:nvPr/>
+      </p:nvGrpSpPr>
+      <p:grpSpPr>
+        <a:xfrm>
+          <a:off x="0" y="0"/>
+          <a:ext cx="0" cy="0"/>
+          <a:chOff x="0" y="0"/>
+          <a:chExt cx="0" cy="0"/>
+        </a:xfrm>
+      </p:grpSpPr>
+      <p:sp>
+        <p:nvSpPr>
+          <p:cNvPr id="2" name="Title 1">
+            <a:extLst>
+              <a:ext uri="{FF2B5EF4-FFF2-40B4-BE49-F238E27FC236}">
                 <a16:creationId xmlns:a16="http://schemas.microsoft.com/office/drawing/2014/main" id="{C5786B83-2319-4234-A711-D8D0D86F958F}"/>
               </a:ext>
             </a:extLst>
@@ -15945,7 +16431,7 @@
 </p:sld>
 </file>
 
-<file path=ppt/slides/slide5.xml><?xml version="1.0" encoding="utf-8"?>
+<file path=ppt/slides/slide6.xml><?xml version="1.0" encoding="utf-8"?>
 <p:sld xmlns:a="http://schemas.openxmlformats.org/drawingml/2006/main" xmlns:r="http://schemas.openxmlformats.org/officeDocument/2006/relationships" xmlns:p="http://schemas.openxmlformats.org/presentationml/2006/main">
   <p:cSld>
     <p:spTree>
@@ -16220,7 +16706,7 @@
 </p:sld>
 </file>
 
-<file path=ppt/slides/slide6.xml><?xml version="1.0" encoding="utf-8"?>
+<file path=ppt/slides/slide7.xml><?xml version="1.0" encoding="utf-8"?>
 <p:sld xmlns:a="http://schemas.openxmlformats.org/drawingml/2006/main" xmlns:r="http://schemas.openxmlformats.org/officeDocument/2006/relationships" xmlns:p="http://schemas.openxmlformats.org/presentationml/2006/main">
   <p:cSld>
     <p:spTree>
@@ -16354,7 +16840,7 @@
 </p:sld>
 </file>
 
-<file path=ppt/slides/slide7.xml><?xml version="1.0" encoding="utf-8"?>
+<file path=ppt/slides/slide8.xml><?xml version="1.0" encoding="utf-8"?>
 <p:sld xmlns:a="http://schemas.openxmlformats.org/drawingml/2006/main" xmlns:r="http://schemas.openxmlformats.org/officeDocument/2006/relationships" xmlns:p="http://schemas.openxmlformats.org/presentationml/2006/main">
   <p:cSld>
     <p:spTree>
@@ -16488,7 +16974,7 @@
 </p:sld>
 </file>
 
-<file path=ppt/slides/slide8.xml><?xml version="1.0" encoding="utf-8"?>
+<file path=ppt/slides/slide9.xml><?xml version="1.0" encoding="utf-8"?>
 <p:sld xmlns:a="http://schemas.openxmlformats.org/drawingml/2006/main" xmlns:r="http://schemas.openxmlformats.org/officeDocument/2006/relationships" xmlns:p="http://schemas.openxmlformats.org/presentationml/2006/main">
   <p:cSld>
     <p:spTree>
@@ -16613,140 +17099,6 @@
     <p:extLst>
       <p:ext uri="{BB962C8B-B14F-4D97-AF65-F5344CB8AC3E}">
         <p14:creationId xmlns:p14="http://schemas.microsoft.com/office/powerpoint/2010/main" val="1673664046"/>
-      </p:ext>
-    </p:extLst>
-  </p:cSld>
-  <p:clrMapOvr>
-    <a:masterClrMapping/>
-  </p:clrMapOvr>
-</p:sld>
-</file>
-
-<file path=ppt/slides/slide9.xml><?xml version="1.0" encoding="utf-8"?>
-<p:sld xmlns:a="http://schemas.openxmlformats.org/drawingml/2006/main" xmlns:r="http://schemas.openxmlformats.org/officeDocument/2006/relationships" xmlns:p="http://schemas.openxmlformats.org/presentationml/2006/main">
-  <p:cSld>
-    <p:spTree>
-      <p:nvGrpSpPr>
-        <p:cNvPr id="1" name=""/>
-        <p:cNvGrpSpPr/>
-        <p:nvPr/>
-      </p:nvGrpSpPr>
-      <p:grpSpPr>
-        <a:xfrm>
-          <a:off x="0" y="0"/>
-          <a:ext cx="0" cy="0"/>
-          <a:chOff x="0" y="0"/>
-          <a:chExt cx="0" cy="0"/>
-        </a:xfrm>
-      </p:grpSpPr>
-      <p:sp>
-        <p:nvSpPr>
-          <p:cNvPr id="2" name="Title 1">
-            <a:extLst>
-              <a:ext uri="{FF2B5EF4-FFF2-40B4-BE49-F238E27FC236}">
-                <a16:creationId xmlns:a16="http://schemas.microsoft.com/office/drawing/2014/main" id="{624452A9-FBE1-433E-B907-5D8698440D8F}"/>
-              </a:ext>
-            </a:extLst>
-          </p:cNvPr>
-          <p:cNvSpPr>
-            <a:spLocks noGrp="1"/>
-          </p:cNvSpPr>
-          <p:nvPr>
-            <p:ph type="title"/>
-          </p:nvPr>
-        </p:nvSpPr>
-        <p:spPr/>
-        <p:txBody>
-          <a:bodyPr/>
-          <a:lstStyle/>
-          <a:p>
-            <a:r>
-              <a:rPr lang="en-US" dirty="0"/>
-              <a:t>Chp.3 – Data Anomalies</a:t>
-            </a:r>
-            <a:endParaRPr lang="fr-BE" dirty="0"/>
-          </a:p>
-        </p:txBody>
-      </p:sp>
-      <p:sp>
-        <p:nvSpPr>
-          <p:cNvPr id="6" name="TextBox 5">
-            <a:extLst>
-              <a:ext uri="{FF2B5EF4-FFF2-40B4-BE49-F238E27FC236}">
-                <a16:creationId xmlns:a16="http://schemas.microsoft.com/office/drawing/2014/main" id="{A11CD5CC-C07D-5E80-3D58-87D4D8ABDF52}"/>
-              </a:ext>
-            </a:extLst>
-          </p:cNvPr>
-          <p:cNvSpPr txBox="1"/>
-          <p:nvPr/>
-        </p:nvSpPr>
-        <p:spPr>
-          <a:xfrm>
-            <a:off x="954156" y="1401417"/>
-            <a:ext cx="8239540" cy="1200329"/>
-          </a:xfrm>
-          <a:prstGeom prst="rect">
-            <a:avLst/>
-          </a:prstGeom>
-          <a:noFill/>
-        </p:spPr>
-        <p:txBody>
-          <a:bodyPr wrap="square" rtlCol="0">
-            <a:spAutoFit/>
-          </a:bodyPr>
-          <a:lstStyle/>
-          <a:p>
-            <a:r>
-              <a:rPr lang="en-US" dirty="0"/>
-              <a:t>However, it's not always the case in our data. We kept it respecting the data source and we will use it to illustrate the validity of the mode.</a:t>
-            </a:r>
-          </a:p>
-          <a:p>
-            <a:endParaRPr lang="en-US" dirty="0"/>
-          </a:p>
-          <a:p>
-            <a:r>
-              <a:rPr lang="en-US" dirty="0"/>
-              <a:t>Take by example the following subgraph:</a:t>
-            </a:r>
-            <a:endParaRPr lang="fr-BE" dirty="0"/>
-          </a:p>
-        </p:txBody>
-      </p:sp>
-      <p:pic>
-        <p:nvPicPr>
-          <p:cNvPr id="3" name="Picture 2">
-            <a:extLst>
-              <a:ext uri="{FF2B5EF4-FFF2-40B4-BE49-F238E27FC236}">
-                <a16:creationId xmlns:a16="http://schemas.microsoft.com/office/drawing/2014/main" id="{163D9839-9AA7-A4BA-A5EB-17F1112629B2}"/>
-              </a:ext>
-            </a:extLst>
-          </p:cNvPr>
-          <p:cNvPicPr>
-            <a:picLocks noChangeAspect="1"/>
-          </p:cNvPicPr>
-          <p:nvPr/>
-        </p:nvPicPr>
-        <p:blipFill>
-          <a:blip r:embed="rId3"/>
-          <a:stretch>
-            <a:fillRect/>
-          </a:stretch>
-        </p:blipFill>
-        <p:spPr>
-          <a:xfrm>
-            <a:off x="609124" y="2812096"/>
-            <a:ext cx="10973751" cy="3680779"/>
-          </a:xfrm>
-          <a:prstGeom prst="rect">
-            <a:avLst/>
-          </a:prstGeom>
-        </p:spPr>
-      </p:pic>
-    </p:spTree>
-    <p:extLst>
-      <p:ext uri="{BB962C8B-B14F-4D97-AF65-F5344CB8AC3E}">
-        <p14:creationId xmlns:p14="http://schemas.microsoft.com/office/powerpoint/2010/main" val="2207421586"/>
       </p:ext>
     </p:extLst>
   </p:cSld>

--- a/11.Presenttaions/big-cities-transport.pptx
+++ b/11.Presenttaions/big-cities-transport.pptx
@@ -5,7 +5,7 @@
     <p:sldMasterId id="2147483648" r:id="rId1"/>
   </p:sldMasterIdLst>
   <p:notesMasterIdLst>
-    <p:notesMasterId r:id="rId30"/>
+    <p:notesMasterId r:id="rId32"/>
   </p:notesMasterIdLst>
   <p:sldIdLst>
     <p:sldId id="257" r:id="rId2"/>
@@ -29,13 +29,15 @@
     <p:sldId id="274" r:id="rId20"/>
     <p:sldId id="270" r:id="rId21"/>
     <p:sldId id="262" r:id="rId22"/>
-    <p:sldId id="263" r:id="rId23"/>
-    <p:sldId id="288" r:id="rId24"/>
-    <p:sldId id="290" r:id="rId25"/>
-    <p:sldId id="289" r:id="rId26"/>
-    <p:sldId id="291" r:id="rId27"/>
-    <p:sldId id="264" r:id="rId28"/>
-    <p:sldId id="265" r:id="rId29"/>
+    <p:sldId id="294" r:id="rId23"/>
+    <p:sldId id="263" r:id="rId24"/>
+    <p:sldId id="288" r:id="rId25"/>
+    <p:sldId id="293" r:id="rId26"/>
+    <p:sldId id="290" r:id="rId27"/>
+    <p:sldId id="289" r:id="rId28"/>
+    <p:sldId id="291" r:id="rId29"/>
+    <p:sldId id="264" r:id="rId30"/>
+    <p:sldId id="265" r:id="rId31"/>
   </p:sldIdLst>
   <p:sldSz cx="12192000" cy="6858000"/>
   <p:notesSz cx="6858000" cy="9144000"/>
@@ -3045,119 +3047,6 @@
               <a:buFont typeface="Wingdings" panose="05000000000000000000" pitchFamily="2" charset="2"/>
               <a:buNone/>
             </a:pPr>
-            <a:endParaRPr lang="en-US" dirty="0"/>
-          </a:p>
-          <a:p>
-            <a:pPr marL="171450" indent="-171450">
-              <a:buFont typeface="Wingdings" panose="05000000000000000000" pitchFamily="2" charset="2"/>
-              <a:buChar char="à"/>
-            </a:pPr>
-            <a:r>
-              <a:rPr lang="en-US" dirty="0"/>
-              <a:t>Shortest Path: (Neo4j):</a:t>
-            </a:r>
-          </a:p>
-          <a:p>
-            <a:pPr marL="0" indent="0">
-              <a:buFont typeface="Wingdings" panose="05000000000000000000" pitchFamily="2" charset="2"/>
-              <a:buNone/>
-            </a:pPr>
-            <a:r>
-              <a:rPr lang="en-US" dirty="0"/>
-              <a:t>Each edges will be ranked with the possible distress caused by its disruption. It means, the loss of time.</a:t>
-            </a:r>
-          </a:p>
-          <a:p>
-            <a:pPr marL="0" indent="0">
-              <a:buFont typeface="Wingdings" panose="05000000000000000000" pitchFamily="2" charset="2"/>
-              <a:buNone/>
-            </a:pPr>
-            <a:r>
-              <a:rPr lang="en-US" dirty="0"/>
-              <a:t>For that, it is necessary to take the user’s perspective. Thanks to NUMBAT dataset, it was possible to statically </a:t>
-            </a:r>
-          </a:p>
-          <a:p>
-            <a:pPr marL="0" indent="0">
-              <a:buFont typeface="Wingdings" panose="05000000000000000000" pitchFamily="2" charset="2"/>
-              <a:buNone/>
-            </a:pPr>
-            <a:r>
-              <a:rPr lang="en-US" dirty="0"/>
-              <a:t>recreate the of the user O/D route at each segment.</a:t>
-            </a:r>
-          </a:p>
-          <a:p>
-            <a:pPr marL="0" indent="0">
-              <a:buFont typeface="Wingdings" panose="05000000000000000000" pitchFamily="2" charset="2"/>
-              <a:buNone/>
-            </a:pPr>
-            <a:r>
-              <a:rPr lang="en-US" dirty="0"/>
-              <a:t>Indicator: Times (the less </a:t>
-            </a:r>
-            <a:r>
-              <a:rPr lang="en-US" dirty="0">
-                <a:sym typeface="Wingdings" panose="05000000000000000000" pitchFamily="2" charset="2"/>
-              </a:rPr>
-              <a:t>possible) </a:t>
-            </a:r>
-          </a:p>
-          <a:p>
-            <a:pPr marL="0" indent="0">
-              <a:buFont typeface="Wingdings" panose="05000000000000000000" pitchFamily="2" charset="2"/>
-              <a:buNone/>
-            </a:pPr>
-            <a:r>
-              <a:rPr lang="en-US" dirty="0">
-                <a:sym typeface="Wingdings" panose="05000000000000000000" pitchFamily="2" charset="2"/>
-              </a:rPr>
-              <a:t>Ranks: what are the most relevant edges in User angle. The ones that saves more journey time. </a:t>
-            </a:r>
-            <a:endParaRPr lang="en-US" dirty="0"/>
-          </a:p>
-          <a:p>
-            <a:pPr marL="0" indent="0">
-              <a:buFont typeface="Wingdings" panose="05000000000000000000" pitchFamily="2" charset="2"/>
-              <a:buNone/>
-            </a:pPr>
-            <a:endParaRPr lang="en-US" dirty="0"/>
-          </a:p>
-          <a:p>
-            <a:pPr marL="0" indent="0">
-              <a:buFont typeface="Wingdings" panose="05000000000000000000" pitchFamily="2" charset="2"/>
-              <a:buNone/>
-            </a:pPr>
-            <a:r>
-              <a:rPr lang="en-US" dirty="0"/>
-              <a:t>Comparison Method:</a:t>
-            </a:r>
-          </a:p>
-          <a:p>
-            <a:pPr marL="0" indent="0">
-              <a:buFont typeface="Wingdings" panose="05000000000000000000" pitchFamily="2" charset="2"/>
-              <a:buNone/>
-            </a:pPr>
-            <a:endParaRPr lang="en-US" dirty="0"/>
-          </a:p>
-          <a:p>
-            <a:pPr marL="0" indent="0">
-              <a:buFont typeface="Wingdings" panose="05000000000000000000" pitchFamily="2" charset="2"/>
-              <a:buNone/>
-            </a:pPr>
-            <a:r>
-              <a:rPr lang="en-US" dirty="0">
-                <a:sym typeface="Wingdings" panose="05000000000000000000" pitchFamily="2" charset="2"/>
-              </a:rPr>
-              <a:t> Kendall Correlation Coefficient</a:t>
-            </a:r>
-            <a:endParaRPr lang="en-US" dirty="0"/>
-          </a:p>
-          <a:p>
-            <a:pPr marL="0" indent="0">
-              <a:buFont typeface="Wingdings" panose="05000000000000000000" pitchFamily="2" charset="2"/>
-              <a:buNone/>
-            </a:pPr>
             <a:r>
               <a:rPr lang="en-US" dirty="0"/>
               <a:t>    </a:t>
@@ -3274,225 +3163,6 @@
             </a:r>
           </a:p>
           <a:p>
-            <a:r>
-              <a:rPr lang="en-US" dirty="0"/>
-              <a:t>Ranking Methods:</a:t>
-            </a:r>
-          </a:p>
-          <a:p>
-            <a:endParaRPr lang="en-US" dirty="0"/>
-          </a:p>
-          <a:p>
-            <a:pPr marL="171450" indent="-171450">
-              <a:buFont typeface="Wingdings" panose="05000000000000000000" pitchFamily="2" charset="2"/>
-              <a:buChar char="à"/>
-            </a:pPr>
-            <a:r>
-              <a:rPr lang="en-US" dirty="0"/>
-              <a:t>Disparity Filter (Networkx):</a:t>
-            </a:r>
-          </a:p>
-          <a:p>
-            <a:pPr marL="0" indent="0">
-              <a:buFont typeface="Wingdings" panose="05000000000000000000" pitchFamily="2" charset="2"/>
-              <a:buNone/>
-            </a:pPr>
-            <a:r>
-              <a:rPr lang="en-US" dirty="0"/>
-              <a:t>It filters out edges deemed not compatible with a random distribution with a certain statistical significance (alpha). </a:t>
-            </a:r>
-          </a:p>
-          <a:p>
-            <a:pPr marL="0" indent="0">
-              <a:buFont typeface="Wingdings" panose="05000000000000000000" pitchFamily="2" charset="2"/>
-              <a:buNone/>
-            </a:pPr>
-            <a:r>
-              <a:rPr lang="en-US" dirty="0"/>
-              <a:t>This manner its possible to encounter different levels of heterogeneities. </a:t>
-            </a:r>
-          </a:p>
-          <a:p>
-            <a:pPr marL="0" indent="0">
-              <a:buFont typeface="Wingdings" panose="05000000000000000000" pitchFamily="2" charset="2"/>
-              <a:buNone/>
-            </a:pPr>
-            <a:r>
-              <a:rPr lang="en-US" dirty="0">
-                <a:sym typeface="Wingdings" panose="05000000000000000000" pitchFamily="2" charset="2"/>
-              </a:rPr>
-              <a:t>Indicator: Efficient </a:t>
-            </a:r>
-            <a:r>
-              <a:rPr lang="en-US" dirty="0"/>
-              <a:t>Indicator (weight), weight prob. distribution, statistical relevance, node strength, node degree, </a:t>
-            </a:r>
-          </a:p>
-          <a:p>
-            <a:pPr marL="0" indent="0">
-              <a:buFont typeface="Wingdings" panose="05000000000000000000" pitchFamily="2" charset="2"/>
-              <a:buNone/>
-            </a:pPr>
-            <a:r>
-              <a:rPr lang="en-US" dirty="0"/>
-              <a:t>Ranks: what are the most relevant edges in Collective angle. </a:t>
-            </a:r>
-          </a:p>
-          <a:p>
-            <a:pPr marL="0" indent="0">
-              <a:buFont typeface="Wingdings" panose="05000000000000000000" pitchFamily="2" charset="2"/>
-              <a:buNone/>
-            </a:pPr>
-            <a:endParaRPr lang="en-US" dirty="0"/>
-          </a:p>
-          <a:p>
-            <a:pPr marL="0" indent="0">
-              <a:buFont typeface="Wingdings" panose="05000000000000000000" pitchFamily="2" charset="2"/>
-              <a:buNone/>
-            </a:pPr>
-            <a:r>
-              <a:rPr lang="en-US" dirty="0"/>
-              <a:t>*</a:t>
-            </a:r>
-            <a:r>
-              <a:rPr lang="en-US" b="0" i="0" dirty="0">
-                <a:solidFill>
-                  <a:srgbClr val="57606A"/>
-                </a:solidFill>
-                <a:effectLst/>
-                <a:latin typeface="-apple-system"/>
-              </a:rPr>
-              <a:t>The disparity filter exploits local heterogeneity and local correlations among weights to extract the network backbone by considering the relevant edges at all the scales present in the system. The methodology preserves an edge whenever its intensity is a statistically not compatible with respect to a null hypothesis of uniform randomness for at least one of the two nodes the edge is incident to, which ensures that small nodes in terms of strength are not neglected. As result, the disparity filter reduces the number of edges in the original network significantly keeping, at the same time, almost all the weight and a large fraction of nodes. As well, this filter preserves the cut-off of the degree distribution, the form of the weight distribution, and the clustering coefficient.</a:t>
-            </a:r>
-            <a:endParaRPr lang="en-US" dirty="0"/>
-          </a:p>
-          <a:p>
-            <a:pPr marL="0" indent="0">
-              <a:buFont typeface="Wingdings" panose="05000000000000000000" pitchFamily="2" charset="2"/>
-              <a:buNone/>
-            </a:pPr>
-            <a:endParaRPr lang="en-US" dirty="0"/>
-          </a:p>
-          <a:p>
-            <a:pPr marL="171450" indent="-171450">
-              <a:buFont typeface="Wingdings" panose="05000000000000000000" pitchFamily="2" charset="2"/>
-              <a:buChar char="à"/>
-            </a:pPr>
-            <a:r>
-              <a:rPr lang="en-US" dirty="0"/>
-              <a:t>Shortest Path: (Neo4j):</a:t>
-            </a:r>
-          </a:p>
-          <a:p>
-            <a:pPr marL="0" indent="0">
-              <a:buFont typeface="Wingdings" panose="05000000000000000000" pitchFamily="2" charset="2"/>
-              <a:buNone/>
-            </a:pPr>
-            <a:r>
-              <a:rPr lang="en-US" dirty="0"/>
-              <a:t>Each edges will be ranked with the possible distress caused by its disruption. It means, the loss of time.</a:t>
-            </a:r>
-          </a:p>
-          <a:p>
-            <a:pPr marL="0" indent="0">
-              <a:buFont typeface="Wingdings" panose="05000000000000000000" pitchFamily="2" charset="2"/>
-              <a:buNone/>
-            </a:pPr>
-            <a:r>
-              <a:rPr lang="en-US" dirty="0"/>
-              <a:t>For that, it is necessary to take the user’s perspective. Thanks to NUMBAT dataset, it was possible to statically </a:t>
-            </a:r>
-          </a:p>
-          <a:p>
-            <a:pPr marL="0" indent="0">
-              <a:buFont typeface="Wingdings" panose="05000000000000000000" pitchFamily="2" charset="2"/>
-              <a:buNone/>
-            </a:pPr>
-            <a:r>
-              <a:rPr lang="en-US" dirty="0"/>
-              <a:t>recreate the of the user O/D route at each segment.</a:t>
-            </a:r>
-          </a:p>
-          <a:p>
-            <a:pPr marL="0" indent="0">
-              <a:buFont typeface="Wingdings" panose="05000000000000000000" pitchFamily="2" charset="2"/>
-              <a:buNone/>
-            </a:pPr>
-            <a:r>
-              <a:rPr lang="en-US" dirty="0"/>
-              <a:t>Indicator: Times (the less </a:t>
-            </a:r>
-            <a:r>
-              <a:rPr lang="en-US" dirty="0">
-                <a:sym typeface="Wingdings" panose="05000000000000000000" pitchFamily="2" charset="2"/>
-              </a:rPr>
-              <a:t>possible) </a:t>
-            </a:r>
-          </a:p>
-          <a:p>
-            <a:pPr marL="0" indent="0">
-              <a:buFont typeface="Wingdings" panose="05000000000000000000" pitchFamily="2" charset="2"/>
-              <a:buNone/>
-            </a:pPr>
-            <a:r>
-              <a:rPr lang="en-US" dirty="0">
-                <a:sym typeface="Wingdings" panose="05000000000000000000" pitchFamily="2" charset="2"/>
-              </a:rPr>
-              <a:t>Ranks: what are the most relevant edges in User angle. The ones that saves more journey time. </a:t>
-            </a:r>
-            <a:endParaRPr lang="en-US" dirty="0"/>
-          </a:p>
-          <a:p>
-            <a:pPr marL="0" indent="0">
-              <a:buFont typeface="Wingdings" panose="05000000000000000000" pitchFamily="2" charset="2"/>
-              <a:buNone/>
-            </a:pPr>
-            <a:endParaRPr lang="en-US" dirty="0"/>
-          </a:p>
-          <a:p>
-            <a:pPr marL="0" indent="0">
-              <a:buFont typeface="Wingdings" panose="05000000000000000000" pitchFamily="2" charset="2"/>
-              <a:buNone/>
-            </a:pPr>
-            <a:r>
-              <a:rPr lang="en-US" dirty="0"/>
-              <a:t>Comparison Method:</a:t>
-            </a:r>
-          </a:p>
-          <a:p>
-            <a:pPr marL="0" indent="0">
-              <a:buFont typeface="Wingdings" panose="05000000000000000000" pitchFamily="2" charset="2"/>
-              <a:buNone/>
-            </a:pPr>
-            <a:endParaRPr lang="en-US" dirty="0"/>
-          </a:p>
-          <a:p>
-            <a:pPr marL="0" indent="0">
-              <a:buFont typeface="Wingdings" panose="05000000000000000000" pitchFamily="2" charset="2"/>
-              <a:buNone/>
-            </a:pPr>
-            <a:r>
-              <a:rPr lang="en-US" dirty="0">
-                <a:sym typeface="Wingdings" panose="05000000000000000000" pitchFamily="2" charset="2"/>
-              </a:rPr>
-              <a:t> Kendall Correlation Coefficient</a:t>
-            </a:r>
-            <a:endParaRPr lang="en-US" dirty="0"/>
-          </a:p>
-          <a:p>
-            <a:pPr marL="0" indent="0">
-              <a:buFont typeface="Wingdings" panose="05000000000000000000" pitchFamily="2" charset="2"/>
-              <a:buNone/>
-            </a:pPr>
-            <a:r>
-              <a:rPr lang="en-US" dirty="0"/>
-              <a:t>    </a:t>
-            </a:r>
-          </a:p>
-          <a:p>
-            <a:endParaRPr lang="en-US" dirty="0"/>
-          </a:p>
-          <a:p>
             <a:endParaRPr lang="fr-BE" dirty="0"/>
           </a:p>
         </p:txBody>
@@ -3814,182 +3484,6 @@
             </a:r>
           </a:p>
           <a:p>
-            <a:r>
-              <a:rPr lang="en-US" dirty="0"/>
-              <a:t>Ranking Methods:</a:t>
-            </a:r>
-          </a:p>
-          <a:p>
-            <a:endParaRPr lang="en-US" dirty="0"/>
-          </a:p>
-          <a:p>
-            <a:pPr marL="171450" indent="-171450">
-              <a:buFont typeface="Wingdings" panose="05000000000000000000" pitchFamily="2" charset="2"/>
-              <a:buChar char="à"/>
-            </a:pPr>
-            <a:r>
-              <a:rPr lang="en-US" dirty="0"/>
-              <a:t>Disparity Filter (Networkx):</a:t>
-            </a:r>
-          </a:p>
-          <a:p>
-            <a:pPr marL="0" indent="0">
-              <a:buFont typeface="Wingdings" panose="05000000000000000000" pitchFamily="2" charset="2"/>
-              <a:buNone/>
-            </a:pPr>
-            <a:r>
-              <a:rPr lang="en-US" dirty="0"/>
-              <a:t>It filters out edges deemed not compatible with a random distribution with a certain statistical significance (alpha). </a:t>
-            </a:r>
-          </a:p>
-          <a:p>
-            <a:pPr marL="0" indent="0">
-              <a:buFont typeface="Wingdings" panose="05000000000000000000" pitchFamily="2" charset="2"/>
-              <a:buNone/>
-            </a:pPr>
-            <a:r>
-              <a:rPr lang="en-US" dirty="0"/>
-              <a:t>This manner its possible to encounter different levels of heterogeneities. </a:t>
-            </a:r>
-          </a:p>
-          <a:p>
-            <a:pPr marL="0" indent="0">
-              <a:buFont typeface="Wingdings" panose="05000000000000000000" pitchFamily="2" charset="2"/>
-              <a:buNone/>
-            </a:pPr>
-            <a:r>
-              <a:rPr lang="en-US" dirty="0">
-                <a:sym typeface="Wingdings" panose="05000000000000000000" pitchFamily="2" charset="2"/>
-              </a:rPr>
-              <a:t>Indicator: Efficient </a:t>
-            </a:r>
-            <a:r>
-              <a:rPr lang="en-US" dirty="0"/>
-              <a:t>Indicator (weight), weight prob. distribution, statistical relevance, node strength, node degree, </a:t>
-            </a:r>
-          </a:p>
-          <a:p>
-            <a:pPr marL="0" indent="0">
-              <a:buFont typeface="Wingdings" panose="05000000000000000000" pitchFamily="2" charset="2"/>
-              <a:buNone/>
-            </a:pPr>
-            <a:r>
-              <a:rPr lang="en-US" dirty="0"/>
-              <a:t>Ranks: what are the most relevant edges in Collective angle. </a:t>
-            </a:r>
-          </a:p>
-          <a:p>
-            <a:pPr marL="0" indent="0">
-              <a:buFont typeface="Wingdings" panose="05000000000000000000" pitchFamily="2" charset="2"/>
-              <a:buNone/>
-            </a:pPr>
-            <a:endParaRPr lang="en-US" dirty="0"/>
-          </a:p>
-          <a:p>
-            <a:pPr marL="0" indent="0">
-              <a:buFont typeface="Wingdings" panose="05000000000000000000" pitchFamily="2" charset="2"/>
-              <a:buNone/>
-            </a:pPr>
-            <a:r>
-              <a:rPr lang="en-US" dirty="0"/>
-              <a:t>*</a:t>
-            </a:r>
-            <a:r>
-              <a:rPr lang="en-US" b="0" i="0" dirty="0">
-                <a:solidFill>
-                  <a:srgbClr val="57606A"/>
-                </a:solidFill>
-                <a:effectLst/>
-                <a:latin typeface="-apple-system"/>
-              </a:rPr>
-              <a:t>The disparity filter exploits local heterogeneity and local correlations among weights to extract the network backbone by considering the relevant edges at all the scales present in the system. The methodology preserves an edge whenever its intensity is a statistically not compatible with respect to a null hypothesis of uniform randomness for at least one of the two nodes the edge is incident to, which ensures that small nodes in terms of strength are not neglected. As result, the disparity filter reduces the number of edges in the original network significantly keeping, at the same time, almost all the weight and a large fraction of nodes. As well, this filter preserves the cut-off of the degree distribution, the form of the weight distribution, and the clustering coefficient.</a:t>
-            </a:r>
-            <a:endParaRPr lang="en-US" dirty="0"/>
-          </a:p>
-          <a:p>
-            <a:pPr marL="0" indent="0">
-              <a:buFont typeface="Wingdings" panose="05000000000000000000" pitchFamily="2" charset="2"/>
-              <a:buNone/>
-            </a:pPr>
-            <a:endParaRPr lang="en-US" dirty="0"/>
-          </a:p>
-          <a:p>
-            <a:pPr marL="171450" indent="-171450">
-              <a:buFont typeface="Wingdings" panose="05000000000000000000" pitchFamily="2" charset="2"/>
-              <a:buChar char="à"/>
-            </a:pPr>
-            <a:r>
-              <a:rPr lang="en-US" dirty="0"/>
-              <a:t>Shortest Path: (Neo4j):</a:t>
-            </a:r>
-          </a:p>
-          <a:p>
-            <a:pPr marL="0" indent="0">
-              <a:buFont typeface="Wingdings" panose="05000000000000000000" pitchFamily="2" charset="2"/>
-              <a:buNone/>
-            </a:pPr>
-            <a:r>
-              <a:rPr lang="en-US" dirty="0"/>
-              <a:t>Each edges will be ranked with the possible distress caused by its disruption. It means, the loss of time.</a:t>
-            </a:r>
-          </a:p>
-          <a:p>
-            <a:pPr marL="0" indent="0">
-              <a:buFont typeface="Wingdings" panose="05000000000000000000" pitchFamily="2" charset="2"/>
-              <a:buNone/>
-            </a:pPr>
-            <a:r>
-              <a:rPr lang="en-US" dirty="0"/>
-              <a:t>For that, it is necessary to take the user’s perspective. Thanks to NUMBAT dataset, it was possible to statically </a:t>
-            </a:r>
-          </a:p>
-          <a:p>
-            <a:pPr marL="0" indent="0">
-              <a:buFont typeface="Wingdings" panose="05000000000000000000" pitchFamily="2" charset="2"/>
-              <a:buNone/>
-            </a:pPr>
-            <a:r>
-              <a:rPr lang="en-US" dirty="0"/>
-              <a:t>recreate the of the user O/D route at each segment.</a:t>
-            </a:r>
-          </a:p>
-          <a:p>
-            <a:pPr marL="0" indent="0">
-              <a:buFont typeface="Wingdings" panose="05000000000000000000" pitchFamily="2" charset="2"/>
-              <a:buNone/>
-            </a:pPr>
-            <a:r>
-              <a:rPr lang="en-US" dirty="0"/>
-              <a:t>Indicator: Times (the less </a:t>
-            </a:r>
-            <a:r>
-              <a:rPr lang="en-US" dirty="0">
-                <a:sym typeface="Wingdings" panose="05000000000000000000" pitchFamily="2" charset="2"/>
-              </a:rPr>
-              <a:t>possible) </a:t>
-            </a:r>
-          </a:p>
-          <a:p>
-            <a:pPr marL="0" indent="0">
-              <a:buFont typeface="Wingdings" panose="05000000000000000000" pitchFamily="2" charset="2"/>
-              <a:buNone/>
-            </a:pPr>
-            <a:r>
-              <a:rPr lang="en-US" dirty="0">
-                <a:sym typeface="Wingdings" panose="05000000000000000000" pitchFamily="2" charset="2"/>
-              </a:rPr>
-              <a:t>Ranks: what are the most relevant edges in User angle. The ones that saves more journey time. </a:t>
-            </a:r>
-            <a:endParaRPr lang="en-US" dirty="0"/>
-          </a:p>
-          <a:p>
-            <a:pPr marL="0" indent="0">
-              <a:buFont typeface="Wingdings" panose="05000000000000000000" pitchFamily="2" charset="2"/>
-              <a:buNone/>
-            </a:pPr>
-            <a:endParaRPr lang="en-US" dirty="0"/>
-          </a:p>
-          <a:p>
             <a:pPr marL="0" indent="0">
               <a:buFont typeface="Wingdings" panose="05000000000000000000" pitchFamily="2" charset="2"/>
               <a:buNone/>
@@ -4236,7 +3730,7 @@
               </a:spcAft>
               <a:buClrTx/>
               <a:buSzTx/>
-              <a:buFont typeface="Wingdings" panose="05000000000000000000" pitchFamily="2" charset="2"/>
+              <a:buFontTx/>
               <a:buNone/>
               <a:tabLst/>
               <a:defRPr/>
@@ -4245,9 +3739,9 @@
               <a:rPr lang="en-US" dirty="0"/>
               <a:t>TODO</a:t>
             </a:r>
-            <a:endParaRPr lang="en-US" dirty="0">
-              <a:sym typeface="Wingdings" panose="05000000000000000000" pitchFamily="2" charset="2"/>
-            </a:endParaRPr>
+          </a:p>
+          <a:p>
+            <a:endParaRPr lang="en-GB" dirty="0"/>
           </a:p>
         </p:txBody>
       </p:sp>
@@ -4277,7 +3771,7 @@
     </p:spTree>
     <p:extLst>
       <p:ext uri="{BB962C8B-B14F-4D97-AF65-F5344CB8AC3E}">
-        <p14:creationId xmlns:p14="http://schemas.microsoft.com/office/powerpoint/2010/main" val="3129316229"/>
+        <p14:creationId xmlns:p14="http://schemas.microsoft.com/office/powerpoint/2010/main" val="3863284585"/>
       </p:ext>
     </p:extLst>
   </p:cSld>
@@ -4331,7 +3825,7 @@
           <a:bodyPr/>
           <a:lstStyle/>
           <a:p>
-            <a:pPr marL="171450" marR="0" lvl="0" indent="-171450" algn="l" defTabSz="914400" rtl="0" eaLnBrk="1" fontAlgn="auto" latinLnBrk="0" hangingPunct="1">
+            <a:pPr marL="0" marR="0" lvl="0" indent="0" algn="l" defTabSz="914400" rtl="0" eaLnBrk="1" fontAlgn="auto" latinLnBrk="0" hangingPunct="1">
               <a:lnSpc>
                 <a:spcPct val="100000"/>
               </a:lnSpc>
@@ -4344,7 +3838,7 @@
               <a:buClrTx/>
               <a:buSzTx/>
               <a:buFont typeface="Wingdings" panose="05000000000000000000" pitchFamily="2" charset="2"/>
-              <a:buChar char="à"/>
+              <a:buNone/>
               <a:tabLst/>
               <a:defRPr/>
             </a:pPr>
@@ -4352,9 +3846,6 @@
               <a:rPr lang="en-US" dirty="0"/>
               <a:t>TODO</a:t>
             </a:r>
-            <a:endParaRPr lang="en-US" dirty="0">
-              <a:sym typeface="Wingdings" panose="05000000000000000000" pitchFamily="2" charset="2"/>
-            </a:endParaRPr>
           </a:p>
           <a:p>
             <a:pPr marL="0" marR="0" lvl="0" indent="0" algn="l" defTabSz="914400" rtl="0" eaLnBrk="1" fontAlgn="auto" latinLnBrk="0" hangingPunct="1">
@@ -4369,7 +3860,7 @@
               </a:spcAft>
               <a:buClrTx/>
               <a:buSzTx/>
-              <a:buFontTx/>
+              <a:buFont typeface="Wingdings" panose="05000000000000000000" pitchFamily="2" charset="2"/>
               <a:buNone/>
               <a:tabLst/>
               <a:defRPr/>
@@ -4378,41 +3869,33 @@
               <a:rPr lang="en-US" dirty="0">
                 <a:sym typeface="Wingdings" panose="05000000000000000000" pitchFamily="2" charset="2"/>
               </a:rPr>
-              <a:t> Traffic</a:t>
-            </a:r>
-          </a:p>
-          <a:p>
-            <a:pPr marL="171450" indent="-171450">
-              <a:buFontTx/>
-              <a:buChar char="-"/>
+              <a:t>Explain example DLR distance (JCD Team)</a:t>
+            </a:r>
+          </a:p>
+          <a:p>
+            <a:pPr marL="0" marR="0" lvl="0" indent="0" algn="l" defTabSz="914400" rtl="0" eaLnBrk="1" fontAlgn="auto" latinLnBrk="0" hangingPunct="1">
+              <a:lnSpc>
+                <a:spcPct val="100000"/>
+              </a:lnSpc>
+              <a:spcBef>
+                <a:spcPts val="0"/>
+              </a:spcBef>
+              <a:spcAft>
+                <a:spcPts val="0"/>
+              </a:spcAft>
+              <a:buClrTx/>
+              <a:buSzTx/>
+              <a:buFont typeface="Wingdings" panose="05000000000000000000" pitchFamily="2" charset="2"/>
+              <a:buNone/>
+              <a:tabLst/>
+              <a:defRPr/>
             </a:pPr>
             <a:r>
               <a:rPr lang="en-US" dirty="0">
                 <a:sym typeface="Wingdings" panose="05000000000000000000" pitchFamily="2" charset="2"/>
               </a:rPr>
-              <a:t>Enter/Exists in stations (Networkx)</a:t>
-            </a:r>
-          </a:p>
-          <a:p>
-            <a:pPr marL="171450" indent="-171450">
-              <a:buFontTx/>
-              <a:buChar char="-"/>
-            </a:pPr>
-            <a:r>
-              <a:rPr lang="en-US" dirty="0">
-                <a:sym typeface="Wingdings" panose="05000000000000000000" pitchFamily="2" charset="2"/>
-              </a:rPr>
-              <a:t>Load in segments (Networkx)</a:t>
-            </a:r>
-          </a:p>
-          <a:p>
-            <a:pPr marL="171450" indent="-171450">
-              <a:buFontTx/>
-              <a:buChar char="-"/>
-            </a:pPr>
-            <a:endParaRPr lang="en-US" dirty="0">
-              <a:sym typeface="Wingdings" panose="05000000000000000000" pitchFamily="2" charset="2"/>
-            </a:endParaRPr>
+              <a:t>Show statistic: distance, speed</a:t>
+            </a:r>
           </a:p>
         </p:txBody>
       </p:sp>
@@ -4442,7 +3925,7 @@
     </p:spTree>
     <p:extLst>
       <p:ext uri="{BB962C8B-B14F-4D97-AF65-F5344CB8AC3E}">
-        <p14:creationId xmlns:p14="http://schemas.microsoft.com/office/powerpoint/2010/main" val="2407261714"/>
+        <p14:creationId xmlns:p14="http://schemas.microsoft.com/office/powerpoint/2010/main" val="3129316229"/>
       </p:ext>
     </p:extLst>
   </p:cSld>
@@ -4496,39 +3979,41 @@
           <a:bodyPr/>
           <a:lstStyle/>
           <a:p>
-            <a:pPr marL="171450" indent="-171450">
+            <a:pPr marL="171450" marR="0" lvl="0" indent="-171450" algn="l" defTabSz="914400" rtl="0" eaLnBrk="1" fontAlgn="auto" latinLnBrk="0" hangingPunct="1">
+              <a:lnSpc>
+                <a:spcPct val="100000"/>
+              </a:lnSpc>
+              <a:spcBef>
+                <a:spcPts val="0"/>
+              </a:spcBef>
+              <a:spcAft>
+                <a:spcPts val="0"/>
+              </a:spcAft>
+              <a:buClrTx/>
+              <a:buSzTx/>
               <a:buFont typeface="Wingdings" panose="05000000000000000000" pitchFamily="2" charset="2"/>
               <a:buChar char="à"/>
+              <a:tabLst/>
+              <a:defRPr/>
+            </a:pPr>
+            <a:r>
+              <a:rPr lang="en-US" dirty="0"/>
+              <a:t>TODO</a:t>
+            </a:r>
+            <a:endParaRPr lang="en-US" dirty="0">
+              <a:sym typeface="Wingdings" panose="05000000000000000000" pitchFamily="2" charset="2"/>
+            </a:endParaRPr>
+          </a:p>
+          <a:p>
+            <a:pPr marL="0" indent="0">
+              <a:buFontTx/>
+              <a:buNone/>
             </a:pPr>
             <a:r>
               <a:rPr lang="en-US" dirty="0">
                 <a:sym typeface="Wingdings" panose="05000000000000000000" pitchFamily="2" charset="2"/>
               </a:rPr>
-              <a:t>Operational: Speed &amp; Frequency</a:t>
-            </a:r>
-          </a:p>
-          <a:p>
-            <a:pPr marL="171450" indent="-171450">
-              <a:buFontTx/>
-              <a:buChar char="-"/>
-            </a:pPr>
-            <a:r>
-              <a:rPr lang="en-US" dirty="0">
-                <a:sym typeface="Wingdings" panose="05000000000000000000" pitchFamily="2" charset="2"/>
-              </a:rPr>
-              <a:t>Histogram (charts) weight</a:t>
-            </a:r>
-          </a:p>
-          <a:p>
-            <a:pPr marL="171450" indent="-171450">
-              <a:buFontTx/>
-              <a:buChar char="-"/>
-            </a:pPr>
-            <a:r>
-              <a:rPr lang="en-US" dirty="0">
-                <a:sym typeface="Wingdings" panose="05000000000000000000" pitchFamily="2" charset="2"/>
-              </a:rPr>
-              <a:t>Maps (</a:t>
+              <a:t>Show statistic graph: Enter/Exists in stations (</a:t>
             </a:r>
             <a:r>
               <a:rPr lang="en-US" dirty="0" err="1">
@@ -4542,6 +4027,49 @@
               </a:rPr>
               <a:t>)</a:t>
             </a:r>
+          </a:p>
+          <a:p>
+            <a:pPr marL="0" marR="0" lvl="0" indent="0" algn="l" defTabSz="914400" rtl="0" eaLnBrk="1" fontAlgn="auto" latinLnBrk="0" hangingPunct="1">
+              <a:lnSpc>
+                <a:spcPct val="100000"/>
+              </a:lnSpc>
+              <a:spcBef>
+                <a:spcPts val="0"/>
+              </a:spcBef>
+              <a:spcAft>
+                <a:spcPts val="0"/>
+              </a:spcAft>
+              <a:buClrTx/>
+              <a:buSzTx/>
+              <a:buFontTx/>
+              <a:buNone/>
+              <a:tabLst/>
+              <a:defRPr/>
+            </a:pPr>
+            <a:r>
+              <a:rPr lang="en-US" dirty="0">
+                <a:sym typeface="Wingdings" panose="05000000000000000000" pitchFamily="2" charset="2"/>
+              </a:rPr>
+              <a:t>Show statistic charts: traffic, loads, </a:t>
+            </a:r>
+            <a:r>
+              <a:rPr lang="en-US" dirty="0" err="1">
+                <a:sym typeface="Wingdings" panose="05000000000000000000" pitchFamily="2" charset="2"/>
+              </a:rPr>
+              <a:t>traffic_distance</a:t>
+            </a:r>
+            <a:endParaRPr lang="en-US" dirty="0">
+              <a:sym typeface="Wingdings" panose="05000000000000000000" pitchFamily="2" charset="2"/>
+            </a:endParaRPr>
+          </a:p>
+          <a:p>
+            <a:pPr marL="0" indent="0">
+              <a:buFontTx/>
+              <a:buNone/>
+            </a:pPr>
+            <a:endParaRPr lang="en-US" dirty="0">
+              <a:sym typeface="Wingdings" panose="05000000000000000000" pitchFamily="2" charset="2"/>
+            </a:endParaRPr>
           </a:p>
         </p:txBody>
       </p:sp>
@@ -4571,7 +4099,7 @@
     </p:spTree>
     <p:extLst>
       <p:ext uri="{BB962C8B-B14F-4D97-AF65-F5344CB8AC3E}">
-        <p14:creationId xmlns:p14="http://schemas.microsoft.com/office/powerpoint/2010/main" val="2305896"/>
+        <p14:creationId xmlns:p14="http://schemas.microsoft.com/office/powerpoint/2010/main" val="2407261714"/>
       </p:ext>
     </p:extLst>
   </p:cSld>
@@ -4625,51 +4153,6 @@
           <a:bodyPr/>
           <a:lstStyle/>
           <a:p>
-            <a:pPr marL="171450" indent="-171450">
-              <a:buFont typeface="Wingdings" panose="05000000000000000000" pitchFamily="2" charset="2"/>
-              <a:buChar char="à"/>
-            </a:pPr>
-            <a:r>
-              <a:rPr lang="en-US" dirty="0">
-                <a:sym typeface="Wingdings" panose="05000000000000000000" pitchFamily="2" charset="2"/>
-              </a:rPr>
-              <a:t>Operational: Speed &amp; Frequency</a:t>
-            </a:r>
-          </a:p>
-          <a:p>
-            <a:pPr marL="171450" indent="-171450">
-              <a:buFontTx/>
-              <a:buChar char="-"/>
-            </a:pPr>
-            <a:r>
-              <a:rPr lang="en-US" dirty="0">
-                <a:sym typeface="Wingdings" panose="05000000000000000000" pitchFamily="2" charset="2"/>
-              </a:rPr>
-              <a:t>Histogram (charts) weight</a:t>
-            </a:r>
-          </a:p>
-          <a:p>
-            <a:pPr marL="171450" indent="-171450">
-              <a:buFontTx/>
-              <a:buChar char="-"/>
-            </a:pPr>
-            <a:r>
-              <a:rPr lang="en-US" dirty="0">
-                <a:sym typeface="Wingdings" panose="05000000000000000000" pitchFamily="2" charset="2"/>
-              </a:rPr>
-              <a:t>Maps (Networkx)</a:t>
-            </a:r>
-          </a:p>
-          <a:p>
-            <a:pPr marL="0" indent="0">
-              <a:buFontTx/>
-              <a:buNone/>
-            </a:pPr>
-            <a:endParaRPr lang="en-US" dirty="0">
-              <a:sym typeface="Wingdings" panose="05000000000000000000" pitchFamily="2" charset="2"/>
-            </a:endParaRPr>
-          </a:p>
-          <a:p>
             <a:pPr marL="0" marR="0" lvl="0" indent="0" algn="l" defTabSz="914400" rtl="0" eaLnBrk="1" fontAlgn="auto" latinLnBrk="0" hangingPunct="1">
               <a:lnSpc>
                 <a:spcPct val="100000"/>
@@ -4682,132 +4165,14 @@
               </a:spcAft>
               <a:buClrTx/>
               <a:buSzTx/>
-              <a:buFontTx/>
+              <a:buFont typeface="Wingdings" panose="05000000000000000000" pitchFamily="2" charset="2"/>
               <a:buNone/>
               <a:tabLst/>
               <a:defRPr/>
             </a:pPr>
             <a:r>
-              <a:rPr lang="en-US" dirty="0">
-                <a:sym typeface="Wingdings" panose="05000000000000000000" pitchFamily="2" charset="2"/>
-              </a:rPr>
-              <a:t> Traffic</a:t>
-            </a:r>
-          </a:p>
-          <a:p>
-            <a:pPr marL="171450" indent="-171450">
-              <a:buFontTx/>
-              <a:buChar char="-"/>
-            </a:pPr>
-            <a:r>
-              <a:rPr lang="en-US" dirty="0">
-                <a:sym typeface="Wingdings" panose="05000000000000000000" pitchFamily="2" charset="2"/>
-              </a:rPr>
-              <a:t>Enter/Exists in stations (Networkx)</a:t>
-            </a:r>
-          </a:p>
-          <a:p>
-            <a:pPr marL="171450" indent="-171450">
-              <a:buFontTx/>
-              <a:buChar char="-"/>
-            </a:pPr>
-            <a:r>
-              <a:rPr lang="en-US" dirty="0">
-                <a:sym typeface="Wingdings" panose="05000000000000000000" pitchFamily="2" charset="2"/>
-              </a:rPr>
-              <a:t>Load in segments (Networkx)</a:t>
-            </a:r>
-          </a:p>
-          <a:p>
-            <a:pPr marL="171450" indent="-171450">
-              <a:buFontTx/>
-              <a:buChar char="-"/>
-            </a:pPr>
-            <a:endParaRPr lang="en-US" dirty="0">
-              <a:sym typeface="Wingdings" panose="05000000000000000000" pitchFamily="2" charset="2"/>
-            </a:endParaRPr>
-          </a:p>
-          <a:p>
-            <a:pPr marL="0" marR="0" lvl="0" indent="0" algn="l" defTabSz="914400" rtl="0" eaLnBrk="1" fontAlgn="auto" latinLnBrk="0" hangingPunct="1">
-              <a:lnSpc>
-                <a:spcPct val="100000"/>
-              </a:lnSpc>
-              <a:spcBef>
-                <a:spcPts val="0"/>
-              </a:spcBef>
-              <a:spcAft>
-                <a:spcPts val="0"/>
-              </a:spcAft>
-              <a:buClrTx/>
-              <a:buSzTx/>
-              <a:buFontTx/>
-              <a:buNone/>
-              <a:tabLst/>
-              <a:defRPr/>
-            </a:pPr>
-            <a:r>
-              <a:rPr lang="en-US" dirty="0">
-                <a:sym typeface="Wingdings" panose="05000000000000000000" pitchFamily="2" charset="2"/>
-              </a:rPr>
-              <a:t> User importance:</a:t>
-            </a:r>
-          </a:p>
-          <a:p>
-            <a:pPr marL="171450" indent="-171450">
-              <a:buFontTx/>
-              <a:buChar char="-"/>
-            </a:pPr>
-            <a:r>
-              <a:rPr lang="en-US" dirty="0">
-                <a:sym typeface="Wingdings" panose="05000000000000000000" pitchFamily="2" charset="2"/>
-              </a:rPr>
-              <a:t>Disparity ranking comparison</a:t>
-            </a:r>
-          </a:p>
-          <a:p>
-            <a:pPr marL="171450" indent="-171450">
-              <a:buFontTx/>
-              <a:buChar char="-"/>
-            </a:pPr>
-            <a:endParaRPr lang="en-US" dirty="0">
-              <a:sym typeface="Wingdings" panose="05000000000000000000" pitchFamily="2" charset="2"/>
-            </a:endParaRPr>
-          </a:p>
-          <a:p>
-            <a:pPr marL="0" marR="0" lvl="0" indent="0" algn="l" defTabSz="914400" rtl="0" eaLnBrk="1" fontAlgn="auto" latinLnBrk="0" hangingPunct="1">
-              <a:lnSpc>
-                <a:spcPct val="100000"/>
-              </a:lnSpc>
-              <a:spcBef>
-                <a:spcPts val="0"/>
-              </a:spcBef>
-              <a:spcAft>
-                <a:spcPts val="0"/>
-              </a:spcAft>
-              <a:buClrTx/>
-              <a:buSzTx/>
-              <a:buFontTx/>
-              <a:buNone/>
-              <a:tabLst/>
-              <a:defRPr/>
-            </a:pPr>
-            <a:r>
-              <a:rPr lang="en-US" dirty="0">
-                <a:sym typeface="Wingdings" panose="05000000000000000000" pitchFamily="2" charset="2"/>
-              </a:rPr>
-              <a:t> Collective importance:</a:t>
-            </a:r>
-          </a:p>
-          <a:p>
-            <a:pPr marL="171450" indent="-171450">
-              <a:buFontTx/>
-              <a:buChar char="-"/>
-            </a:pPr>
-            <a:r>
-              <a:rPr lang="en-US" dirty="0">
-                <a:sym typeface="Wingdings" panose="05000000000000000000" pitchFamily="2" charset="2"/>
-              </a:rPr>
-              <a:t>Distress ranking comparison</a:t>
+              <a:rPr lang="en-US" dirty="0"/>
+              <a:t>TODO</a:t>
             </a:r>
           </a:p>
         </p:txBody>
@@ -4838,7 +4203,7 @@
     </p:spTree>
     <p:extLst>
       <p:ext uri="{BB962C8B-B14F-4D97-AF65-F5344CB8AC3E}">
-        <p14:creationId xmlns:p14="http://schemas.microsoft.com/office/powerpoint/2010/main" val="3774980255"/>
+        <p14:creationId xmlns:p14="http://schemas.microsoft.com/office/powerpoint/2010/main" val="1413593128"/>
       </p:ext>
     </p:extLst>
   </p:cSld>
@@ -4924,157 +4289,19 @@
               <a:rPr lang="en-US" dirty="0">
                 <a:sym typeface="Wingdings" panose="05000000000000000000" pitchFamily="2" charset="2"/>
               </a:rPr>
-              <a:t>Maps (Networkx)</a:t>
-            </a:r>
-          </a:p>
-          <a:p>
-            <a:pPr marL="0" indent="0">
-              <a:buFontTx/>
-              <a:buNone/>
-            </a:pPr>
-            <a:endParaRPr lang="en-US" dirty="0">
-              <a:sym typeface="Wingdings" panose="05000000000000000000" pitchFamily="2" charset="2"/>
-            </a:endParaRPr>
-          </a:p>
-          <a:p>
-            <a:pPr marL="0" marR="0" lvl="0" indent="0" algn="l" defTabSz="914400" rtl="0" eaLnBrk="1" fontAlgn="auto" latinLnBrk="0" hangingPunct="1">
-              <a:lnSpc>
-                <a:spcPct val="100000"/>
-              </a:lnSpc>
-              <a:spcBef>
-                <a:spcPts val="0"/>
-              </a:spcBef>
-              <a:spcAft>
-                <a:spcPts val="0"/>
-              </a:spcAft>
-              <a:buClrTx/>
-              <a:buSzTx/>
-              <a:buFontTx/>
-              <a:buNone/>
-              <a:tabLst/>
-              <a:defRPr/>
-            </a:pPr>
+              <a:t>Maps (</a:t>
+            </a:r>
+            <a:r>
+              <a:rPr lang="en-US" dirty="0" err="1">
+                <a:sym typeface="Wingdings" panose="05000000000000000000" pitchFamily="2" charset="2"/>
+              </a:rPr>
+              <a:t>Networkx</a:t>
+            </a:r>
             <a:r>
               <a:rPr lang="en-US" dirty="0">
                 <a:sym typeface="Wingdings" panose="05000000000000000000" pitchFamily="2" charset="2"/>
               </a:rPr>
-              <a:t> Traffic</a:t>
-            </a:r>
-          </a:p>
-          <a:p>
-            <a:pPr marL="171450" indent="-171450">
-              <a:buFontTx/>
-              <a:buChar char="-"/>
-            </a:pPr>
-            <a:r>
-              <a:rPr lang="en-US" dirty="0">
-                <a:sym typeface="Wingdings" panose="05000000000000000000" pitchFamily="2" charset="2"/>
-              </a:rPr>
-              <a:t>Enter/Exists in stations (Networkx)</a:t>
-            </a:r>
-          </a:p>
-          <a:p>
-            <a:pPr marL="171450" indent="-171450">
-              <a:buFontTx/>
-              <a:buChar char="-"/>
-            </a:pPr>
-            <a:r>
-              <a:rPr lang="en-US" dirty="0">
-                <a:sym typeface="Wingdings" panose="05000000000000000000" pitchFamily="2" charset="2"/>
-              </a:rPr>
-              <a:t>Load in segments (Networkx)</a:t>
-            </a:r>
-          </a:p>
-          <a:p>
-            <a:pPr marL="171450" indent="-171450">
-              <a:buFontTx/>
-              <a:buChar char="-"/>
-            </a:pPr>
-            <a:endParaRPr lang="en-US" dirty="0">
-              <a:sym typeface="Wingdings" panose="05000000000000000000" pitchFamily="2" charset="2"/>
-            </a:endParaRPr>
-          </a:p>
-          <a:p>
-            <a:pPr marL="0" marR="0" lvl="0" indent="0" algn="l" defTabSz="914400" rtl="0" eaLnBrk="1" fontAlgn="auto" latinLnBrk="0" hangingPunct="1">
-              <a:lnSpc>
-                <a:spcPct val="100000"/>
-              </a:lnSpc>
-              <a:spcBef>
-                <a:spcPts val="0"/>
-              </a:spcBef>
-              <a:spcAft>
-                <a:spcPts val="0"/>
-              </a:spcAft>
-              <a:buClrTx/>
-              <a:buSzTx/>
-              <a:buFontTx/>
-              <a:buNone/>
-              <a:tabLst/>
-              <a:defRPr/>
-            </a:pPr>
-            <a:r>
-              <a:rPr lang="en-US" dirty="0">
-                <a:sym typeface="Wingdings" panose="05000000000000000000" pitchFamily="2" charset="2"/>
-              </a:rPr>
-              <a:t> User importance:</a:t>
-            </a:r>
-          </a:p>
-          <a:p>
-            <a:pPr marL="171450" indent="-171450">
-              <a:buFontTx/>
-              <a:buChar char="-"/>
-            </a:pPr>
-            <a:r>
-              <a:rPr lang="en-US" dirty="0">
-                <a:sym typeface="Wingdings" panose="05000000000000000000" pitchFamily="2" charset="2"/>
-              </a:rPr>
-              <a:t>Disparity ranking comparison</a:t>
-            </a:r>
-          </a:p>
-          <a:p>
-            <a:pPr marL="171450" indent="-171450">
-              <a:buFontTx/>
-              <a:buChar char="-"/>
-            </a:pPr>
-            <a:endParaRPr lang="en-US" dirty="0">
-              <a:sym typeface="Wingdings" panose="05000000000000000000" pitchFamily="2" charset="2"/>
-            </a:endParaRPr>
-          </a:p>
-          <a:p>
-            <a:pPr marL="0" marR="0" lvl="0" indent="0" algn="l" defTabSz="914400" rtl="0" eaLnBrk="1" fontAlgn="auto" latinLnBrk="0" hangingPunct="1">
-              <a:lnSpc>
-                <a:spcPct val="100000"/>
-              </a:lnSpc>
-              <a:spcBef>
-                <a:spcPts val="0"/>
-              </a:spcBef>
-              <a:spcAft>
-                <a:spcPts val="0"/>
-              </a:spcAft>
-              <a:buClrTx/>
-              <a:buSzTx/>
-              <a:buFontTx/>
-              <a:buNone/>
-              <a:tabLst/>
-              <a:defRPr/>
-            </a:pPr>
-            <a:r>
-              <a:rPr lang="en-US" dirty="0">
-                <a:sym typeface="Wingdings" panose="05000000000000000000" pitchFamily="2" charset="2"/>
-              </a:rPr>
-              <a:t> Collective importance:</a:t>
-            </a:r>
-          </a:p>
-          <a:p>
-            <a:pPr marL="171450" indent="-171450">
-              <a:buFontTx/>
-              <a:buChar char="-"/>
-            </a:pPr>
-            <a:r>
-              <a:rPr lang="en-US" dirty="0">
-                <a:sym typeface="Wingdings" panose="05000000000000000000" pitchFamily="2" charset="2"/>
-              </a:rPr>
-              <a:t>Distress ranking comparison</a:t>
+              <a:t>)</a:t>
             </a:r>
           </a:p>
         </p:txBody>
@@ -5105,7 +4332,7 @@
     </p:spTree>
     <p:extLst>
       <p:ext uri="{BB962C8B-B14F-4D97-AF65-F5344CB8AC3E}">
-        <p14:creationId xmlns:p14="http://schemas.microsoft.com/office/powerpoint/2010/main" val="203907506"/>
+        <p14:creationId xmlns:p14="http://schemas.microsoft.com/office/powerpoint/2010/main" val="2305896"/>
       </p:ext>
     </p:extLst>
   </p:cSld>
@@ -5159,10 +4386,49 @@
           <a:bodyPr/>
           <a:lstStyle/>
           <a:p>
+            <a:pPr marL="171450" indent="-171450">
+              <a:buFont typeface="Wingdings" panose="05000000000000000000" pitchFamily="2" charset="2"/>
+              <a:buChar char="à"/>
+            </a:pPr>
+            <a:r>
+              <a:rPr lang="en-US" dirty="0">
+                <a:sym typeface="Wingdings" panose="05000000000000000000" pitchFamily="2" charset="2"/>
+              </a:rPr>
+              <a:t>Operational: Speed &amp; Frequency</a:t>
+            </a:r>
+          </a:p>
+          <a:p>
+            <a:pPr marL="171450" indent="-171450">
+              <a:buFontTx/>
+              <a:buChar char="-"/>
+            </a:pPr>
+            <a:r>
+              <a:rPr lang="en-US" dirty="0">
+                <a:sym typeface="Wingdings" panose="05000000000000000000" pitchFamily="2" charset="2"/>
+              </a:rPr>
+              <a:t>Histogram (charts) weight</a:t>
+            </a:r>
+          </a:p>
+          <a:p>
+            <a:pPr marL="171450" indent="-171450">
+              <a:buFontTx/>
+              <a:buChar char="-"/>
+            </a:pPr>
+            <a:r>
+              <a:rPr lang="en-US" dirty="0">
+                <a:sym typeface="Wingdings" panose="05000000000000000000" pitchFamily="2" charset="2"/>
+              </a:rPr>
+              <a:t>Maps (Networkx)</a:t>
+            </a:r>
+          </a:p>
+          <a:p>
             <a:pPr marL="0" indent="0">
-              <a:buNone/>
-            </a:pPr>
-            <a:endParaRPr lang="en-US" dirty="0"/>
+              <a:buFontTx/>
+              <a:buNone/>
+            </a:pPr>
+            <a:endParaRPr lang="en-US" dirty="0">
+              <a:sym typeface="Wingdings" panose="05000000000000000000" pitchFamily="2" charset="2"/>
+            </a:endParaRPr>
           </a:p>
           <a:p>
             <a:pPr marL="0" marR="0" lvl="0" indent="0" algn="l" defTabSz="914400" rtl="0" eaLnBrk="1" fontAlgn="auto" latinLnBrk="0" hangingPunct="1">
@@ -5183,108 +4449,47 @@
               <a:defRPr/>
             </a:pPr>
             <a:r>
-              <a:rPr lang="en-US" dirty="0"/>
-              <a:t>1) </a:t>
-            </a:r>
-            <a:r>
               <a:rPr lang="en-US" dirty="0">
                 <a:sym typeface="Wingdings" panose="05000000000000000000" pitchFamily="2" charset="2"/>
               </a:rPr>
-              <a:t>Interconnect all possible modes of transport including bikes and walks.</a:t>
-            </a:r>
-            <a:endParaRPr lang="en-US" dirty="0"/>
-          </a:p>
-          <a:p>
-            <a:pPr marL="0" indent="0">
-              <a:buNone/>
-            </a:pPr>
-            <a:endParaRPr lang="en-US" dirty="0"/>
-          </a:p>
-          <a:p>
-            <a:pPr marL="0" indent="0">
-              <a:buNone/>
-            </a:pPr>
-            <a:endParaRPr lang="en-US" dirty="0"/>
-          </a:p>
-          <a:p>
-            <a:pPr marL="0" indent="0">
-              <a:buNone/>
-            </a:pPr>
-            <a:r>
-              <a:rPr lang="en-US" dirty="0"/>
-              <a:t>2) Use ML models for predictions of:</a:t>
-            </a:r>
-          </a:p>
-          <a:p>
-            <a:pPr marL="228600" indent="-228600">
-              <a:buAutoNum type="arabicParenR"/>
-            </a:pPr>
-            <a:endParaRPr lang="en-US" dirty="0"/>
+              <a:t> Traffic</a:t>
+            </a:r>
           </a:p>
           <a:p>
             <a:pPr marL="171450" indent="-171450">
-              <a:buFont typeface="Wingdings" panose="05000000000000000000" pitchFamily="2" charset="2"/>
-              <a:buChar char="à"/>
-            </a:pPr>
-            <a:r>
-              <a:rPr lang="en-US" dirty="0"/>
-              <a:t>TRAFFIC: Passenger flow: </a:t>
-            </a:r>
-            <a:r>
-              <a:rPr lang="en-US" b="0" i="0" dirty="0">
-                <a:solidFill>
-                  <a:srgbClr val="24292F"/>
-                </a:solidFill>
-                <a:effectLst/>
-                <a:latin typeface="-apple-system"/>
+              <a:buFontTx/>
+              <a:buChar char="-"/>
+            </a:pPr>
+            <a:r>
+              <a:rPr lang="en-US" dirty="0">
+                <a:sym typeface="Wingdings" panose="05000000000000000000" pitchFamily="2" charset="2"/>
               </a:rPr>
-              <a:t>From network lens (keeping passenger anonymity) , use more data (daily events) to more accurately understand why traffic is generated in each segments;</a:t>
+              <a:t>Enter/Exists in stations (Networkx)</a:t>
             </a:r>
           </a:p>
           <a:p>
             <a:pPr marL="171450" indent="-171450">
-              <a:buFont typeface="Wingdings" panose="05000000000000000000" pitchFamily="2" charset="2"/>
-              <a:buChar char="à"/>
-            </a:pPr>
-            <a:endParaRPr lang="en-US" b="0" i="0" dirty="0">
-              <a:solidFill>
-                <a:srgbClr val="24292F"/>
-              </a:solidFill>
-              <a:effectLst/>
-              <a:latin typeface="-apple-system"/>
+              <a:buFontTx/>
+              <a:buChar char="-"/>
+            </a:pPr>
+            <a:r>
+              <a:rPr lang="en-US" dirty="0">
+                <a:sym typeface="Wingdings" panose="05000000000000000000" pitchFamily="2" charset="2"/>
+              </a:rPr>
+              <a:t>Load in segments (Networkx)</a:t>
+            </a:r>
+          </a:p>
+          <a:p>
+            <a:pPr marL="171450" indent="-171450">
+              <a:buFontTx/>
+              <a:buChar char="-"/>
+            </a:pPr>
+            <a:endParaRPr lang="en-US" dirty="0">
+              <a:sym typeface="Wingdings" panose="05000000000000000000" pitchFamily="2" charset="2"/>
             </a:endParaRPr>
           </a:p>
           <a:p>
-            <a:pPr marL="171450" indent="-171450">
-              <a:buFont typeface="Wingdings" panose="05000000000000000000" pitchFamily="2" charset="2"/>
-              <a:buChar char="à"/>
-            </a:pPr>
-            <a:r>
-              <a:rPr lang="en-US" b="0" i="0" dirty="0">
-                <a:solidFill>
-                  <a:srgbClr val="24292F"/>
-                </a:solidFill>
-                <a:effectLst/>
-                <a:latin typeface="-apple-system"/>
-              </a:rPr>
-              <a:t>OPEX: Predict disruptions and its impact considering forecasted passenger traffic to optimize maintenance planning.</a:t>
-            </a:r>
-          </a:p>
-          <a:p>
-            <a:pPr marL="171450" indent="-171450">
-              <a:buFont typeface="Wingdings" panose="05000000000000000000" pitchFamily="2" charset="2"/>
-              <a:buChar char="à"/>
-            </a:pPr>
-            <a:endParaRPr lang="en-US" b="0" i="0" dirty="0">
-              <a:solidFill>
-                <a:srgbClr val="24292F"/>
-              </a:solidFill>
-              <a:effectLst/>
-              <a:latin typeface="-apple-system"/>
-            </a:endParaRPr>
-          </a:p>
-          <a:p>
-            <a:pPr marL="171450" marR="0" lvl="0" indent="-171450" algn="l" defTabSz="914400" rtl="0" eaLnBrk="1" fontAlgn="auto" latinLnBrk="0" hangingPunct="1">
+            <a:pPr marL="0" marR="0" lvl="0" indent="0" algn="l" defTabSz="914400" rtl="0" eaLnBrk="1" fontAlgn="auto" latinLnBrk="0" hangingPunct="1">
               <a:lnSpc>
                 <a:spcPct val="100000"/>
               </a:lnSpc>
@@ -5296,102 +4501,75 @@
               </a:spcAft>
               <a:buClrTx/>
               <a:buSzTx/>
-              <a:buFont typeface="Wingdings" panose="05000000000000000000" pitchFamily="2" charset="2"/>
-              <a:buChar char="à"/>
+              <a:buFontTx/>
+              <a:buNone/>
               <a:tabLst/>
               <a:defRPr/>
             </a:pPr>
             <a:r>
-              <a:rPr lang="en-US" b="0" i="0" dirty="0">
-                <a:solidFill>
-                  <a:srgbClr val="24292F"/>
-                </a:solidFill>
-                <a:effectLst/>
-                <a:latin typeface="-apple-system"/>
+              <a:rPr lang="en-US" dirty="0">
+                <a:sym typeface="Wingdings" panose="05000000000000000000" pitchFamily="2" charset="2"/>
               </a:rPr>
-              <a:t>Create a timetable dynamically tailored that optimize infra-structure towards the commuters needs.</a:t>
+              <a:t> User importance:</a:t>
             </a:r>
           </a:p>
           <a:p>
             <a:pPr marL="171450" indent="-171450">
-              <a:buFont typeface="Wingdings" panose="05000000000000000000" pitchFamily="2" charset="2"/>
-              <a:buChar char="à"/>
-            </a:pPr>
-            <a:endParaRPr lang="en-US" b="0" i="0" dirty="0">
-              <a:solidFill>
-                <a:srgbClr val="24292F"/>
-              </a:solidFill>
-              <a:effectLst/>
-              <a:latin typeface="-apple-system"/>
+              <a:buFontTx/>
+              <a:buChar char="-"/>
+            </a:pPr>
+            <a:r>
+              <a:rPr lang="en-US" dirty="0">
+                <a:sym typeface="Wingdings" panose="05000000000000000000" pitchFamily="2" charset="2"/>
+              </a:rPr>
+              <a:t>Disparity ranking comparison</a:t>
+            </a:r>
+          </a:p>
+          <a:p>
+            <a:pPr marL="171450" indent="-171450">
+              <a:buFontTx/>
+              <a:buChar char="-"/>
+            </a:pPr>
+            <a:endParaRPr lang="en-US" dirty="0">
+              <a:sym typeface="Wingdings" panose="05000000000000000000" pitchFamily="2" charset="2"/>
             </a:endParaRPr>
           </a:p>
           <a:p>
+            <a:pPr marL="0" marR="0" lvl="0" indent="0" algn="l" defTabSz="914400" rtl="0" eaLnBrk="1" fontAlgn="auto" latinLnBrk="0" hangingPunct="1">
+              <a:lnSpc>
+                <a:spcPct val="100000"/>
+              </a:lnSpc>
+              <a:spcBef>
+                <a:spcPts val="0"/>
+              </a:spcBef>
+              <a:spcAft>
+                <a:spcPts val="0"/>
+              </a:spcAft>
+              <a:buClrTx/>
+              <a:buSzTx/>
+              <a:buFontTx/>
+              <a:buNone/>
+              <a:tabLst/>
+              <a:defRPr/>
+            </a:pPr>
+            <a:r>
+              <a:rPr lang="en-US" dirty="0">
+                <a:sym typeface="Wingdings" panose="05000000000000000000" pitchFamily="2" charset="2"/>
+              </a:rPr>
+              <a:t> Collective importance:</a:t>
+            </a:r>
+          </a:p>
+          <a:p>
             <a:pPr marL="171450" indent="-171450">
-              <a:buFont typeface="Wingdings" panose="05000000000000000000" pitchFamily="2" charset="2"/>
-              <a:buChar char="à"/>
-            </a:pPr>
-            <a:r>
-              <a:rPr lang="en-US" b="0" i="0" dirty="0">
-                <a:solidFill>
-                  <a:srgbClr val="24292F"/>
-                </a:solidFill>
-                <a:effectLst/>
-                <a:latin typeface="-apple-system"/>
+              <a:buFontTx/>
+              <a:buChar char="-"/>
+            </a:pPr>
+            <a:r>
+              <a:rPr lang="en-US" dirty="0">
+                <a:sym typeface="Wingdings" panose="05000000000000000000" pitchFamily="2" charset="2"/>
               </a:rPr>
-              <a:t>CAPEX: More maintenance, less disruptions, less need for redundancy and more investment express lanes (study of origin and destination). </a:t>
-            </a:r>
-          </a:p>
-          <a:p>
-            <a:pPr marL="171450" indent="-171450">
-              <a:buFont typeface="Wingdings" panose="05000000000000000000" pitchFamily="2" charset="2"/>
-              <a:buChar char="à"/>
-            </a:pPr>
-            <a:endParaRPr lang="en-US" b="0" i="0" dirty="0">
-              <a:solidFill>
-                <a:srgbClr val="24292F"/>
-              </a:solidFill>
-              <a:effectLst/>
-              <a:latin typeface="-apple-system"/>
-            </a:endParaRPr>
-          </a:p>
-          <a:p>
-            <a:pPr marL="171450" indent="-171450">
-              <a:buFont typeface="Wingdings" panose="05000000000000000000" pitchFamily="2" charset="2"/>
-              <a:buChar char="à"/>
-            </a:pPr>
-            <a:endParaRPr lang="en-US" b="0" i="0" dirty="0">
-              <a:solidFill>
-                <a:srgbClr val="24292F"/>
-              </a:solidFill>
-              <a:effectLst/>
-              <a:latin typeface="-apple-system"/>
-            </a:endParaRPr>
-          </a:p>
-          <a:p>
-            <a:pPr marL="0" indent="0">
-              <a:buFont typeface="Wingdings" panose="05000000000000000000" pitchFamily="2" charset="2"/>
-              <a:buNone/>
-            </a:pPr>
-            <a:endParaRPr lang="en-US" b="0" i="0" dirty="0">
-              <a:solidFill>
-                <a:srgbClr val="24292F"/>
-              </a:solidFill>
-              <a:effectLst/>
-              <a:latin typeface="-apple-system"/>
-            </a:endParaRPr>
-          </a:p>
-          <a:p>
-            <a:pPr marL="171450" indent="-171450">
-              <a:buFont typeface="Wingdings" panose="05000000000000000000" pitchFamily="2" charset="2"/>
-              <a:buChar char="à"/>
-            </a:pPr>
-            <a:endParaRPr lang="en-US" b="0" i="0" dirty="0">
-              <a:solidFill>
-                <a:srgbClr val="24292F"/>
-              </a:solidFill>
-              <a:effectLst/>
-              <a:latin typeface="-apple-system"/>
-            </a:endParaRPr>
+              <a:t>Distress ranking comparison</a:t>
+            </a:r>
           </a:p>
         </p:txBody>
       </p:sp>
@@ -5421,7 +4599,7 @@
     </p:spTree>
     <p:extLst>
       <p:ext uri="{BB962C8B-B14F-4D97-AF65-F5344CB8AC3E}">
-        <p14:creationId xmlns:p14="http://schemas.microsoft.com/office/powerpoint/2010/main" val="2618829657"/>
+        <p14:creationId xmlns:p14="http://schemas.microsoft.com/office/powerpoint/2010/main" val="3774980255"/>
       </p:ext>
     </p:extLst>
   </p:cSld>
@@ -5475,10 +4653,49 @@
           <a:bodyPr/>
           <a:lstStyle/>
           <a:p>
-            <a:r>
-              <a:rPr lang="en-US" dirty="0"/>
-              <a:t>What is a efficient network = minimizes travel time and costs (vehicles, energy, emissions, price) assuring passenger “comfort” and “prompt mobility”.</a:t>
-            </a:r>
+            <a:pPr marL="171450" indent="-171450">
+              <a:buFont typeface="Wingdings" panose="05000000000000000000" pitchFamily="2" charset="2"/>
+              <a:buChar char="à"/>
+            </a:pPr>
+            <a:r>
+              <a:rPr lang="en-US" dirty="0">
+                <a:sym typeface="Wingdings" panose="05000000000000000000" pitchFamily="2" charset="2"/>
+              </a:rPr>
+              <a:t>Operational: Speed &amp; Frequency</a:t>
+            </a:r>
+          </a:p>
+          <a:p>
+            <a:pPr marL="171450" indent="-171450">
+              <a:buFontTx/>
+              <a:buChar char="-"/>
+            </a:pPr>
+            <a:r>
+              <a:rPr lang="en-US" dirty="0">
+                <a:sym typeface="Wingdings" panose="05000000000000000000" pitchFamily="2" charset="2"/>
+              </a:rPr>
+              <a:t>Histogram (charts) weight</a:t>
+            </a:r>
+          </a:p>
+          <a:p>
+            <a:pPr marL="171450" indent="-171450">
+              <a:buFontTx/>
+              <a:buChar char="-"/>
+            </a:pPr>
+            <a:r>
+              <a:rPr lang="en-US" dirty="0">
+                <a:sym typeface="Wingdings" panose="05000000000000000000" pitchFamily="2" charset="2"/>
+              </a:rPr>
+              <a:t>Maps (Networkx)</a:t>
+            </a:r>
+          </a:p>
+          <a:p>
+            <a:pPr marL="0" indent="0">
+              <a:buFontTx/>
+              <a:buNone/>
+            </a:pPr>
+            <a:endParaRPr lang="en-US" dirty="0">
+              <a:sym typeface="Wingdings" panose="05000000000000000000" pitchFamily="2" charset="2"/>
+            </a:endParaRPr>
           </a:p>
           <a:p>
             <a:pPr marL="0" marR="0" lvl="0" indent="0" algn="l" defTabSz="914400" rtl="0" eaLnBrk="1" fontAlgn="auto" latinLnBrk="0" hangingPunct="1">
@@ -5498,67 +4715,128 @@
               <a:tabLst/>
               <a:defRPr/>
             </a:pPr>
-            <a:endParaRPr lang="en-US" dirty="0"/>
-          </a:p>
-          <a:p>
-            <a:r>
-              <a:rPr lang="en-US" dirty="0"/>
-              <a:t>It is important to mention that a more efficient network inherently requires more maintenance.</a:t>
-            </a:r>
-          </a:p>
-          <a:p>
-            <a:endParaRPr lang="en-US" dirty="0"/>
-          </a:p>
-          <a:p>
-            <a:r>
-              <a:rPr lang="en-US" dirty="0"/>
-              <a:t>It is not necessary related to its size. But is related to how it was projected to assist the commuters.</a:t>
-            </a:r>
-          </a:p>
-          <a:p>
-            <a:endParaRPr lang="en-US" dirty="0"/>
-          </a:p>
-          <a:p>
-            <a:r>
-              <a:rPr lang="en-US" dirty="0"/>
-              <a:t>In a network without disruption, for instance, it would be a waste invest in redundancies. More money could be destinated to reduce travels time. </a:t>
-            </a:r>
-          </a:p>
-          <a:p>
-            <a:endParaRPr lang="en-US" dirty="0"/>
-          </a:p>
-          <a:p>
-            <a:r>
-              <a:rPr lang="en-US" dirty="0"/>
-              <a:t>In a real world, however, no disruptions comes with a high maintenance price. </a:t>
-            </a:r>
-          </a:p>
-          <a:p>
-            <a:endParaRPr lang="en-US" dirty="0"/>
-          </a:p>
-          <a:p>
-            <a:r>
-              <a:rPr lang="en-US" dirty="0"/>
-              <a:t>The balance between effectiveness and robustness is a major question when comes down to a such important factor of the society evolvement.</a:t>
-            </a:r>
-          </a:p>
-          <a:p>
-            <a:endParaRPr lang="en-US" dirty="0"/>
-          </a:p>
-          <a:p>
-            <a:endParaRPr lang="en-US" dirty="0"/>
-          </a:p>
-          <a:p>
-            <a:endParaRPr lang="en-US" dirty="0"/>
-          </a:p>
-          <a:p>
-            <a:endParaRPr lang="en-US" dirty="0"/>
-          </a:p>
-          <a:p>
-            <a:endParaRPr lang="en-US" dirty="0"/>
-          </a:p>
-          <a:p>
-            <a:endParaRPr lang="en-US" dirty="0"/>
+            <a:r>
+              <a:rPr lang="en-US" dirty="0">
+                <a:sym typeface="Wingdings" panose="05000000000000000000" pitchFamily="2" charset="2"/>
+              </a:rPr>
+              <a:t> Traffic</a:t>
+            </a:r>
+          </a:p>
+          <a:p>
+            <a:pPr marL="171450" indent="-171450">
+              <a:buFontTx/>
+              <a:buChar char="-"/>
+            </a:pPr>
+            <a:r>
+              <a:rPr lang="en-US" dirty="0">
+                <a:sym typeface="Wingdings" panose="05000000000000000000" pitchFamily="2" charset="2"/>
+              </a:rPr>
+              <a:t>Enter/Exists in stations (Networkx)</a:t>
+            </a:r>
+          </a:p>
+          <a:p>
+            <a:pPr marL="171450" indent="-171450">
+              <a:buFontTx/>
+              <a:buChar char="-"/>
+            </a:pPr>
+            <a:r>
+              <a:rPr lang="en-US" dirty="0">
+                <a:sym typeface="Wingdings" panose="05000000000000000000" pitchFamily="2" charset="2"/>
+              </a:rPr>
+              <a:t>Load in segments (Networkx)</a:t>
+            </a:r>
+          </a:p>
+          <a:p>
+            <a:pPr marL="171450" indent="-171450">
+              <a:buFontTx/>
+              <a:buChar char="-"/>
+            </a:pPr>
+            <a:endParaRPr lang="en-US" dirty="0">
+              <a:sym typeface="Wingdings" panose="05000000000000000000" pitchFamily="2" charset="2"/>
+            </a:endParaRPr>
+          </a:p>
+          <a:p>
+            <a:pPr marL="0" marR="0" lvl="0" indent="0" algn="l" defTabSz="914400" rtl="0" eaLnBrk="1" fontAlgn="auto" latinLnBrk="0" hangingPunct="1">
+              <a:lnSpc>
+                <a:spcPct val="100000"/>
+              </a:lnSpc>
+              <a:spcBef>
+                <a:spcPts val="0"/>
+              </a:spcBef>
+              <a:spcAft>
+                <a:spcPts val="0"/>
+              </a:spcAft>
+              <a:buClrTx/>
+              <a:buSzTx/>
+              <a:buFontTx/>
+              <a:buNone/>
+              <a:tabLst/>
+              <a:defRPr/>
+            </a:pPr>
+            <a:r>
+              <a:rPr lang="en-US" dirty="0">
+                <a:sym typeface="Wingdings" panose="05000000000000000000" pitchFamily="2" charset="2"/>
+              </a:rPr>
+              <a:t> User importance:</a:t>
+            </a:r>
+          </a:p>
+          <a:p>
+            <a:pPr marL="171450" indent="-171450">
+              <a:buFontTx/>
+              <a:buChar char="-"/>
+            </a:pPr>
+            <a:r>
+              <a:rPr lang="en-US" dirty="0">
+                <a:sym typeface="Wingdings" panose="05000000000000000000" pitchFamily="2" charset="2"/>
+              </a:rPr>
+              <a:t>Disparity ranking comparison</a:t>
+            </a:r>
+          </a:p>
+          <a:p>
+            <a:pPr marL="171450" indent="-171450">
+              <a:buFontTx/>
+              <a:buChar char="-"/>
+            </a:pPr>
+            <a:endParaRPr lang="en-US" dirty="0">
+              <a:sym typeface="Wingdings" panose="05000000000000000000" pitchFamily="2" charset="2"/>
+            </a:endParaRPr>
+          </a:p>
+          <a:p>
+            <a:pPr marL="0" marR="0" lvl="0" indent="0" algn="l" defTabSz="914400" rtl="0" eaLnBrk="1" fontAlgn="auto" latinLnBrk="0" hangingPunct="1">
+              <a:lnSpc>
+                <a:spcPct val="100000"/>
+              </a:lnSpc>
+              <a:spcBef>
+                <a:spcPts val="0"/>
+              </a:spcBef>
+              <a:spcAft>
+                <a:spcPts val="0"/>
+              </a:spcAft>
+              <a:buClrTx/>
+              <a:buSzTx/>
+              <a:buFontTx/>
+              <a:buNone/>
+              <a:tabLst/>
+              <a:defRPr/>
+            </a:pPr>
+            <a:r>
+              <a:rPr lang="en-US" dirty="0">
+                <a:sym typeface="Wingdings" panose="05000000000000000000" pitchFamily="2" charset="2"/>
+              </a:rPr>
+              <a:t> Collective importance:</a:t>
+            </a:r>
+          </a:p>
+          <a:p>
+            <a:pPr marL="171450" indent="-171450">
+              <a:buFontTx/>
+              <a:buChar char="-"/>
+            </a:pPr>
+            <a:r>
+              <a:rPr lang="en-US" dirty="0">
+                <a:sym typeface="Wingdings" panose="05000000000000000000" pitchFamily="2" charset="2"/>
+              </a:rPr>
+              <a:t>Distress ranking comparison</a:t>
+            </a:r>
           </a:p>
         </p:txBody>
       </p:sp>
@@ -5588,7 +4866,323 @@
     </p:spTree>
     <p:extLst>
       <p:ext uri="{BB962C8B-B14F-4D97-AF65-F5344CB8AC3E}">
-        <p14:creationId xmlns:p14="http://schemas.microsoft.com/office/powerpoint/2010/main" val="3771545508"/>
+        <p14:creationId xmlns:p14="http://schemas.microsoft.com/office/powerpoint/2010/main" val="203907506"/>
+      </p:ext>
+    </p:extLst>
+  </p:cSld>
+  <p:clrMapOvr>
+    <a:masterClrMapping/>
+  </p:clrMapOvr>
+</p:notes>
+</file>
+
+<file path=ppt/notesSlides/notesSlide29.xml><?xml version="1.0" encoding="utf-8"?>
+<p:notes xmlns:a="http://schemas.openxmlformats.org/drawingml/2006/main" xmlns:r="http://schemas.openxmlformats.org/officeDocument/2006/relationships" xmlns:p="http://schemas.openxmlformats.org/presentationml/2006/main">
+  <p:cSld>
+    <p:spTree>
+      <p:nvGrpSpPr>
+        <p:cNvPr id="1" name=""/>
+        <p:cNvGrpSpPr/>
+        <p:nvPr/>
+      </p:nvGrpSpPr>
+      <p:grpSpPr>
+        <a:xfrm>
+          <a:off x="0" y="0"/>
+          <a:ext cx="0" cy="0"/>
+          <a:chOff x="0" y="0"/>
+          <a:chExt cx="0" cy="0"/>
+        </a:xfrm>
+      </p:grpSpPr>
+      <p:sp>
+        <p:nvSpPr>
+          <p:cNvPr id="2" name="Slide Image Placeholder 1"/>
+          <p:cNvSpPr>
+            <a:spLocks noGrp="1" noRot="1" noChangeAspect="1"/>
+          </p:cNvSpPr>
+          <p:nvPr>
+            <p:ph type="sldImg"/>
+          </p:nvPr>
+        </p:nvSpPr>
+        <p:spPr/>
+      </p:sp>
+      <p:sp>
+        <p:nvSpPr>
+          <p:cNvPr id="3" name="Notes Placeholder 2"/>
+          <p:cNvSpPr>
+            <a:spLocks noGrp="1"/>
+          </p:cNvSpPr>
+          <p:nvPr>
+            <p:ph type="body" idx="1"/>
+          </p:nvPr>
+        </p:nvSpPr>
+        <p:spPr/>
+        <p:txBody>
+          <a:bodyPr/>
+          <a:lstStyle/>
+          <a:p>
+            <a:pPr marL="0" indent="0">
+              <a:buNone/>
+            </a:pPr>
+            <a:endParaRPr lang="en-US" dirty="0"/>
+          </a:p>
+          <a:p>
+            <a:pPr marL="0" marR="0" lvl="0" indent="0" algn="l" defTabSz="914400" rtl="0" eaLnBrk="1" fontAlgn="auto" latinLnBrk="0" hangingPunct="1">
+              <a:lnSpc>
+                <a:spcPct val="100000"/>
+              </a:lnSpc>
+              <a:spcBef>
+                <a:spcPts val="0"/>
+              </a:spcBef>
+              <a:spcAft>
+                <a:spcPts val="0"/>
+              </a:spcAft>
+              <a:buClrTx/>
+              <a:buSzTx/>
+              <a:buFontTx/>
+              <a:buNone/>
+              <a:tabLst/>
+              <a:defRPr/>
+            </a:pPr>
+            <a:r>
+              <a:rPr lang="en-US" dirty="0"/>
+              <a:t>1) </a:t>
+            </a:r>
+            <a:r>
+              <a:rPr lang="en-US" dirty="0">
+                <a:sym typeface="Wingdings" panose="05000000000000000000" pitchFamily="2" charset="2"/>
+              </a:rPr>
+              <a:t>Interconnect all possible modes of transport including bikes and walks.</a:t>
+            </a:r>
+            <a:endParaRPr lang="en-US" dirty="0"/>
+          </a:p>
+          <a:p>
+            <a:pPr marL="0" indent="0">
+              <a:buNone/>
+            </a:pPr>
+            <a:endParaRPr lang="en-US" dirty="0"/>
+          </a:p>
+          <a:p>
+            <a:pPr marL="0" indent="0">
+              <a:buNone/>
+            </a:pPr>
+            <a:endParaRPr lang="en-US" dirty="0"/>
+          </a:p>
+          <a:p>
+            <a:pPr marL="0" indent="0">
+              <a:buNone/>
+            </a:pPr>
+            <a:r>
+              <a:rPr lang="en-US" dirty="0"/>
+              <a:t>2) Use ML models for predictions of:</a:t>
+            </a:r>
+          </a:p>
+          <a:p>
+            <a:pPr marL="228600" indent="-228600">
+              <a:buAutoNum type="arabicParenR"/>
+            </a:pPr>
+            <a:endParaRPr lang="en-US" dirty="0"/>
+          </a:p>
+          <a:p>
+            <a:pPr marL="171450" indent="-171450">
+              <a:buFont typeface="Wingdings" panose="05000000000000000000" pitchFamily="2" charset="2"/>
+              <a:buChar char="à"/>
+            </a:pPr>
+            <a:r>
+              <a:rPr lang="en-US" dirty="0"/>
+              <a:t>TRAFFIC: Passenger flow: </a:t>
+            </a:r>
+            <a:r>
+              <a:rPr lang="en-US" b="0" i="0" dirty="0">
+                <a:solidFill>
+                  <a:srgbClr val="24292F"/>
+                </a:solidFill>
+                <a:effectLst/>
+                <a:latin typeface="-apple-system"/>
+              </a:rPr>
+              <a:t>From network lens (keeping passenger anonymity) , use more data (daily events) to more accurately understand why traffic is generated in each segments;</a:t>
+            </a:r>
+          </a:p>
+          <a:p>
+            <a:pPr marL="171450" indent="-171450">
+              <a:buFont typeface="Wingdings" panose="05000000000000000000" pitchFamily="2" charset="2"/>
+              <a:buChar char="à"/>
+            </a:pPr>
+            <a:endParaRPr lang="en-US" b="0" i="0" dirty="0">
+              <a:solidFill>
+                <a:srgbClr val="24292F"/>
+              </a:solidFill>
+              <a:effectLst/>
+              <a:latin typeface="-apple-system"/>
+            </a:endParaRPr>
+          </a:p>
+          <a:p>
+            <a:pPr marL="171450" indent="-171450">
+              <a:buFont typeface="Wingdings" panose="05000000000000000000" pitchFamily="2" charset="2"/>
+              <a:buChar char="à"/>
+            </a:pPr>
+            <a:r>
+              <a:rPr lang="en-US" b="0" i="0" dirty="0">
+                <a:solidFill>
+                  <a:srgbClr val="24292F"/>
+                </a:solidFill>
+                <a:effectLst/>
+                <a:latin typeface="-apple-system"/>
+              </a:rPr>
+              <a:t>OPEX: Predict disruptions and its impact considering forecasted passenger traffic to optimize maintenance planning.</a:t>
+            </a:r>
+          </a:p>
+          <a:p>
+            <a:pPr marL="171450" indent="-171450">
+              <a:buFont typeface="Wingdings" panose="05000000000000000000" pitchFamily="2" charset="2"/>
+              <a:buChar char="à"/>
+            </a:pPr>
+            <a:endParaRPr lang="en-US" b="0" i="0" dirty="0">
+              <a:solidFill>
+                <a:srgbClr val="24292F"/>
+              </a:solidFill>
+              <a:effectLst/>
+              <a:latin typeface="-apple-system"/>
+            </a:endParaRPr>
+          </a:p>
+          <a:p>
+            <a:pPr marL="171450" marR="0" lvl="0" indent="-171450" algn="l" defTabSz="914400" rtl="0" eaLnBrk="1" fontAlgn="auto" latinLnBrk="0" hangingPunct="1">
+              <a:lnSpc>
+                <a:spcPct val="100000"/>
+              </a:lnSpc>
+              <a:spcBef>
+                <a:spcPts val="0"/>
+              </a:spcBef>
+              <a:spcAft>
+                <a:spcPts val="0"/>
+              </a:spcAft>
+              <a:buClrTx/>
+              <a:buSzTx/>
+              <a:buFont typeface="Wingdings" panose="05000000000000000000" pitchFamily="2" charset="2"/>
+              <a:buChar char="à"/>
+              <a:tabLst/>
+              <a:defRPr/>
+            </a:pPr>
+            <a:r>
+              <a:rPr lang="en-US" b="0" i="0" dirty="0">
+                <a:solidFill>
+                  <a:srgbClr val="24292F"/>
+                </a:solidFill>
+                <a:effectLst/>
+                <a:latin typeface="-apple-system"/>
+              </a:rPr>
+              <a:t>Create a timetable dynamically tailored that optimize infra-structure towards the commuters needs.</a:t>
+            </a:r>
+          </a:p>
+          <a:p>
+            <a:pPr marL="171450" indent="-171450">
+              <a:buFont typeface="Wingdings" panose="05000000000000000000" pitchFamily="2" charset="2"/>
+              <a:buChar char="à"/>
+            </a:pPr>
+            <a:endParaRPr lang="en-US" b="0" i="0" dirty="0">
+              <a:solidFill>
+                <a:srgbClr val="24292F"/>
+              </a:solidFill>
+              <a:effectLst/>
+              <a:latin typeface="-apple-system"/>
+            </a:endParaRPr>
+          </a:p>
+          <a:p>
+            <a:pPr marL="171450" indent="-171450">
+              <a:buFont typeface="Wingdings" panose="05000000000000000000" pitchFamily="2" charset="2"/>
+              <a:buChar char="à"/>
+            </a:pPr>
+            <a:r>
+              <a:rPr lang="en-US" b="0" i="0" dirty="0">
+                <a:solidFill>
+                  <a:srgbClr val="24292F"/>
+                </a:solidFill>
+                <a:effectLst/>
+                <a:latin typeface="-apple-system"/>
+              </a:rPr>
+              <a:t>CAPEX: More maintenance, less disruptions, less need for redundancy and more investment express lanes (study of origin and destination). </a:t>
+            </a:r>
+          </a:p>
+          <a:p>
+            <a:pPr marL="171450" indent="-171450">
+              <a:buFont typeface="Wingdings" panose="05000000000000000000" pitchFamily="2" charset="2"/>
+              <a:buChar char="à"/>
+            </a:pPr>
+            <a:endParaRPr lang="en-US" b="0" i="0" dirty="0">
+              <a:solidFill>
+                <a:srgbClr val="24292F"/>
+              </a:solidFill>
+              <a:effectLst/>
+              <a:latin typeface="-apple-system"/>
+            </a:endParaRPr>
+          </a:p>
+          <a:p>
+            <a:pPr marL="171450" indent="-171450">
+              <a:buFont typeface="Wingdings" panose="05000000000000000000" pitchFamily="2" charset="2"/>
+              <a:buChar char="à"/>
+            </a:pPr>
+            <a:endParaRPr lang="en-US" b="0" i="0" dirty="0">
+              <a:solidFill>
+                <a:srgbClr val="24292F"/>
+              </a:solidFill>
+              <a:effectLst/>
+              <a:latin typeface="-apple-system"/>
+            </a:endParaRPr>
+          </a:p>
+          <a:p>
+            <a:pPr marL="0" indent="0">
+              <a:buFont typeface="Wingdings" panose="05000000000000000000" pitchFamily="2" charset="2"/>
+              <a:buNone/>
+            </a:pPr>
+            <a:endParaRPr lang="en-US" b="0" i="0" dirty="0">
+              <a:solidFill>
+                <a:srgbClr val="24292F"/>
+              </a:solidFill>
+              <a:effectLst/>
+              <a:latin typeface="-apple-system"/>
+            </a:endParaRPr>
+          </a:p>
+          <a:p>
+            <a:pPr marL="171450" indent="-171450">
+              <a:buFont typeface="Wingdings" panose="05000000000000000000" pitchFamily="2" charset="2"/>
+              <a:buChar char="à"/>
+            </a:pPr>
+            <a:endParaRPr lang="en-US" b="0" i="0" dirty="0">
+              <a:solidFill>
+                <a:srgbClr val="24292F"/>
+              </a:solidFill>
+              <a:effectLst/>
+              <a:latin typeface="-apple-system"/>
+            </a:endParaRPr>
+          </a:p>
+        </p:txBody>
+      </p:sp>
+      <p:sp>
+        <p:nvSpPr>
+          <p:cNvPr id="4" name="Slide Number Placeholder 3"/>
+          <p:cNvSpPr>
+            <a:spLocks noGrp="1"/>
+          </p:cNvSpPr>
+          <p:nvPr>
+            <p:ph type="sldNum" sz="quarter" idx="5"/>
+          </p:nvPr>
+        </p:nvSpPr>
+        <p:spPr/>
+        <p:txBody>
+          <a:bodyPr/>
+          <a:lstStyle/>
+          <a:p>
+            <a:fld id="{3D19D2C4-D801-4083-8F60-14491AD78394}" type="slidenum">
+              <a:rPr lang="fr-BE" smtClean="0"/>
+              <a:t>29</a:t>
+            </a:fld>
+            <a:endParaRPr lang="fr-BE"/>
+          </a:p>
+        </p:txBody>
+      </p:sp>
+    </p:spTree>
+    <p:extLst>
+      <p:ext uri="{BB962C8B-B14F-4D97-AF65-F5344CB8AC3E}">
+        <p14:creationId xmlns:p14="http://schemas.microsoft.com/office/powerpoint/2010/main" val="2618829657"/>
       </p:ext>
     </p:extLst>
   </p:cSld>
@@ -5906,6 +5500,173 @@
     <p:extLst>
       <p:ext uri="{BB962C8B-B14F-4D97-AF65-F5344CB8AC3E}">
         <p14:creationId xmlns:p14="http://schemas.microsoft.com/office/powerpoint/2010/main" val="66036145"/>
+      </p:ext>
+    </p:extLst>
+  </p:cSld>
+  <p:clrMapOvr>
+    <a:masterClrMapping/>
+  </p:clrMapOvr>
+</p:notes>
+</file>
+
+<file path=ppt/notesSlides/notesSlide30.xml><?xml version="1.0" encoding="utf-8"?>
+<p:notes xmlns:a="http://schemas.openxmlformats.org/drawingml/2006/main" xmlns:r="http://schemas.openxmlformats.org/officeDocument/2006/relationships" xmlns:p="http://schemas.openxmlformats.org/presentationml/2006/main">
+  <p:cSld>
+    <p:spTree>
+      <p:nvGrpSpPr>
+        <p:cNvPr id="1" name=""/>
+        <p:cNvGrpSpPr/>
+        <p:nvPr/>
+      </p:nvGrpSpPr>
+      <p:grpSpPr>
+        <a:xfrm>
+          <a:off x="0" y="0"/>
+          <a:ext cx="0" cy="0"/>
+          <a:chOff x="0" y="0"/>
+          <a:chExt cx="0" cy="0"/>
+        </a:xfrm>
+      </p:grpSpPr>
+      <p:sp>
+        <p:nvSpPr>
+          <p:cNvPr id="2" name="Slide Image Placeholder 1"/>
+          <p:cNvSpPr>
+            <a:spLocks noGrp="1" noRot="1" noChangeAspect="1"/>
+          </p:cNvSpPr>
+          <p:nvPr>
+            <p:ph type="sldImg"/>
+          </p:nvPr>
+        </p:nvSpPr>
+        <p:spPr/>
+      </p:sp>
+      <p:sp>
+        <p:nvSpPr>
+          <p:cNvPr id="3" name="Notes Placeholder 2"/>
+          <p:cNvSpPr>
+            <a:spLocks noGrp="1"/>
+          </p:cNvSpPr>
+          <p:nvPr>
+            <p:ph type="body" idx="1"/>
+          </p:nvPr>
+        </p:nvSpPr>
+        <p:spPr/>
+        <p:txBody>
+          <a:bodyPr/>
+          <a:lstStyle/>
+          <a:p>
+            <a:r>
+              <a:rPr lang="en-US" dirty="0"/>
+              <a:t>What is a efficient network = minimizes travel time and costs (vehicles, energy, emissions, price) assuring passenger “comfort” and “prompt mobility”.</a:t>
+            </a:r>
+          </a:p>
+          <a:p>
+            <a:pPr marL="0" marR="0" lvl="0" indent="0" algn="l" defTabSz="914400" rtl="0" eaLnBrk="1" fontAlgn="auto" latinLnBrk="0" hangingPunct="1">
+              <a:lnSpc>
+                <a:spcPct val="100000"/>
+              </a:lnSpc>
+              <a:spcBef>
+                <a:spcPts val="0"/>
+              </a:spcBef>
+              <a:spcAft>
+                <a:spcPts val="0"/>
+              </a:spcAft>
+              <a:buClrTx/>
+              <a:buSzTx/>
+              <a:buFontTx/>
+              <a:buNone/>
+              <a:tabLst/>
+              <a:defRPr/>
+            </a:pPr>
+            <a:endParaRPr lang="en-US" dirty="0"/>
+          </a:p>
+          <a:p>
+            <a:r>
+              <a:rPr lang="en-US" dirty="0"/>
+              <a:t>It is important to mention that a more efficient network inherently requires more maintenance.</a:t>
+            </a:r>
+          </a:p>
+          <a:p>
+            <a:endParaRPr lang="en-US" dirty="0"/>
+          </a:p>
+          <a:p>
+            <a:r>
+              <a:rPr lang="en-US" dirty="0"/>
+              <a:t>It is not necessary related to its size. But is related to how it was projected to assist the commuters.</a:t>
+            </a:r>
+          </a:p>
+          <a:p>
+            <a:endParaRPr lang="en-US" dirty="0"/>
+          </a:p>
+          <a:p>
+            <a:r>
+              <a:rPr lang="en-US" dirty="0"/>
+              <a:t>In a network without disruption, for instance, it would be a waste invest in redundancies. More money could be destinated to reduce travels time. </a:t>
+            </a:r>
+          </a:p>
+          <a:p>
+            <a:endParaRPr lang="en-US" dirty="0"/>
+          </a:p>
+          <a:p>
+            <a:r>
+              <a:rPr lang="en-US" dirty="0"/>
+              <a:t>In a real world, however, no disruptions comes with a high maintenance price. </a:t>
+            </a:r>
+          </a:p>
+          <a:p>
+            <a:endParaRPr lang="en-US" dirty="0"/>
+          </a:p>
+          <a:p>
+            <a:r>
+              <a:rPr lang="en-US" dirty="0"/>
+              <a:t>The balance between effectiveness and robustness is a major question when comes down to a such important factor of the society evolvement.</a:t>
+            </a:r>
+          </a:p>
+          <a:p>
+            <a:endParaRPr lang="en-US" dirty="0"/>
+          </a:p>
+          <a:p>
+            <a:endParaRPr lang="en-US" dirty="0"/>
+          </a:p>
+          <a:p>
+            <a:endParaRPr lang="en-US" dirty="0"/>
+          </a:p>
+          <a:p>
+            <a:endParaRPr lang="en-US" dirty="0"/>
+          </a:p>
+          <a:p>
+            <a:endParaRPr lang="en-US" dirty="0"/>
+          </a:p>
+          <a:p>
+            <a:endParaRPr lang="en-US" dirty="0"/>
+          </a:p>
+        </p:txBody>
+      </p:sp>
+      <p:sp>
+        <p:nvSpPr>
+          <p:cNvPr id="4" name="Slide Number Placeholder 3"/>
+          <p:cNvSpPr>
+            <a:spLocks noGrp="1"/>
+          </p:cNvSpPr>
+          <p:nvPr>
+            <p:ph type="sldNum" sz="quarter" idx="5"/>
+          </p:nvPr>
+        </p:nvSpPr>
+        <p:spPr/>
+        <p:txBody>
+          <a:bodyPr/>
+          <a:lstStyle/>
+          <a:p>
+            <a:fld id="{3D19D2C4-D801-4083-8F60-14491AD78394}" type="slidenum">
+              <a:rPr lang="fr-BE" smtClean="0"/>
+              <a:t>30</a:t>
+            </a:fld>
+            <a:endParaRPr lang="fr-BE"/>
+          </a:p>
+        </p:txBody>
+      </p:sp>
+    </p:spTree>
+    <p:extLst>
+      <p:ext uri="{BB962C8B-B14F-4D97-AF65-F5344CB8AC3E}">
+        <p14:creationId xmlns:p14="http://schemas.microsoft.com/office/powerpoint/2010/main" val="3771545508"/>
       </p:ext>
     </p:extLst>
   </p:cSld>
@@ -14688,93 +14449,16 @@
           <a:p>
             <a:r>
               <a:rPr lang="en-US" dirty="0"/>
-              <a:t>Chp.5 - Results</a:t>
+              <a:t>Chp.4 – Modelling – Centrality by mode</a:t>
             </a:r>
             <a:endParaRPr lang="fr-BE" dirty="0"/>
-          </a:p>
-        </p:txBody>
-      </p:sp>
-      <p:sp>
-        <p:nvSpPr>
-          <p:cNvPr id="5" name="TextBox 4">
-            <a:extLst>
-              <a:ext uri="{FF2B5EF4-FFF2-40B4-BE49-F238E27FC236}">
-                <a16:creationId xmlns:a16="http://schemas.microsoft.com/office/drawing/2014/main" id="{1C70F5EB-D628-4D33-90C3-908BAEAACF37}"/>
-              </a:ext>
-            </a:extLst>
-          </p:cNvPr>
-          <p:cNvSpPr txBox="1"/>
-          <p:nvPr/>
-        </p:nvSpPr>
-        <p:spPr>
-          <a:xfrm>
-            <a:off x="958970" y="1759610"/>
-            <a:ext cx="6883400" cy="923330"/>
-          </a:xfrm>
-          <a:prstGeom prst="rect">
-            <a:avLst/>
-          </a:prstGeom>
-          <a:noFill/>
-        </p:spPr>
-        <p:txBody>
-          <a:bodyPr wrap="square">
-            <a:spAutoFit/>
-          </a:bodyPr>
-          <a:lstStyle/>
-          <a:p>
-            <a:pPr marL="171450" indent="-171450">
-              <a:buFont typeface="Wingdings" panose="05000000000000000000" pitchFamily="2" charset="2"/>
-              <a:buChar char="à"/>
-            </a:pPr>
-            <a:r>
-              <a:rPr lang="en-US" dirty="0">
-                <a:sym typeface="Wingdings" panose="05000000000000000000" pitchFamily="2" charset="2"/>
-              </a:rPr>
-              <a:t>Inbound &amp; Outbound Traffic: Morning (5-7) x Evening (19-22) </a:t>
-            </a:r>
-          </a:p>
-          <a:p>
-            <a:pPr marL="171450" indent="-171450">
-              <a:buFontTx/>
-              <a:buChar char="-"/>
-            </a:pPr>
-            <a:r>
-              <a:rPr lang="en-US" dirty="0">
-                <a:sym typeface="Wingdings" panose="05000000000000000000" pitchFamily="2" charset="2"/>
-              </a:rPr>
-              <a:t>(DLR, </a:t>
-            </a:r>
-            <a:r>
-              <a:rPr lang="en-US" dirty="0" err="1">
-                <a:sym typeface="Wingdings" panose="05000000000000000000" pitchFamily="2" charset="2"/>
-              </a:rPr>
-              <a:t>OverGround</a:t>
-            </a:r>
-            <a:r>
-              <a:rPr lang="en-US" dirty="0">
-                <a:sym typeface="Wingdings" panose="05000000000000000000" pitchFamily="2" charset="2"/>
-              </a:rPr>
-              <a:t>, Tube) </a:t>
-            </a:r>
-          </a:p>
-          <a:p>
-            <a:pPr marL="171450" indent="-171450">
-              <a:buFontTx/>
-              <a:buChar char="-"/>
-            </a:pPr>
-            <a:r>
-              <a:rPr lang="en-US" dirty="0">
-                <a:sym typeface="Wingdings" panose="05000000000000000000" pitchFamily="2" charset="2"/>
-              </a:rPr>
-              <a:t>MTT, FRI, SAT and SUN</a:t>
-            </a:r>
           </a:p>
         </p:txBody>
       </p:sp>
     </p:spTree>
     <p:extLst>
       <p:ext uri="{BB962C8B-B14F-4D97-AF65-F5344CB8AC3E}">
-        <p14:creationId xmlns:p14="http://schemas.microsoft.com/office/powerpoint/2010/main" val="831078479"/>
+        <p14:creationId xmlns:p14="http://schemas.microsoft.com/office/powerpoint/2010/main" val="900605431"/>
       </p:ext>
     </p:extLst>
   </p:cSld>
@@ -14845,7 +14529,7 @@
         <p:spPr>
           <a:xfrm>
             <a:off x="958970" y="1759610"/>
-            <a:ext cx="6883400" cy="923330"/>
+            <a:ext cx="6883400" cy="646331"/>
           </a:xfrm>
           <a:prstGeom prst="rect">
             <a:avLst/>
@@ -14858,28 +14542,15 @@
           </a:bodyPr>
           <a:lstStyle/>
           <a:p>
-            <a:pPr marL="0" marR="0" lvl="0" indent="0" algn="l" defTabSz="914400" rtl="0" eaLnBrk="1" fontAlgn="auto" latinLnBrk="0" hangingPunct="1">
-              <a:lnSpc>
-                <a:spcPct val="100000"/>
-              </a:lnSpc>
-              <a:spcBef>
-                <a:spcPts val="0"/>
-              </a:spcBef>
-              <a:spcAft>
-                <a:spcPts val="0"/>
-              </a:spcAft>
-              <a:buClrTx/>
-              <a:buSzTx/>
-              <a:buFontTx/>
-              <a:buNone/>
-              <a:tabLst/>
-              <a:defRPr/>
+            <a:pPr marL="171450" indent="-171450">
+              <a:buFont typeface="Wingdings" panose="05000000000000000000" pitchFamily="2" charset="2"/>
+              <a:buChar char="à"/>
             </a:pPr>
             <a:r>
               <a:rPr lang="en-US" dirty="0">
                 <a:sym typeface="Wingdings" panose="05000000000000000000" pitchFamily="2" charset="2"/>
               </a:rPr>
-              <a:t> Traffic</a:t>
+              <a:t>Toy disparity and ranking: speed and distance</a:t>
             </a:r>
           </a:p>
           <a:p>
@@ -14891,31 +14562,19 @@
               <a:rPr lang="en-US" dirty="0">
                 <a:sym typeface="Wingdings" panose="05000000000000000000" pitchFamily="2" charset="2"/>
               </a:rPr>
-              <a:t>Enter/Exists in stations (Networkx)</a:t>
-            </a:r>
-          </a:p>
-          <a:p>
-            <a:pPr marL="171450" indent="-171450">
-              <a:buFontTx/>
-              <a:buChar char="-"/>
-            </a:pPr>
+              <a:t>(DLR, </a:t>
+            </a:r>
+            <a:r>
+              <a:rPr lang="en-US" dirty="0" err="1">
+                <a:sym typeface="Wingdings" panose="05000000000000000000" pitchFamily="2" charset="2"/>
+              </a:rPr>
+              <a:t>OverGround</a:t>
+            </a:r>
             <a:r>
               <a:rPr lang="en-US" dirty="0">
                 <a:sym typeface="Wingdings" panose="05000000000000000000" pitchFamily="2" charset="2"/>
               </a:rPr>
-              <a:t>Load in segments (</a:t>
-            </a:r>
-            <a:r>
-              <a:rPr lang="en-US" dirty="0" err="1">
-                <a:sym typeface="Wingdings" panose="05000000000000000000" pitchFamily="2" charset="2"/>
-              </a:rPr>
-              <a:t>Networkx</a:t>
-            </a:r>
-            <a:r>
-              <a:rPr lang="en-US" dirty="0">
-                <a:sym typeface="Wingdings" panose="05000000000000000000" pitchFamily="2" charset="2"/>
-              </a:rPr>
-              <a:t>)</a:t>
+              <a:t>, Tube)</a:t>
             </a:r>
           </a:p>
         </p:txBody>
@@ -14923,7 +14582,7 @@
     </p:spTree>
     <p:extLst>
       <p:ext uri="{BB962C8B-B14F-4D97-AF65-F5344CB8AC3E}">
-        <p14:creationId xmlns:p14="http://schemas.microsoft.com/office/powerpoint/2010/main" val="2043830219"/>
+        <p14:creationId xmlns:p14="http://schemas.microsoft.com/office/powerpoint/2010/main" val="831078479"/>
       </p:ext>
     </p:extLst>
   </p:cSld>
@@ -14994,7 +14653,7 @@
         <p:spPr>
           <a:xfrm>
             <a:off x="958970" y="1759610"/>
-            <a:ext cx="6883400" cy="1200329"/>
+            <a:ext cx="6883400" cy="646331"/>
           </a:xfrm>
           <a:prstGeom prst="rect">
             <a:avLst/>
@@ -15007,15 +14666,28 @@
           </a:bodyPr>
           <a:lstStyle/>
           <a:p>
-            <a:pPr marL="171450" indent="-171450">
-              <a:buFont typeface="Wingdings" panose="05000000000000000000" pitchFamily="2" charset="2"/>
-              <a:buChar char="à"/>
+            <a:pPr marL="0" marR="0" lvl="0" indent="0" algn="l" defTabSz="914400" rtl="0" eaLnBrk="1" fontAlgn="auto" latinLnBrk="0" hangingPunct="1">
+              <a:lnSpc>
+                <a:spcPct val="100000"/>
+              </a:lnSpc>
+              <a:spcBef>
+                <a:spcPts val="0"/>
+              </a:spcBef>
+              <a:spcAft>
+                <a:spcPts val="0"/>
+              </a:spcAft>
+              <a:buClrTx/>
+              <a:buSzTx/>
+              <a:buFontTx/>
+              <a:buNone/>
+              <a:tabLst/>
+              <a:defRPr/>
             </a:pPr>
             <a:r>
               <a:rPr lang="en-US" dirty="0">
                 <a:sym typeface="Wingdings" panose="05000000000000000000" pitchFamily="2" charset="2"/>
               </a:rPr>
-              <a:t>Operational: Speed &amp; Frequency</a:t>
+              <a:t> Traffic</a:t>
             </a:r>
           </a:p>
           <a:p>
@@ -15027,19 +14699,7 @@
               <a:rPr lang="en-US" dirty="0">
                 <a:sym typeface="Wingdings" panose="05000000000000000000" pitchFamily="2" charset="2"/>
               </a:rPr>
-              <a:t>Histogram (charts)</a:t>
-            </a:r>
-          </a:p>
-          <a:p>
-            <a:pPr marL="171450" indent="-171450">
-              <a:buFontTx/>
-              <a:buChar char="-"/>
-            </a:pPr>
-            <a:r>
-              <a:rPr lang="en-US" dirty="0">
-                <a:sym typeface="Wingdings" panose="05000000000000000000" pitchFamily="2" charset="2"/>
-              </a:rPr>
-              <a:t>Maps (</a:t>
+              <a:t>Enter/Exists in stations (</a:t>
             </a:r>
             <a:r>
               <a:rPr lang="en-US" dirty="0" err="1">
@@ -15054,21 +14714,12 @@
               <a:t>)</a:t>
             </a:r>
           </a:p>
-          <a:p>
-            <a:pPr marL="0" indent="0">
-              <a:buFontTx/>
-              <a:buNone/>
-            </a:pPr>
-            <a:endParaRPr lang="en-US" dirty="0">
-              <a:sym typeface="Wingdings" panose="05000000000000000000" pitchFamily="2" charset="2"/>
-            </a:endParaRPr>
-          </a:p>
         </p:txBody>
       </p:sp>
     </p:spTree>
     <p:extLst>
       <p:ext uri="{BB962C8B-B14F-4D97-AF65-F5344CB8AC3E}">
-        <p14:creationId xmlns:p14="http://schemas.microsoft.com/office/powerpoint/2010/main" val="468144026"/>
+        <p14:creationId xmlns:p14="http://schemas.microsoft.com/office/powerpoint/2010/main" val="2043830219"/>
       </p:ext>
     </p:extLst>
   </p:cSld>
@@ -15152,28 +14803,15 @@
           </a:bodyPr>
           <a:lstStyle/>
           <a:p>
-            <a:pPr marL="0" marR="0" lvl="0" indent="0" algn="l" defTabSz="914400" rtl="0" eaLnBrk="1" fontAlgn="auto" latinLnBrk="0" hangingPunct="1">
-              <a:lnSpc>
-                <a:spcPct val="100000"/>
-              </a:lnSpc>
-              <a:spcBef>
-                <a:spcPts val="0"/>
-              </a:spcBef>
-              <a:spcAft>
-                <a:spcPts val="0"/>
-              </a:spcAft>
-              <a:buClrTx/>
-              <a:buSzTx/>
-              <a:buFontTx/>
-              <a:buNone/>
-              <a:tabLst/>
-              <a:defRPr/>
+            <a:pPr marL="171450" indent="-171450">
+              <a:buFont typeface="Wingdings" panose="05000000000000000000" pitchFamily="2" charset="2"/>
+              <a:buChar char="à"/>
             </a:pPr>
             <a:r>
               <a:rPr lang="en-US" dirty="0">
                 <a:sym typeface="Wingdings" panose="05000000000000000000" pitchFamily="2" charset="2"/>
               </a:rPr>
-              <a:t> User importance:</a:t>
+              <a:t>Inbound &amp; Outbound Traffic: Morning (5-7) x Evening (19-22) </a:t>
             </a:r>
           </a:p>
           <a:p>
@@ -15182,16 +14820,22 @@
               <a:buChar char="-"/>
             </a:pPr>
             <a:r>
+              <a:rPr lang="en-US" dirty="0">
+                <a:sym typeface="Wingdings" panose="05000000000000000000" pitchFamily="2" charset="2"/>
+              </a:rPr>
+              <a:t>(DLR, </a:t>
+            </a:r>
+            <a:r>
               <a:rPr lang="en-US" dirty="0" err="1">
                 <a:sym typeface="Wingdings" panose="05000000000000000000" pitchFamily="2" charset="2"/>
               </a:rPr>
-              <a:t>Efficience</a:t>
+              <a:t>OverGround</a:t>
             </a:r>
             <a:r>
               <a:rPr lang="en-US" dirty="0">
                 <a:sym typeface="Wingdings" panose="05000000000000000000" pitchFamily="2" charset="2"/>
               </a:rPr>
-              <a:t> ranking comparison</a:t>
+              <a:t>, Tube) </a:t>
             </a:r>
           </a:p>
           <a:p>
@@ -15199,16 +14843,19 @@
               <a:buFontTx/>
               <a:buChar char="-"/>
             </a:pPr>
-            <a:endParaRPr lang="en-US" dirty="0">
-              <a:sym typeface="Wingdings" panose="05000000000000000000" pitchFamily="2" charset="2"/>
-            </a:endParaRPr>
+            <a:r>
+              <a:rPr lang="en-US" dirty="0">
+                <a:sym typeface="Wingdings" panose="05000000000000000000" pitchFamily="2" charset="2"/>
+              </a:rPr>
+              <a:t>MTT, FRI, SAT and SUN</a:t>
+            </a:r>
           </a:p>
         </p:txBody>
       </p:sp>
     </p:spTree>
     <p:extLst>
       <p:ext uri="{BB962C8B-B14F-4D97-AF65-F5344CB8AC3E}">
-        <p14:creationId xmlns:p14="http://schemas.microsoft.com/office/powerpoint/2010/main" val="2555179648"/>
+        <p14:creationId xmlns:p14="http://schemas.microsoft.com/office/powerpoint/2010/main" val="4061708431"/>
       </p:ext>
     </p:extLst>
   </p:cSld>
@@ -15279,7 +14926,7 @@
         <p:spPr>
           <a:xfrm>
             <a:off x="958970" y="1759610"/>
-            <a:ext cx="6883400" cy="646331"/>
+            <a:ext cx="6883400" cy="1200329"/>
           </a:xfrm>
           <a:prstGeom prst="rect">
             <a:avLst/>
@@ -15292,28 +14939,15 @@
           </a:bodyPr>
           <a:lstStyle/>
           <a:p>
-            <a:pPr marL="0" marR="0" lvl="0" indent="0" algn="l" defTabSz="914400" rtl="0" eaLnBrk="1" fontAlgn="auto" latinLnBrk="0" hangingPunct="1">
-              <a:lnSpc>
-                <a:spcPct val="100000"/>
-              </a:lnSpc>
-              <a:spcBef>
-                <a:spcPts val="0"/>
-              </a:spcBef>
-              <a:spcAft>
-                <a:spcPts val="0"/>
-              </a:spcAft>
-              <a:buClrTx/>
-              <a:buSzTx/>
-              <a:buFontTx/>
-              <a:buNone/>
-              <a:tabLst/>
-              <a:defRPr/>
+            <a:pPr marL="171450" indent="-171450">
+              <a:buFont typeface="Wingdings" panose="05000000000000000000" pitchFamily="2" charset="2"/>
+              <a:buChar char="à"/>
             </a:pPr>
             <a:r>
               <a:rPr lang="en-US" dirty="0">
                 <a:sym typeface="Wingdings" panose="05000000000000000000" pitchFamily="2" charset="2"/>
               </a:rPr>
-              <a:t> Collective importance:</a:t>
+              <a:t>Operational: Speed &amp; Frequency</a:t>
             </a:r>
           </a:p>
           <a:p>
@@ -15325,15 +14959,48 @@
               <a:rPr lang="en-US" dirty="0">
                 <a:sym typeface="Wingdings" panose="05000000000000000000" pitchFamily="2" charset="2"/>
               </a:rPr>
-              <a:t>Distress ranking comparison</a:t>
-            </a:r>
+              <a:t>Histogram (charts)</a:t>
+            </a:r>
+          </a:p>
+          <a:p>
+            <a:pPr marL="171450" indent="-171450">
+              <a:buFontTx/>
+              <a:buChar char="-"/>
+            </a:pPr>
+            <a:r>
+              <a:rPr lang="en-US" dirty="0">
+                <a:sym typeface="Wingdings" panose="05000000000000000000" pitchFamily="2" charset="2"/>
+              </a:rPr>
+              <a:t>Maps (</a:t>
+            </a:r>
+            <a:r>
+              <a:rPr lang="en-US" dirty="0" err="1">
+                <a:sym typeface="Wingdings" panose="05000000000000000000" pitchFamily="2" charset="2"/>
+              </a:rPr>
+              <a:t>Networkx</a:t>
+            </a:r>
+            <a:r>
+              <a:rPr lang="en-US" dirty="0">
+                <a:sym typeface="Wingdings" panose="05000000000000000000" pitchFamily="2" charset="2"/>
+              </a:rPr>
+              <a:t>)</a:t>
+            </a:r>
+          </a:p>
+          <a:p>
+            <a:pPr marL="0" indent="0">
+              <a:buFontTx/>
+              <a:buNone/>
+            </a:pPr>
+            <a:endParaRPr lang="en-US" dirty="0">
+              <a:sym typeface="Wingdings" panose="05000000000000000000" pitchFamily="2" charset="2"/>
+            </a:endParaRPr>
           </a:p>
         </p:txBody>
       </p:sp>
     </p:spTree>
     <p:extLst>
       <p:ext uri="{BB962C8B-B14F-4D97-AF65-F5344CB8AC3E}">
-        <p14:creationId xmlns:p14="http://schemas.microsoft.com/office/powerpoint/2010/main" val="2702504304"/>
+        <p14:creationId xmlns:p14="http://schemas.microsoft.com/office/powerpoint/2010/main" val="468144026"/>
       </p:ext>
     </p:extLst>
   </p:cSld>
@@ -15383,7 +15050,7 @@
           <a:p>
             <a:r>
               <a:rPr lang="en-US" dirty="0"/>
-              <a:t>Chp.6 - Following Steps</a:t>
+              <a:t>Chp.5 - Results</a:t>
             </a:r>
             <a:endParaRPr lang="fr-BE" dirty="0"/>
           </a:p>
@@ -15394,7 +15061,7 @@
           <p:cNvPr id="5" name="TextBox 4">
             <a:extLst>
               <a:ext uri="{FF2B5EF4-FFF2-40B4-BE49-F238E27FC236}">
-                <a16:creationId xmlns:a16="http://schemas.microsoft.com/office/drawing/2014/main" id="{C5BDFFFD-DF47-4673-8095-E9BA459078C9}"/>
+                <a16:creationId xmlns:a16="http://schemas.microsoft.com/office/drawing/2014/main" id="{1C70F5EB-D628-4D33-90C3-908BAEAACF37}"/>
               </a:ext>
             </a:extLst>
           </p:cNvPr>
@@ -15403,8 +15070,8 @@
         </p:nvSpPr>
         <p:spPr>
           <a:xfrm>
-            <a:off x="541867" y="1690687"/>
-            <a:ext cx="11243733" cy="4708981"/>
+            <a:off x="958970" y="1759610"/>
+            <a:ext cx="6883400" cy="923330"/>
           </a:xfrm>
           <a:prstGeom prst="rect">
             <a:avLst/>
@@ -15435,170 +15102,45 @@
               <a:defRPr/>
             </a:pPr>
             <a:r>
-              <a:rPr lang="en-US" sz="2000" dirty="0"/>
-              <a:t>1) </a:t>
-            </a:r>
-            <a:r>
-              <a:rPr lang="en-US" sz="2000" dirty="0">
+              <a:rPr lang="en-US" dirty="0">
                 <a:sym typeface="Wingdings" panose="05000000000000000000" pitchFamily="2" charset="2"/>
               </a:rPr>
-              <a:t>Interconnect all possible modes of transport including bikes and walks.</a:t>
-            </a:r>
-            <a:endParaRPr lang="en-US" sz="2000" dirty="0"/>
-          </a:p>
-          <a:p>
-            <a:pPr marL="0" indent="0">
-              <a:buNone/>
-            </a:pPr>
-            <a:endParaRPr lang="en-US" sz="2000" dirty="0"/>
-          </a:p>
-          <a:p>
-            <a:pPr marL="0" indent="0">
-              <a:buNone/>
-            </a:pPr>
-            <a:endParaRPr lang="en-US" sz="2000" dirty="0"/>
-          </a:p>
-          <a:p>
-            <a:pPr marL="0" indent="0">
-              <a:buNone/>
-            </a:pPr>
-            <a:r>
-              <a:rPr lang="en-US" sz="2000" dirty="0"/>
-              <a:t>2) Use ML models for predictions of:</a:t>
-            </a:r>
-          </a:p>
-          <a:p>
-            <a:pPr marL="228600" indent="-228600">
-              <a:buAutoNum type="arabicParenR"/>
-            </a:pPr>
-            <a:endParaRPr lang="en-US" sz="2000" dirty="0"/>
+              <a:t> User importance:</a:t>
+            </a:r>
           </a:p>
           <a:p>
             <a:pPr marL="171450" indent="-171450">
-              <a:buFont typeface="Wingdings" panose="05000000000000000000" pitchFamily="2" charset="2"/>
-              <a:buChar char="à"/>
-            </a:pPr>
-            <a:r>
-              <a:rPr lang="en-US" sz="2000" dirty="0"/>
-              <a:t>TRAFFIC: Passenger flow: </a:t>
-            </a:r>
-            <a:r>
-              <a:rPr lang="en-US" sz="2000" b="0" i="0" dirty="0">
-                <a:solidFill>
-                  <a:srgbClr val="24292F"/>
-                </a:solidFill>
-                <a:effectLst/>
-                <a:latin typeface="-apple-system"/>
+              <a:buFontTx/>
+              <a:buChar char="-"/>
+            </a:pPr>
+            <a:r>
+              <a:rPr lang="en-US" dirty="0" err="1">
+                <a:sym typeface="Wingdings" panose="05000000000000000000" pitchFamily="2" charset="2"/>
               </a:rPr>
-              <a:t>From network lens (keeping passenger anonymity) , use more data (daily events) to more accurately understand why traffic is generated in each segments;</a:t>
+              <a:t>Efficience</a:t>
+            </a:r>
+            <a:r>
+              <a:rPr lang="en-US" dirty="0">
+                <a:sym typeface="Wingdings" panose="05000000000000000000" pitchFamily="2" charset="2"/>
+              </a:rPr>
+              <a:t> ranking comparison</a:t>
             </a:r>
           </a:p>
           <a:p>
             <a:pPr marL="171450" indent="-171450">
-              <a:buFont typeface="Wingdings" panose="05000000000000000000" pitchFamily="2" charset="2"/>
-              <a:buChar char="à"/>
-            </a:pPr>
-            <a:endParaRPr lang="en-US" sz="2000" b="0" i="0" dirty="0">
-              <a:solidFill>
-                <a:srgbClr val="24292F"/>
-              </a:solidFill>
-              <a:effectLst/>
-              <a:latin typeface="-apple-system"/>
+              <a:buFontTx/>
+              <a:buChar char="-"/>
+            </a:pPr>
+            <a:endParaRPr lang="en-US" dirty="0">
+              <a:sym typeface="Wingdings" panose="05000000000000000000" pitchFamily="2" charset="2"/>
             </a:endParaRPr>
-          </a:p>
-          <a:p>
-            <a:pPr marL="171450" indent="-171450">
-              <a:buFont typeface="Wingdings" panose="05000000000000000000" pitchFamily="2" charset="2"/>
-              <a:buChar char="à"/>
-            </a:pPr>
-            <a:r>
-              <a:rPr lang="en-US" sz="2000" b="0" i="0" dirty="0">
-                <a:solidFill>
-                  <a:srgbClr val="24292F"/>
-                </a:solidFill>
-                <a:effectLst/>
-                <a:latin typeface="-apple-system"/>
-              </a:rPr>
-              <a:t>OPEX: Predict disruptions and its impact considering forecasted passenger traffic to optimize maintenance planning.</a:t>
-            </a:r>
-          </a:p>
-          <a:p>
-            <a:pPr marL="171450" indent="-171450">
-              <a:buFont typeface="Wingdings" panose="05000000000000000000" pitchFamily="2" charset="2"/>
-              <a:buChar char="à"/>
-            </a:pPr>
-            <a:endParaRPr lang="en-US" sz="2000" b="0" i="0" dirty="0">
-              <a:solidFill>
-                <a:srgbClr val="24292F"/>
-              </a:solidFill>
-              <a:effectLst/>
-              <a:latin typeface="-apple-system"/>
-            </a:endParaRPr>
-          </a:p>
-          <a:p>
-            <a:pPr marL="171450" marR="0" lvl="0" indent="-171450" algn="l" defTabSz="914400" rtl="0" eaLnBrk="1" fontAlgn="auto" latinLnBrk="0" hangingPunct="1">
-              <a:lnSpc>
-                <a:spcPct val="100000"/>
-              </a:lnSpc>
-              <a:spcBef>
-                <a:spcPts val="0"/>
-              </a:spcBef>
-              <a:spcAft>
-                <a:spcPts val="0"/>
-              </a:spcAft>
-              <a:buClrTx/>
-              <a:buSzTx/>
-              <a:buFont typeface="Wingdings" panose="05000000000000000000" pitchFamily="2" charset="2"/>
-              <a:buChar char="à"/>
-              <a:tabLst/>
-              <a:defRPr/>
-            </a:pPr>
-            <a:r>
-              <a:rPr lang="en-US" sz="2000" b="0" i="0" dirty="0">
-                <a:solidFill>
-                  <a:srgbClr val="24292F"/>
-                </a:solidFill>
-                <a:effectLst/>
-                <a:latin typeface="-apple-system"/>
-              </a:rPr>
-              <a:t>Create a timetable dynamically tailored that optimize infra-structure towards the commuters needs.</a:t>
-            </a:r>
-          </a:p>
-          <a:p>
-            <a:pPr marL="171450" indent="-171450">
-              <a:buFont typeface="Wingdings" panose="05000000000000000000" pitchFamily="2" charset="2"/>
-              <a:buChar char="à"/>
-            </a:pPr>
-            <a:endParaRPr lang="en-US" sz="2000" b="0" i="0" dirty="0">
-              <a:solidFill>
-                <a:srgbClr val="24292F"/>
-              </a:solidFill>
-              <a:effectLst/>
-              <a:latin typeface="-apple-system"/>
-            </a:endParaRPr>
-          </a:p>
-          <a:p>
-            <a:pPr marL="171450" indent="-171450">
-              <a:buFont typeface="Wingdings" panose="05000000000000000000" pitchFamily="2" charset="2"/>
-              <a:buChar char="à"/>
-            </a:pPr>
-            <a:r>
-              <a:rPr lang="en-US" sz="2000" b="0" i="0" dirty="0">
-                <a:solidFill>
-                  <a:srgbClr val="24292F"/>
-                </a:solidFill>
-                <a:effectLst/>
-                <a:latin typeface="-apple-system"/>
-              </a:rPr>
-              <a:t>CAPEX: More maintenance, less disruptions, less need for redundancy and more investment express lanes (study of origin and destination).  A study considering entries and exist of studies.</a:t>
-            </a:r>
           </a:p>
         </p:txBody>
       </p:sp>
     </p:spTree>
     <p:extLst>
       <p:ext uri="{BB962C8B-B14F-4D97-AF65-F5344CB8AC3E}">
-        <p14:creationId xmlns:p14="http://schemas.microsoft.com/office/powerpoint/2010/main" val="3254598016"/>
+        <p14:creationId xmlns:p14="http://schemas.microsoft.com/office/powerpoint/2010/main" val="2555179648"/>
       </p:ext>
     </p:extLst>
   </p:cSld>
@@ -15648,7 +15190,7 @@
           <a:p>
             <a:r>
               <a:rPr lang="en-US" dirty="0"/>
-              <a:t>Chp.7 - Conclusion</a:t>
+              <a:t>Chp.5 - Results</a:t>
             </a:r>
             <a:endParaRPr lang="fr-BE" dirty="0"/>
           </a:p>
@@ -15656,68 +15198,339 @@
       </p:sp>
       <p:sp>
         <p:nvSpPr>
-          <p:cNvPr id="3" name="Content Placeholder 2">
+          <p:cNvPr id="5" name="TextBox 4">
             <a:extLst>
               <a:ext uri="{FF2B5EF4-FFF2-40B4-BE49-F238E27FC236}">
-                <a16:creationId xmlns:a16="http://schemas.microsoft.com/office/drawing/2014/main" id="{DAE38D01-88EE-41C2-B9C1-6627C65A5A93}"/>
+                <a16:creationId xmlns:a16="http://schemas.microsoft.com/office/drawing/2014/main" id="{1C70F5EB-D628-4D33-90C3-908BAEAACF37}"/>
               </a:ext>
             </a:extLst>
           </p:cNvPr>
-          <p:cNvSpPr>
-            <a:spLocks noGrp="1"/>
-          </p:cNvSpPr>
-          <p:nvPr>
-            <p:ph idx="1"/>
-          </p:nvPr>
-        </p:nvSpPr>
-        <p:spPr/>
-        <p:txBody>
-          <a:bodyPr>
-            <a:normAutofit fontScale="92500" lnSpcReduction="20000"/>
+          <p:cNvSpPr txBox="1"/>
+          <p:nvPr/>
+        </p:nvSpPr>
+        <p:spPr>
+          <a:xfrm>
+            <a:off x="958970" y="1759610"/>
+            <a:ext cx="6883400" cy="646331"/>
+          </a:xfrm>
+          <a:prstGeom prst="rect">
+            <a:avLst/>
+          </a:prstGeom>
+          <a:noFill/>
+        </p:spPr>
+        <p:txBody>
+          <a:bodyPr wrap="square">
+            <a:spAutoFit/>
           </a:bodyPr>
           <a:lstStyle/>
           <a:p>
-            <a:r>
-              <a:rPr lang="en-US" dirty="0"/>
-              <a:t>It is not necessary related to its size. But is related to how it was projected to assist the commuters.</a:t>
-            </a:r>
-          </a:p>
-          <a:p>
-            <a:endParaRPr lang="en-US" dirty="0"/>
-          </a:p>
-          <a:p>
-            <a:r>
-              <a:rPr lang="en-US" dirty="0"/>
-              <a:t>Proper maintenances can reduce the number of disruption, for instance, it would be a waste invest in redundancies. More money could be destinated to reduce travels time. </a:t>
-            </a:r>
-          </a:p>
-          <a:p>
-            <a:endParaRPr lang="en-US" dirty="0"/>
-          </a:p>
-          <a:p>
-            <a:r>
-              <a:rPr lang="en-US" dirty="0"/>
-              <a:t>In a real world, however, no disruptions comes with a high maintenance price. </a:t>
-            </a:r>
-          </a:p>
-          <a:p>
-            <a:endParaRPr lang="en-US" dirty="0"/>
-          </a:p>
-          <a:p>
-            <a:r>
-              <a:rPr lang="en-US" dirty="0"/>
-              <a:t>The balance between effectiveness and robustness is a major question when comes down to a such important factor of the society evolvement.</a:t>
-            </a:r>
-          </a:p>
-          <a:p>
-            <a:endParaRPr lang="fr-BE" dirty="0"/>
+            <a:pPr marL="0" marR="0" lvl="0" indent="0" algn="l" defTabSz="914400" rtl="0" eaLnBrk="1" fontAlgn="auto" latinLnBrk="0" hangingPunct="1">
+              <a:lnSpc>
+                <a:spcPct val="100000"/>
+              </a:lnSpc>
+              <a:spcBef>
+                <a:spcPts val="0"/>
+              </a:spcBef>
+              <a:spcAft>
+                <a:spcPts val="0"/>
+              </a:spcAft>
+              <a:buClrTx/>
+              <a:buSzTx/>
+              <a:buFontTx/>
+              <a:buNone/>
+              <a:tabLst/>
+              <a:defRPr/>
+            </a:pPr>
+            <a:r>
+              <a:rPr lang="en-US" dirty="0">
+                <a:sym typeface="Wingdings" panose="05000000000000000000" pitchFamily="2" charset="2"/>
+              </a:rPr>
+              <a:t> Collective importance:</a:t>
+            </a:r>
+          </a:p>
+          <a:p>
+            <a:pPr marL="171450" indent="-171450">
+              <a:buFontTx/>
+              <a:buChar char="-"/>
+            </a:pPr>
+            <a:r>
+              <a:rPr lang="en-US" dirty="0">
+                <a:sym typeface="Wingdings" panose="05000000000000000000" pitchFamily="2" charset="2"/>
+              </a:rPr>
+              <a:t>Distress ranking comparison</a:t>
+            </a:r>
           </a:p>
         </p:txBody>
       </p:sp>
     </p:spTree>
     <p:extLst>
       <p:ext uri="{BB962C8B-B14F-4D97-AF65-F5344CB8AC3E}">
-        <p14:creationId xmlns:p14="http://schemas.microsoft.com/office/powerpoint/2010/main" val="3798559975"/>
+        <p14:creationId xmlns:p14="http://schemas.microsoft.com/office/powerpoint/2010/main" val="2702504304"/>
+      </p:ext>
+    </p:extLst>
+  </p:cSld>
+  <p:clrMapOvr>
+    <a:masterClrMapping/>
+  </p:clrMapOvr>
+</p:sld>
+</file>
+
+<file path=ppt/slides/slide29.xml><?xml version="1.0" encoding="utf-8"?>
+<p:sld xmlns:a="http://schemas.openxmlformats.org/drawingml/2006/main" xmlns:r="http://schemas.openxmlformats.org/officeDocument/2006/relationships" xmlns:p="http://schemas.openxmlformats.org/presentationml/2006/main">
+  <p:cSld>
+    <p:spTree>
+      <p:nvGrpSpPr>
+        <p:cNvPr id="1" name=""/>
+        <p:cNvGrpSpPr/>
+        <p:nvPr/>
+      </p:nvGrpSpPr>
+      <p:grpSpPr>
+        <a:xfrm>
+          <a:off x="0" y="0"/>
+          <a:ext cx="0" cy="0"/>
+          <a:chOff x="0" y="0"/>
+          <a:chExt cx="0" cy="0"/>
+        </a:xfrm>
+      </p:grpSpPr>
+      <p:sp>
+        <p:nvSpPr>
+          <p:cNvPr id="2" name="Title 1">
+            <a:extLst>
+              <a:ext uri="{FF2B5EF4-FFF2-40B4-BE49-F238E27FC236}">
+                <a16:creationId xmlns:a16="http://schemas.microsoft.com/office/drawing/2014/main" id="{63482FFF-7EC4-4691-BF8C-91E0066F6BE9}"/>
+              </a:ext>
+            </a:extLst>
+          </p:cNvPr>
+          <p:cNvSpPr>
+            <a:spLocks noGrp="1"/>
+          </p:cNvSpPr>
+          <p:nvPr>
+            <p:ph type="title"/>
+          </p:nvPr>
+        </p:nvSpPr>
+        <p:spPr/>
+        <p:txBody>
+          <a:bodyPr/>
+          <a:lstStyle/>
+          <a:p>
+            <a:r>
+              <a:rPr lang="en-US" dirty="0"/>
+              <a:t>Chp.6 - Following Steps</a:t>
+            </a:r>
+            <a:endParaRPr lang="fr-BE" dirty="0"/>
+          </a:p>
+        </p:txBody>
+      </p:sp>
+      <p:sp>
+        <p:nvSpPr>
+          <p:cNvPr id="5" name="TextBox 4">
+            <a:extLst>
+              <a:ext uri="{FF2B5EF4-FFF2-40B4-BE49-F238E27FC236}">
+                <a16:creationId xmlns:a16="http://schemas.microsoft.com/office/drawing/2014/main" id="{C5BDFFFD-DF47-4673-8095-E9BA459078C9}"/>
+              </a:ext>
+            </a:extLst>
+          </p:cNvPr>
+          <p:cNvSpPr txBox="1"/>
+          <p:nvPr/>
+        </p:nvSpPr>
+        <p:spPr>
+          <a:xfrm>
+            <a:off x="541867" y="1690687"/>
+            <a:ext cx="11243733" cy="4708981"/>
+          </a:xfrm>
+          <a:prstGeom prst="rect">
+            <a:avLst/>
+          </a:prstGeom>
+          <a:noFill/>
+        </p:spPr>
+        <p:txBody>
+          <a:bodyPr wrap="square">
+            <a:spAutoFit/>
+          </a:bodyPr>
+          <a:lstStyle/>
+          <a:p>
+            <a:pPr marL="0" marR="0" lvl="0" indent="0" algn="l" defTabSz="914400" rtl="0" eaLnBrk="1" fontAlgn="auto" latinLnBrk="0" hangingPunct="1">
+              <a:lnSpc>
+                <a:spcPct val="100000"/>
+              </a:lnSpc>
+              <a:spcBef>
+                <a:spcPts val="0"/>
+              </a:spcBef>
+              <a:spcAft>
+                <a:spcPts val="0"/>
+              </a:spcAft>
+              <a:buClrTx/>
+              <a:buSzTx/>
+              <a:buFontTx/>
+              <a:buNone/>
+              <a:tabLst/>
+              <a:defRPr/>
+            </a:pPr>
+            <a:r>
+              <a:rPr lang="en-US" sz="2000" dirty="0"/>
+              <a:t>1) </a:t>
+            </a:r>
+            <a:r>
+              <a:rPr lang="en-US" sz="2000" dirty="0">
+                <a:sym typeface="Wingdings" panose="05000000000000000000" pitchFamily="2" charset="2"/>
+              </a:rPr>
+              <a:t>Interconnect all possible modes of transport including bikes and walks.</a:t>
+            </a:r>
+            <a:endParaRPr lang="en-US" sz="2000" dirty="0"/>
+          </a:p>
+          <a:p>
+            <a:pPr marL="0" indent="0">
+              <a:buNone/>
+            </a:pPr>
+            <a:endParaRPr lang="en-US" sz="2000" dirty="0"/>
+          </a:p>
+          <a:p>
+            <a:pPr marL="0" indent="0">
+              <a:buNone/>
+            </a:pPr>
+            <a:endParaRPr lang="en-US" sz="2000" dirty="0"/>
+          </a:p>
+          <a:p>
+            <a:pPr marL="0" indent="0">
+              <a:buNone/>
+            </a:pPr>
+            <a:r>
+              <a:rPr lang="en-US" sz="2000" dirty="0"/>
+              <a:t>2) Use ML models for predictions of:</a:t>
+            </a:r>
+          </a:p>
+          <a:p>
+            <a:pPr marL="228600" indent="-228600">
+              <a:buAutoNum type="arabicParenR"/>
+            </a:pPr>
+            <a:endParaRPr lang="en-US" sz="2000" dirty="0"/>
+          </a:p>
+          <a:p>
+            <a:pPr marL="171450" indent="-171450">
+              <a:buFont typeface="Wingdings" panose="05000000000000000000" pitchFamily="2" charset="2"/>
+              <a:buChar char="à"/>
+            </a:pPr>
+            <a:r>
+              <a:rPr lang="en-US" sz="2000" dirty="0"/>
+              <a:t>TRAFFIC: Passenger flow: </a:t>
+            </a:r>
+            <a:r>
+              <a:rPr lang="en-US" sz="2000" b="0" i="0" dirty="0">
+                <a:solidFill>
+                  <a:srgbClr val="24292F"/>
+                </a:solidFill>
+                <a:effectLst/>
+                <a:latin typeface="-apple-system"/>
+              </a:rPr>
+              <a:t>From network lens (keeping passenger anonymity) , use more data (daily events) to more accurately understand why traffic is generated in each segments;</a:t>
+            </a:r>
+          </a:p>
+          <a:p>
+            <a:pPr marL="171450" indent="-171450">
+              <a:buFont typeface="Wingdings" panose="05000000000000000000" pitchFamily="2" charset="2"/>
+              <a:buChar char="à"/>
+            </a:pPr>
+            <a:endParaRPr lang="en-US" sz="2000" b="0" i="0" dirty="0">
+              <a:solidFill>
+                <a:srgbClr val="24292F"/>
+              </a:solidFill>
+              <a:effectLst/>
+              <a:latin typeface="-apple-system"/>
+            </a:endParaRPr>
+          </a:p>
+          <a:p>
+            <a:pPr marL="171450" indent="-171450">
+              <a:buFont typeface="Wingdings" panose="05000000000000000000" pitchFamily="2" charset="2"/>
+              <a:buChar char="à"/>
+            </a:pPr>
+            <a:r>
+              <a:rPr lang="en-US" sz="2000" b="0" i="0" dirty="0">
+                <a:solidFill>
+                  <a:srgbClr val="24292F"/>
+                </a:solidFill>
+                <a:effectLst/>
+                <a:latin typeface="-apple-system"/>
+              </a:rPr>
+              <a:t>OPEX: Predict disruptions and its impact considering forecasted passenger traffic to optimize maintenance planning.</a:t>
+            </a:r>
+          </a:p>
+          <a:p>
+            <a:pPr marL="171450" indent="-171450">
+              <a:buFont typeface="Wingdings" panose="05000000000000000000" pitchFamily="2" charset="2"/>
+              <a:buChar char="à"/>
+            </a:pPr>
+            <a:endParaRPr lang="en-US" sz="2000" b="0" i="0" dirty="0">
+              <a:solidFill>
+                <a:srgbClr val="24292F"/>
+              </a:solidFill>
+              <a:effectLst/>
+              <a:latin typeface="-apple-system"/>
+            </a:endParaRPr>
+          </a:p>
+          <a:p>
+            <a:pPr marL="171450" marR="0" lvl="0" indent="-171450" algn="l" defTabSz="914400" rtl="0" eaLnBrk="1" fontAlgn="auto" latinLnBrk="0" hangingPunct="1">
+              <a:lnSpc>
+                <a:spcPct val="100000"/>
+              </a:lnSpc>
+              <a:spcBef>
+                <a:spcPts val="0"/>
+              </a:spcBef>
+              <a:spcAft>
+                <a:spcPts val="0"/>
+              </a:spcAft>
+              <a:buClrTx/>
+              <a:buSzTx/>
+              <a:buFont typeface="Wingdings" panose="05000000000000000000" pitchFamily="2" charset="2"/>
+              <a:buChar char="à"/>
+              <a:tabLst/>
+              <a:defRPr/>
+            </a:pPr>
+            <a:r>
+              <a:rPr lang="en-US" sz="2000" b="0" i="0" dirty="0">
+                <a:solidFill>
+                  <a:srgbClr val="24292F"/>
+                </a:solidFill>
+                <a:effectLst/>
+                <a:latin typeface="-apple-system"/>
+              </a:rPr>
+              <a:t>Create a timetable dynamically tailored that optimize infra-structure towards the commuters needs.</a:t>
+            </a:r>
+          </a:p>
+          <a:p>
+            <a:pPr marL="171450" indent="-171450">
+              <a:buFont typeface="Wingdings" panose="05000000000000000000" pitchFamily="2" charset="2"/>
+              <a:buChar char="à"/>
+            </a:pPr>
+            <a:endParaRPr lang="en-US" sz="2000" b="0" i="0" dirty="0">
+              <a:solidFill>
+                <a:srgbClr val="24292F"/>
+              </a:solidFill>
+              <a:effectLst/>
+              <a:latin typeface="-apple-system"/>
+            </a:endParaRPr>
+          </a:p>
+          <a:p>
+            <a:pPr marL="171450" indent="-171450">
+              <a:buFont typeface="Wingdings" panose="05000000000000000000" pitchFamily="2" charset="2"/>
+              <a:buChar char="à"/>
+            </a:pPr>
+            <a:r>
+              <a:rPr lang="en-US" sz="2000" b="0" i="0" dirty="0">
+                <a:solidFill>
+                  <a:srgbClr val="24292F"/>
+                </a:solidFill>
+                <a:effectLst/>
+                <a:latin typeface="-apple-system"/>
+              </a:rPr>
+              <a:t>CAPEX: More maintenance, less disruptions, less need for redundancy and more investment express lanes (study of origin and destination).  A study considering entries and exist of studies.</a:t>
+            </a:r>
+          </a:p>
+        </p:txBody>
+      </p:sp>
+    </p:spTree>
+    <p:extLst>
+      <p:ext uri="{BB962C8B-B14F-4D97-AF65-F5344CB8AC3E}">
+        <p14:creationId xmlns:p14="http://schemas.microsoft.com/office/powerpoint/2010/main" val="3254598016"/>
       </p:ext>
     </p:extLst>
   </p:cSld>
@@ -16169,6 +15982,125 @@
     <p:extLst>
       <p:ext uri="{BB962C8B-B14F-4D97-AF65-F5344CB8AC3E}">
         <p14:creationId xmlns:p14="http://schemas.microsoft.com/office/powerpoint/2010/main" val="3048223808"/>
+      </p:ext>
+    </p:extLst>
+  </p:cSld>
+  <p:clrMapOvr>
+    <a:masterClrMapping/>
+  </p:clrMapOvr>
+</p:sld>
+</file>
+
+<file path=ppt/slides/slide30.xml><?xml version="1.0" encoding="utf-8"?>
+<p:sld xmlns:a="http://schemas.openxmlformats.org/drawingml/2006/main" xmlns:r="http://schemas.openxmlformats.org/officeDocument/2006/relationships" xmlns:p="http://schemas.openxmlformats.org/presentationml/2006/main">
+  <p:cSld>
+    <p:spTree>
+      <p:nvGrpSpPr>
+        <p:cNvPr id="1" name=""/>
+        <p:cNvGrpSpPr/>
+        <p:nvPr/>
+      </p:nvGrpSpPr>
+      <p:grpSpPr>
+        <a:xfrm>
+          <a:off x="0" y="0"/>
+          <a:ext cx="0" cy="0"/>
+          <a:chOff x="0" y="0"/>
+          <a:chExt cx="0" cy="0"/>
+        </a:xfrm>
+      </p:grpSpPr>
+      <p:sp>
+        <p:nvSpPr>
+          <p:cNvPr id="2" name="Title 1">
+            <a:extLst>
+              <a:ext uri="{FF2B5EF4-FFF2-40B4-BE49-F238E27FC236}">
+                <a16:creationId xmlns:a16="http://schemas.microsoft.com/office/drawing/2014/main" id="{63482FFF-7EC4-4691-BF8C-91E0066F6BE9}"/>
+              </a:ext>
+            </a:extLst>
+          </p:cNvPr>
+          <p:cNvSpPr>
+            <a:spLocks noGrp="1"/>
+          </p:cNvSpPr>
+          <p:nvPr>
+            <p:ph type="title"/>
+          </p:nvPr>
+        </p:nvSpPr>
+        <p:spPr/>
+        <p:txBody>
+          <a:bodyPr/>
+          <a:lstStyle/>
+          <a:p>
+            <a:r>
+              <a:rPr lang="en-US" dirty="0"/>
+              <a:t>Chp.7 - Conclusion</a:t>
+            </a:r>
+            <a:endParaRPr lang="fr-BE" dirty="0"/>
+          </a:p>
+        </p:txBody>
+      </p:sp>
+      <p:sp>
+        <p:nvSpPr>
+          <p:cNvPr id="3" name="Content Placeholder 2">
+            <a:extLst>
+              <a:ext uri="{FF2B5EF4-FFF2-40B4-BE49-F238E27FC236}">
+                <a16:creationId xmlns:a16="http://schemas.microsoft.com/office/drawing/2014/main" id="{DAE38D01-88EE-41C2-B9C1-6627C65A5A93}"/>
+              </a:ext>
+            </a:extLst>
+          </p:cNvPr>
+          <p:cNvSpPr>
+            <a:spLocks noGrp="1"/>
+          </p:cNvSpPr>
+          <p:nvPr>
+            <p:ph idx="1"/>
+          </p:nvPr>
+        </p:nvSpPr>
+        <p:spPr/>
+        <p:txBody>
+          <a:bodyPr>
+            <a:normAutofit fontScale="92500" lnSpcReduction="20000"/>
+          </a:bodyPr>
+          <a:lstStyle/>
+          <a:p>
+            <a:r>
+              <a:rPr lang="en-US" dirty="0"/>
+              <a:t>It is not necessary related to its size. But is related to how it was projected to assist the commuters.</a:t>
+            </a:r>
+          </a:p>
+          <a:p>
+            <a:endParaRPr lang="en-US" dirty="0"/>
+          </a:p>
+          <a:p>
+            <a:r>
+              <a:rPr lang="en-US" dirty="0"/>
+              <a:t>Proper maintenances can reduce the number of disruption, for instance, it would be a waste invest in redundancies. More money could be destinated to reduce travels time. </a:t>
+            </a:r>
+          </a:p>
+          <a:p>
+            <a:endParaRPr lang="en-US" dirty="0"/>
+          </a:p>
+          <a:p>
+            <a:r>
+              <a:rPr lang="en-US" dirty="0"/>
+              <a:t>In a real world, however, no disruptions comes with a high maintenance price. </a:t>
+            </a:r>
+          </a:p>
+          <a:p>
+            <a:endParaRPr lang="en-US" dirty="0"/>
+          </a:p>
+          <a:p>
+            <a:r>
+              <a:rPr lang="en-US" dirty="0"/>
+              <a:t>The balance between effectiveness and robustness is a major question when comes down to a such important factor of the society evolvement.</a:t>
+            </a:r>
+          </a:p>
+          <a:p>
+            <a:endParaRPr lang="fr-BE" dirty="0"/>
+          </a:p>
+        </p:txBody>
+      </p:sp>
+    </p:spTree>
+    <p:extLst>
+      <p:ext uri="{BB962C8B-B14F-4D97-AF65-F5344CB8AC3E}">
+        <p14:creationId xmlns:p14="http://schemas.microsoft.com/office/powerpoint/2010/main" val="3798559975"/>
       </p:ext>
     </p:extLst>
   </p:cSld>

--- a/11.Presenttaions/big-cities-transport.pptx
+++ b/11.Presenttaions/big-cities-transport.pptx
@@ -227,7 +227,7 @@
           <a:p>
             <a:fld id="{E0227317-6136-4B22-B169-340711FF5F77}" type="datetimeFigureOut">
               <a:rPr lang="fr-BE" smtClean="0"/>
-              <a:t>06-11-23</a:t>
+              <a:t>08-11-23</a:t>
             </a:fld>
             <a:endParaRPr lang="fr-BE"/>
           </a:p>
@@ -6866,7 +6866,7 @@
           <a:p>
             <a:fld id="{CCC07DD4-E8D6-4581-B1F4-04F48CF9E11E}" type="datetimeFigureOut">
               <a:rPr lang="fr-BE" smtClean="0"/>
-              <a:t>06-11-23</a:t>
+              <a:t>08-11-23</a:t>
             </a:fld>
             <a:endParaRPr lang="fr-BE"/>
           </a:p>
@@ -7066,7 +7066,7 @@
           <a:p>
             <a:fld id="{CCC07DD4-E8D6-4581-B1F4-04F48CF9E11E}" type="datetimeFigureOut">
               <a:rPr lang="fr-BE" smtClean="0"/>
-              <a:t>06-11-23</a:t>
+              <a:t>08-11-23</a:t>
             </a:fld>
             <a:endParaRPr lang="fr-BE"/>
           </a:p>
@@ -7276,7 +7276,7 @@
           <a:p>
             <a:fld id="{CCC07DD4-E8D6-4581-B1F4-04F48CF9E11E}" type="datetimeFigureOut">
               <a:rPr lang="fr-BE" smtClean="0"/>
-              <a:t>06-11-23</a:t>
+              <a:t>08-11-23</a:t>
             </a:fld>
             <a:endParaRPr lang="fr-BE"/>
           </a:p>
@@ -7476,7 +7476,7 @@
           <a:p>
             <a:fld id="{CCC07DD4-E8D6-4581-B1F4-04F48CF9E11E}" type="datetimeFigureOut">
               <a:rPr lang="fr-BE" smtClean="0"/>
-              <a:t>06-11-23</a:t>
+              <a:t>08-11-23</a:t>
             </a:fld>
             <a:endParaRPr lang="fr-BE"/>
           </a:p>
@@ -7752,7 +7752,7 @@
           <a:p>
             <a:fld id="{CCC07DD4-E8D6-4581-B1F4-04F48CF9E11E}" type="datetimeFigureOut">
               <a:rPr lang="fr-BE" smtClean="0"/>
-              <a:t>06-11-23</a:t>
+              <a:t>08-11-23</a:t>
             </a:fld>
             <a:endParaRPr lang="fr-BE"/>
           </a:p>
@@ -8020,7 +8020,7 @@
           <a:p>
             <a:fld id="{CCC07DD4-E8D6-4581-B1F4-04F48CF9E11E}" type="datetimeFigureOut">
               <a:rPr lang="fr-BE" smtClean="0"/>
-              <a:t>06-11-23</a:t>
+              <a:t>08-11-23</a:t>
             </a:fld>
             <a:endParaRPr lang="fr-BE"/>
           </a:p>
@@ -8435,7 +8435,7 @@
           <a:p>
             <a:fld id="{CCC07DD4-E8D6-4581-B1F4-04F48CF9E11E}" type="datetimeFigureOut">
               <a:rPr lang="fr-BE" smtClean="0"/>
-              <a:t>06-11-23</a:t>
+              <a:t>08-11-23</a:t>
             </a:fld>
             <a:endParaRPr lang="fr-BE"/>
           </a:p>
@@ -8577,7 +8577,7 @@
           <a:p>
             <a:fld id="{CCC07DD4-E8D6-4581-B1F4-04F48CF9E11E}" type="datetimeFigureOut">
               <a:rPr lang="fr-BE" smtClean="0"/>
-              <a:t>06-11-23</a:t>
+              <a:t>08-11-23</a:t>
             </a:fld>
             <a:endParaRPr lang="fr-BE"/>
           </a:p>
@@ -8690,7 +8690,7 @@
           <a:p>
             <a:fld id="{CCC07DD4-E8D6-4581-B1F4-04F48CF9E11E}" type="datetimeFigureOut">
               <a:rPr lang="fr-BE" smtClean="0"/>
-              <a:t>06-11-23</a:t>
+              <a:t>08-11-23</a:t>
             </a:fld>
             <a:endParaRPr lang="fr-BE"/>
           </a:p>
@@ -9003,7 +9003,7 @@
           <a:p>
             <a:fld id="{CCC07DD4-E8D6-4581-B1F4-04F48CF9E11E}" type="datetimeFigureOut">
               <a:rPr lang="fr-BE" smtClean="0"/>
-              <a:t>06-11-23</a:t>
+              <a:t>08-11-23</a:t>
             </a:fld>
             <a:endParaRPr lang="fr-BE"/>
           </a:p>
@@ -9292,7 +9292,7 @@
           <a:p>
             <a:fld id="{CCC07DD4-E8D6-4581-B1F4-04F48CF9E11E}" type="datetimeFigureOut">
               <a:rPr lang="fr-BE" smtClean="0"/>
-              <a:t>06-11-23</a:t>
+              <a:t>08-11-23</a:t>
             </a:fld>
             <a:endParaRPr lang="fr-BE"/>
           </a:p>
@@ -9535,7 +9535,7 @@
           <a:p>
             <a:fld id="{CCC07DD4-E8D6-4581-B1F4-04F48CF9E11E}" type="datetimeFigureOut">
               <a:rPr lang="fr-BE" smtClean="0"/>
-              <a:t>06-11-23</a:t>
+              <a:t>08-11-23</a:t>
             </a:fld>
             <a:endParaRPr lang="fr-BE"/>
           </a:p>
@@ -10072,7 +10072,7 @@
                   </a:schemeClr>
                 </a:solidFill>
               </a:rPr>
-              <a:t>Disparity algorithm (toy example)</a:t>
+              <a:t>Backbone Extraction (local method) toy example)</a:t>
             </a:r>
           </a:p>
           <a:p>
@@ -10088,7 +10088,7 @@
                   </a:schemeClr>
                 </a:solidFill>
               </a:rPr>
-              <a:t>Operation indicator (pyramid)</a:t>
+              <a:t>Operation indicator (pyramid) </a:t>
             </a:r>
           </a:p>
           <a:p>
@@ -10104,7 +10104,7 @@
                   </a:schemeClr>
                 </a:solidFill>
               </a:rPr>
-              <a:t>End-User indicator (anomalies)</a:t>
+              <a:t>End-User indicator (global approach, anomalies*)</a:t>
             </a:r>
           </a:p>
           <a:p>
@@ -10232,7 +10232,7 @@
                   </a:schemeClr>
                 </a:solidFill>
               </a:rPr>
-              <a:t>Neo4J (base-graph)</a:t>
+              <a:t>Neo4J (base-graph, anomalies*)</a:t>
             </a:r>
           </a:p>
           <a:p>
@@ -12984,26 +12984,6 @@
               </a:rPr>
               <a:t>Local (Null model, pdf), </a:t>
             </a:r>
-            <a:r>
-              <a:rPr lang="en-GB" dirty="0" err="1">
-                <a:solidFill>
-                  <a:schemeClr val="accent4">
-                    <a:lumMod val="75000"/>
-                  </a:schemeClr>
-                </a:solidFill>
-              </a:rPr>
-              <a:t>GloSS</a:t>
-            </a:r>
-            <a:r>
-              <a:rPr lang="en-GB" dirty="0">
-                <a:solidFill>
-                  <a:schemeClr val="accent4">
-                    <a:lumMod val="75000"/>
-                  </a:schemeClr>
-                </a:solidFill>
-              </a:rPr>
-              <a:t> (Bayesian)</a:t>
-            </a:r>
           </a:p>
         </p:txBody>
       </p:sp>
@@ -13021,8 +13001,8 @@
         </p:nvSpPr>
         <p:spPr>
           <a:xfrm>
-            <a:off x="6096000" y="1013828"/>
-            <a:ext cx="6025586" cy="4524315"/>
+            <a:off x="6107575" y="1013828"/>
+            <a:ext cx="6025586" cy="4801314"/>
           </a:xfrm>
           <a:prstGeom prst="rect">
             <a:avLst/>
@@ -13111,7 +13091,22 @@
             </a:pPr>
             <a:r>
               <a:rPr lang="en-GB" dirty="0"/>
-              <a:t>Advanced Extraction methodologies</a:t>
+              <a:t>Advanced Extraction methodologies: </a:t>
+            </a:r>
+            <a:r>
+              <a:rPr lang="en-GB" dirty="0" err="1"/>
+              <a:t>GloSS</a:t>
+            </a:r>
+            <a:r>
+              <a:rPr lang="en-GB" dirty="0"/>
+              <a:t> or </a:t>
+            </a:r>
+          </a:p>
+          <a:p>
+            <a:pPr lvl="1"/>
+            <a:r>
+              <a:rPr lang="en-GB" dirty="0"/>
+              <a:t>GLANB</a:t>
             </a:r>
           </a:p>
           <a:p>
